--- a/docs/werbung/HiveVoice.pptx
+++ b/docs/werbung/HiveVoice.pptx
@@ -2200,7 +2200,7 @@
         </p:nvSpPr>
         <p:spPr>
           <a:xfrm>
-            <a:off x="457200" y="4754880"/>
+            <a:off x="698500" y="4754880"/>
             <a:ext cx="1828800" cy="274320"/>
           </a:xfrm>
           <a:prstGeom prst="rect">
@@ -2217,12 +2217,12 @@
               <a:buNone/>
             </a:pPr>
             <a:r>
-              <a:rPr lang="en-US" sz="1000" b="1" dirty="0">
-                <a:solidFill>
-                  <a:schemeClr val="tx2"/>
-                </a:solidFill>
-              </a:rPr>
-              <a:t>HiveVoice</a:t>
+              <a:rPr b="1" sz="1000"/>
+              <a:t>hive</a:t>
+            </a:r>
+            <a:r>
+              <a:rPr b="0" sz="1000"/>
+              <a:t>voice</a:t>
             </a:r>
             <a:endParaRPr lang="en-US" sz="1000" dirty="0"/>
           </a:p>
@@ -2270,6 +2270,503 @@
               <a:t>1004</a:t>
             </a:fld>
             <a:endParaRPr lang="en-US"/>
+          </a:p>
+        </p:txBody>
+      </p:sp>
+      <p:sp>
+        <p:nvSpPr>
+          <p:cNvPr id="19" name="logo-0"/>
+          <p:cNvSpPr/>
+          <p:nvPr/>
+        </p:nvSpPr>
+        <p:spPr>
+          <a:xfrm>
+            <a:off x="575749" y="4864354"/>
+            <a:ext cx="43571" cy="50292"/>
+          </a:xfrm>
+          <a:custGeom>
+            <a:avLst/>
+            <a:gdLst/>
+            <a:ahLst/>
+            <a:cxnLst/>
+            <a:rect l="l" t="t" r="r" b="b"/>
+            <a:pathLst>
+              <a:path w="43571" h="50292">
+                <a:moveTo>
+                  <a:pt x="21786" y="0"/>
+                </a:moveTo>
+                <a:lnTo>
+                  <a:pt x="43571" y="12573"/>
+                </a:lnTo>
+                <a:lnTo>
+                  <a:pt x="43571" y="37719"/>
+                </a:lnTo>
+                <a:lnTo>
+                  <a:pt x="21786" y="50292"/>
+                </a:lnTo>
+                <a:lnTo>
+                  <a:pt x="0" y="37719"/>
+                </a:lnTo>
+                <a:lnTo>
+                  <a:pt x="0" y="12573"/>
+                </a:lnTo>
+                <a:close/>
+              </a:path>
+            </a:pathLst>
+          </a:custGeom>
+          <a:solidFill>
+            <a:srgbClr val="111111"/>
+          </a:solidFill>
+          <a:ln>
+            <a:noFill/>
+          </a:ln>
+          <a:effectLst/>
+        </p:spPr>
+        <p:style>
+          <a:lnRef idx="1">
+            <a:schemeClr val="accent1"/>
+          </a:lnRef>
+          <a:fillRef idx="3">
+            <a:schemeClr val="accent1"/>
+          </a:fillRef>
+          <a:effectRef idx="2">
+            <a:schemeClr val="accent1"/>
+          </a:effectRef>
+          <a:fontRef idx="minor">
+            <a:schemeClr val="lt1"/>
+          </a:fontRef>
+        </p:style>
+        <p:txBody>
+          <a:bodyPr rtlCol="0" anchor="ctr"/>
+          <a:lstStyle/>
+          <a:p>
+            <a:pPr algn="ctr"/>
+          </a:p>
+        </p:txBody>
+      </p:sp>
+      <p:sp>
+        <p:nvSpPr>
+          <p:cNvPr id="20" name="logo-1"/>
+          <p:cNvSpPr/>
+          <p:nvPr/>
+        </p:nvSpPr>
+        <p:spPr>
+          <a:xfrm>
+            <a:off x="472879" y="4864354"/>
+            <a:ext cx="43571" cy="50292"/>
+          </a:xfrm>
+          <a:custGeom>
+            <a:avLst/>
+            <a:gdLst/>
+            <a:ahLst/>
+            <a:cxnLst/>
+            <a:rect l="l" t="t" r="r" b="b"/>
+            <a:pathLst>
+              <a:path w="43571" h="50292">
+                <a:moveTo>
+                  <a:pt x="21786" y="0"/>
+                </a:moveTo>
+                <a:lnTo>
+                  <a:pt x="43571" y="12573"/>
+                </a:lnTo>
+                <a:lnTo>
+                  <a:pt x="43571" y="37719"/>
+                </a:lnTo>
+                <a:lnTo>
+                  <a:pt x="21786" y="50292"/>
+                </a:lnTo>
+                <a:lnTo>
+                  <a:pt x="0" y="37719"/>
+                </a:lnTo>
+                <a:lnTo>
+                  <a:pt x="0" y="12573"/>
+                </a:lnTo>
+                <a:close/>
+              </a:path>
+            </a:pathLst>
+          </a:custGeom>
+          <a:solidFill>
+            <a:srgbClr val="111111"/>
+          </a:solidFill>
+          <a:ln>
+            <a:noFill/>
+          </a:ln>
+          <a:effectLst/>
+        </p:spPr>
+        <p:style>
+          <a:lnRef idx="1">
+            <a:schemeClr val="accent1"/>
+          </a:lnRef>
+          <a:fillRef idx="3">
+            <a:schemeClr val="accent1"/>
+          </a:fillRef>
+          <a:effectRef idx="2">
+            <a:schemeClr val="accent1"/>
+          </a:effectRef>
+          <a:fontRef idx="minor">
+            <a:schemeClr val="lt1"/>
+          </a:fontRef>
+        </p:style>
+        <p:txBody>
+          <a:bodyPr rtlCol="0" anchor="ctr"/>
+          <a:lstStyle/>
+          <a:p>
+            <a:pPr algn="ctr"/>
+          </a:p>
+        </p:txBody>
+      </p:sp>
+      <p:sp>
+        <p:nvSpPr>
+          <p:cNvPr id="21" name="logo-2"/>
+          <p:cNvSpPr/>
+          <p:nvPr/>
+        </p:nvSpPr>
+        <p:spPr>
+          <a:xfrm>
+            <a:off x="550031" y="4819777"/>
+            <a:ext cx="43572" cy="50292"/>
+          </a:xfrm>
+          <a:custGeom>
+            <a:avLst/>
+            <a:gdLst/>
+            <a:ahLst/>
+            <a:cxnLst/>
+            <a:rect l="l" t="t" r="r" b="b"/>
+            <a:pathLst>
+              <a:path w="43572" h="50292">
+                <a:moveTo>
+                  <a:pt x="21786" y="0"/>
+                </a:moveTo>
+                <a:lnTo>
+                  <a:pt x="43572" y="12573"/>
+                </a:lnTo>
+                <a:lnTo>
+                  <a:pt x="43572" y="37719"/>
+                </a:lnTo>
+                <a:lnTo>
+                  <a:pt x="21786" y="50292"/>
+                </a:lnTo>
+                <a:lnTo>
+                  <a:pt x="0" y="37719"/>
+                </a:lnTo>
+                <a:lnTo>
+                  <a:pt x="0" y="12573"/>
+                </a:lnTo>
+                <a:close/>
+              </a:path>
+            </a:pathLst>
+          </a:custGeom>
+          <a:solidFill>
+            <a:srgbClr val="111111"/>
+          </a:solidFill>
+          <a:ln>
+            <a:noFill/>
+          </a:ln>
+          <a:effectLst/>
+        </p:spPr>
+        <p:style>
+          <a:lnRef idx="1">
+            <a:schemeClr val="accent1"/>
+          </a:lnRef>
+          <a:fillRef idx="3">
+            <a:schemeClr val="accent1"/>
+          </a:fillRef>
+          <a:effectRef idx="2">
+            <a:schemeClr val="accent1"/>
+          </a:effectRef>
+          <a:fontRef idx="minor">
+            <a:schemeClr val="lt1"/>
+          </a:fontRef>
+        </p:style>
+        <p:txBody>
+          <a:bodyPr rtlCol="0" anchor="ctr"/>
+          <a:lstStyle/>
+          <a:p>
+            <a:pPr algn="ctr"/>
+          </a:p>
+        </p:txBody>
+      </p:sp>
+      <p:sp>
+        <p:nvSpPr>
+          <p:cNvPr id="22" name="logo-3"/>
+          <p:cNvSpPr/>
+          <p:nvPr/>
+        </p:nvSpPr>
+        <p:spPr>
+          <a:xfrm>
+            <a:off x="498596" y="4819777"/>
+            <a:ext cx="43572" cy="50292"/>
+          </a:xfrm>
+          <a:custGeom>
+            <a:avLst/>
+            <a:gdLst/>
+            <a:ahLst/>
+            <a:cxnLst/>
+            <a:rect l="l" t="t" r="r" b="b"/>
+            <a:pathLst>
+              <a:path w="43572" h="50292">
+                <a:moveTo>
+                  <a:pt x="21786" y="0"/>
+                </a:moveTo>
+                <a:lnTo>
+                  <a:pt x="43572" y="12573"/>
+                </a:lnTo>
+                <a:lnTo>
+                  <a:pt x="43572" y="37719"/>
+                </a:lnTo>
+                <a:lnTo>
+                  <a:pt x="21786" y="50292"/>
+                </a:lnTo>
+                <a:lnTo>
+                  <a:pt x="0" y="37719"/>
+                </a:lnTo>
+                <a:lnTo>
+                  <a:pt x="0" y="12573"/>
+                </a:lnTo>
+                <a:close/>
+              </a:path>
+            </a:pathLst>
+          </a:custGeom>
+          <a:solidFill>
+            <a:srgbClr val="111111"/>
+          </a:solidFill>
+          <a:ln>
+            <a:noFill/>
+          </a:ln>
+          <a:effectLst/>
+        </p:spPr>
+        <p:style>
+          <a:lnRef idx="1">
+            <a:schemeClr val="accent1"/>
+          </a:lnRef>
+          <a:fillRef idx="3">
+            <a:schemeClr val="accent1"/>
+          </a:fillRef>
+          <a:effectRef idx="2">
+            <a:schemeClr val="accent1"/>
+          </a:effectRef>
+          <a:fontRef idx="minor">
+            <a:schemeClr val="lt1"/>
+          </a:fontRef>
+        </p:style>
+        <p:txBody>
+          <a:bodyPr rtlCol="0" anchor="ctr"/>
+          <a:lstStyle/>
+          <a:p>
+            <a:pPr algn="ctr"/>
+          </a:p>
+        </p:txBody>
+      </p:sp>
+      <p:sp>
+        <p:nvSpPr>
+          <p:cNvPr id="23" name="logo-4"/>
+          <p:cNvSpPr/>
+          <p:nvPr/>
+        </p:nvSpPr>
+        <p:spPr>
+          <a:xfrm>
+            <a:off x="550031" y="4908931"/>
+            <a:ext cx="43572" cy="50292"/>
+          </a:xfrm>
+          <a:custGeom>
+            <a:avLst/>
+            <a:gdLst/>
+            <a:ahLst/>
+            <a:cxnLst/>
+            <a:rect l="l" t="t" r="r" b="b"/>
+            <a:pathLst>
+              <a:path w="43572" h="50292">
+                <a:moveTo>
+                  <a:pt x="21786" y="0"/>
+                </a:moveTo>
+                <a:lnTo>
+                  <a:pt x="43572" y="12573"/>
+                </a:lnTo>
+                <a:lnTo>
+                  <a:pt x="43572" y="37719"/>
+                </a:lnTo>
+                <a:lnTo>
+                  <a:pt x="21786" y="50292"/>
+                </a:lnTo>
+                <a:lnTo>
+                  <a:pt x="0" y="37719"/>
+                </a:lnTo>
+                <a:lnTo>
+                  <a:pt x="0" y="12573"/>
+                </a:lnTo>
+                <a:close/>
+              </a:path>
+            </a:pathLst>
+          </a:custGeom>
+          <a:solidFill>
+            <a:srgbClr val="111111"/>
+          </a:solidFill>
+          <a:ln>
+            <a:noFill/>
+          </a:ln>
+          <a:effectLst/>
+        </p:spPr>
+        <p:style>
+          <a:lnRef idx="1">
+            <a:schemeClr val="accent1"/>
+          </a:lnRef>
+          <a:fillRef idx="3">
+            <a:schemeClr val="accent1"/>
+          </a:fillRef>
+          <a:effectRef idx="2">
+            <a:schemeClr val="accent1"/>
+          </a:effectRef>
+          <a:fontRef idx="minor">
+            <a:schemeClr val="lt1"/>
+          </a:fontRef>
+        </p:style>
+        <p:txBody>
+          <a:bodyPr rtlCol="0" anchor="ctr"/>
+          <a:lstStyle/>
+          <a:p>
+            <a:pPr algn="ctr"/>
+          </a:p>
+        </p:txBody>
+      </p:sp>
+      <p:sp>
+        <p:nvSpPr>
+          <p:cNvPr id="24" name="logo-5"/>
+          <p:cNvSpPr/>
+          <p:nvPr/>
+        </p:nvSpPr>
+        <p:spPr>
+          <a:xfrm>
+            <a:off x="498596" y="4908931"/>
+            <a:ext cx="43572" cy="50292"/>
+          </a:xfrm>
+          <a:custGeom>
+            <a:avLst/>
+            <a:gdLst/>
+            <a:ahLst/>
+            <a:cxnLst/>
+            <a:rect l="l" t="t" r="r" b="b"/>
+            <a:pathLst>
+              <a:path w="43572" h="50292">
+                <a:moveTo>
+                  <a:pt x="21786" y="0"/>
+                </a:moveTo>
+                <a:lnTo>
+                  <a:pt x="43572" y="12573"/>
+                </a:lnTo>
+                <a:lnTo>
+                  <a:pt x="43572" y="37719"/>
+                </a:lnTo>
+                <a:lnTo>
+                  <a:pt x="21786" y="50292"/>
+                </a:lnTo>
+                <a:lnTo>
+                  <a:pt x="0" y="37719"/>
+                </a:lnTo>
+                <a:lnTo>
+                  <a:pt x="0" y="12573"/>
+                </a:lnTo>
+                <a:close/>
+              </a:path>
+            </a:pathLst>
+          </a:custGeom>
+          <a:solidFill>
+            <a:srgbClr val="111111"/>
+          </a:solidFill>
+          <a:ln>
+            <a:noFill/>
+          </a:ln>
+          <a:effectLst/>
+        </p:spPr>
+        <p:style>
+          <a:lnRef idx="1">
+            <a:schemeClr val="accent1"/>
+          </a:lnRef>
+          <a:fillRef idx="3">
+            <a:schemeClr val="accent1"/>
+          </a:fillRef>
+          <a:effectRef idx="2">
+            <a:schemeClr val="accent1"/>
+          </a:effectRef>
+          <a:fontRef idx="minor">
+            <a:schemeClr val="lt1"/>
+          </a:fontRef>
+        </p:style>
+        <p:txBody>
+          <a:bodyPr rtlCol="0" anchor="ctr"/>
+          <a:lstStyle/>
+          <a:p>
+            <a:pPr algn="ctr"/>
+          </a:p>
+        </p:txBody>
+      </p:sp>
+      <p:sp>
+        <p:nvSpPr>
+          <p:cNvPr id="26" name="logo-center"/>
+          <p:cNvSpPr/>
+          <p:nvPr/>
+        </p:nvSpPr>
+        <p:spPr>
+          <a:xfrm>
+            <a:off x="524314" y="4864354"/>
+            <a:ext cx="43571" cy="50292"/>
+          </a:xfrm>
+          <a:custGeom>
+            <a:avLst/>
+            <a:gdLst/>
+            <a:ahLst/>
+            <a:cxnLst/>
+            <a:rect l="l" t="t" r="r" b="b"/>
+            <a:pathLst>
+              <a:path w="43571" h="50292">
+                <a:moveTo>
+                  <a:pt x="21786" y="0"/>
+                </a:moveTo>
+                <a:lnTo>
+                  <a:pt x="43571" y="12573"/>
+                </a:lnTo>
+                <a:lnTo>
+                  <a:pt x="43571" y="37719"/>
+                </a:lnTo>
+                <a:lnTo>
+                  <a:pt x="21786" y="50292"/>
+                </a:lnTo>
+                <a:lnTo>
+                  <a:pt x="0" y="37719"/>
+                </a:lnTo>
+                <a:lnTo>
+                  <a:pt x="0" y="12573"/>
+                </a:lnTo>
+                <a:close/>
+              </a:path>
+            </a:pathLst>
+          </a:custGeom>
+          <a:solidFill>
+            <a:srgbClr val="E2001A"/>
+          </a:solidFill>
+          <a:ln>
+            <a:noFill/>
+          </a:ln>
+          <a:effectLst/>
+        </p:spPr>
+        <p:style>
+          <a:lnRef idx="1">
+            <a:schemeClr val="accent1"/>
+          </a:lnRef>
+          <a:fillRef idx="3">
+            <a:schemeClr val="accent1"/>
+          </a:fillRef>
+          <a:effectRef idx="2">
+            <a:schemeClr val="accent1"/>
+          </a:effectRef>
+          <a:fontRef idx="minor">
+            <a:schemeClr val="lt1"/>
+          </a:fontRef>
+        </p:style>
+        <p:txBody>
+          <a:bodyPr rtlCol="0" anchor="ctr"/>
+          <a:lstStyle/>
+          <a:p>
+            <a:pPr algn="ctr"/>
           </a:p>
         </p:txBody>
       </p:sp>
@@ -2650,12 +3147,12 @@
               <a:buNone/>
             </a:pPr>
             <a:r>
-              <a:rPr lang="en-US" sz="5400" b="1" dirty="0">
-                <a:solidFill>
-                  <a:schemeClr val="bg1"/>
-                </a:solidFill>
-              </a:rPr>
-              <a:t>HiveVoice</a:t>
+              <a:rPr b="1" sz="5400"/>
+              <a:t>hive</a:t>
+            </a:r>
+            <a:r>
+              <a:rPr b="0" sz="5400"/>
+              <a:t>voice</a:t>
             </a:r>
             <a:endParaRPr lang="en-US" sz="5400" dirty="0"/>
           </a:p>
@@ -2701,203 +3198,500 @@
       </p:sp>
       <p:sp>
         <p:nvSpPr>
-          <p:cNvPr id="4" name="hex-0"/>
+          <p:cNvPr id="4" name="logo-0"/>
           <p:cNvSpPr/>
           <p:nvPr/>
         </p:nvSpPr>
         <p:spPr>
           <a:xfrm>
-            <a:off x="5852160" y="914400"/>
-            <a:ext cx="914400" cy="791870"/>
-          </a:xfrm>
-          <a:prstGeom prst="hexagon">
-            <a:avLst/>
-          </a:prstGeom>
+            <a:off x="7540269" y="1859280"/>
+            <a:ext cx="629361" cy="726440"/>
+          </a:xfrm>
+          <a:custGeom>
+            <a:avLst/>
+            <a:gdLst/>
+            <a:ahLst/>
+            <a:cxnLst/>
+            <a:rect l="l" t="t" r="r" b="b"/>
+            <a:pathLst>
+              <a:path w="629361" h="726440">
+                <a:moveTo>
+                  <a:pt x="314681" y="0"/>
+                </a:moveTo>
+                <a:lnTo>
+                  <a:pt x="629361" y="181609"/>
+                </a:lnTo>
+                <a:lnTo>
+                  <a:pt x="629361" y="544830"/>
+                </a:lnTo>
+                <a:lnTo>
+                  <a:pt x="314681" y="726440"/>
+                </a:lnTo>
+                <a:lnTo>
+                  <a:pt x="0" y="544830"/>
+                </a:lnTo>
+                <a:lnTo>
+                  <a:pt x="0" y="181609"/>
+                </a:lnTo>
+                <a:close/>
+              </a:path>
+            </a:pathLst>
+          </a:custGeom>
           <a:solidFill>
-            <a:srgbClr val="FFFFFF"/>
+            <a:srgbClr val="F4F4F4"/>
           </a:solidFill>
-          <a:ln w="6350">
-            <a:solidFill>
-              <a:srgbClr val="FFFFFF"/>
-            </a:solidFill>
-            <a:prstDash val="solid"/>
+          <a:ln>
+            <a:noFill/>
           </a:ln>
-        </p:spPr>
-      </p:sp>
-      <p:sp>
-        <p:nvSpPr>
-          <p:cNvPr id="5" name="hex-1"/>
+          <a:effectLst/>
+        </p:spPr>
+        <p:style>
+          <a:lnRef idx="1">
+            <a:schemeClr val="accent1"/>
+          </a:lnRef>
+          <a:fillRef idx="3">
+            <a:schemeClr val="accent1"/>
+          </a:fillRef>
+          <a:effectRef idx="2">
+            <a:schemeClr val="accent1"/>
+          </a:effectRef>
+          <a:fontRef idx="minor">
+            <a:schemeClr val="lt1"/>
+          </a:fontRef>
+        </p:style>
+        <p:txBody>
+          <a:bodyPr rtlCol="0" anchor="ctr"/>
+          <a:lstStyle/>
+          <a:p>
+            <a:pPr algn="ctr"/>
+          </a:p>
+        </p:txBody>
+      </p:sp>
+      <p:sp>
+        <p:nvSpPr>
+          <p:cNvPr id="5" name="logo-1"/>
           <p:cNvSpPr/>
           <p:nvPr/>
         </p:nvSpPr>
         <p:spPr>
           <a:xfrm>
-            <a:off x="6601968" y="1346911"/>
-            <a:ext cx="914400" cy="791870"/>
-          </a:xfrm>
-          <a:prstGeom prst="hexagon">
-            <a:avLst/>
-          </a:prstGeom>
+            <a:off x="6054369" y="1859280"/>
+            <a:ext cx="629361" cy="726440"/>
+          </a:xfrm>
+          <a:custGeom>
+            <a:avLst/>
+            <a:gdLst/>
+            <a:ahLst/>
+            <a:cxnLst/>
+            <a:rect l="l" t="t" r="r" b="b"/>
+            <a:pathLst>
+              <a:path w="629361" h="726440">
+                <a:moveTo>
+                  <a:pt x="314681" y="0"/>
+                </a:moveTo>
+                <a:lnTo>
+                  <a:pt x="629361" y="181609"/>
+                </a:lnTo>
+                <a:lnTo>
+                  <a:pt x="629361" y="544830"/>
+                </a:lnTo>
+                <a:lnTo>
+                  <a:pt x="314681" y="726440"/>
+                </a:lnTo>
+                <a:lnTo>
+                  <a:pt x="0" y="544830"/>
+                </a:lnTo>
+                <a:lnTo>
+                  <a:pt x="0" y="181609"/>
+                </a:lnTo>
+                <a:close/>
+              </a:path>
+            </a:pathLst>
+          </a:custGeom>
           <a:solidFill>
-            <a:srgbClr val="FFFFFF"/>
+            <a:srgbClr val="F4F4F4"/>
           </a:solidFill>
-          <a:ln w="6350">
-            <a:solidFill>
-              <a:srgbClr val="FFFFFF"/>
-            </a:solidFill>
-            <a:prstDash val="solid"/>
+          <a:ln>
+            <a:noFill/>
           </a:ln>
-        </p:spPr>
-      </p:sp>
-      <p:sp>
-        <p:nvSpPr>
-          <p:cNvPr id="6" name="hex-2"/>
+          <a:effectLst/>
+        </p:spPr>
+        <p:style>
+          <a:lnRef idx="1">
+            <a:schemeClr val="accent1"/>
+          </a:lnRef>
+          <a:fillRef idx="3">
+            <a:schemeClr val="accent1"/>
+          </a:fillRef>
+          <a:effectRef idx="2">
+            <a:schemeClr val="accent1"/>
+          </a:effectRef>
+          <a:fontRef idx="minor">
+            <a:schemeClr val="lt1"/>
+          </a:fontRef>
+        </p:style>
+        <p:txBody>
+          <a:bodyPr rtlCol="0" anchor="ctr"/>
+          <a:lstStyle/>
+          <a:p>
+            <a:pPr algn="ctr"/>
+          </a:p>
+        </p:txBody>
+      </p:sp>
+      <p:sp>
+        <p:nvSpPr>
+          <p:cNvPr id="6" name="logo-2"/>
           <p:cNvSpPr/>
           <p:nvPr/>
         </p:nvSpPr>
         <p:spPr>
           <a:xfrm>
-            <a:off x="7351776" y="914400"/>
-            <a:ext cx="914400" cy="791870"/>
-          </a:xfrm>
-          <a:prstGeom prst="hexagon">
-            <a:avLst/>
-          </a:prstGeom>
+            <a:off x="7168794" y="1215390"/>
+            <a:ext cx="629361" cy="726440"/>
+          </a:xfrm>
+          <a:custGeom>
+            <a:avLst/>
+            <a:gdLst/>
+            <a:ahLst/>
+            <a:cxnLst/>
+            <a:rect l="l" t="t" r="r" b="b"/>
+            <a:pathLst>
+              <a:path w="629361" h="726440">
+                <a:moveTo>
+                  <a:pt x="314681" y="0"/>
+                </a:moveTo>
+                <a:lnTo>
+                  <a:pt x="629361" y="181610"/>
+                </a:lnTo>
+                <a:lnTo>
+                  <a:pt x="629361" y="544830"/>
+                </a:lnTo>
+                <a:lnTo>
+                  <a:pt x="314681" y="726440"/>
+                </a:lnTo>
+                <a:lnTo>
+                  <a:pt x="0" y="544830"/>
+                </a:lnTo>
+                <a:lnTo>
+                  <a:pt x="0" y="181610"/>
+                </a:lnTo>
+                <a:close/>
+              </a:path>
+            </a:pathLst>
+          </a:custGeom>
+          <a:solidFill>
+            <a:srgbClr val="F4F4F4"/>
+          </a:solidFill>
+          <a:ln>
+            <a:noFill/>
+          </a:ln>
+          <a:effectLst/>
+        </p:spPr>
+        <p:style>
+          <a:lnRef idx="1">
+            <a:schemeClr val="accent1"/>
+          </a:lnRef>
+          <a:fillRef idx="3">
+            <a:schemeClr val="accent1"/>
+          </a:fillRef>
+          <a:effectRef idx="2">
+            <a:schemeClr val="accent1"/>
+          </a:effectRef>
+          <a:fontRef idx="minor">
+            <a:schemeClr val="lt1"/>
+          </a:fontRef>
+        </p:style>
+        <p:txBody>
+          <a:bodyPr rtlCol="0" anchor="ctr"/>
+          <a:lstStyle/>
+          <a:p>
+            <a:pPr algn="ctr"/>
+          </a:p>
+        </p:txBody>
+      </p:sp>
+      <p:sp>
+        <p:nvSpPr>
+          <p:cNvPr id="7" name="logo-3"/>
+          <p:cNvSpPr/>
+          <p:nvPr/>
+        </p:nvSpPr>
+        <p:spPr>
+          <a:xfrm>
+            <a:off x="6425844" y="1215390"/>
+            <a:ext cx="629361" cy="726440"/>
+          </a:xfrm>
+          <a:custGeom>
+            <a:avLst/>
+            <a:gdLst/>
+            <a:ahLst/>
+            <a:cxnLst/>
+            <a:rect l="l" t="t" r="r" b="b"/>
+            <a:pathLst>
+              <a:path w="629361" h="726440">
+                <a:moveTo>
+                  <a:pt x="314681" y="0"/>
+                </a:moveTo>
+                <a:lnTo>
+                  <a:pt x="629361" y="181610"/>
+                </a:lnTo>
+                <a:lnTo>
+                  <a:pt x="629361" y="544830"/>
+                </a:lnTo>
+                <a:lnTo>
+                  <a:pt x="314681" y="726440"/>
+                </a:lnTo>
+                <a:lnTo>
+                  <a:pt x="0" y="544830"/>
+                </a:lnTo>
+                <a:lnTo>
+                  <a:pt x="0" y="181610"/>
+                </a:lnTo>
+                <a:close/>
+              </a:path>
+            </a:pathLst>
+          </a:custGeom>
+          <a:solidFill>
+            <a:srgbClr val="F4F4F4"/>
+          </a:solidFill>
+          <a:ln>
+            <a:noFill/>
+          </a:ln>
+          <a:effectLst/>
+        </p:spPr>
+        <p:style>
+          <a:lnRef idx="1">
+            <a:schemeClr val="accent1"/>
+          </a:lnRef>
+          <a:fillRef idx="3">
+            <a:schemeClr val="accent1"/>
+          </a:fillRef>
+          <a:effectRef idx="2">
+            <a:schemeClr val="accent1"/>
+          </a:effectRef>
+          <a:fontRef idx="minor">
+            <a:schemeClr val="lt1"/>
+          </a:fontRef>
+        </p:style>
+        <p:txBody>
+          <a:bodyPr rtlCol="0" anchor="ctr"/>
+          <a:lstStyle/>
+          <a:p>
+            <a:pPr algn="ctr"/>
+          </a:p>
+        </p:txBody>
+      </p:sp>
+      <p:sp>
+        <p:nvSpPr>
+          <p:cNvPr id="8" name="logo-4"/>
+          <p:cNvSpPr/>
+          <p:nvPr/>
+        </p:nvSpPr>
+        <p:spPr>
+          <a:xfrm>
+            <a:off x="7168794" y="2503170"/>
+            <a:ext cx="629361" cy="726440"/>
+          </a:xfrm>
+          <a:custGeom>
+            <a:avLst/>
+            <a:gdLst/>
+            <a:ahLst/>
+            <a:cxnLst/>
+            <a:rect l="l" t="t" r="r" b="b"/>
+            <a:pathLst>
+              <a:path w="629361" h="726440">
+                <a:moveTo>
+                  <a:pt x="314681" y="0"/>
+                </a:moveTo>
+                <a:lnTo>
+                  <a:pt x="629361" y="181610"/>
+                </a:lnTo>
+                <a:lnTo>
+                  <a:pt x="629361" y="544830"/>
+                </a:lnTo>
+                <a:lnTo>
+                  <a:pt x="314681" y="726440"/>
+                </a:lnTo>
+                <a:lnTo>
+                  <a:pt x="0" y="544830"/>
+                </a:lnTo>
+                <a:lnTo>
+                  <a:pt x="0" y="181610"/>
+                </a:lnTo>
+                <a:close/>
+              </a:path>
+            </a:pathLst>
+          </a:custGeom>
+          <a:solidFill>
+            <a:srgbClr val="F4F4F4"/>
+          </a:solidFill>
+          <a:ln>
+            <a:noFill/>
+          </a:ln>
+          <a:effectLst/>
+        </p:spPr>
+        <p:style>
+          <a:lnRef idx="1">
+            <a:schemeClr val="accent1"/>
+          </a:lnRef>
+          <a:fillRef idx="3">
+            <a:schemeClr val="accent1"/>
+          </a:fillRef>
+          <a:effectRef idx="2">
+            <a:schemeClr val="accent1"/>
+          </a:effectRef>
+          <a:fontRef idx="minor">
+            <a:schemeClr val="lt1"/>
+          </a:fontRef>
+        </p:style>
+        <p:txBody>
+          <a:bodyPr rtlCol="0" anchor="ctr"/>
+          <a:lstStyle/>
+          <a:p>
+            <a:pPr algn="ctr"/>
+          </a:p>
+        </p:txBody>
+      </p:sp>
+      <p:sp>
+        <p:nvSpPr>
+          <p:cNvPr id="9" name="logo-5"/>
+          <p:cNvSpPr/>
+          <p:nvPr/>
+        </p:nvSpPr>
+        <p:spPr>
+          <a:xfrm>
+            <a:off x="6425844" y="2503170"/>
+            <a:ext cx="629361" cy="726440"/>
+          </a:xfrm>
+          <a:custGeom>
+            <a:avLst/>
+            <a:gdLst/>
+            <a:ahLst/>
+            <a:cxnLst/>
+            <a:rect l="l" t="t" r="r" b="b"/>
+            <a:pathLst>
+              <a:path w="629361" h="726440">
+                <a:moveTo>
+                  <a:pt x="314681" y="0"/>
+                </a:moveTo>
+                <a:lnTo>
+                  <a:pt x="629361" y="181610"/>
+                </a:lnTo>
+                <a:lnTo>
+                  <a:pt x="629361" y="544830"/>
+                </a:lnTo>
+                <a:lnTo>
+                  <a:pt x="314681" y="726440"/>
+                </a:lnTo>
+                <a:lnTo>
+                  <a:pt x="0" y="544830"/>
+                </a:lnTo>
+                <a:lnTo>
+                  <a:pt x="0" y="181610"/>
+                </a:lnTo>
+                <a:close/>
+              </a:path>
+            </a:pathLst>
+          </a:custGeom>
+          <a:solidFill>
+            <a:srgbClr val="F4F4F4"/>
+          </a:solidFill>
+          <a:ln>
+            <a:noFill/>
+          </a:ln>
+          <a:effectLst/>
+        </p:spPr>
+        <p:style>
+          <a:lnRef idx="1">
+            <a:schemeClr val="accent1"/>
+          </a:lnRef>
+          <a:fillRef idx="3">
+            <a:schemeClr val="accent1"/>
+          </a:fillRef>
+          <a:effectRef idx="2">
+            <a:schemeClr val="accent1"/>
+          </a:effectRef>
+          <a:fontRef idx="minor">
+            <a:schemeClr val="lt1"/>
+          </a:fontRef>
+        </p:style>
+        <p:txBody>
+          <a:bodyPr rtlCol="0" anchor="ctr"/>
+          <a:lstStyle/>
+          <a:p>
+            <a:pPr algn="ctr"/>
+          </a:p>
+        </p:txBody>
+      </p:sp>
+      <p:sp>
+        <p:nvSpPr>
+          <p:cNvPr id="10" name="logo-center"/>
+          <p:cNvSpPr/>
+          <p:nvPr/>
+        </p:nvSpPr>
+        <p:spPr>
+          <a:xfrm>
+            <a:off x="6797319" y="1859280"/>
+            <a:ext cx="629361" cy="726440"/>
+          </a:xfrm>
+          <a:custGeom>
+            <a:avLst/>
+            <a:gdLst/>
+            <a:ahLst/>
+            <a:cxnLst/>
+            <a:rect l="l" t="t" r="r" b="b"/>
+            <a:pathLst>
+              <a:path w="629361" h="726440">
+                <a:moveTo>
+                  <a:pt x="314681" y="0"/>
+                </a:moveTo>
+                <a:lnTo>
+                  <a:pt x="629361" y="181609"/>
+                </a:lnTo>
+                <a:lnTo>
+                  <a:pt x="629361" y="544830"/>
+                </a:lnTo>
+                <a:lnTo>
+                  <a:pt x="314681" y="726440"/>
+                </a:lnTo>
+                <a:lnTo>
+                  <a:pt x="0" y="544830"/>
+                </a:lnTo>
+                <a:lnTo>
+                  <a:pt x="0" y="181609"/>
+                </a:lnTo>
+                <a:close/>
+              </a:path>
+            </a:pathLst>
+          </a:custGeom>
           <a:solidFill>
             <a:srgbClr val="E2001A"/>
           </a:solidFill>
-          <a:ln w="6350">
-            <a:solidFill>
-              <a:srgbClr val="E2001A"/>
-            </a:solidFill>
-            <a:prstDash val="solid"/>
+          <a:ln>
+            <a:noFill/>
           </a:ln>
-        </p:spPr>
-      </p:sp>
-      <p:sp>
-        <p:nvSpPr>
-          <p:cNvPr id="7" name="hex-3"/>
-          <p:cNvSpPr/>
-          <p:nvPr/>
-        </p:nvSpPr>
-        <p:spPr>
-          <a:xfrm>
-            <a:off x="5852160" y="1779422"/>
-            <a:ext cx="914400" cy="791870"/>
-          </a:xfrm>
-          <a:prstGeom prst="hexagon">
-            <a:avLst/>
-          </a:prstGeom>
-          <a:solidFill>
-            <a:srgbClr val="FFFFFF"/>
-          </a:solidFill>
-          <a:ln w="6350">
-            <a:solidFill>
-              <a:srgbClr val="FFFFFF"/>
-            </a:solidFill>
-            <a:prstDash val="solid"/>
-          </a:ln>
-        </p:spPr>
-      </p:sp>
-      <p:sp>
-        <p:nvSpPr>
-          <p:cNvPr id="8" name="hex-4"/>
-          <p:cNvSpPr/>
-          <p:nvPr/>
-        </p:nvSpPr>
-        <p:spPr>
-          <a:xfrm>
-            <a:off x="6601968" y="2211934"/>
-            <a:ext cx="914400" cy="791870"/>
-          </a:xfrm>
-          <a:prstGeom prst="hexagon">
-            <a:avLst/>
-          </a:prstGeom>
-          <a:solidFill>
-            <a:srgbClr val="FFFFFF"/>
-          </a:solidFill>
-          <a:ln w="6350">
-            <a:solidFill>
-              <a:srgbClr val="FFFFFF"/>
-            </a:solidFill>
-            <a:prstDash val="solid"/>
-          </a:ln>
-        </p:spPr>
-      </p:sp>
-      <p:sp>
-        <p:nvSpPr>
-          <p:cNvPr id="9" name="hex-5"/>
-          <p:cNvSpPr/>
-          <p:nvPr/>
-        </p:nvSpPr>
-        <p:spPr>
-          <a:xfrm>
-            <a:off x="7351776" y="1779422"/>
-            <a:ext cx="914400" cy="791870"/>
-          </a:xfrm>
-          <a:prstGeom prst="hexagon">
-            <a:avLst/>
-          </a:prstGeom>
-          <a:solidFill>
-            <a:srgbClr val="FFFFFF"/>
-          </a:solidFill>
-          <a:ln w="6350">
-            <a:solidFill>
-              <a:srgbClr val="FFFFFF"/>
-            </a:solidFill>
-            <a:prstDash val="solid"/>
-          </a:ln>
-        </p:spPr>
-      </p:sp>
-      <p:sp>
-        <p:nvSpPr>
-          <p:cNvPr id="10" name="hex-6"/>
-          <p:cNvSpPr/>
-          <p:nvPr/>
-        </p:nvSpPr>
-        <p:spPr>
-          <a:xfrm>
-            <a:off x="6601968" y="3076956"/>
-            <a:ext cx="914400" cy="791870"/>
-          </a:xfrm>
-          <a:prstGeom prst="hexagon">
-            <a:avLst/>
-          </a:prstGeom>
-          <a:solidFill>
-            <a:srgbClr val="FFFFFF"/>
-          </a:solidFill>
-          <a:ln w="6350">
-            <a:solidFill>
-              <a:srgbClr val="FFFFFF"/>
-            </a:solidFill>
-            <a:prstDash val="solid"/>
-          </a:ln>
-        </p:spPr>
-      </p:sp>
-      <p:sp>
-        <p:nvSpPr>
-          <p:cNvPr id="11" name="hex-7"/>
-          <p:cNvSpPr/>
-          <p:nvPr/>
-        </p:nvSpPr>
-        <p:spPr>
-          <a:xfrm>
-            <a:off x="5852160" y="2644445"/>
-            <a:ext cx="914400" cy="791870"/>
-          </a:xfrm>
-          <a:prstGeom prst="hexagon">
-            <a:avLst/>
-          </a:prstGeom>
-          <a:solidFill>
-            <a:srgbClr val="FFFFFF"/>
-          </a:solidFill>
-          <a:ln w="6350">
-            <a:solidFill>
-              <a:srgbClr val="FFFFFF"/>
-            </a:solidFill>
-            <a:prstDash val="solid"/>
-          </a:ln>
-        </p:spPr>
+          <a:effectLst/>
+        </p:spPr>
+        <p:style>
+          <a:lnRef idx="1">
+            <a:schemeClr val="accent1"/>
+          </a:lnRef>
+          <a:fillRef idx="3">
+            <a:schemeClr val="accent1"/>
+          </a:fillRef>
+          <a:effectRef idx="2">
+            <a:schemeClr val="accent1"/>
+          </a:effectRef>
+          <a:fontRef idx="minor">
+            <a:schemeClr val="lt1"/>
+          </a:fontRef>
+        </p:style>
+        <p:txBody>
+          <a:bodyPr rtlCol="0" anchor="ctr"/>
+          <a:lstStyle/>
+          <a:p>
+            <a:pPr algn="ctr"/>
+          </a:p>
+        </p:txBody>
       </p:sp>
     </p:spTree>
   </p:cSld>
@@ -3827,7 +4621,7 @@
         <p:spPr>
           <a:xfrm>
             <a:off x="4937760" y="3017520"/>
-            <a:ext cx="3474720" cy="1371600"/>
+            <a:ext cx="3474720" cy="838200"/>
           </a:xfrm>
           <a:prstGeom prst="rect">
             <a:avLst/>
@@ -3848,7 +4642,7 @@
                   <a:schemeClr val="tx1"/>
                 </a:solidFill>
               </a:rPr>
-              <a:t>Abholungen als Aufgaben, Brot als kostenloses Angebot auf der Karte, per „Weitergeben“ sofort im Nachbarschafts-Chat.</a:t>
+              <a:t>Abholungen als Aufgaben, Brot gratis auf der Karte, per „Weitergeben“ sofort im Nachbarschafts-Chat.</a:t>
             </a:r>
             <a:endParaRPr lang="en-US" sz="1400" dirty="0"/>
           </a:p>
@@ -3896,6 +4690,91 @@
               <a:t>11</a:t>
             </a:fld>
             <a:endParaRPr lang="en-US"/>
+          </a:p>
+        </p:txBody>
+      </p:sp>
+      <p:sp>
+        <p:nvSpPr>
+          <p:cNvPr id="26" name="fact-bar-4-1"/>
+          <p:cNvSpPr/>
+          <p:nvPr/>
+        </p:nvSpPr>
+        <p:spPr>
+          <a:xfrm>
+            <a:off x="4937760" y="3911600"/>
+            <a:ext cx="38100" cy="482600"/>
+          </a:xfrm>
+          <a:prstGeom prst="rect">
+            <a:avLst/>
+          </a:prstGeom>
+          <a:solidFill>
+            <a:srgbClr val="E2001A"/>
+          </a:solidFill>
+          <a:ln>
+            <a:noFill/>
+          </a:ln>
+          <a:effectLst/>
+        </p:spPr>
+        <p:style>
+          <a:lnRef idx="1">
+            <a:schemeClr val="accent1"/>
+          </a:lnRef>
+          <a:fillRef idx="3">
+            <a:schemeClr val="accent1"/>
+          </a:fillRef>
+          <a:effectRef idx="2">
+            <a:schemeClr val="accent1"/>
+          </a:effectRef>
+          <a:fontRef idx="minor">
+            <a:schemeClr val="lt1"/>
+          </a:fontRef>
+        </p:style>
+        <p:txBody>
+          <a:bodyPr rtlCol="0" anchor="ctr"/>
+          <a:lstStyle/>
+          <a:p>
+            <a:pPr algn="ctr"/>
+          </a:p>
+        </p:txBody>
+      </p:sp>
+      <p:sp>
+        <p:nvSpPr>
+          <p:cNvPr id="27" name="fact-4-1"/>
+          <p:cNvSpPr txBox="1"/>
+          <p:nvPr/>
+        </p:nvSpPr>
+        <p:spPr>
+          <a:xfrm>
+            <a:off x="5064760" y="3911600"/>
+            <a:ext cx="3347720" cy="482600"/>
+          </a:xfrm>
+          <a:prstGeom prst="rect">
+            <a:avLst/>
+          </a:prstGeom>
+          <a:noFill/>
+        </p:spPr>
+        <p:txBody>
+          <a:bodyPr wrap="square" lIns="0" rIns="0" tIns="0" bIns="0">
+            <a:spAutoFit/>
+          </a:bodyPr>
+          <a:lstStyle/>
+          <a:p>
+            <a:r>
+              <a:rPr sz="900" b="1">
+                <a:solidFill>
+                  <a:srgbClr val="E2001A"/>
+                </a:solidFill>
+              </a:rPr>
+              <a:t>EUROPA  </a:t>
+            </a:r>
+            <a:r>
+              <a:rPr sz="1000">
+                <a:solidFill>
+                  <a:srgbClr val="555555"/>
+                </a:solidFill>
+              </a:rPr>
+              <a:t>58 Mio. Tonnen Lebensmittelabfall im Jahr, 130 kg pro Kopf (Eurostat, 2023)</a:t>
+            </a:r>
           </a:p>
         </p:txBody>
       </p:sp>
@@ -8062,203 +8941,500 @@
       </p:sp>
       <p:sp>
         <p:nvSpPr>
-          <p:cNvPr id="4" name="hex-0"/>
+          <p:cNvPr id="4" name="logo-0"/>
           <p:cNvSpPr/>
           <p:nvPr/>
         </p:nvSpPr>
         <p:spPr>
           <a:xfrm>
-            <a:off x="5852160" y="914400"/>
-            <a:ext cx="914400" cy="791870"/>
-          </a:xfrm>
-          <a:prstGeom prst="hexagon">
-            <a:avLst/>
-          </a:prstGeom>
+            <a:off x="7540269" y="1859280"/>
+            <a:ext cx="629361" cy="726440"/>
+          </a:xfrm>
+          <a:custGeom>
+            <a:avLst/>
+            <a:gdLst/>
+            <a:ahLst/>
+            <a:cxnLst/>
+            <a:rect l="l" t="t" r="r" b="b"/>
+            <a:pathLst>
+              <a:path w="629361" h="726440">
+                <a:moveTo>
+                  <a:pt x="314681" y="0"/>
+                </a:moveTo>
+                <a:lnTo>
+                  <a:pt x="629361" y="181609"/>
+                </a:lnTo>
+                <a:lnTo>
+                  <a:pt x="629361" y="544830"/>
+                </a:lnTo>
+                <a:lnTo>
+                  <a:pt x="314681" y="726440"/>
+                </a:lnTo>
+                <a:lnTo>
+                  <a:pt x="0" y="544830"/>
+                </a:lnTo>
+                <a:lnTo>
+                  <a:pt x="0" y="181609"/>
+                </a:lnTo>
+                <a:close/>
+              </a:path>
+            </a:pathLst>
+          </a:custGeom>
           <a:solidFill>
-            <a:srgbClr val="FFFFFF"/>
+            <a:srgbClr val="F4F4F4"/>
           </a:solidFill>
-          <a:ln w="6350">
-            <a:solidFill>
-              <a:srgbClr val="FFFFFF"/>
-            </a:solidFill>
-            <a:prstDash val="solid"/>
+          <a:ln>
+            <a:noFill/>
           </a:ln>
-        </p:spPr>
-      </p:sp>
-      <p:sp>
-        <p:nvSpPr>
-          <p:cNvPr id="5" name="hex-1"/>
+          <a:effectLst/>
+        </p:spPr>
+        <p:style>
+          <a:lnRef idx="1">
+            <a:schemeClr val="accent1"/>
+          </a:lnRef>
+          <a:fillRef idx="3">
+            <a:schemeClr val="accent1"/>
+          </a:fillRef>
+          <a:effectRef idx="2">
+            <a:schemeClr val="accent1"/>
+          </a:effectRef>
+          <a:fontRef idx="minor">
+            <a:schemeClr val="lt1"/>
+          </a:fontRef>
+        </p:style>
+        <p:txBody>
+          <a:bodyPr rtlCol="0" anchor="ctr"/>
+          <a:lstStyle/>
+          <a:p>
+            <a:pPr algn="ctr"/>
+          </a:p>
+        </p:txBody>
+      </p:sp>
+      <p:sp>
+        <p:nvSpPr>
+          <p:cNvPr id="5" name="logo-1"/>
           <p:cNvSpPr/>
           <p:nvPr/>
         </p:nvSpPr>
         <p:spPr>
           <a:xfrm>
-            <a:off x="6601968" y="1346911"/>
-            <a:ext cx="914400" cy="791870"/>
-          </a:xfrm>
-          <a:prstGeom prst="hexagon">
-            <a:avLst/>
-          </a:prstGeom>
+            <a:off x="6054369" y="1859280"/>
+            <a:ext cx="629361" cy="726440"/>
+          </a:xfrm>
+          <a:custGeom>
+            <a:avLst/>
+            <a:gdLst/>
+            <a:ahLst/>
+            <a:cxnLst/>
+            <a:rect l="l" t="t" r="r" b="b"/>
+            <a:pathLst>
+              <a:path w="629361" h="726440">
+                <a:moveTo>
+                  <a:pt x="314681" y="0"/>
+                </a:moveTo>
+                <a:lnTo>
+                  <a:pt x="629361" y="181609"/>
+                </a:lnTo>
+                <a:lnTo>
+                  <a:pt x="629361" y="544830"/>
+                </a:lnTo>
+                <a:lnTo>
+                  <a:pt x="314681" y="726440"/>
+                </a:lnTo>
+                <a:lnTo>
+                  <a:pt x="0" y="544830"/>
+                </a:lnTo>
+                <a:lnTo>
+                  <a:pt x="0" y="181609"/>
+                </a:lnTo>
+                <a:close/>
+              </a:path>
+            </a:pathLst>
+          </a:custGeom>
           <a:solidFill>
-            <a:srgbClr val="FFFFFF"/>
+            <a:srgbClr val="F4F4F4"/>
           </a:solidFill>
-          <a:ln w="6350">
-            <a:solidFill>
-              <a:srgbClr val="FFFFFF"/>
-            </a:solidFill>
-            <a:prstDash val="solid"/>
+          <a:ln>
+            <a:noFill/>
           </a:ln>
-        </p:spPr>
-      </p:sp>
-      <p:sp>
-        <p:nvSpPr>
-          <p:cNvPr id="6" name="hex-2"/>
+          <a:effectLst/>
+        </p:spPr>
+        <p:style>
+          <a:lnRef idx="1">
+            <a:schemeClr val="accent1"/>
+          </a:lnRef>
+          <a:fillRef idx="3">
+            <a:schemeClr val="accent1"/>
+          </a:fillRef>
+          <a:effectRef idx="2">
+            <a:schemeClr val="accent1"/>
+          </a:effectRef>
+          <a:fontRef idx="minor">
+            <a:schemeClr val="lt1"/>
+          </a:fontRef>
+        </p:style>
+        <p:txBody>
+          <a:bodyPr rtlCol="0" anchor="ctr"/>
+          <a:lstStyle/>
+          <a:p>
+            <a:pPr algn="ctr"/>
+          </a:p>
+        </p:txBody>
+      </p:sp>
+      <p:sp>
+        <p:nvSpPr>
+          <p:cNvPr id="6" name="logo-2"/>
           <p:cNvSpPr/>
           <p:nvPr/>
         </p:nvSpPr>
         <p:spPr>
           <a:xfrm>
-            <a:off x="7351776" y="914400"/>
-            <a:ext cx="914400" cy="791870"/>
-          </a:xfrm>
-          <a:prstGeom prst="hexagon">
-            <a:avLst/>
-          </a:prstGeom>
+            <a:off x="7168794" y="1215390"/>
+            <a:ext cx="629361" cy="726440"/>
+          </a:xfrm>
+          <a:custGeom>
+            <a:avLst/>
+            <a:gdLst/>
+            <a:ahLst/>
+            <a:cxnLst/>
+            <a:rect l="l" t="t" r="r" b="b"/>
+            <a:pathLst>
+              <a:path w="629361" h="726440">
+                <a:moveTo>
+                  <a:pt x="314681" y="0"/>
+                </a:moveTo>
+                <a:lnTo>
+                  <a:pt x="629361" y="181610"/>
+                </a:lnTo>
+                <a:lnTo>
+                  <a:pt x="629361" y="544830"/>
+                </a:lnTo>
+                <a:lnTo>
+                  <a:pt x="314681" y="726440"/>
+                </a:lnTo>
+                <a:lnTo>
+                  <a:pt x="0" y="544830"/>
+                </a:lnTo>
+                <a:lnTo>
+                  <a:pt x="0" y="181610"/>
+                </a:lnTo>
+                <a:close/>
+              </a:path>
+            </a:pathLst>
+          </a:custGeom>
           <a:solidFill>
-            <a:srgbClr val="FFFFFF"/>
+            <a:srgbClr val="F4F4F4"/>
           </a:solidFill>
-          <a:ln w="6350">
-            <a:solidFill>
-              <a:srgbClr val="FFFFFF"/>
-            </a:solidFill>
-            <a:prstDash val="solid"/>
+          <a:ln>
+            <a:noFill/>
           </a:ln>
-        </p:spPr>
-      </p:sp>
-      <p:sp>
-        <p:nvSpPr>
-          <p:cNvPr id="7" name="hex-3"/>
+          <a:effectLst/>
+        </p:spPr>
+        <p:style>
+          <a:lnRef idx="1">
+            <a:schemeClr val="accent1"/>
+          </a:lnRef>
+          <a:fillRef idx="3">
+            <a:schemeClr val="accent1"/>
+          </a:fillRef>
+          <a:effectRef idx="2">
+            <a:schemeClr val="accent1"/>
+          </a:effectRef>
+          <a:fontRef idx="minor">
+            <a:schemeClr val="lt1"/>
+          </a:fontRef>
+        </p:style>
+        <p:txBody>
+          <a:bodyPr rtlCol="0" anchor="ctr"/>
+          <a:lstStyle/>
+          <a:p>
+            <a:pPr algn="ctr"/>
+          </a:p>
+        </p:txBody>
+      </p:sp>
+      <p:sp>
+        <p:nvSpPr>
+          <p:cNvPr id="7" name="logo-3"/>
           <p:cNvSpPr/>
           <p:nvPr/>
         </p:nvSpPr>
         <p:spPr>
           <a:xfrm>
-            <a:off x="5852160" y="1779422"/>
-            <a:ext cx="914400" cy="791870"/>
-          </a:xfrm>
-          <a:prstGeom prst="hexagon">
-            <a:avLst/>
-          </a:prstGeom>
+            <a:off x="6425844" y="1215390"/>
+            <a:ext cx="629361" cy="726440"/>
+          </a:xfrm>
+          <a:custGeom>
+            <a:avLst/>
+            <a:gdLst/>
+            <a:ahLst/>
+            <a:cxnLst/>
+            <a:rect l="l" t="t" r="r" b="b"/>
+            <a:pathLst>
+              <a:path w="629361" h="726440">
+                <a:moveTo>
+                  <a:pt x="314681" y="0"/>
+                </a:moveTo>
+                <a:lnTo>
+                  <a:pt x="629361" y="181610"/>
+                </a:lnTo>
+                <a:lnTo>
+                  <a:pt x="629361" y="544830"/>
+                </a:lnTo>
+                <a:lnTo>
+                  <a:pt x="314681" y="726440"/>
+                </a:lnTo>
+                <a:lnTo>
+                  <a:pt x="0" y="544830"/>
+                </a:lnTo>
+                <a:lnTo>
+                  <a:pt x="0" y="181610"/>
+                </a:lnTo>
+                <a:close/>
+              </a:path>
+            </a:pathLst>
+          </a:custGeom>
           <a:solidFill>
-            <a:srgbClr val="FFFFFF"/>
+            <a:srgbClr val="F4F4F4"/>
           </a:solidFill>
-          <a:ln w="6350">
-            <a:solidFill>
-              <a:srgbClr val="FFFFFF"/>
-            </a:solidFill>
-            <a:prstDash val="solid"/>
+          <a:ln>
+            <a:noFill/>
           </a:ln>
-        </p:spPr>
-      </p:sp>
-      <p:sp>
-        <p:nvSpPr>
-          <p:cNvPr id="8" name="hex-4"/>
+          <a:effectLst/>
+        </p:spPr>
+        <p:style>
+          <a:lnRef idx="1">
+            <a:schemeClr val="accent1"/>
+          </a:lnRef>
+          <a:fillRef idx="3">
+            <a:schemeClr val="accent1"/>
+          </a:fillRef>
+          <a:effectRef idx="2">
+            <a:schemeClr val="accent1"/>
+          </a:effectRef>
+          <a:fontRef idx="minor">
+            <a:schemeClr val="lt1"/>
+          </a:fontRef>
+        </p:style>
+        <p:txBody>
+          <a:bodyPr rtlCol="0" anchor="ctr"/>
+          <a:lstStyle/>
+          <a:p>
+            <a:pPr algn="ctr"/>
+          </a:p>
+        </p:txBody>
+      </p:sp>
+      <p:sp>
+        <p:nvSpPr>
+          <p:cNvPr id="8" name="logo-4"/>
           <p:cNvSpPr/>
           <p:nvPr/>
         </p:nvSpPr>
         <p:spPr>
           <a:xfrm>
-            <a:off x="6601968" y="2211934"/>
-            <a:ext cx="914400" cy="791870"/>
-          </a:xfrm>
-          <a:prstGeom prst="hexagon">
-            <a:avLst/>
-          </a:prstGeom>
+            <a:off x="7168794" y="2503170"/>
+            <a:ext cx="629361" cy="726440"/>
+          </a:xfrm>
+          <a:custGeom>
+            <a:avLst/>
+            <a:gdLst/>
+            <a:ahLst/>
+            <a:cxnLst/>
+            <a:rect l="l" t="t" r="r" b="b"/>
+            <a:pathLst>
+              <a:path w="629361" h="726440">
+                <a:moveTo>
+                  <a:pt x="314681" y="0"/>
+                </a:moveTo>
+                <a:lnTo>
+                  <a:pt x="629361" y="181610"/>
+                </a:lnTo>
+                <a:lnTo>
+                  <a:pt x="629361" y="544830"/>
+                </a:lnTo>
+                <a:lnTo>
+                  <a:pt x="314681" y="726440"/>
+                </a:lnTo>
+                <a:lnTo>
+                  <a:pt x="0" y="544830"/>
+                </a:lnTo>
+                <a:lnTo>
+                  <a:pt x="0" y="181610"/>
+                </a:lnTo>
+                <a:close/>
+              </a:path>
+            </a:pathLst>
+          </a:custGeom>
+          <a:solidFill>
+            <a:srgbClr val="F4F4F4"/>
+          </a:solidFill>
+          <a:ln>
+            <a:noFill/>
+          </a:ln>
+          <a:effectLst/>
+        </p:spPr>
+        <p:style>
+          <a:lnRef idx="1">
+            <a:schemeClr val="accent1"/>
+          </a:lnRef>
+          <a:fillRef idx="3">
+            <a:schemeClr val="accent1"/>
+          </a:fillRef>
+          <a:effectRef idx="2">
+            <a:schemeClr val="accent1"/>
+          </a:effectRef>
+          <a:fontRef idx="minor">
+            <a:schemeClr val="lt1"/>
+          </a:fontRef>
+        </p:style>
+        <p:txBody>
+          <a:bodyPr rtlCol="0" anchor="ctr"/>
+          <a:lstStyle/>
+          <a:p>
+            <a:pPr algn="ctr"/>
+          </a:p>
+        </p:txBody>
+      </p:sp>
+      <p:sp>
+        <p:nvSpPr>
+          <p:cNvPr id="9" name="logo-5"/>
+          <p:cNvSpPr/>
+          <p:nvPr/>
+        </p:nvSpPr>
+        <p:spPr>
+          <a:xfrm>
+            <a:off x="6425844" y="2503170"/>
+            <a:ext cx="629361" cy="726440"/>
+          </a:xfrm>
+          <a:custGeom>
+            <a:avLst/>
+            <a:gdLst/>
+            <a:ahLst/>
+            <a:cxnLst/>
+            <a:rect l="l" t="t" r="r" b="b"/>
+            <a:pathLst>
+              <a:path w="629361" h="726440">
+                <a:moveTo>
+                  <a:pt x="314681" y="0"/>
+                </a:moveTo>
+                <a:lnTo>
+                  <a:pt x="629361" y="181610"/>
+                </a:lnTo>
+                <a:lnTo>
+                  <a:pt x="629361" y="544830"/>
+                </a:lnTo>
+                <a:lnTo>
+                  <a:pt x="314681" y="726440"/>
+                </a:lnTo>
+                <a:lnTo>
+                  <a:pt x="0" y="544830"/>
+                </a:lnTo>
+                <a:lnTo>
+                  <a:pt x="0" y="181610"/>
+                </a:lnTo>
+                <a:close/>
+              </a:path>
+            </a:pathLst>
+          </a:custGeom>
+          <a:solidFill>
+            <a:srgbClr val="F4F4F4"/>
+          </a:solidFill>
+          <a:ln>
+            <a:noFill/>
+          </a:ln>
+          <a:effectLst/>
+        </p:spPr>
+        <p:style>
+          <a:lnRef idx="1">
+            <a:schemeClr val="accent1"/>
+          </a:lnRef>
+          <a:fillRef idx="3">
+            <a:schemeClr val="accent1"/>
+          </a:fillRef>
+          <a:effectRef idx="2">
+            <a:schemeClr val="accent1"/>
+          </a:effectRef>
+          <a:fontRef idx="minor">
+            <a:schemeClr val="lt1"/>
+          </a:fontRef>
+        </p:style>
+        <p:txBody>
+          <a:bodyPr rtlCol="0" anchor="ctr"/>
+          <a:lstStyle/>
+          <a:p>
+            <a:pPr algn="ctr"/>
+          </a:p>
+        </p:txBody>
+      </p:sp>
+      <p:sp>
+        <p:nvSpPr>
+          <p:cNvPr id="10" name="logo-center"/>
+          <p:cNvSpPr/>
+          <p:nvPr/>
+        </p:nvSpPr>
+        <p:spPr>
+          <a:xfrm>
+            <a:off x="6797319" y="1859280"/>
+            <a:ext cx="629361" cy="726440"/>
+          </a:xfrm>
+          <a:custGeom>
+            <a:avLst/>
+            <a:gdLst/>
+            <a:ahLst/>
+            <a:cxnLst/>
+            <a:rect l="l" t="t" r="r" b="b"/>
+            <a:pathLst>
+              <a:path w="629361" h="726440">
+                <a:moveTo>
+                  <a:pt x="314681" y="0"/>
+                </a:moveTo>
+                <a:lnTo>
+                  <a:pt x="629361" y="181609"/>
+                </a:lnTo>
+                <a:lnTo>
+                  <a:pt x="629361" y="544830"/>
+                </a:lnTo>
+                <a:lnTo>
+                  <a:pt x="314681" y="726440"/>
+                </a:lnTo>
+                <a:lnTo>
+                  <a:pt x="0" y="544830"/>
+                </a:lnTo>
+                <a:lnTo>
+                  <a:pt x="0" y="181609"/>
+                </a:lnTo>
+                <a:close/>
+              </a:path>
+            </a:pathLst>
+          </a:custGeom>
           <a:solidFill>
             <a:srgbClr val="E2001A"/>
           </a:solidFill>
-          <a:ln w="6350">
-            <a:solidFill>
-              <a:srgbClr val="E2001A"/>
-            </a:solidFill>
-            <a:prstDash val="solid"/>
+          <a:ln>
+            <a:noFill/>
           </a:ln>
-        </p:spPr>
-      </p:sp>
-      <p:sp>
-        <p:nvSpPr>
-          <p:cNvPr id="9" name="hex-5"/>
-          <p:cNvSpPr/>
-          <p:nvPr/>
-        </p:nvSpPr>
-        <p:spPr>
-          <a:xfrm>
-            <a:off x="7351776" y="1779422"/>
-            <a:ext cx="914400" cy="791870"/>
-          </a:xfrm>
-          <a:prstGeom prst="hexagon">
-            <a:avLst/>
-          </a:prstGeom>
-          <a:solidFill>
-            <a:srgbClr val="FFFFFF"/>
-          </a:solidFill>
-          <a:ln w="6350">
-            <a:solidFill>
-              <a:srgbClr val="FFFFFF"/>
-            </a:solidFill>
-            <a:prstDash val="solid"/>
-          </a:ln>
-        </p:spPr>
-      </p:sp>
-      <p:sp>
-        <p:nvSpPr>
-          <p:cNvPr id="10" name="hex-6"/>
-          <p:cNvSpPr/>
-          <p:nvPr/>
-        </p:nvSpPr>
-        <p:spPr>
-          <a:xfrm>
-            <a:off x="6601968" y="3076956"/>
-            <a:ext cx="914400" cy="791870"/>
-          </a:xfrm>
-          <a:prstGeom prst="hexagon">
-            <a:avLst/>
-          </a:prstGeom>
-          <a:solidFill>
-            <a:srgbClr val="FFFFFF"/>
-          </a:solidFill>
-          <a:ln w="6350">
-            <a:solidFill>
-              <a:srgbClr val="FFFFFF"/>
-            </a:solidFill>
-            <a:prstDash val="solid"/>
-          </a:ln>
-        </p:spPr>
-      </p:sp>
-      <p:sp>
-        <p:nvSpPr>
-          <p:cNvPr id="11" name="hex-7"/>
-          <p:cNvSpPr/>
-          <p:nvPr/>
-        </p:nvSpPr>
-        <p:spPr>
-          <a:xfrm>
-            <a:off x="5852160" y="2644445"/>
-            <a:ext cx="914400" cy="791870"/>
-          </a:xfrm>
-          <a:prstGeom prst="hexagon">
-            <a:avLst/>
-          </a:prstGeom>
-          <a:solidFill>
-            <a:srgbClr val="FFFFFF"/>
-          </a:solidFill>
-          <a:ln w="6350">
-            <a:solidFill>
-              <a:srgbClr val="FFFFFF"/>
-            </a:solidFill>
-            <a:prstDash val="solid"/>
-          </a:ln>
-        </p:spPr>
+          <a:effectLst/>
+        </p:spPr>
+        <p:style>
+          <a:lnRef idx="1">
+            <a:schemeClr val="accent1"/>
+          </a:lnRef>
+          <a:fillRef idx="3">
+            <a:schemeClr val="accent1"/>
+          </a:fillRef>
+          <a:effectRef idx="2">
+            <a:schemeClr val="accent1"/>
+          </a:effectRef>
+          <a:fontRef idx="minor">
+            <a:schemeClr val="lt1"/>
+          </a:fontRef>
+        </p:style>
+        <p:txBody>
+          <a:bodyPr rtlCol="0" anchor="ctr"/>
+          <a:lstStyle/>
+          <a:p>
+            <a:pPr algn="ctr"/>
+          </a:p>
+        </p:txBody>
       </p:sp>
     </p:spTree>
   </p:cSld>
@@ -11466,7 +12642,7 @@
         <p:spPr>
           <a:xfrm>
             <a:off x="4937760" y="3017520"/>
-            <a:ext cx="3474720" cy="1371600"/>
+            <a:ext cx="3474720" cy="838200"/>
           </a:xfrm>
           <a:prstGeom prst="rect">
             <a:avLst/>
@@ -11535,6 +12711,91 @@
               <a:t>7</a:t>
             </a:fld>
             <a:endParaRPr lang="en-US"/>
+          </a:p>
+        </p:txBody>
+      </p:sp>
+      <p:sp>
+        <p:nvSpPr>
+          <p:cNvPr id="26" name="fact-bar-0-1"/>
+          <p:cNvSpPr/>
+          <p:nvPr/>
+        </p:nvSpPr>
+        <p:spPr>
+          <a:xfrm>
+            <a:off x="4937760" y="3911600"/>
+            <a:ext cx="38100" cy="482600"/>
+          </a:xfrm>
+          <a:prstGeom prst="rect">
+            <a:avLst/>
+          </a:prstGeom>
+          <a:solidFill>
+            <a:srgbClr val="E2001A"/>
+          </a:solidFill>
+          <a:ln>
+            <a:noFill/>
+          </a:ln>
+          <a:effectLst/>
+        </p:spPr>
+        <p:style>
+          <a:lnRef idx="1">
+            <a:schemeClr val="accent1"/>
+          </a:lnRef>
+          <a:fillRef idx="3">
+            <a:schemeClr val="accent1"/>
+          </a:fillRef>
+          <a:effectRef idx="2">
+            <a:schemeClr val="accent1"/>
+          </a:effectRef>
+          <a:fontRef idx="minor">
+            <a:schemeClr val="lt1"/>
+          </a:fontRef>
+        </p:style>
+        <p:txBody>
+          <a:bodyPr rtlCol="0" anchor="ctr"/>
+          <a:lstStyle/>
+          <a:p>
+            <a:pPr algn="ctr"/>
+          </a:p>
+        </p:txBody>
+      </p:sp>
+      <p:sp>
+        <p:nvSpPr>
+          <p:cNvPr id="27" name="fact-0-1"/>
+          <p:cNvSpPr txBox="1"/>
+          <p:nvPr/>
+        </p:nvSpPr>
+        <p:spPr>
+          <a:xfrm>
+            <a:off x="5064760" y="3911600"/>
+            <a:ext cx="3347720" cy="482600"/>
+          </a:xfrm>
+          <a:prstGeom prst="rect">
+            <a:avLst/>
+          </a:prstGeom>
+          <a:noFill/>
+        </p:spPr>
+        <p:txBody>
+          <a:bodyPr wrap="square" lIns="0" rIns="0" tIns="0" bIns="0">
+            <a:spAutoFit/>
+          </a:bodyPr>
+          <a:lstStyle/>
+          <a:p>
+            <a:r>
+              <a:rPr sz="900" b="1">
+                <a:solidFill>
+                  <a:srgbClr val="E2001A"/>
+                </a:solidFill>
+              </a:rPr>
+              <a:t>MÜNCHEN  </a:t>
+            </a:r>
+            <a:r>
+              <a:rPr sz="1000">
+                <a:solidFill>
+                  <a:srgbClr val="555555"/>
+                </a:solidFill>
+              </a:rPr>
+              <a:t>23,35 € pro m² Angebotsmiete, fast 9 € über dem Bundesschnitt (IfW Kiel, GREIX Q4/2025)</a:t>
+            </a:r>
           </a:p>
         </p:txBody>
       </p:sp>
@@ -11770,7 +13031,7 @@
         <p:spPr>
           <a:xfrm>
             <a:off x="731520" y="3017520"/>
-            <a:ext cx="3474720" cy="1371600"/>
+            <a:ext cx="3474720" cy="838200"/>
           </a:xfrm>
           <a:prstGeom prst="rect">
             <a:avLst/>
@@ -12035,6 +13296,91 @@
               <a:t>8</a:t>
             </a:fld>
             <a:endParaRPr lang="en-US"/>
+          </a:p>
+        </p:txBody>
+      </p:sp>
+      <p:sp>
+        <p:nvSpPr>
+          <p:cNvPr id="26" name="fact-bar-1-0"/>
+          <p:cNvSpPr/>
+          <p:nvPr/>
+        </p:nvSpPr>
+        <p:spPr>
+          <a:xfrm>
+            <a:off x="731520" y="3911600"/>
+            <a:ext cx="38100" cy="482600"/>
+          </a:xfrm>
+          <a:prstGeom prst="rect">
+            <a:avLst/>
+          </a:prstGeom>
+          <a:solidFill>
+            <a:srgbClr val="E2001A"/>
+          </a:solidFill>
+          <a:ln>
+            <a:noFill/>
+          </a:ln>
+          <a:effectLst/>
+        </p:spPr>
+        <p:style>
+          <a:lnRef idx="1">
+            <a:schemeClr val="accent1"/>
+          </a:lnRef>
+          <a:fillRef idx="3">
+            <a:schemeClr val="accent1"/>
+          </a:fillRef>
+          <a:effectRef idx="2">
+            <a:schemeClr val="accent1"/>
+          </a:effectRef>
+          <a:fontRef idx="minor">
+            <a:schemeClr val="lt1"/>
+          </a:fontRef>
+        </p:style>
+        <p:txBody>
+          <a:bodyPr rtlCol="0" anchor="ctr"/>
+          <a:lstStyle/>
+          <a:p>
+            <a:pPr algn="ctr"/>
+          </a:p>
+        </p:txBody>
+      </p:sp>
+      <p:sp>
+        <p:nvSpPr>
+          <p:cNvPr id="27" name="fact-1-0"/>
+          <p:cNvSpPr txBox="1"/>
+          <p:nvPr/>
+        </p:nvSpPr>
+        <p:spPr>
+          <a:xfrm>
+            <a:off x="858520" y="3911600"/>
+            <a:ext cx="3347720" cy="482600"/>
+          </a:xfrm>
+          <a:prstGeom prst="rect">
+            <a:avLst/>
+          </a:prstGeom>
+          <a:noFill/>
+        </p:spPr>
+        <p:txBody>
+          <a:bodyPr wrap="square" lIns="0" rIns="0" tIns="0" bIns="0">
+            <a:spAutoFit/>
+          </a:bodyPr>
+          <a:lstStyle/>
+          <a:p>
+            <a:r>
+              <a:rPr sz="900" b="1">
+                <a:solidFill>
+                  <a:srgbClr val="E2001A"/>
+                </a:solidFill>
+              </a:rPr>
+              <a:t>DEUTSCHLAND  </a:t>
+            </a:r>
+            <a:r>
+              <a:rPr sz="1000">
+                <a:solidFill>
+                  <a:srgbClr val="555555"/>
+                </a:solidFill>
+              </a:rPr>
+              <a:t>Gut jede:r Neunte fühlt sich häufig einsam, über 75-Jährige am stärksten (Einsamkeitsbarometer 2024)</a:t>
+            </a:r>
           </a:p>
         </p:txBody>
       </p:sp>

--- a/docs/werbung/HiveVoice.pptx
+++ b/docs/werbung/HiveVoice.pptx
@@ -7,7 +7,8 @@
   <p:sldIdLst>
     <p:sldId id="256" r:id="rId2"/>
     <p:sldId id="257" r:id="rId3"/>
-    <p:sldId id="258" r:id="rId4"/>
+    <p:sldId id="271" r:id="rId22"/>
+    <p:sldId id="272" r:id="rId23"/>
     <p:sldId id="259" r:id="rId5"/>
     <p:sldId id="260" r:id="rId6"/>
     <p:sldId id="261" r:id="rId7"/>
@@ -16,8 +17,10 @@
     <p:sldId id="264" r:id="rId10"/>
     <p:sldId id="265" r:id="rId11"/>
     <p:sldId id="266" r:id="rId12"/>
+    <p:sldId id="273" r:id="rId24"/>
     <p:sldId id="267" r:id="rId13"/>
     <p:sldId id="268" r:id="rId14"/>
+    <p:sldId id="274" r:id="rId25"/>
     <p:sldId id="269" r:id="rId15"/>
     <p:sldId id="270" r:id="rId16"/>
   </p:sldIdLst>
@@ -559,10 +562,8 @@
           <a:lstStyle/>
           <a:p>
             <a:r>
-              <a:rPr lang="en-US" dirty="0"/>
-              <a:t>HiveVoice ist ein soziales Netzwerk für Engagement vor Ort: Menschen bieten an, was sie können, fragen an, was ihnen fehlt, gründen Gruppen und stellen Forderungen an die zuständige Stelle. Ohne Werbung, ohne Algorithmus, der Lautstärke belohnt.</a:t>
-            </a:r>
-            <a:endParaRPr lang="en-US" dirty="0"/>
+              <a:t>Stellt euch vor, ihr zieht nach München, braucht ein Zimmer und kennt niemanden. Oder ihr seid 72 und es ist seit Monaten still in der Wohnung. Was fehlt, ist selten guter Wille. Es fehlt ein Ort, an dem sich die richtigen Menschen finden. Das ist hivevoice.</a:t>
+            </a:r>
           </a:p>
         </p:txBody>
       </p:sp>
@@ -647,10 +648,8 @@
           <a:lstStyle/>
           <a:p>
             <a:r>
-              <a:rPr lang="en-US" dirty="0"/>
-              <a:t/>
-            </a:r>
-            <a:endParaRPr lang="en-US" dirty="0"/>
+              <a:t>Auch Bürger und Verwaltung ergänzen sich. Lena will einen sicheren Radweg und eine echte Antwort. Sabine im Baureferat bekommt Anliegen über fünf Kanäle. Mit hivevoice kommt die Initiative gebündelt an, mit Argumenten beider Seiten und Abstimmung. Sabine antwortet öffentlich, innerhalb von sechs Wochen.</a:t>
+            </a:r>
           </a:p>
         </p:txBody>
       </p:sp>
@@ -735,10 +734,8 @@
           <a:lstStyle/>
           <a:p>
             <a:r>
-              <a:rPr lang="en-US" dirty="0"/>
-              <a:t/>
-            </a:r>
-            <a:endParaRPr lang="en-US" dirty="0"/>
+              <a:t>Clara rettet jeden Abend Lebensmittel, ihr fehlen ein Ort und verlässliche Leute. Das Wohnprojekt der Familie Berger hat einen Gemeinschaftsraum, der oft leer steht. Jetzt steht dort der Kühlschrank, die Nachbarschaft holt ab, und aus einem Problem wird ein Treffpunkt.</a:t>
+            </a:r>
           </a:p>
         </p:txBody>
       </p:sp>
@@ -823,10 +820,8 @@
           <a:lstStyle/>
           <a:p>
             <a:r>
-              <a:rPr lang="en-US" dirty="0"/>
-              <a:t/>
-            </a:r>
-            <a:endParaRPr lang="en-US" dirty="0"/>
+              <a:t>Was unterscheidet uns? Soziale Medien leben von Aufmerksamkeit, Chat-Gruppen vom Neuesten, Kleinanzeigen vom Geld. Bei uns steht oben, was beide Seiten überzeugt. Entscheidungen sind geheim und verbindlich, Zuständige müssen antworten, und der Code ist offen.</a:t>
+            </a:r>
           </a:p>
         </p:txBody>
       </p:sp>
@@ -911,10 +906,8 @@
           <a:lstStyle/>
           <a:p>
             <a:r>
-              <a:rPr lang="en-US" dirty="0"/>
-              <a:t/>
-            </a:r>
-            <a:endParaRPr lang="en-US" dirty="0"/>
+              <a:t>Dafür stehen wir mit vier Zahlen: null Tracking, eine Person, ein Konto, eine Stimme, sechs Wochen Antwortfrist und hundert Prozent offener Code.</a:t>
+            </a:r>
           </a:p>
         </p:txBody>
       </p:sp>
@@ -999,10 +992,8 @@
           <a:lstStyle/>
           <a:p>
             <a:r>
-              <a:rPr lang="en-US" dirty="0"/>
-              <a:t/>
-            </a:r>
-            <a:endParaRPr lang="en-US" dirty="0"/>
+              <a:t>Und wir denken langfristig. Jede Abhängigkeit wird austauschbar, Vereine und Kommunen können selbst betreiben, mit Online-Ausweis anmelden, Instanzen verbinden sich über ActivityPub, Chats werden Ende-zu-Ende verschlüsselt. Damit hivevoice niemandem gehört, sondern allen.</a:t>
+            </a:r>
           </a:p>
         </p:txBody>
       </p:sp>
@@ -1087,10 +1078,8 @@
           <a:lstStyle/>
           <a:p>
             <a:r>
-              <a:rPr lang="en-US" dirty="0"/>
-              <a:t/>
-            </a:r>
-            <a:endParaRPr lang="en-US" dirty="0"/>
+              <a:t>Was wir suchen: Förderung für den Aufbau und für Barrierefreiheit, eine Pilot-Kommune oder einen Bezirk, der mit uns startet, und Vereine und Initiativen als erste Gruppen. Probiert es aus unter hive-voice.vercel.app. Danke.</a:t>
+            </a:r>
           </a:p>
         </p:txBody>
       </p:sp>
@@ -1123,6 +1112,286 @@
         <p14:creationId xmlns:p14="http://schemas.microsoft.com/office/powerpoint/2010/main" val="1024086991"/>
       </p:ext>
     </p:extLst>
+  </p:cSld>
+  <p:clrMapOvr>
+    <a:masterClrMapping/>
+  </p:clrMapOvr>
+</p:notes>
+</file>
+
+<file path=ppt/notesSlides/notesSlide16.xml><?xml version="1.0" encoding="utf-8"?>
+<p:notes xmlns:a="http://schemas.openxmlformats.org/drawingml/2006/main" xmlns:p="http://schemas.openxmlformats.org/presentationml/2006/main" xmlns:r="http://schemas.openxmlformats.org/officeDocument/2006/relationships">
+  <p:cSld>
+    <p:spTree>
+      <p:nvGrpSpPr>
+        <p:cNvPr id="1" name=""/>
+        <p:cNvGrpSpPr/>
+        <p:nvPr/>
+      </p:nvGrpSpPr>
+      <p:grpSpPr>
+        <a:xfrm>
+          <a:off x="0" y="0"/>
+          <a:ext cx="0" cy="0"/>
+          <a:chOff x="0" y="0"/>
+          <a:chExt cx="0" cy="0"/>
+        </a:xfrm>
+      </p:grpSpPr>
+      <p:sp>
+        <p:nvSpPr>
+          <p:cNvPr id="2" name="Slide Image Placeholder 1"/>
+          <p:cNvSpPr>
+            <a:spLocks noGrp="1"/>
+          </p:cNvSpPr>
+          <p:nvPr>
+            <p:ph type="sldImg" idx="2"/>
+          </p:nvPr>
+        </p:nvSpPr>
+        <p:spPr/>
+      </p:sp>
+      <p:sp>
+        <p:nvSpPr>
+          <p:cNvPr id="3" name="Notes Placeholder 2"/>
+          <p:cNvSpPr>
+            <a:spLocks noGrp="1"/>
+          </p:cNvSpPr>
+          <p:nvPr>
+            <p:ph type="body" idx="3" sz="quarter"/>
+          </p:nvPr>
+        </p:nvSpPr>
+        <p:spPr/>
+        <p:txBody>
+          <a:bodyPr/>
+          <a:lstStyle/>
+          <a:p>
+            <a:r>
+              <a:t>Drei Zahlen, drei Ebenen. In München kostet eine neu angebotene Wohnung über 23 Euro pro Quadratmeter, fast 9 Euro mehr als im Bundesschnitt. In Deutschland fühlt sich etwa jede neunte Person häufig einsam. Und in der EU landen pro Kopf 130 Kilo Lebensmittel im Abfall. Zimmer, Zeit, Essen: das alles ist da. Es findet nur nicht zueinander.</a:t>
+            </a:r>
+          </a:p>
+        </p:txBody>
+      </p:sp>
+      <p:sp>
+        <p:nvSpPr>
+          <p:cNvPr id="4" name="Slide Number Placeholder 3"/>
+          <p:cNvSpPr>
+            <a:spLocks noGrp="1"/>
+          </p:cNvSpPr>
+          <p:nvPr>
+            <p:ph type="sldNum" idx="5" sz="quarter"/>
+          </p:nvPr>
+        </p:nvSpPr>
+        <p:spPr/>
+      </p:sp>
+    </p:spTree>
+  </p:cSld>
+  <p:clrMapOvr>
+    <a:masterClrMapping/>
+  </p:clrMapOvr>
+</p:notes>
+</file>
+
+<file path=ppt/notesSlides/notesSlide17.xml><?xml version="1.0" encoding="utf-8"?>
+<p:notes xmlns:a="http://schemas.openxmlformats.org/drawingml/2006/main" xmlns:p="http://schemas.openxmlformats.org/presentationml/2006/main" xmlns:r="http://schemas.openxmlformats.org/officeDocument/2006/relationships">
+  <p:cSld>
+    <p:spTree>
+      <p:nvGrpSpPr>
+        <p:cNvPr id="1" name=""/>
+        <p:cNvGrpSpPr/>
+        <p:nvPr/>
+      </p:nvGrpSpPr>
+      <p:grpSpPr>
+        <a:xfrm>
+          <a:off x="0" y="0"/>
+          <a:ext cx="0" cy="0"/>
+          <a:chOff x="0" y="0"/>
+          <a:chExt cx="0" cy="0"/>
+        </a:xfrm>
+      </p:grpSpPr>
+      <p:sp>
+        <p:nvSpPr>
+          <p:cNvPr id="2" name="Slide Image Placeholder 1"/>
+          <p:cNvSpPr>
+            <a:spLocks noGrp="1"/>
+          </p:cNvSpPr>
+          <p:nvPr>
+            <p:ph type="sldImg" idx="2"/>
+          </p:nvPr>
+        </p:nvSpPr>
+        <p:spPr/>
+      </p:sp>
+      <p:sp>
+        <p:nvSpPr>
+          <p:cNvPr id="3" name="Notes Placeholder 2"/>
+          <p:cNvSpPr>
+            <a:spLocks noGrp="1"/>
+          </p:cNvSpPr>
+          <p:nvPr>
+            <p:ph type="body" idx="3" sz="quarter"/>
+          </p:nvPr>
+        </p:nvSpPr>
+        <p:spPr/>
+        <p:txBody>
+          <a:bodyPr/>
+          <a:lstStyle/>
+          <a:p>
+            <a:r>
+              <a:t>Unsere Idee ist einfach: Frag an, was dir fehlt. Biete, was du entbehren kannst. hivevoice findet die passenden Menschen in deiner Nähe. Wer dasselbe will, verbindet sich zu einer Gruppe mit Zielen. Und wer etwas verändern will, richtet eine Forderung an die zuständige Stelle und bekommt eine Antwort.</a:t>
+            </a:r>
+          </a:p>
+        </p:txBody>
+      </p:sp>
+      <p:sp>
+        <p:nvSpPr>
+          <p:cNvPr id="4" name="Slide Number Placeholder 3"/>
+          <p:cNvSpPr>
+            <a:spLocks noGrp="1"/>
+          </p:cNvSpPr>
+          <p:nvPr>
+            <p:ph type="sldNum" idx="5" sz="quarter"/>
+          </p:nvPr>
+        </p:nvSpPr>
+        <p:spPr/>
+      </p:sp>
+    </p:spTree>
+  </p:cSld>
+  <p:clrMapOvr>
+    <a:masterClrMapping/>
+  </p:clrMapOvr>
+</p:notes>
+</file>
+
+<file path=ppt/notesSlides/notesSlide18.xml><?xml version="1.0" encoding="utf-8"?>
+<p:notes xmlns:a="http://schemas.openxmlformats.org/drawingml/2006/main" xmlns:p="http://schemas.openxmlformats.org/presentationml/2006/main" xmlns:r="http://schemas.openxmlformats.org/officeDocument/2006/relationships">
+  <p:cSld>
+    <p:spTree>
+      <p:nvGrpSpPr>
+        <p:cNvPr id="1" name=""/>
+        <p:cNvGrpSpPr/>
+        <p:nvPr/>
+      </p:nvGrpSpPr>
+      <p:grpSpPr>
+        <a:xfrm>
+          <a:off x="0" y="0"/>
+          <a:ext cx="0" cy="0"/>
+          <a:chOff x="0" y="0"/>
+          <a:chExt cx="0" cy="0"/>
+        </a:xfrm>
+      </p:grpSpPr>
+      <p:sp>
+        <p:nvSpPr>
+          <p:cNvPr id="2" name="Slide Image Placeholder 1"/>
+          <p:cNvSpPr>
+            <a:spLocks noGrp="1"/>
+          </p:cNvSpPr>
+          <p:nvPr>
+            <p:ph type="sldImg" idx="2"/>
+          </p:nvPr>
+        </p:nvSpPr>
+        <p:spPr/>
+      </p:sp>
+      <p:sp>
+        <p:nvSpPr>
+          <p:cNvPr id="3" name="Notes Placeholder 2"/>
+          <p:cNvSpPr>
+            <a:spLocks noGrp="1"/>
+          </p:cNvSpPr>
+          <p:nvPr>
+            <p:ph type="body" idx="3" sz="quarter"/>
+          </p:nvPr>
+        </p:nvSpPr>
+        <p:spPr/>
+        <p:txBody>
+          <a:bodyPr/>
+          <a:lstStyle/>
+          <a:p>
+            <a:r>
+              <a:t>So sieht das aus, live und heute schon nutzbar. Links eine Initiative für den Radweg, mit Phasen bis zur Antwort. In der Mitte der Marktplatz mit Angeboten und Gesuchen. Rechts die Gruppen im Viertel.</a:t>
+            </a:r>
+          </a:p>
+        </p:txBody>
+      </p:sp>
+      <p:sp>
+        <p:nvSpPr>
+          <p:cNvPr id="4" name="Slide Number Placeholder 3"/>
+          <p:cNvSpPr>
+            <a:spLocks noGrp="1"/>
+          </p:cNvSpPr>
+          <p:nvPr>
+            <p:ph type="sldNum" idx="5" sz="quarter"/>
+          </p:nvPr>
+        </p:nvSpPr>
+        <p:spPr/>
+      </p:sp>
+    </p:spTree>
+  </p:cSld>
+  <p:clrMapOvr>
+    <a:masterClrMapping/>
+  </p:clrMapOvr>
+</p:notes>
+</file>
+
+<file path=ppt/notesSlides/notesSlide19.xml><?xml version="1.0" encoding="utf-8"?>
+<p:notes xmlns:a="http://schemas.openxmlformats.org/drawingml/2006/main" xmlns:p="http://schemas.openxmlformats.org/presentationml/2006/main" xmlns:r="http://schemas.openxmlformats.org/officeDocument/2006/relationships">
+  <p:cSld>
+    <p:spTree>
+      <p:nvGrpSpPr>
+        <p:cNvPr id="1" name=""/>
+        <p:cNvGrpSpPr/>
+        <p:nvPr/>
+      </p:nvGrpSpPr>
+      <p:grpSpPr>
+        <a:xfrm>
+          <a:off x="0" y="0"/>
+          <a:ext cx="0" cy="0"/>
+          <a:chOff x="0" y="0"/>
+          <a:chExt cx="0" cy="0"/>
+        </a:xfrm>
+      </p:grpSpPr>
+      <p:sp>
+        <p:nvSpPr>
+          <p:cNvPr id="2" name="Slide Image Placeholder 1"/>
+          <p:cNvSpPr>
+            <a:spLocks noGrp="1"/>
+          </p:cNvSpPr>
+          <p:nvPr>
+            <p:ph type="sldImg" idx="2"/>
+          </p:nvPr>
+        </p:nvSpPr>
+        <p:spPr/>
+      </p:sp>
+      <p:sp>
+        <p:nvSpPr>
+          <p:cNvPr id="3" name="Notes Placeholder 2"/>
+          <p:cNvSpPr>
+            <a:spLocks noGrp="1"/>
+          </p:cNvSpPr>
+          <p:nvPr>
+            <p:ph type="body" idx="3" sz="quarter"/>
+          </p:nvPr>
+        </p:nvSpPr>
+        <p:spPr/>
+        <p:txBody>
+          <a:bodyPr/>
+          <a:lstStyle/>
+          <a:p>
+            <a:r>
+              <a:t>hivevoice ist kein Geldprojekt, sondern ein Gemeinwohlprojekt. Die Nutzung ist frei. Wer mehr Speicher braucht, bindet seinen eigenen an oder bucht dazu. Und lokale Dienstleister können ihre Angebote hervorheben, klar gekennzeichnet und ohne Tracking. Das soll den Betrieb tragen. Für den Aufbau suchen wir Förderung.</a:t>
+            </a:r>
+          </a:p>
+        </p:txBody>
+      </p:sp>
+      <p:sp>
+        <p:nvSpPr>
+          <p:cNvPr id="4" name="Slide Number Placeholder 3"/>
+          <p:cNvSpPr>
+            <a:spLocks noGrp="1"/>
+          </p:cNvSpPr>
+          <p:nvPr>
+            <p:ph type="sldNum" idx="5" sz="quarter"/>
+          </p:nvPr>
+        </p:nvSpPr>
+        <p:spPr/>
+      </p:sp>
+    </p:spTree>
   </p:cSld>
   <p:clrMapOvr>
     <a:masterClrMapping/>
@@ -1175,10 +1444,8 @@
           <a:lstStyle/>
           <a:p>
             <a:r>
-              <a:rPr lang="en-US" dirty="0"/>
-              <a:t/>
-            </a:r>
-            <a:endParaRPr lang="en-US" dirty="0"/>
+              <a:t>Heute zerfällt Engagement in viele Apps: Gruppen-Chats, Kleinanzeigen, Petitionsseiten, Mail-Verteiler, der Zettel im Treppenhaus. Und die großen Plattformen belohnen, was Empörung auslöst, nicht was hilft. Wer eine Forderung stellt, bekommt selten eine Antwort.</a:t>
+            </a:r>
           </a:p>
         </p:txBody>
       </p:sp>
@@ -1200,94 +1467,6 @@
             <a:fld id="{F7021451-1387-4CA6-816F-3879F97B5CBC}" type="slidenum">
               <a:rPr lang="en-US"/>
               <a:t>2</a:t>
-            </a:fld>
-            <a:endParaRPr lang="en-US"/>
-          </a:p>
-        </p:txBody>
-      </p:sp>
-    </p:spTree>
-    <p:extLst>
-      <p:ext uri="{BB962C8B-B14F-4D97-AF65-F5344CB8AC3E}">
-        <p14:creationId xmlns:p14="http://schemas.microsoft.com/office/powerpoint/2010/main" val="1024086991"/>
-      </p:ext>
-    </p:extLst>
-  </p:cSld>
-  <p:clrMapOvr>
-    <a:masterClrMapping/>
-  </p:clrMapOvr>
-</p:notes>
-</file>
-
-<file path=ppt/notesSlides/notesSlide3.xml><?xml version="1.0" encoding="utf-8"?>
-<p:notes xmlns:a="http://schemas.openxmlformats.org/drawingml/2006/main" xmlns:r="http://schemas.openxmlformats.org/officeDocument/2006/relationships" xmlns:p="http://schemas.openxmlformats.org/presentationml/2006/main">
-  <p:cSld>
-    <p:spTree>
-      <p:nvGrpSpPr>
-        <p:cNvPr id="1" name=""/>
-        <p:cNvGrpSpPr/>
-        <p:nvPr/>
-      </p:nvGrpSpPr>
-      <p:grpSpPr>
-        <a:xfrm>
-          <a:off x="0" y="0"/>
-          <a:ext cx="0" cy="0"/>
-          <a:chOff x="0" y="0"/>
-          <a:chExt cx="0" cy="0"/>
-        </a:xfrm>
-      </p:grpSpPr>
-      <p:sp>
-        <p:nvSpPr>
-          <p:cNvPr id="2" name="Slide Image Placeholder 1"/>
-          <p:cNvSpPr>
-            <a:spLocks noGrp="1" noRot="1" noChangeAspect="1"/>
-          </p:cNvSpPr>
-          <p:nvPr>
-            <p:ph type="sldImg"/>
-          </p:nvPr>
-        </p:nvSpPr>
-        <p:spPr/>
-      </p:sp>
-      <p:sp>
-        <p:nvSpPr>
-          <p:cNvPr id="3" name="Notes Placeholder 2"/>
-          <p:cNvSpPr>
-            <a:spLocks noGrp="1"/>
-          </p:cNvSpPr>
-          <p:nvPr>
-            <p:ph type="body" idx="1"/>
-          </p:nvPr>
-        </p:nvSpPr>
-        <p:spPr/>
-        <p:txBody>
-          <a:bodyPr/>
-          <a:lstStyle/>
-          <a:p>
-            <a:r>
-              <a:rPr lang="en-US" dirty="0"/>
-              <a:t/>
-            </a:r>
-            <a:endParaRPr lang="en-US" dirty="0"/>
-          </a:p>
-        </p:txBody>
-      </p:sp>
-      <p:sp>
-        <p:nvSpPr>
-          <p:cNvPr id="4" name="Slide Number Placeholder 3"/>
-          <p:cNvSpPr>
-            <a:spLocks noGrp="1"/>
-          </p:cNvSpPr>
-          <p:nvPr>
-            <p:ph type="sldNum" sz="quarter" idx="10"/>
-          </p:nvPr>
-        </p:nvSpPr>
-        <p:spPr/>
-        <p:txBody>
-          <a:bodyPr/>
-          <a:lstStyle/>
-          <a:p>
-            <a:fld id="{F7021451-1387-4CA6-816F-3879F97B5CBC}" type="slidenum">
-              <a:rPr lang="en-US"/>
-              <a:t>3</a:t>
             </a:fld>
             <a:endParaRPr lang="en-US"/>
           </a:p>
@@ -1351,10 +1530,8 @@
           <a:lstStyle/>
           <a:p>
             <a:r>
-              <a:rPr lang="en-US" dirty="0"/>
-              <a:t/>
-            </a:r>
-            <a:endParaRPr lang="en-US" dirty="0"/>
+              <a:t>Dafür gibt es vier Bausteine in einer App. Anliegen: bieten und suchen in einem Formular, von Hilfe über Wohnen bis Mitfahrt. Gruppen: mit Zielen, Aufgaben und Abstimmungen. Initiativen: Forderungen mit Antwortfrist. Und Verbinden: Chats und der Marktplatz vor Ort.</a:t>
+            </a:r>
           </a:p>
         </p:txBody>
       </p:sp>
@@ -1439,10 +1616,8 @@
           <a:lstStyle/>
           <a:p>
             <a:r>
-              <a:rPr lang="en-US" dirty="0"/>
-              <a:t/>
-            </a:r>
-            <a:endParaRPr lang="en-US" dirty="0"/>
+              <a:t>Das Herzstück ist das Matching. Ein Angebot und ein Gesuch finden sich, und beide Seiten sehen, warum: gleiche Schlagworte, gleiche Kategorie, derselbe Ort, ähnliche Bedeutung. Die KI dafür läuft direkt in unserer Datenbank, kein Text geht an einen fremden KI-Dienst.</a:t>
+            </a:r>
           </a:p>
         </p:txBody>
       </p:sp>
@@ -1527,10 +1702,8 @@
           <a:lstStyle/>
           <a:p>
             <a:r>
-              <a:rPr lang="en-US" dirty="0"/>
-              <a:t/>
-            </a:r>
-            <a:endParaRPr lang="en-US" dirty="0"/>
+              <a:t>Wie das im Alltag aussieht, zeige ich an fünf Paaren. Immer zwei Menschen, die sehr verschieden sind und genau deshalb zusammenpassen.</a:t>
+            </a:r>
           </a:p>
         </p:txBody>
       </p:sp>
@@ -1615,10 +1788,8 @@
           <a:lstStyle/>
           <a:p>
             <a:r>
-              <a:rPr lang="en-US" dirty="0"/>
-              <a:t/>
-            </a:r>
-            <a:endParaRPr lang="en-US" dirty="0"/>
+              <a:t>Fatma ist alleinerziehend und arbeitet abends. Erika ist 72 und allein. Fatma sucht Betreuung, Erika sucht Gesellschaft. hivevoice zeigt beiden den Treffer als Tausch in beide Richtungen: Erika passt dienstags auf, sonntags essen sie zusammen, und Fatma richtet ihr das Smartphone ein.</a:t>
+            </a:r>
           </a:p>
         </p:txBody>
       </p:sp>
@@ -1703,10 +1874,8 @@
           <a:lstStyle/>
           <a:p>
             <a:r>
-              <a:rPr lang="en-US" dirty="0"/>
-              <a:t/>
-            </a:r>
-            <a:endParaRPr lang="en-US" dirty="0"/>
+              <a:t>Jonas ist 19 und findet in München kein Zimmer, das er sich leisten kann. Josef ist 81, hat ein Haus mit leeren Zimmern und schafft den Garten nicht mehr. Wohnen gegen Hilfe: Jonas zieht ein und packt mit an. Kein Makler, keine Anzeige, die im Rauschen untergeht.</a:t>
+            </a:r>
           </a:p>
         </p:txBody>
       </p:sp>
@@ -1791,10 +1960,8 @@
           <a:lstStyle/>
           <a:p>
             <a:r>
-              <a:rPr lang="en-US" dirty="0"/>
-              <a:t/>
-            </a:r>
-            <a:endParaRPr lang="en-US" dirty="0"/>
+              <a:t>Thomas leitet einen Sportverein und plant den Umbau des Vereinsheims. Ahmed ist Bauingenieur aus Syrien, sein Abschluss wird gerade anerkannt. Ahmed bringt sein Wissen ein, Thomas öffnet ihm Türen zu Betrieben im Ort. Gefunden haben sie sich über das, was sie können, nicht über Follower.</a:t>
+            </a:r>
           </a:p>
         </p:txBody>
       </p:sp>
@@ -3198,7 +3365,7 @@
       </p:sp>
       <p:sp>
         <p:nvSpPr>
-          <p:cNvPr id="4" name="logo-0"/>
+          <p:cNvPr id="4" name="!!logo-0"/>
           <p:cNvSpPr/>
           <p:nvPr/>
         </p:nvSpPr>
@@ -3269,7 +3436,7 @@
       </p:sp>
       <p:sp>
         <p:nvSpPr>
-          <p:cNvPr id="5" name="logo-1"/>
+          <p:cNvPr id="5" name="!!logo-1"/>
           <p:cNvSpPr/>
           <p:nvPr/>
         </p:nvSpPr>
@@ -3340,7 +3507,7 @@
       </p:sp>
       <p:sp>
         <p:nvSpPr>
-          <p:cNvPr id="6" name="logo-2"/>
+          <p:cNvPr id="6" name="!!logo-2"/>
           <p:cNvSpPr/>
           <p:nvPr/>
         </p:nvSpPr>
@@ -3411,7 +3578,7 @@
       </p:sp>
       <p:sp>
         <p:nvSpPr>
-          <p:cNvPr id="7" name="logo-3"/>
+          <p:cNvPr id="7" name="!!logo-3"/>
           <p:cNvSpPr/>
           <p:nvPr/>
         </p:nvSpPr>
@@ -3482,7 +3649,7 @@
       </p:sp>
       <p:sp>
         <p:nvSpPr>
-          <p:cNvPr id="8" name="logo-4"/>
+          <p:cNvPr id="8" name="!!logo-4"/>
           <p:cNvSpPr/>
           <p:nvPr/>
         </p:nvSpPr>
@@ -3553,7 +3720,7 @@
       </p:sp>
       <p:sp>
         <p:nvSpPr>
-          <p:cNvPr id="9" name="logo-5"/>
+          <p:cNvPr id="9" name="!!logo-5"/>
           <p:cNvSpPr/>
           <p:nvPr/>
         </p:nvSpPr>
@@ -3624,7 +3791,7 @@
       </p:sp>
       <p:sp>
         <p:nvSpPr>
-          <p:cNvPr id="10" name="logo-center"/>
+          <p:cNvPr id="10" name="!!logo-6"/>
           <p:cNvSpPr/>
           <p:nvPr/>
         </p:nvSpPr>
@@ -3698,10 +3865,692 @@
   <p:clrMapOvr>
     <a:masterClrMapping/>
   </p:clrMapOvr>
+  <mc:AlternateContent xmlns:mc="http://schemas.openxmlformats.org/markup-compatibility/2006">
+    <mc:Choice xmlns:p159="http://schemas.microsoft.com/office/powerpoint/2015/09/main" Requires="p159">
+      <p:transition xmlns:p14="http://schemas.microsoft.com/office/powerpoint/2010/main" spd="slow" p14:dur="900">
+        <p159:morph option="byObject"/>
+      </p:transition>
+    </mc:Choice>
+    <mc:Fallback>
+      <p:transition spd="slow">
+        <p:fade/>
+      </p:transition>
+    </mc:Fallback>
+  </mc:AlternateContent>
 </p:sld>
 </file>
 
 <file path=ppt/slides/slide10.xml><?xml version="1.0" encoding="utf-8"?>
+<p:sld xmlns:a="http://schemas.openxmlformats.org/drawingml/2006/main" xmlns:r="http://schemas.openxmlformats.org/officeDocument/2006/relationships" xmlns:p="http://schemas.openxmlformats.org/presentationml/2006/main">
+  <p:cSld name="Slide 9">
+    <p:spTree>
+      <p:nvGrpSpPr>
+        <p:cNvPr id="1" name=""/>
+        <p:cNvGrpSpPr/>
+        <p:nvPr/>
+      </p:nvGrpSpPr>
+      <p:grpSpPr>
+        <a:xfrm>
+          <a:off x="0" y="0"/>
+          <a:ext cx="0" cy="0"/>
+          <a:chOff x="0" y="0"/>
+          <a:chExt cx="0" cy="0"/>
+        </a:xfrm>
+      </p:grpSpPr>
+      <p:sp>
+        <p:nvSpPr>
+          <p:cNvPr id="2" name="Text 0"/>
+          <p:cNvSpPr/>
+          <p:nvPr>
+            <p:ph idx="100" type="title" hasCustomPrompt="1"/>
+          </p:nvPr>
+        </p:nvSpPr>
+        <p:spPr>
+          <a:xfrm>
+            <a:off x="457200" y="320040"/>
+            <a:ext cx="8229600" cy="685800"/>
+          </a:xfrm>
+          <a:prstGeom prst="rect">
+            <a:avLst/>
+          </a:prstGeom>
+          <a:noFill/>
+          <a:ln/>
+        </p:spPr>
+        <p:txBody>
+          <a:bodyPr wrap="square" lIns="0" tIns="0" rIns="0" bIns="0" rtlCol="0" anchor="t"/>
+          <a:lstStyle/>
+          <a:p>
+            <a:pPr algn="l" indent="0" marL="0">
+              <a:buNone/>
+            </a:pPr>
+            <a:r>
+              <a:rPr lang="en-US" sz="3000" b="1" dirty="0">
+                <a:solidFill>
+                  <a:schemeClr val="tx1"/>
+                </a:solidFill>
+              </a:rPr>
+              <a:t>Thomas und Ahmed</a:t>
+            </a:r>
+            <a:endParaRPr lang="en-US" sz="3000" dirty="0"/>
+          </a:p>
+        </p:txBody>
+      </p:sp>
+      <p:sp>
+        <p:nvSpPr>
+          <p:cNvPr id="25" name="Slide Number Placeholder 0"/>
+          <p:cNvSpPr>
+            <a:spLocks noGrp="1"/>
+          </p:cNvSpPr>
+          <p:nvPr>
+            <p:ph type="sldNum" sz="quarter" idx="4294967295"/>
+          </p:nvPr>
+        </p:nvSpPr>
+        <p:spPr>
+          <a:xfrm>
+            <a:off x="8412480" y="4754880"/>
+            <a:ext cx="457200" cy="274320"/>
+          </a:xfrm>
+          <a:prstGeom prst="rect">
+            <a:avLst/>
+          </a:prstGeom>
+          <a:extLst>
+            <a:ext uri="{C572A759-6A51-4108-AA02-DFA0A04FC94B}">
+              <ma14:wrappingTextBoxFlag xmlns:ma14="http://schemas.microsoft.com/office/mac/drawingml/2011/main" val="0"/>
+            </a:ext>
+          </a:extLst>
+        </p:spPr>
+        <p:txBody>
+          <a:bodyPr/>
+          <a:lstStyle>
+            <a:lvl1pPr>
+              <a:defRPr sz="1000">
+                <a:solidFill>
+                  <a:schemeClr val="tx2"/>
+                </a:solidFill>
+              </a:defRPr>
+            </a:lvl1pPr>
+          </a:lstStyle>
+          <a:p>
+            <a:pPr algn="l"/>
+            <a:fld id="{F7021451-1387-4CA6-816F-3879F97B5CBC}" type="slidenum">
+              <a:rPr b="0" lang="en-US"/>
+              <a:t>9</a:t>
+            </a:fld>
+            <a:endParaRPr lang="en-US"/>
+          </a:p>
+        </p:txBody>
+      </p:sp>
+      <p:sp>
+        <p:nvSpPr>
+          <p:cNvPr id="26" name="!!card-a"/>
+          <p:cNvSpPr/>
+          <p:nvPr/>
+        </p:nvSpPr>
+        <p:spPr>
+          <a:xfrm>
+            <a:off x="457200" y="1193800"/>
+            <a:ext cx="3683000" cy="3327400"/>
+          </a:xfrm>
+          <a:prstGeom prst="rect">
+            <a:avLst/>
+          </a:prstGeom>
+          <a:solidFill>
+            <a:schemeClr val="bg1"/>
+          </a:solidFill>
+          <a:ln w="9525">
+            <a:solidFill>
+              <a:schemeClr val="accent6"/>
+            </a:solidFill>
+          </a:ln>
+          <a:effectLst/>
+        </p:spPr>
+        <p:style>
+          <a:lnRef idx="1">
+            <a:schemeClr val="accent1"/>
+          </a:lnRef>
+          <a:fillRef idx="3">
+            <a:schemeClr val="accent1"/>
+          </a:fillRef>
+          <a:effectRef idx="2">
+            <a:schemeClr val="accent1"/>
+          </a:effectRef>
+          <a:fontRef idx="minor">
+            <a:schemeClr val="lt1"/>
+          </a:fontRef>
+        </p:style>
+        <p:txBody>
+          <a:bodyPr rtlCol="0" anchor="ctr"/>
+          <a:lstStyle/>
+          <a:p>
+            <a:pPr algn="ctr"/>
+          </a:p>
+        </p:txBody>
+      </p:sp>
+      <p:sp>
+        <p:nvSpPr>
+          <p:cNvPr id="27" name="!!dot-a"/>
+          <p:cNvSpPr/>
+          <p:nvPr/>
+        </p:nvSpPr>
+        <p:spPr>
+          <a:xfrm>
+            <a:off x="711200" y="1422400"/>
+            <a:ext cx="635000" cy="635000"/>
+          </a:xfrm>
+          <a:prstGeom prst="ellipse">
+            <a:avLst/>
+          </a:prstGeom>
+          <a:solidFill>
+            <a:schemeClr val="tx1"/>
+          </a:solidFill>
+          <a:ln>
+            <a:noFill/>
+          </a:ln>
+          <a:effectLst/>
+        </p:spPr>
+        <p:style>
+          <a:lnRef idx="1">
+            <a:schemeClr val="accent1"/>
+          </a:lnRef>
+          <a:fillRef idx="3">
+            <a:schemeClr val="accent1"/>
+          </a:fillRef>
+          <a:effectRef idx="2">
+            <a:schemeClr val="accent1"/>
+          </a:effectRef>
+          <a:fontRef idx="minor">
+            <a:schemeClr val="lt1"/>
+          </a:fontRef>
+        </p:style>
+        <p:txBody>
+          <a:bodyPr rtlCol="0" anchor="ctr"/>
+          <a:lstStyle/>
+          <a:p>
+            <a:pPr algn="ctr"/>
+          </a:p>
+        </p:txBody>
+      </p:sp>
+      <p:pic>
+        <p:nvPicPr>
+          <p:cNvPr id="28" name="icon-a" descr="image.png"/>
+          <p:cNvPicPr>
+            <a:picLocks noChangeAspect="1"/>
+          </p:cNvPicPr>
+          <p:nvPr/>
+        </p:nvPicPr>
+        <p:blipFill>
+          <a:blip r:embed="rId5"/>
+          <a:stretch>
+            <a:fillRect/>
+          </a:stretch>
+        </p:blipFill>
+        <p:spPr>
+          <a:xfrm>
+            <a:off x="850900" y="1562100"/>
+            <a:ext cx="355600" cy="355600"/>
+          </a:xfrm>
+          <a:prstGeom prst="rect">
+            <a:avLst/>
+          </a:prstGeom>
+        </p:spPr>
+      </p:pic>
+      <p:sp>
+        <p:nvSpPr>
+          <p:cNvPr id="29" name="name-a"/>
+          <p:cNvSpPr txBox="1"/>
+          <p:nvPr/>
+        </p:nvSpPr>
+        <p:spPr>
+          <a:xfrm>
+            <a:off x="1524000" y="1422400"/>
+            <a:ext cx="2362200" cy="635000"/>
+          </a:xfrm>
+          <a:prstGeom prst="rect">
+            <a:avLst/>
+          </a:prstGeom>
+          <a:noFill/>
+        </p:spPr>
+        <p:txBody>
+          <a:bodyPr wrap="square" anchor="ctr" lIns="0" rIns="0" tIns="0" bIns="0">
+            <a:spAutoFit/>
+          </a:bodyPr>
+          <a:lstStyle/>
+          <a:p>
+            <a:r>
+              <a:rPr sz="1700" b="1">
+                <a:solidFill>
+                  <a:schemeClr val="tx1"/>
+                </a:solidFill>
+              </a:rPr>
+              <a:t>Thomas, 45</a:t>
+            </a:r>
+          </a:p>
+          <a:p>
+            <a:r>
+              <a:rPr sz="1100" b="0">
+                <a:solidFill>
+                  <a:schemeClr val="tx2"/>
+                </a:solidFill>
+              </a:rPr>
+              <a:t>Vorsitzender eines Sportvereins</a:t>
+            </a:r>
+          </a:p>
+        </p:txBody>
+      </p:sp>
+      <p:sp>
+        <p:nvSpPr>
+          <p:cNvPr id="30" name="sucht-a"/>
+          <p:cNvSpPr txBox="1"/>
+          <p:nvPr/>
+        </p:nvSpPr>
+        <p:spPr>
+          <a:xfrm>
+            <a:off x="711200" y="2260600"/>
+            <a:ext cx="3175000" cy="736600"/>
+          </a:xfrm>
+          <a:prstGeom prst="rect">
+            <a:avLst/>
+          </a:prstGeom>
+          <a:noFill/>
+        </p:spPr>
+        <p:txBody>
+          <a:bodyPr wrap="square" anchor="t" lIns="0" rIns="0" tIns="0" bIns="0">
+            <a:spAutoFit/>
+          </a:bodyPr>
+          <a:lstStyle/>
+          <a:p>
+            <a:r>
+              <a:rPr sz="900" b="1">
+                <a:solidFill>
+                  <a:srgbClr val="E2001A"/>
+                </a:solidFill>
+              </a:rPr>
+              <a:t>SUCHT</a:t>
+            </a:r>
+          </a:p>
+          <a:p>
+            <a:pPr>
+              <a:spcBef>
+                <a:spcPts val="200"/>
+              </a:spcBef>
+            </a:pPr>
+            <a:r>
+              <a:rPr sz="1300" b="1">
+                <a:solidFill>
+                  <a:schemeClr val="tx1"/>
+                </a:solidFill>
+              </a:rPr>
+              <a:t>Jemanden, der den Umbau des Vereinsheims fachlich einschätzt</a:t>
+            </a:r>
+          </a:p>
+        </p:txBody>
+      </p:sp>
+      <p:sp>
+        <p:nvSpPr>
+          <p:cNvPr id="31" name="bietet-a"/>
+          <p:cNvSpPr txBox="1"/>
+          <p:nvPr/>
+        </p:nvSpPr>
+        <p:spPr>
+          <a:xfrm>
+            <a:off x="711200" y="3073400"/>
+            <a:ext cx="3175000" cy="736600"/>
+          </a:xfrm>
+          <a:prstGeom prst="rect">
+            <a:avLst/>
+          </a:prstGeom>
+          <a:noFill/>
+        </p:spPr>
+        <p:txBody>
+          <a:bodyPr wrap="square" anchor="t" lIns="0" rIns="0" tIns="0" bIns="0">
+            <a:spAutoFit/>
+          </a:bodyPr>
+          <a:lstStyle/>
+          <a:p>
+            <a:r>
+              <a:rPr sz="900" b="1">
+                <a:solidFill>
+                  <a:srgbClr val="E2001A"/>
+                </a:solidFill>
+              </a:rPr>
+              <a:t>BIETET</a:t>
+            </a:r>
+          </a:p>
+          <a:p>
+            <a:pPr>
+              <a:spcBef>
+                <a:spcPts val="200"/>
+              </a:spcBef>
+            </a:pPr>
+            <a:r>
+              <a:rPr sz="1300" b="0">
+                <a:solidFill>
+                  <a:schemeClr val="tx1"/>
+                </a:solidFill>
+              </a:rPr>
+              <a:t>Kontakte zu Baufirmen im Verein und ein Empfehlungsschreiben</a:t>
+            </a:r>
+          </a:p>
+        </p:txBody>
+      </p:sp>
+      <p:sp>
+        <p:nvSpPr>
+          <p:cNvPr id="32" name="!!card-b"/>
+          <p:cNvSpPr/>
+          <p:nvPr/>
+        </p:nvSpPr>
+        <p:spPr>
+          <a:xfrm>
+            <a:off x="5003800" y="1193800"/>
+            <a:ext cx="3683000" cy="3327400"/>
+          </a:xfrm>
+          <a:prstGeom prst="rect">
+            <a:avLst/>
+          </a:prstGeom>
+          <a:solidFill>
+            <a:schemeClr val="bg1"/>
+          </a:solidFill>
+          <a:ln w="9525">
+            <a:solidFill>
+              <a:schemeClr val="accent6"/>
+            </a:solidFill>
+          </a:ln>
+          <a:effectLst/>
+        </p:spPr>
+        <p:style>
+          <a:lnRef idx="1">
+            <a:schemeClr val="accent1"/>
+          </a:lnRef>
+          <a:fillRef idx="3">
+            <a:schemeClr val="accent1"/>
+          </a:fillRef>
+          <a:effectRef idx="2">
+            <a:schemeClr val="accent1"/>
+          </a:effectRef>
+          <a:fontRef idx="minor">
+            <a:schemeClr val="lt1"/>
+          </a:fontRef>
+        </p:style>
+        <p:txBody>
+          <a:bodyPr rtlCol="0" anchor="ctr"/>
+          <a:lstStyle/>
+          <a:p>
+            <a:pPr algn="ctr"/>
+          </a:p>
+        </p:txBody>
+      </p:sp>
+      <p:sp>
+        <p:nvSpPr>
+          <p:cNvPr id="33" name="!!dot-b"/>
+          <p:cNvSpPr/>
+          <p:nvPr/>
+        </p:nvSpPr>
+        <p:spPr>
+          <a:xfrm>
+            <a:off x="5257800" y="1422400"/>
+            <a:ext cx="635000" cy="635000"/>
+          </a:xfrm>
+          <a:prstGeom prst="ellipse">
+            <a:avLst/>
+          </a:prstGeom>
+          <a:solidFill>
+            <a:schemeClr val="tx1"/>
+          </a:solidFill>
+          <a:ln>
+            <a:noFill/>
+          </a:ln>
+          <a:effectLst/>
+        </p:spPr>
+        <p:style>
+          <a:lnRef idx="1">
+            <a:schemeClr val="accent1"/>
+          </a:lnRef>
+          <a:fillRef idx="3">
+            <a:schemeClr val="accent1"/>
+          </a:fillRef>
+          <a:effectRef idx="2">
+            <a:schemeClr val="accent1"/>
+          </a:effectRef>
+          <a:fontRef idx="minor">
+            <a:schemeClr val="lt1"/>
+          </a:fontRef>
+        </p:style>
+        <p:txBody>
+          <a:bodyPr rtlCol="0" anchor="ctr"/>
+          <a:lstStyle/>
+          <a:p>
+            <a:pPr algn="ctr"/>
+          </a:p>
+        </p:txBody>
+      </p:sp>
+      <p:pic>
+        <p:nvPicPr>
+          <p:cNvPr id="34" name="icon-b" descr="image.png"/>
+          <p:cNvPicPr>
+            <a:picLocks noChangeAspect="1"/>
+          </p:cNvPicPr>
+          <p:nvPr/>
+        </p:nvPicPr>
+        <p:blipFill>
+          <a:blip r:embed="rId2"/>
+          <a:stretch>
+            <a:fillRect/>
+          </a:stretch>
+        </p:blipFill>
+        <p:spPr>
+          <a:xfrm>
+            <a:off x="5397500" y="1562100"/>
+            <a:ext cx="355600" cy="355600"/>
+          </a:xfrm>
+          <a:prstGeom prst="rect">
+            <a:avLst/>
+          </a:prstGeom>
+        </p:spPr>
+      </p:pic>
+      <p:sp>
+        <p:nvSpPr>
+          <p:cNvPr id="35" name="name-b"/>
+          <p:cNvSpPr txBox="1"/>
+          <p:nvPr/>
+        </p:nvSpPr>
+        <p:spPr>
+          <a:xfrm>
+            <a:off x="6070600" y="1422400"/>
+            <a:ext cx="2362200" cy="635000"/>
+          </a:xfrm>
+          <a:prstGeom prst="rect">
+            <a:avLst/>
+          </a:prstGeom>
+          <a:noFill/>
+        </p:spPr>
+        <p:txBody>
+          <a:bodyPr wrap="square" anchor="ctr" lIns="0" rIns="0" tIns="0" bIns="0">
+            <a:spAutoFit/>
+          </a:bodyPr>
+          <a:lstStyle/>
+          <a:p>
+            <a:r>
+              <a:rPr sz="1700" b="1">
+                <a:solidFill>
+                  <a:schemeClr val="tx1"/>
+                </a:solidFill>
+              </a:rPr>
+              <a:t>Ahmed, 38</a:t>
+            </a:r>
+          </a:p>
+          <a:p>
+            <a:r>
+              <a:rPr sz="1100" b="0">
+                <a:solidFill>
+                  <a:schemeClr val="tx2"/>
+                </a:solidFill>
+              </a:rPr>
+              <a:t>Bauingenieur aus Syrien</a:t>
+            </a:r>
+          </a:p>
+        </p:txBody>
+      </p:sp>
+      <p:sp>
+        <p:nvSpPr>
+          <p:cNvPr id="36" name="sucht-b"/>
+          <p:cNvSpPr txBox="1"/>
+          <p:nvPr/>
+        </p:nvSpPr>
+        <p:spPr>
+          <a:xfrm>
+            <a:off x="5257800" y="2260600"/>
+            <a:ext cx="3175000" cy="736600"/>
+          </a:xfrm>
+          <a:prstGeom prst="rect">
+            <a:avLst/>
+          </a:prstGeom>
+          <a:noFill/>
+        </p:spPr>
+        <p:txBody>
+          <a:bodyPr wrap="square" anchor="t" lIns="0" rIns="0" tIns="0" bIns="0">
+            <a:spAutoFit/>
+          </a:bodyPr>
+          <a:lstStyle/>
+          <a:p>
+            <a:r>
+              <a:rPr sz="900" b="1">
+                <a:solidFill>
+                  <a:srgbClr val="E2001A"/>
+                </a:solidFill>
+              </a:rPr>
+              <a:t>SUCHT</a:t>
+            </a:r>
+          </a:p>
+          <a:p>
+            <a:pPr>
+              <a:spcBef>
+                <a:spcPts val="200"/>
+              </a:spcBef>
+            </a:pPr>
+            <a:r>
+              <a:rPr sz="1300" b="1">
+                <a:solidFill>
+                  <a:schemeClr val="tx1"/>
+                </a:solidFill>
+              </a:rPr>
+              <a:t>Kontakte und Referenzen, solange sein Abschluss anerkannt wird</a:t>
+            </a:r>
+          </a:p>
+        </p:txBody>
+      </p:sp>
+      <p:sp>
+        <p:nvSpPr>
+          <p:cNvPr id="37" name="bietet-b"/>
+          <p:cNvSpPr txBox="1"/>
+          <p:nvPr/>
+        </p:nvSpPr>
+        <p:spPr>
+          <a:xfrm>
+            <a:off x="5257800" y="3073400"/>
+            <a:ext cx="3175000" cy="736600"/>
+          </a:xfrm>
+          <a:prstGeom prst="rect">
+            <a:avLst/>
+          </a:prstGeom>
+          <a:noFill/>
+        </p:spPr>
+        <p:txBody>
+          <a:bodyPr wrap="square" anchor="t" lIns="0" rIns="0" tIns="0" bIns="0">
+            <a:spAutoFit/>
+          </a:bodyPr>
+          <a:lstStyle/>
+          <a:p>
+            <a:r>
+              <a:rPr sz="900" b="1">
+                <a:solidFill>
+                  <a:srgbClr val="E2001A"/>
+                </a:solidFill>
+              </a:rPr>
+              <a:t>BIETET</a:t>
+            </a:r>
+          </a:p>
+          <a:p>
+            <a:pPr>
+              <a:spcBef>
+                <a:spcPts val="200"/>
+              </a:spcBef>
+            </a:pPr>
+            <a:r>
+              <a:rPr sz="1300" b="0">
+                <a:solidFill>
+                  <a:schemeClr val="tx1"/>
+                </a:solidFill>
+              </a:rPr>
+              <a:t>Ingenieurwissen: eine erste Einschätzung von Bau und Umbau</a:t>
+            </a:r>
+          </a:p>
+        </p:txBody>
+      </p:sp>
+      <p:sp>
+        <p:nvSpPr>
+          <p:cNvPr id="38" name="!!match"/>
+          <p:cNvSpPr/>
+          <p:nvPr/>
+        </p:nvSpPr>
+        <p:spPr>
+          <a:xfrm>
+            <a:off x="4292600" y="2692400"/>
+            <a:ext cx="558800" cy="330200"/>
+          </a:xfrm>
+          <a:prstGeom prst="leftRightArrow">
+            <a:avLst/>
+          </a:prstGeom>
+          <a:solidFill>
+            <a:srgbClr val="E2001A"/>
+          </a:solidFill>
+          <a:ln>
+            <a:noFill/>
+          </a:ln>
+          <a:effectLst/>
+        </p:spPr>
+        <p:style>
+          <a:lnRef idx="1">
+            <a:schemeClr val="accent1"/>
+          </a:lnRef>
+          <a:fillRef idx="3">
+            <a:schemeClr val="accent1"/>
+          </a:fillRef>
+          <a:effectRef idx="2">
+            <a:schemeClr val="accent1"/>
+          </a:effectRef>
+          <a:fontRef idx="minor">
+            <a:schemeClr val="lt1"/>
+          </a:fontRef>
+        </p:style>
+        <p:txBody>
+          <a:bodyPr rtlCol="0" anchor="ctr"/>
+          <a:lstStyle/>
+          <a:p>
+            <a:pPr algn="ctr"/>
+          </a:p>
+        </p:txBody>
+      </p:sp>
+    </p:spTree>
+  </p:cSld>
+  <p:clrMapOvr>
+    <a:masterClrMapping/>
+  </p:clrMapOvr>
+  <mc:AlternateContent xmlns:mc="http://schemas.openxmlformats.org/markup-compatibility/2006">
+    <mc:Choice xmlns:p159="http://schemas.microsoft.com/office/powerpoint/2015/09/main" Requires="p159">
+      <p:transition xmlns:p14="http://schemas.microsoft.com/office/powerpoint/2010/main" spd="slow" p14:dur="900">
+        <p159:morph option="byObject"/>
+      </p:transition>
+    </mc:Choice>
+    <mc:Fallback>
+      <p:transition spd="slow">
+        <p:fade/>
+      </p:transition>
+    </mc:Fallback>
+  </mc:AlternateContent>
+</p:sld>
+</file>
+
+<file path=ppt/slides/slide11.xml><?xml version="1.0" encoding="utf-8"?>
 <p:sld xmlns:a="http://schemas.openxmlformats.org/drawingml/2006/main" xmlns:r="http://schemas.openxmlformats.org/officeDocument/2006/relationships" xmlns:p="http://schemas.openxmlformats.org/presentationml/2006/main">
   <p:cSld name="Slide 10">
     <p:spTree>
@@ -3750,7 +4599,7 @@
                   <a:schemeClr val="tx1"/>
                 </a:solidFill>
               </a:rPr>
-              <a:t>Sabine und Max</a:t>
+              <a:t>Lena und Sabine</a:t>
             </a:r>
             <a:endParaRPr lang="en-US" sz="3000" dirty="0"/>
           </a:p>
@@ -3758,14 +4607,59 @@
       </p:sp>
       <p:sp>
         <p:nvSpPr>
-          <p:cNvPr id="3" name="persona-3-0"/>
+          <p:cNvPr id="25" name="Slide Number Placeholder 0"/>
+          <p:cNvSpPr>
+            <a:spLocks noGrp="1"/>
+          </p:cNvSpPr>
+          <p:nvPr>
+            <p:ph type="sldNum" sz="quarter" idx="4294967295"/>
+          </p:nvPr>
+        </p:nvSpPr>
+        <p:spPr>
+          <a:xfrm>
+            <a:off x="8412480" y="4754880"/>
+            <a:ext cx="457200" cy="274320"/>
+          </a:xfrm>
+          <a:prstGeom prst="rect">
+            <a:avLst/>
+          </a:prstGeom>
+          <a:extLst>
+            <a:ext uri="{C572A759-6A51-4108-AA02-DFA0A04FC94B}">
+              <ma14:wrappingTextBoxFlag xmlns:ma14="http://schemas.microsoft.com/office/mac/drawingml/2011/main" val="0"/>
+            </a:ext>
+          </a:extLst>
+        </p:spPr>
+        <p:txBody>
+          <a:bodyPr/>
+          <a:lstStyle>
+            <a:lvl1pPr>
+              <a:defRPr sz="1000">
+                <a:solidFill>
+                  <a:schemeClr val="tx2"/>
+                </a:solidFill>
+              </a:defRPr>
+            </a:lvl1pPr>
+          </a:lstStyle>
+          <a:p>
+            <a:pPr algn="l"/>
+            <a:fld id="{F7021451-1387-4CA6-816F-3879F97B5CBC}" type="slidenum">
+              <a:rPr b="0" lang="en-US"/>
+              <a:t>10</a:t>
+            </a:fld>
+            <a:endParaRPr lang="en-US"/>
+          </a:p>
+        </p:txBody>
+      </p:sp>
+      <p:sp>
+        <p:nvSpPr>
+          <p:cNvPr id="26" name="!!card-a"/>
           <p:cNvSpPr/>
           <p:nvPr/>
         </p:nvSpPr>
         <p:spPr>
           <a:xfrm>
-            <a:off x="457200" y="1188720"/>
-            <a:ext cx="4023360" cy="3291840"/>
+            <a:off x="457200" y="1193800"/>
+            <a:ext cx="3683000" cy="3327400"/>
           </a:xfrm>
           <a:prstGeom prst="rect">
             <a:avLst/>
@@ -3777,20 +4671,41 @@
             <a:solidFill>
               <a:schemeClr val="accent6"/>
             </a:solidFill>
-            <a:prstDash val="solid"/>
           </a:ln>
-        </p:spPr>
-      </p:sp>
-      <p:sp>
-        <p:nvSpPr>
-          <p:cNvPr id="4" name="pp-dot-3-0"/>
+          <a:effectLst/>
+        </p:spPr>
+        <p:style>
+          <a:lnRef idx="1">
+            <a:schemeClr val="accent1"/>
+          </a:lnRef>
+          <a:fillRef idx="3">
+            <a:schemeClr val="accent1"/>
+          </a:fillRef>
+          <a:effectRef idx="2">
+            <a:schemeClr val="accent1"/>
+          </a:effectRef>
+          <a:fontRef idx="minor">
+            <a:schemeClr val="lt1"/>
+          </a:fontRef>
+        </p:style>
+        <p:txBody>
+          <a:bodyPr rtlCol="0" anchor="ctr"/>
+          <a:lstStyle/>
+          <a:p>
+            <a:pPr algn="ctr"/>
+          </a:p>
+        </p:txBody>
+      </p:sp>
+      <p:sp>
+        <p:nvSpPr>
+          <p:cNvPr id="27" name="!!dot-a"/>
           <p:cNvSpPr/>
           <p:nvPr/>
         </p:nvSpPr>
         <p:spPr>
           <a:xfrm>
-            <a:off x="731520" y="1417320"/>
-            <a:ext cx="685800" cy="685800"/>
+            <a:off x="711200" y="1422400"/>
+            <a:ext cx="635000" cy="635000"/>
           </a:xfrm>
           <a:prstGeom prst="ellipse">
             <a:avLst/>
@@ -3798,17 +4713,289 @@
           <a:solidFill>
             <a:schemeClr val="tx1"/>
           </a:solidFill>
-          <a:ln w="12700">
-            <a:solidFill>
-              <a:schemeClr val="tx1"/>
-            </a:solidFill>
-            <a:prstDash val="solid"/>
+          <a:ln>
+            <a:noFill/>
           </a:ln>
-        </p:spPr>
+          <a:effectLst/>
+        </p:spPr>
+        <p:style>
+          <a:lnRef idx="1">
+            <a:schemeClr val="accent1"/>
+          </a:lnRef>
+          <a:fillRef idx="3">
+            <a:schemeClr val="accent1"/>
+          </a:fillRef>
+          <a:effectRef idx="2">
+            <a:schemeClr val="accent1"/>
+          </a:effectRef>
+          <a:fontRef idx="minor">
+            <a:schemeClr val="lt1"/>
+          </a:fontRef>
+        </p:style>
+        <p:txBody>
+          <a:bodyPr rtlCol="0" anchor="ctr"/>
+          <a:lstStyle/>
+          <a:p>
+            <a:pPr algn="ctr"/>
+          </a:p>
+        </p:txBody>
       </p:sp>
       <p:pic>
         <p:nvPicPr>
-          <p:cNvPr id="5" name="pp-icon-3-0" descr="preencoded.png">    </p:cNvPr>
+          <p:cNvPr id="28" name="icon-a" descr="image.png"/>
+          <p:cNvPicPr>
+            <a:picLocks noChangeAspect="1"/>
+          </p:cNvPicPr>
+          <p:nvPr/>
+        </p:nvPicPr>
+        <p:blipFill>
+          <a:blip r:embed="rId5"/>
+          <a:stretch>
+            <a:fillRect/>
+          </a:stretch>
+        </p:blipFill>
+        <p:spPr>
+          <a:xfrm>
+            <a:off x="850900" y="1562100"/>
+            <a:ext cx="355600" cy="355600"/>
+          </a:xfrm>
+          <a:prstGeom prst="rect">
+            <a:avLst/>
+          </a:prstGeom>
+        </p:spPr>
+      </p:pic>
+      <p:sp>
+        <p:nvSpPr>
+          <p:cNvPr id="29" name="name-a"/>
+          <p:cNvSpPr txBox="1"/>
+          <p:nvPr/>
+        </p:nvSpPr>
+        <p:spPr>
+          <a:xfrm>
+            <a:off x="1524000" y="1422400"/>
+            <a:ext cx="2362200" cy="635000"/>
+          </a:xfrm>
+          <a:prstGeom prst="rect">
+            <a:avLst/>
+          </a:prstGeom>
+          <a:noFill/>
+        </p:spPr>
+        <p:txBody>
+          <a:bodyPr wrap="square" anchor="ctr" lIns="0" rIns="0" tIns="0" bIns="0">
+            <a:spAutoFit/>
+          </a:bodyPr>
+          <a:lstStyle/>
+          <a:p>
+            <a:r>
+              <a:rPr sz="1700" b="1">
+                <a:solidFill>
+                  <a:schemeClr val="tx1"/>
+                </a:solidFill>
+              </a:rPr>
+              <a:t>Lena, 28</a:t>
+            </a:r>
+          </a:p>
+          <a:p>
+            <a:r>
+              <a:rPr sz="1100" b="0">
+                <a:solidFill>
+                  <a:schemeClr val="tx2"/>
+                </a:solidFill>
+              </a:rPr>
+              <a:t>Radpendlerin aus Sendling</a:t>
+            </a:r>
+          </a:p>
+        </p:txBody>
+      </p:sp>
+      <p:sp>
+        <p:nvSpPr>
+          <p:cNvPr id="30" name="sucht-a"/>
+          <p:cNvSpPr txBox="1"/>
+          <p:nvPr/>
+        </p:nvSpPr>
+        <p:spPr>
+          <a:xfrm>
+            <a:off x="711200" y="2260600"/>
+            <a:ext cx="3175000" cy="736600"/>
+          </a:xfrm>
+          <a:prstGeom prst="rect">
+            <a:avLst/>
+          </a:prstGeom>
+          <a:noFill/>
+        </p:spPr>
+        <p:txBody>
+          <a:bodyPr wrap="square" anchor="t" lIns="0" rIns="0" tIns="0" bIns="0">
+            <a:spAutoFit/>
+          </a:bodyPr>
+          <a:lstStyle/>
+          <a:p>
+            <a:r>
+              <a:rPr sz="900" b="1">
+                <a:solidFill>
+                  <a:srgbClr val="E2001A"/>
+                </a:solidFill>
+              </a:rPr>
+              <a:t>SUCHT</a:t>
+            </a:r>
+          </a:p>
+          <a:p>
+            <a:pPr>
+              <a:spcBef>
+                <a:spcPts val="200"/>
+              </a:spcBef>
+            </a:pPr>
+            <a:r>
+              <a:rPr sz="1300" b="1">
+                <a:solidFill>
+                  <a:schemeClr val="tx1"/>
+                </a:solidFill>
+              </a:rPr>
+              <a:t>Eine verbindliche Antwort zum Radweg an der Lindwurmstraße</a:t>
+            </a:r>
+          </a:p>
+        </p:txBody>
+      </p:sp>
+      <p:sp>
+        <p:nvSpPr>
+          <p:cNvPr id="31" name="bietet-a"/>
+          <p:cNvSpPr txBox="1"/>
+          <p:nvPr/>
+        </p:nvSpPr>
+        <p:spPr>
+          <a:xfrm>
+            <a:off x="711200" y="3073400"/>
+            <a:ext cx="3175000" cy="736600"/>
+          </a:xfrm>
+          <a:prstGeom prst="rect">
+            <a:avLst/>
+          </a:prstGeom>
+          <a:noFill/>
+        </p:spPr>
+        <p:txBody>
+          <a:bodyPr wrap="square" anchor="t" lIns="0" rIns="0" tIns="0" bIns="0">
+            <a:spAutoFit/>
+          </a:bodyPr>
+          <a:lstStyle/>
+          <a:p>
+            <a:r>
+              <a:rPr sz="900" b="1">
+                <a:solidFill>
+                  <a:srgbClr val="E2001A"/>
+                </a:solidFill>
+              </a:rPr>
+              <a:t>BIETET</a:t>
+            </a:r>
+          </a:p>
+          <a:p>
+            <a:pPr>
+              <a:spcBef>
+                <a:spcPts val="200"/>
+              </a:spcBef>
+            </a:pPr>
+            <a:r>
+              <a:rPr sz="1300" b="0">
+                <a:solidFill>
+                  <a:schemeClr val="tx1"/>
+                </a:solidFill>
+              </a:rPr>
+              <a:t>Eine Initiative mit Argumenten beider Seiten und einer Abstimmung</a:t>
+            </a:r>
+          </a:p>
+        </p:txBody>
+      </p:sp>
+      <p:sp>
+        <p:nvSpPr>
+          <p:cNvPr id="32" name="!!card-b"/>
+          <p:cNvSpPr/>
+          <p:nvPr/>
+        </p:nvSpPr>
+        <p:spPr>
+          <a:xfrm>
+            <a:off x="5003800" y="1193800"/>
+            <a:ext cx="3683000" cy="3327400"/>
+          </a:xfrm>
+          <a:prstGeom prst="rect">
+            <a:avLst/>
+          </a:prstGeom>
+          <a:solidFill>
+            <a:schemeClr val="bg1"/>
+          </a:solidFill>
+          <a:ln w="9525">
+            <a:solidFill>
+              <a:schemeClr val="accent6"/>
+            </a:solidFill>
+          </a:ln>
+          <a:effectLst/>
+        </p:spPr>
+        <p:style>
+          <a:lnRef idx="1">
+            <a:schemeClr val="accent1"/>
+          </a:lnRef>
+          <a:fillRef idx="3">
+            <a:schemeClr val="accent1"/>
+          </a:fillRef>
+          <a:effectRef idx="2">
+            <a:schemeClr val="accent1"/>
+          </a:effectRef>
+          <a:fontRef idx="minor">
+            <a:schemeClr val="lt1"/>
+          </a:fontRef>
+        </p:style>
+        <p:txBody>
+          <a:bodyPr rtlCol="0" anchor="ctr"/>
+          <a:lstStyle/>
+          <a:p>
+            <a:pPr algn="ctr"/>
+          </a:p>
+        </p:txBody>
+      </p:sp>
+      <p:sp>
+        <p:nvSpPr>
+          <p:cNvPr id="33" name="!!dot-b"/>
+          <p:cNvSpPr/>
+          <p:nvPr/>
+        </p:nvSpPr>
+        <p:spPr>
+          <a:xfrm>
+            <a:off x="5257800" y="1422400"/>
+            <a:ext cx="635000" cy="635000"/>
+          </a:xfrm>
+          <a:prstGeom prst="ellipse">
+            <a:avLst/>
+          </a:prstGeom>
+          <a:solidFill>
+            <a:schemeClr val="tx1"/>
+          </a:solidFill>
+          <a:ln>
+            <a:noFill/>
+          </a:ln>
+          <a:effectLst/>
+        </p:spPr>
+        <p:style>
+          <a:lnRef idx="1">
+            <a:schemeClr val="accent1"/>
+          </a:lnRef>
+          <a:fillRef idx="3">
+            <a:schemeClr val="accent1"/>
+          </a:fillRef>
+          <a:effectRef idx="2">
+            <a:schemeClr val="accent1"/>
+          </a:effectRef>
+          <a:fontRef idx="minor">
+            <a:schemeClr val="lt1"/>
+          </a:fontRef>
+        </p:style>
+        <p:txBody>
+          <a:bodyPr rtlCol="0" anchor="ctr"/>
+          <a:lstStyle/>
+          <a:p>
+            <a:pPr algn="ctr"/>
+          </a:p>
+        </p:txBody>
+      </p:sp>
+      <p:pic>
+        <p:nvPicPr>
+          <p:cNvPr id="34" name="icon-b" descr="image.png"/>
           <p:cNvPicPr>
             <a:picLocks noChangeAspect="1"/>
           </p:cNvPicPr>
@@ -3822,8 +5009,8 @@
         </p:blipFill>
         <p:spPr>
           <a:xfrm>
-            <a:off x="891540" y="1577340"/>
-            <a:ext cx="365760" cy="365760"/>
+            <a:off x="5397500" y="1562100"/>
+            <a:ext cx="355600" cy="355600"/>
           </a:xfrm>
           <a:prstGeom prst="rect">
             <a:avLst/>
@@ -3832,364 +5019,184 @@
       </p:pic>
       <p:sp>
         <p:nvSpPr>
-          <p:cNvPr id="6" name="pp-name-3-0"/>
+          <p:cNvPr id="35" name="name-b"/>
           <p:cNvSpPr txBox="1"/>
           <p:nvPr/>
         </p:nvSpPr>
         <p:spPr>
           <a:xfrm>
-            <a:off x="1600200" y="1417320"/>
-            <a:ext cx="2697480" cy="685800"/>
+            <a:off x="6070600" y="1422400"/>
+            <a:ext cx="2362200" cy="635000"/>
           </a:xfrm>
           <a:prstGeom prst="rect">
             <a:avLst/>
           </a:prstGeom>
           <a:noFill/>
-          <a:ln/>
-        </p:spPr>
-        <p:txBody>
-          <a:bodyPr wrap="square" lIns="0" tIns="0" rIns="0" bIns="0" rtlCol="0" anchor="ctr"/>
-          <a:lstStyle/>
-          <a:p>
-            <a:pPr indent="0" marL="0">
-              <a:buNone/>
+        </p:spPr>
+        <p:txBody>
+          <a:bodyPr wrap="square" anchor="ctr" lIns="0" rIns="0" tIns="0" bIns="0">
+            <a:spAutoFit/>
+          </a:bodyPr>
+          <a:lstStyle/>
+          <a:p>
+            <a:r>
+              <a:rPr sz="1700" b="1">
+                <a:solidFill>
+                  <a:schemeClr val="tx1"/>
+                </a:solidFill>
+              </a:rPr>
+              <a:t>Sabine, 51</a:t>
+            </a:r>
+          </a:p>
+          <a:p>
+            <a:r>
+              <a:rPr sz="1100" b="0">
+                <a:solidFill>
+                  <a:schemeClr val="tx2"/>
+                </a:solidFill>
+              </a:rPr>
+              <a:t>Sachbearbeiterin im Baureferat</a:t>
+            </a:r>
+          </a:p>
+        </p:txBody>
+      </p:sp>
+      <p:sp>
+        <p:nvSpPr>
+          <p:cNvPr id="36" name="sucht-b"/>
+          <p:cNvSpPr txBox="1"/>
+          <p:nvPr/>
+        </p:nvSpPr>
+        <p:spPr>
+          <a:xfrm>
+            <a:off x="5257800" y="2260600"/>
+            <a:ext cx="3175000" cy="736600"/>
+          </a:xfrm>
+          <a:prstGeom prst="rect">
+            <a:avLst/>
+          </a:prstGeom>
+          <a:noFill/>
+        </p:spPr>
+        <p:txBody>
+          <a:bodyPr wrap="square" anchor="t" lIns="0" rIns="0" tIns="0" bIns="0">
+            <a:spAutoFit/>
+          </a:bodyPr>
+          <a:lstStyle/>
+          <a:p>
+            <a:r>
+              <a:rPr sz="900" b="1">
+                <a:solidFill>
+                  <a:srgbClr val="E2001A"/>
+                </a:solidFill>
+              </a:rPr>
+              <a:t>SUCHT</a:t>
+            </a:r>
+          </a:p>
+          <a:p>
+            <a:pPr>
+              <a:spcBef>
+                <a:spcPts val="200"/>
+              </a:spcBef>
             </a:pPr>
             <a:r>
-              <a:rPr lang="en-US" sz="1800" b="1" dirty="0">
+              <a:rPr sz="1300" b="1">
                 <a:solidFill>
                   <a:schemeClr val="tx1"/>
                 </a:solidFill>
               </a:rPr>
-              <a:t>Sabine, 51</a:t>
-            </a:r>
-            <a:endParaRPr lang="en-US" sz="1800" dirty="0"/>
-          </a:p>
-          <a:p>
-            <a:pPr indent="0" marL="0">
-              <a:buNone/>
+              <a:t>Klare Anliegen an einem Ort statt Mails, Anrufe und Kommentare</a:t>
+            </a:r>
+          </a:p>
+        </p:txBody>
+      </p:sp>
+      <p:sp>
+        <p:nvSpPr>
+          <p:cNvPr id="37" name="bietet-b"/>
+          <p:cNvSpPr txBox="1"/>
+          <p:nvPr/>
+        </p:nvSpPr>
+        <p:spPr>
+          <a:xfrm>
+            <a:off x="5257800" y="3073400"/>
+            <a:ext cx="3175000" cy="736600"/>
+          </a:xfrm>
+          <a:prstGeom prst="rect">
+            <a:avLst/>
+          </a:prstGeom>
+          <a:noFill/>
+        </p:spPr>
+        <p:txBody>
+          <a:bodyPr wrap="square" anchor="t" lIns="0" rIns="0" tIns="0" bIns="0">
+            <a:spAutoFit/>
+          </a:bodyPr>
+          <a:lstStyle/>
+          <a:p>
+            <a:r>
+              <a:rPr sz="900" b="1">
+                <a:solidFill>
+                  <a:srgbClr val="E2001A"/>
+                </a:solidFill>
+              </a:rPr>
+              <a:t>BIETET</a:t>
+            </a:r>
+          </a:p>
+          <a:p>
+            <a:pPr>
+              <a:spcBef>
+                <a:spcPts val="200"/>
+              </a:spcBef>
             </a:pPr>
             <a:r>
-              <a:rPr lang="en-US" sz="1200" dirty="0">
-                <a:solidFill>
-                  <a:schemeClr val="tx2"/>
-                </a:solidFill>
-              </a:rPr>
-              <a:t>Bezirksamt</a:t>
-            </a:r>
-            <a:endParaRPr lang="en-US" sz="1800" dirty="0"/>
-          </a:p>
-        </p:txBody>
-      </p:sp>
-      <p:sp>
-        <p:nvSpPr>
-          <p:cNvPr id="7" name="pp-sit-3-0"/>
-          <p:cNvSpPr txBox="1"/>
-          <p:nvPr/>
-        </p:nvSpPr>
-        <p:spPr>
-          <a:xfrm>
-            <a:off x="731520" y="2331720"/>
-            <a:ext cx="3474720" cy="640080"/>
-          </a:xfrm>
-          <a:prstGeom prst="rect">
-            <a:avLst/>
-          </a:prstGeom>
-          <a:noFill/>
-          <a:ln/>
-        </p:spPr>
-        <p:txBody>
-          <a:bodyPr wrap="square" lIns="0" tIns="0" rIns="0" bIns="0" rtlCol="0" anchor="t"/>
-          <a:lstStyle/>
-          <a:p>
-            <a:pPr indent="0" marL="0">
-              <a:buNone/>
-            </a:pPr>
-            <a:r>
-              <a:rPr lang="en-US" sz="1500" b="1" dirty="0">
+              <a:rPr sz="1300" b="0">
                 <a:solidFill>
                   <a:schemeClr val="tx1"/>
                 </a:solidFill>
               </a:rPr>
-              <a:t>Anfragen kommen über fünf Kanäle.</a:t>
-            </a:r>
-            <a:endParaRPr lang="en-US" sz="1500" dirty="0"/>
-          </a:p>
-        </p:txBody>
-      </p:sp>
-      <p:sp>
-        <p:nvSpPr>
-          <p:cNvPr id="8" name="pp-sol-3-0"/>
-          <p:cNvSpPr txBox="1"/>
-          <p:nvPr/>
-        </p:nvSpPr>
-        <p:spPr>
-          <a:xfrm>
-            <a:off x="731520" y="3017520"/>
-            <a:ext cx="3474720" cy="1371600"/>
-          </a:xfrm>
-          <a:prstGeom prst="rect">
-            <a:avLst/>
-          </a:prstGeom>
-          <a:noFill/>
-          <a:ln/>
-        </p:spPr>
-        <p:txBody>
-          <a:bodyPr wrap="square" lIns="0" tIns="0" rIns="0" bIns="0" rtlCol="0" anchor="t"/>
-          <a:lstStyle/>
-          <a:p>
-            <a:pPr indent="0" marL="0">
-              <a:buNone/>
-            </a:pPr>
-            <a:r>
-              <a:rPr lang="en-US" sz="1400" dirty="0">
-                <a:solidFill>
-                  <a:schemeClr val="tx1"/>
-                </a:solidFill>
-              </a:rPr>
-              <a:t>Ihre Stelle ist als Zuständige bestätigt. Anfragen kommen mit Frist in einen Eingang, Antworten sind öffentlich.</a:t>
-            </a:r>
-            <a:endParaRPr lang="en-US" sz="1400" dirty="0"/>
-          </a:p>
-        </p:txBody>
-      </p:sp>
-      <p:sp>
-        <p:nvSpPr>
-          <p:cNvPr id="9" name="persona-3-1"/>
+              <a:t>Eine öffentliche Antwort mit Begründung, innerhalb von sechs Wochen</a:t>
+            </a:r>
+          </a:p>
+        </p:txBody>
+      </p:sp>
+      <p:sp>
+        <p:nvSpPr>
+          <p:cNvPr id="38" name="!!match"/>
           <p:cNvSpPr/>
           <p:nvPr/>
         </p:nvSpPr>
         <p:spPr>
           <a:xfrm>
-            <a:off x="4663440" y="1188720"/>
-            <a:ext cx="4023360" cy="3291840"/>
-          </a:xfrm>
-          <a:prstGeom prst="rect">
+            <a:off x="4292600" y="2692400"/>
+            <a:ext cx="558800" cy="330200"/>
+          </a:xfrm>
+          <a:prstGeom prst="leftRightArrow">
             <a:avLst/>
           </a:prstGeom>
           <a:solidFill>
-            <a:schemeClr val="bg1"/>
+            <a:srgbClr val="E2001A"/>
           </a:solidFill>
-          <a:ln w="9525">
-            <a:solidFill>
-              <a:schemeClr val="accent6"/>
-            </a:solidFill>
-            <a:prstDash val="solid"/>
+          <a:ln>
+            <a:noFill/>
           </a:ln>
-        </p:spPr>
-      </p:sp>
-      <p:sp>
-        <p:nvSpPr>
-          <p:cNvPr id="10" name="pp-dot-3-1"/>
-          <p:cNvSpPr/>
-          <p:nvPr/>
-        </p:nvSpPr>
-        <p:spPr>
-          <a:xfrm>
-            <a:off x="4937760" y="1417320"/>
-            <a:ext cx="685800" cy="685800"/>
-          </a:xfrm>
-          <a:prstGeom prst="ellipse">
-            <a:avLst/>
-          </a:prstGeom>
-          <a:solidFill>
-            <a:schemeClr val="tx1"/>
-          </a:solidFill>
-          <a:ln w="12700">
-            <a:solidFill>
-              <a:schemeClr val="tx1"/>
-            </a:solidFill>
-            <a:prstDash val="solid"/>
-          </a:ln>
-        </p:spPr>
-      </p:sp>
-      <p:pic>
-        <p:nvPicPr>
-          <p:cNvPr id="11" name="pp-icon-3-1" descr="preencoded.png">    </p:cNvPr>
-          <p:cNvPicPr>
-            <a:picLocks noChangeAspect="1"/>
-          </p:cNvPicPr>
-          <p:nvPr/>
-        </p:nvPicPr>
-        <p:blipFill>
-          <a:blip r:embed="rId2"/>
-          <a:stretch>
-            <a:fillRect/>
-          </a:stretch>
-        </p:blipFill>
-        <p:spPr>
-          <a:xfrm>
-            <a:off x="5097780" y="1577340"/>
-            <a:ext cx="365760" cy="365760"/>
-          </a:xfrm>
-          <a:prstGeom prst="rect">
-            <a:avLst/>
-          </a:prstGeom>
-        </p:spPr>
-      </p:pic>
-      <p:sp>
-        <p:nvSpPr>
-          <p:cNvPr id="12" name="pp-name-3-1"/>
-          <p:cNvSpPr txBox="1"/>
-          <p:nvPr/>
-        </p:nvSpPr>
-        <p:spPr>
-          <a:xfrm>
-            <a:off x="5806440" y="1417320"/>
-            <a:ext cx="2697480" cy="685800"/>
-          </a:xfrm>
-          <a:prstGeom prst="rect">
-            <a:avLst/>
-          </a:prstGeom>
-          <a:noFill/>
-          <a:ln/>
-        </p:spPr>
-        <p:txBody>
-          <a:bodyPr wrap="square" lIns="0" tIns="0" rIns="0" bIns="0" rtlCol="0" anchor="ctr"/>
-          <a:lstStyle/>
-          <a:p>
-            <a:pPr indent="0" marL="0">
-              <a:buNone/>
-            </a:pPr>
-            <a:r>
-              <a:rPr lang="en-US" sz="1800" b="1" dirty="0">
-                <a:solidFill>
-                  <a:schemeClr val="tx1"/>
-                </a:solidFill>
-              </a:rPr>
-              <a:t>Max, 16</a:t>
-            </a:r>
-            <a:endParaRPr lang="en-US" sz="1800" dirty="0"/>
-          </a:p>
-          <a:p>
-            <a:pPr indent="0" marL="0">
-              <a:buNone/>
-            </a:pPr>
-            <a:r>
-              <a:rPr lang="en-US" sz="1200" dirty="0">
-                <a:solidFill>
-                  <a:schemeClr val="tx2"/>
-                </a:solidFill>
-              </a:rPr>
-              <a:t>Schüler</a:t>
-            </a:r>
-            <a:endParaRPr lang="en-US" sz="1800" dirty="0"/>
-          </a:p>
-        </p:txBody>
-      </p:sp>
-      <p:sp>
-        <p:nvSpPr>
-          <p:cNvPr id="13" name="pp-sit-3-1"/>
-          <p:cNvSpPr txBox="1"/>
-          <p:nvPr/>
-        </p:nvSpPr>
-        <p:spPr>
-          <a:xfrm>
-            <a:off x="4937760" y="2331720"/>
-            <a:ext cx="3474720" cy="640080"/>
-          </a:xfrm>
-          <a:prstGeom prst="rect">
-            <a:avLst/>
-          </a:prstGeom>
-          <a:noFill/>
-          <a:ln/>
-        </p:spPr>
-        <p:txBody>
-          <a:bodyPr wrap="square" lIns="0" tIns="0" rIns="0" bIns="0" rtlCol="0" anchor="t"/>
-          <a:lstStyle/>
-          <a:p>
-            <a:pPr indent="0" marL="0">
-              <a:buNone/>
-            </a:pPr>
-            <a:r>
-              <a:rPr lang="en-US" sz="1500" b="1" dirty="0">
-                <a:solidFill>
-                  <a:schemeClr val="tx1"/>
-                </a:solidFill>
-              </a:rPr>
-              <a:t>Klassenprojekt Schulgarten, aber geschützt.</a:t>
-            </a:r>
-            <a:endParaRPr lang="en-US" sz="1500" dirty="0"/>
-          </a:p>
-        </p:txBody>
-      </p:sp>
-      <p:sp>
-        <p:nvSpPr>
-          <p:cNvPr id="14" name="pp-sol-3-1"/>
-          <p:cNvSpPr txBox="1"/>
-          <p:nvPr/>
-        </p:nvSpPr>
-        <p:spPr>
-          <a:xfrm>
-            <a:off x="4937760" y="3017520"/>
-            <a:ext cx="3474720" cy="1371600"/>
-          </a:xfrm>
-          <a:prstGeom prst="rect">
-            <a:avLst/>
-          </a:prstGeom>
-          <a:noFill/>
-          <a:ln/>
-        </p:spPr>
-        <p:txBody>
-          <a:bodyPr wrap="square" lIns="0" tIns="0" rIns="0" bIns="0" rtlCol="0" anchor="t"/>
-          <a:lstStyle/>
-          <a:p>
-            <a:pPr indent="0" marL="0">
-              <a:buNone/>
-            </a:pPr>
-            <a:r>
-              <a:rPr lang="en-US" sz="1400" dirty="0">
-                <a:solidFill>
-                  <a:schemeClr val="tx1"/>
-                </a:solidFill>
-              </a:rPr>
-              <a:t>Vorlage „Schulklasse“: geheim, nur mit Einladung. Minderjährige schreibt nur an, wer in der Gruppe ist.</a:t>
-            </a:r>
-            <a:endParaRPr lang="en-US" sz="1400" dirty="0"/>
-          </a:p>
-        </p:txBody>
-      </p:sp>
-      <p:sp>
-        <p:nvSpPr>
-          <p:cNvPr id="25" name="Slide Number Placeholder 0"/>
-          <p:cNvSpPr>
-            <a:spLocks noGrp="1"/>
-          </p:cNvSpPr>
-          <p:nvPr>
-            <p:ph type="sldNum" sz="quarter" idx="4294967295"/>
-          </p:nvPr>
-        </p:nvSpPr>
-        <p:spPr>
-          <a:xfrm>
-            <a:off x="8412480" y="4754880"/>
-            <a:ext cx="457200" cy="274320"/>
-          </a:xfrm>
-          <a:prstGeom prst="rect">
-            <a:avLst/>
-          </a:prstGeom>
-          <a:extLst>
-            <a:ext uri="{C572A759-6A51-4108-AA02-DFA0A04FC94B}">
-              <ma14:wrappingTextBoxFlag xmlns:ma14="http://schemas.microsoft.com/office/mac/drawingml/2011/main" val="0"/>
-            </a:ext>
-          </a:extLst>
-        </p:spPr>
-        <p:txBody>
-          <a:bodyPr/>
-          <a:lstStyle>
-            <a:lvl1pPr>
-              <a:defRPr sz="1000">
-                <a:solidFill>
-                  <a:schemeClr val="tx2"/>
-                </a:solidFill>
-              </a:defRPr>
-            </a:lvl1pPr>
-          </a:lstStyle>
-          <a:p>
-            <a:pPr algn="l"/>
-            <a:fld id="{F7021451-1387-4CA6-816F-3879F97B5CBC}" type="slidenum">
-              <a:rPr b="0" lang="en-US"/>
-              <a:t>10</a:t>
-            </a:fld>
-            <a:endParaRPr lang="en-US"/>
+          <a:effectLst/>
+        </p:spPr>
+        <p:style>
+          <a:lnRef idx="1">
+            <a:schemeClr val="accent1"/>
+          </a:lnRef>
+          <a:fillRef idx="3">
+            <a:schemeClr val="accent1"/>
+          </a:fillRef>
+          <a:effectRef idx="2">
+            <a:schemeClr val="accent1"/>
+          </a:effectRef>
+          <a:fontRef idx="minor">
+            <a:schemeClr val="lt1"/>
+          </a:fontRef>
+        </p:style>
+        <p:txBody>
+          <a:bodyPr rtlCol="0" anchor="ctr"/>
+          <a:lstStyle/>
+          <a:p>
+            <a:pPr algn="ctr"/>
           </a:p>
         </p:txBody>
       </p:sp>
@@ -4198,10 +5205,22 @@
   <p:clrMapOvr>
     <a:masterClrMapping/>
   </p:clrMapOvr>
+  <mc:AlternateContent xmlns:mc="http://schemas.openxmlformats.org/markup-compatibility/2006">
+    <mc:Choice xmlns:p159="http://schemas.microsoft.com/office/powerpoint/2015/09/main" Requires="p159">
+      <p:transition xmlns:p14="http://schemas.microsoft.com/office/powerpoint/2010/main" spd="slow" p14:dur="900">
+        <p159:morph option="byObject"/>
+      </p:transition>
+    </mc:Choice>
+    <mc:Fallback>
+      <p:transition spd="slow">
+        <p:fade/>
+      </p:transition>
+    </mc:Fallback>
+  </mc:AlternateContent>
 </p:sld>
 </file>
 
-<file path=ppt/slides/slide11.xml><?xml version="1.0" encoding="utf-8"?>
+<file path=ppt/slides/slide12.xml><?xml version="1.0" encoding="utf-8"?>
 <p:sld xmlns:a="http://schemas.openxmlformats.org/drawingml/2006/main" xmlns:r="http://schemas.openxmlformats.org/officeDocument/2006/relationships" xmlns:p="http://schemas.openxmlformats.org/presentationml/2006/main">
   <p:cSld name="Slide 11">
     <p:spTree>
@@ -4250,7 +5269,7 @@
                   <a:schemeClr val="tx1"/>
                 </a:solidFill>
               </a:rPr>
-              <a:t>Familie Berger und Clara</a:t>
+              <a:t>Clara und Familie Berger</a:t>
             </a:r>
             <a:endParaRPr lang="en-US" sz="3000" dirty="0"/>
           </a:p>
@@ -4258,14 +5277,59 @@
       </p:sp>
       <p:sp>
         <p:nvSpPr>
-          <p:cNvPr id="3" name="persona-4-0"/>
+          <p:cNvPr id="25" name="Slide Number Placeholder 0"/>
+          <p:cNvSpPr>
+            <a:spLocks noGrp="1"/>
+          </p:cNvSpPr>
+          <p:nvPr>
+            <p:ph type="sldNum" sz="quarter" idx="4294967295"/>
+          </p:nvPr>
+        </p:nvSpPr>
+        <p:spPr>
+          <a:xfrm>
+            <a:off x="8412480" y="4754880"/>
+            <a:ext cx="457200" cy="274320"/>
+          </a:xfrm>
+          <a:prstGeom prst="rect">
+            <a:avLst/>
+          </a:prstGeom>
+          <a:extLst>
+            <a:ext uri="{C572A759-6A51-4108-AA02-DFA0A04FC94B}">
+              <ma14:wrappingTextBoxFlag xmlns:ma14="http://schemas.microsoft.com/office/mac/drawingml/2011/main" val="0"/>
+            </a:ext>
+          </a:extLst>
+        </p:spPr>
+        <p:txBody>
+          <a:bodyPr/>
+          <a:lstStyle>
+            <a:lvl1pPr>
+              <a:defRPr sz="1000">
+                <a:solidFill>
+                  <a:schemeClr val="tx2"/>
+                </a:solidFill>
+              </a:defRPr>
+            </a:lvl1pPr>
+          </a:lstStyle>
+          <a:p>
+            <a:pPr algn="l"/>
+            <a:fld id="{F7021451-1387-4CA6-816F-3879F97B5CBC}" type="slidenum">
+              <a:rPr b="0" lang="en-US"/>
+              <a:t>11</a:t>
+            </a:fld>
+            <a:endParaRPr lang="en-US"/>
+          </a:p>
+        </p:txBody>
+      </p:sp>
+      <p:sp>
+        <p:nvSpPr>
+          <p:cNvPr id="26" name="!!card-a"/>
           <p:cNvSpPr/>
           <p:nvPr/>
         </p:nvSpPr>
         <p:spPr>
           <a:xfrm>
-            <a:off x="457200" y="1188720"/>
-            <a:ext cx="4023360" cy="3291840"/>
+            <a:off x="457200" y="1193800"/>
+            <a:ext cx="3683000" cy="3327400"/>
           </a:xfrm>
           <a:prstGeom prst="rect">
             <a:avLst/>
@@ -4277,20 +5341,41 @@
             <a:solidFill>
               <a:schemeClr val="accent6"/>
             </a:solidFill>
-            <a:prstDash val="solid"/>
           </a:ln>
-        </p:spPr>
-      </p:sp>
-      <p:sp>
-        <p:nvSpPr>
-          <p:cNvPr id="4" name="pp-dot-4-0"/>
+          <a:effectLst/>
+        </p:spPr>
+        <p:style>
+          <a:lnRef idx="1">
+            <a:schemeClr val="accent1"/>
+          </a:lnRef>
+          <a:fillRef idx="3">
+            <a:schemeClr val="accent1"/>
+          </a:fillRef>
+          <a:effectRef idx="2">
+            <a:schemeClr val="accent1"/>
+          </a:effectRef>
+          <a:fontRef idx="minor">
+            <a:schemeClr val="lt1"/>
+          </a:fontRef>
+        </p:style>
+        <p:txBody>
+          <a:bodyPr rtlCol="0" anchor="ctr"/>
+          <a:lstStyle/>
+          <a:p>
+            <a:pPr algn="ctr"/>
+          </a:p>
+        </p:txBody>
+      </p:sp>
+      <p:sp>
+        <p:nvSpPr>
+          <p:cNvPr id="27" name="!!dot-a"/>
           <p:cNvSpPr/>
           <p:nvPr/>
         </p:nvSpPr>
         <p:spPr>
           <a:xfrm>
-            <a:off x="731520" y="1417320"/>
-            <a:ext cx="685800" cy="685800"/>
+            <a:off x="711200" y="1422400"/>
+            <a:ext cx="635000" cy="635000"/>
           </a:xfrm>
           <a:prstGeom prst="ellipse">
             <a:avLst/>
@@ -4298,17 +5383,374 @@
           <a:solidFill>
             <a:schemeClr val="tx1"/>
           </a:solidFill>
-          <a:ln w="12700">
-            <a:solidFill>
-              <a:schemeClr val="tx1"/>
-            </a:solidFill>
-            <a:prstDash val="solid"/>
+          <a:ln>
+            <a:noFill/>
           </a:ln>
-        </p:spPr>
+          <a:effectLst/>
+        </p:spPr>
+        <p:style>
+          <a:lnRef idx="1">
+            <a:schemeClr val="accent1"/>
+          </a:lnRef>
+          <a:fillRef idx="3">
+            <a:schemeClr val="accent1"/>
+          </a:fillRef>
+          <a:effectRef idx="2">
+            <a:schemeClr val="accent1"/>
+          </a:effectRef>
+          <a:fontRef idx="minor">
+            <a:schemeClr val="lt1"/>
+          </a:fontRef>
+        </p:style>
+        <p:txBody>
+          <a:bodyPr rtlCol="0" anchor="ctr"/>
+          <a:lstStyle/>
+          <a:p>
+            <a:pPr algn="ctr"/>
+          </a:p>
+        </p:txBody>
       </p:sp>
       <p:pic>
         <p:nvPicPr>
-          <p:cNvPr id="5" name="pp-icon-4-0" descr="preencoded.png">    </p:cNvPr>
+          <p:cNvPr id="28" name="icon-a" descr="image.png"/>
+          <p:cNvPicPr>
+            <a:picLocks noChangeAspect="1"/>
+          </p:cNvPicPr>
+          <p:nvPr/>
+        </p:nvPicPr>
+        <p:blipFill>
+          <a:blip r:embed="rId2"/>
+          <a:stretch>
+            <a:fillRect/>
+          </a:stretch>
+        </p:blipFill>
+        <p:spPr>
+          <a:xfrm>
+            <a:off x="850900" y="1562100"/>
+            <a:ext cx="355600" cy="355600"/>
+          </a:xfrm>
+          <a:prstGeom prst="rect">
+            <a:avLst/>
+          </a:prstGeom>
+        </p:spPr>
+      </p:pic>
+      <p:sp>
+        <p:nvSpPr>
+          <p:cNvPr id="29" name="name-a"/>
+          <p:cNvSpPr txBox="1"/>
+          <p:nvPr/>
+        </p:nvSpPr>
+        <p:spPr>
+          <a:xfrm>
+            <a:off x="1524000" y="1422400"/>
+            <a:ext cx="2362200" cy="635000"/>
+          </a:xfrm>
+          <a:prstGeom prst="rect">
+            <a:avLst/>
+          </a:prstGeom>
+          <a:noFill/>
+        </p:spPr>
+        <p:txBody>
+          <a:bodyPr wrap="square" anchor="ctr" lIns="0" rIns="0" tIns="0" bIns="0">
+            <a:spAutoFit/>
+          </a:bodyPr>
+          <a:lstStyle/>
+          <a:p>
+            <a:r>
+              <a:rPr sz="1700" b="1">
+                <a:solidFill>
+                  <a:schemeClr val="tx1"/>
+                </a:solidFill>
+              </a:rPr>
+              <a:t>Clara, 31</a:t>
+            </a:r>
+          </a:p>
+          <a:p>
+            <a:r>
+              <a:rPr sz="1100" b="0">
+                <a:solidFill>
+                  <a:schemeClr val="tx2"/>
+                </a:solidFill>
+              </a:rPr>
+              <a:t>organisiert Foodsharing</a:t>
+            </a:r>
+          </a:p>
+        </p:txBody>
+      </p:sp>
+      <p:sp>
+        <p:nvSpPr>
+          <p:cNvPr id="30" name="sucht-a"/>
+          <p:cNvSpPr txBox="1"/>
+          <p:nvPr/>
+        </p:nvSpPr>
+        <p:spPr>
+          <a:xfrm>
+            <a:off x="711200" y="2260600"/>
+            <a:ext cx="3175000" cy="736600"/>
+          </a:xfrm>
+          <a:prstGeom prst="rect">
+            <a:avLst/>
+          </a:prstGeom>
+          <a:noFill/>
+        </p:spPr>
+        <p:txBody>
+          <a:bodyPr wrap="square" anchor="t" lIns="0" rIns="0" tIns="0" bIns="0">
+            <a:spAutoFit/>
+          </a:bodyPr>
+          <a:lstStyle/>
+          <a:p>
+            <a:r>
+              <a:rPr sz="900" b="1">
+                <a:solidFill>
+                  <a:srgbClr val="E2001A"/>
+                </a:solidFill>
+              </a:rPr>
+              <a:t>SUCHT</a:t>
+            </a:r>
+          </a:p>
+          <a:p>
+            <a:pPr>
+              <a:spcBef>
+                <a:spcPts val="200"/>
+              </a:spcBef>
+            </a:pPr>
+            <a:r>
+              <a:rPr sz="1300" b="1">
+                <a:solidFill>
+                  <a:schemeClr val="tx1"/>
+                </a:solidFill>
+              </a:rPr>
+              <a:t>Einen Platz für den Kühlschrank und verlässliche Abholer:innen</a:t>
+            </a:r>
+          </a:p>
+        </p:txBody>
+      </p:sp>
+      <p:sp>
+        <p:nvSpPr>
+          <p:cNvPr id="31" name="bietet-a"/>
+          <p:cNvSpPr txBox="1"/>
+          <p:nvPr/>
+        </p:nvSpPr>
+        <p:spPr>
+          <a:xfrm>
+            <a:off x="711200" y="3073400"/>
+            <a:ext cx="3175000" cy="736600"/>
+          </a:xfrm>
+          <a:prstGeom prst="rect">
+            <a:avLst/>
+          </a:prstGeom>
+          <a:noFill/>
+        </p:spPr>
+        <p:txBody>
+          <a:bodyPr wrap="square" anchor="t" lIns="0" rIns="0" tIns="0" bIns="0">
+            <a:spAutoFit/>
+          </a:bodyPr>
+          <a:lstStyle/>
+          <a:p>
+            <a:r>
+              <a:rPr sz="900" b="1">
+                <a:solidFill>
+                  <a:srgbClr val="E2001A"/>
+                </a:solidFill>
+              </a:rPr>
+              <a:t>BIETET</a:t>
+            </a:r>
+          </a:p>
+          <a:p>
+            <a:pPr>
+              <a:spcBef>
+                <a:spcPts val="200"/>
+              </a:spcBef>
+            </a:pPr>
+            <a:r>
+              <a:rPr sz="1300" b="0">
+                <a:solidFill>
+                  <a:schemeClr val="tx1"/>
+                </a:solidFill>
+              </a:rPr>
+              <a:t>Jeden Abend gerettetes Brot und Gemüse, kostenlos</a:t>
+            </a:r>
+          </a:p>
+        </p:txBody>
+      </p:sp>
+      <p:sp>
+        <p:nvSpPr>
+          <p:cNvPr id="32" name="fact-bar-a"/>
+          <p:cNvSpPr/>
+          <p:nvPr/>
+        </p:nvSpPr>
+        <p:spPr>
+          <a:xfrm>
+            <a:off x="711200" y="3937000"/>
+            <a:ext cx="38100" cy="355600"/>
+          </a:xfrm>
+          <a:prstGeom prst="rect">
+            <a:avLst/>
+          </a:prstGeom>
+          <a:solidFill>
+            <a:srgbClr val="E2001A"/>
+          </a:solidFill>
+          <a:ln>
+            <a:noFill/>
+          </a:ln>
+          <a:effectLst/>
+        </p:spPr>
+        <p:style>
+          <a:lnRef idx="1">
+            <a:schemeClr val="accent1"/>
+          </a:lnRef>
+          <a:fillRef idx="3">
+            <a:schemeClr val="accent1"/>
+          </a:fillRef>
+          <a:effectRef idx="2">
+            <a:schemeClr val="accent1"/>
+          </a:effectRef>
+          <a:fontRef idx="minor">
+            <a:schemeClr val="lt1"/>
+          </a:fontRef>
+        </p:style>
+        <p:txBody>
+          <a:bodyPr rtlCol="0" anchor="ctr"/>
+          <a:lstStyle/>
+          <a:p>
+            <a:pPr algn="ctr"/>
+          </a:p>
+        </p:txBody>
+      </p:sp>
+      <p:sp>
+        <p:nvSpPr>
+          <p:cNvPr id="33" name="fact-a"/>
+          <p:cNvSpPr txBox="1"/>
+          <p:nvPr/>
+        </p:nvSpPr>
+        <p:spPr>
+          <a:xfrm>
+            <a:off x="838200" y="3937000"/>
+            <a:ext cx="3048000" cy="355600"/>
+          </a:xfrm>
+          <a:prstGeom prst="rect">
+            <a:avLst/>
+          </a:prstGeom>
+          <a:noFill/>
+        </p:spPr>
+        <p:txBody>
+          <a:bodyPr wrap="square" anchor="ctr" lIns="0" rIns="0" tIns="0" bIns="0">
+            <a:spAutoFit/>
+          </a:bodyPr>
+          <a:lstStyle/>
+          <a:p>
+            <a:r>
+              <a:rPr sz="900" b="1">
+                <a:solidFill>
+                  <a:srgbClr val="E2001A"/>
+                </a:solidFill>
+              </a:rPr>
+              <a:t>EUROPA  </a:t>
+            </a:r>
+            <a:r>
+              <a:rPr sz="1000" b="0">
+                <a:solidFill>
+                  <a:schemeClr val="tx2"/>
+                </a:solidFill>
+              </a:rPr>
+              <a:t>130 kg Lebensmittelabfall pro Kopf und Jahr (Eurostat, 2023)</a:t>
+            </a:r>
+          </a:p>
+        </p:txBody>
+      </p:sp>
+      <p:sp>
+        <p:nvSpPr>
+          <p:cNvPr id="34" name="!!card-b"/>
+          <p:cNvSpPr/>
+          <p:nvPr/>
+        </p:nvSpPr>
+        <p:spPr>
+          <a:xfrm>
+            <a:off x="5003800" y="1193800"/>
+            <a:ext cx="3683000" cy="3327400"/>
+          </a:xfrm>
+          <a:prstGeom prst="rect">
+            <a:avLst/>
+          </a:prstGeom>
+          <a:solidFill>
+            <a:schemeClr val="bg1"/>
+          </a:solidFill>
+          <a:ln w="9525">
+            <a:solidFill>
+              <a:schemeClr val="accent6"/>
+            </a:solidFill>
+          </a:ln>
+          <a:effectLst/>
+        </p:spPr>
+        <p:style>
+          <a:lnRef idx="1">
+            <a:schemeClr val="accent1"/>
+          </a:lnRef>
+          <a:fillRef idx="3">
+            <a:schemeClr val="accent1"/>
+          </a:fillRef>
+          <a:effectRef idx="2">
+            <a:schemeClr val="accent1"/>
+          </a:effectRef>
+          <a:fontRef idx="minor">
+            <a:schemeClr val="lt1"/>
+          </a:fontRef>
+        </p:style>
+        <p:txBody>
+          <a:bodyPr rtlCol="0" anchor="ctr"/>
+          <a:lstStyle/>
+          <a:p>
+            <a:pPr algn="ctr"/>
+          </a:p>
+        </p:txBody>
+      </p:sp>
+      <p:sp>
+        <p:nvSpPr>
+          <p:cNvPr id="35" name="!!dot-b"/>
+          <p:cNvSpPr/>
+          <p:nvPr/>
+        </p:nvSpPr>
+        <p:spPr>
+          <a:xfrm>
+            <a:off x="5257800" y="1422400"/>
+            <a:ext cx="635000" cy="635000"/>
+          </a:xfrm>
+          <a:prstGeom prst="ellipse">
+            <a:avLst/>
+          </a:prstGeom>
+          <a:solidFill>
+            <a:schemeClr val="tx1"/>
+          </a:solidFill>
+          <a:ln>
+            <a:noFill/>
+          </a:ln>
+          <a:effectLst/>
+        </p:spPr>
+        <p:style>
+          <a:lnRef idx="1">
+            <a:schemeClr val="accent1"/>
+          </a:lnRef>
+          <a:fillRef idx="3">
+            <a:schemeClr val="accent1"/>
+          </a:fillRef>
+          <a:effectRef idx="2">
+            <a:schemeClr val="accent1"/>
+          </a:effectRef>
+          <a:fontRef idx="minor">
+            <a:schemeClr val="lt1"/>
+          </a:fontRef>
+        </p:style>
+        <p:txBody>
+          <a:bodyPr rtlCol="0" anchor="ctr"/>
+          <a:lstStyle/>
+          <a:p>
+            <a:pPr algn="ctr"/>
+          </a:p>
+        </p:txBody>
+      </p:sp>
+      <p:pic>
+        <p:nvPicPr>
+          <p:cNvPr id="36" name="icon-b" descr="image.png"/>
           <p:cNvPicPr>
             <a:picLocks noChangeAspect="1"/>
           </p:cNvPicPr>
@@ -4322,8 +5764,8 @@
         </p:blipFill>
         <p:spPr>
           <a:xfrm>
-            <a:off x="891540" y="1577340"/>
-            <a:ext cx="365760" cy="365760"/>
+            <a:off x="5397500" y="1562100"/>
+            <a:ext cx="355600" cy="355600"/>
           </a:xfrm>
           <a:prstGeom prst="rect">
             <a:avLst/>
@@ -4332,14 +5774,227 @@
       </p:pic>
       <p:sp>
         <p:nvSpPr>
-          <p:cNvPr id="6" name="pp-name-4-0"/>
+          <p:cNvPr id="37" name="name-b"/>
           <p:cNvSpPr txBox="1"/>
           <p:nvPr/>
         </p:nvSpPr>
         <p:spPr>
           <a:xfrm>
-            <a:off x="1600200" y="1417320"/>
-            <a:ext cx="2697480" cy="685800"/>
+            <a:off x="6070600" y="1422400"/>
+            <a:ext cx="2362200" cy="635000"/>
+          </a:xfrm>
+          <a:prstGeom prst="rect">
+            <a:avLst/>
+          </a:prstGeom>
+          <a:noFill/>
+        </p:spPr>
+        <p:txBody>
+          <a:bodyPr wrap="square" anchor="ctr" lIns="0" rIns="0" tIns="0" bIns="0">
+            <a:spAutoFit/>
+          </a:bodyPr>
+          <a:lstStyle/>
+          <a:p>
+            <a:r>
+              <a:rPr sz="1700" b="1">
+                <a:solidFill>
+                  <a:schemeClr val="tx1"/>
+                </a:solidFill>
+              </a:rPr>
+              <a:t>Familie Berger</a:t>
+            </a:r>
+          </a:p>
+          <a:p>
+            <a:r>
+              <a:rPr sz="1100" b="0">
+                <a:solidFill>
+                  <a:schemeClr val="tx2"/>
+                </a:solidFill>
+              </a:rPr>
+              <a:t>Wohnprojekt, 24 Parteien</a:t>
+            </a:r>
+          </a:p>
+        </p:txBody>
+      </p:sp>
+      <p:sp>
+        <p:nvSpPr>
+          <p:cNvPr id="38" name="sucht-b"/>
+          <p:cNvSpPr txBox="1"/>
+          <p:nvPr/>
+        </p:nvSpPr>
+        <p:spPr>
+          <a:xfrm>
+            <a:off x="5257800" y="2260600"/>
+            <a:ext cx="3175000" cy="736600"/>
+          </a:xfrm>
+          <a:prstGeom prst="rect">
+            <a:avLst/>
+          </a:prstGeom>
+          <a:noFill/>
+        </p:spPr>
+        <p:txBody>
+          <a:bodyPr wrap="square" anchor="t" lIns="0" rIns="0" tIns="0" bIns="0">
+            <a:spAutoFit/>
+          </a:bodyPr>
+          <a:lstStyle/>
+          <a:p>
+            <a:r>
+              <a:rPr sz="900" b="1">
+                <a:solidFill>
+                  <a:srgbClr val="E2001A"/>
+                </a:solidFill>
+              </a:rPr>
+              <a:t>SUCHT</a:t>
+            </a:r>
+          </a:p>
+          <a:p>
+            <a:pPr>
+              <a:spcBef>
+                <a:spcPts val="200"/>
+              </a:spcBef>
+            </a:pPr>
+            <a:r>
+              <a:rPr sz="1300" b="1">
+                <a:solidFill>
+                  <a:schemeClr val="tx1"/>
+                </a:solidFill>
+              </a:rPr>
+              <a:t>Mehr Leben im Gemeinschaftsraum und weniger Abfall</a:t>
+            </a:r>
+          </a:p>
+        </p:txBody>
+      </p:sp>
+      <p:sp>
+        <p:nvSpPr>
+          <p:cNvPr id="39" name="bietet-b"/>
+          <p:cNvSpPr txBox="1"/>
+          <p:nvPr/>
+        </p:nvSpPr>
+        <p:spPr>
+          <a:xfrm>
+            <a:off x="5257800" y="3073400"/>
+            <a:ext cx="3175000" cy="736600"/>
+          </a:xfrm>
+          <a:prstGeom prst="rect">
+            <a:avLst/>
+          </a:prstGeom>
+          <a:noFill/>
+        </p:spPr>
+        <p:txBody>
+          <a:bodyPr wrap="square" anchor="t" lIns="0" rIns="0" tIns="0" bIns="0">
+            <a:spAutoFit/>
+          </a:bodyPr>
+          <a:lstStyle/>
+          <a:p>
+            <a:r>
+              <a:rPr sz="900" b="1">
+                <a:solidFill>
+                  <a:srgbClr val="E2001A"/>
+                </a:solidFill>
+              </a:rPr>
+              <a:t>BIETET</a:t>
+            </a:r>
+          </a:p>
+          <a:p>
+            <a:pPr>
+              <a:spcBef>
+                <a:spcPts val="200"/>
+              </a:spcBef>
+            </a:pPr>
+            <a:r>
+              <a:rPr sz="1300" b="0">
+                <a:solidFill>
+                  <a:schemeClr val="tx1"/>
+                </a:solidFill>
+              </a:rPr>
+              <a:t>Platz im Gemeinschaftsraum und Nachbar:innen, die abends abholen</a:t>
+            </a:r>
+          </a:p>
+        </p:txBody>
+      </p:sp>
+      <p:sp>
+        <p:nvSpPr>
+          <p:cNvPr id="40" name="!!match"/>
+          <p:cNvSpPr/>
+          <p:nvPr/>
+        </p:nvSpPr>
+        <p:spPr>
+          <a:xfrm>
+            <a:off x="4292600" y="2692400"/>
+            <a:ext cx="558800" cy="330200"/>
+          </a:xfrm>
+          <a:prstGeom prst="leftRightArrow">
+            <a:avLst/>
+          </a:prstGeom>
+          <a:solidFill>
+            <a:srgbClr val="E2001A"/>
+          </a:solidFill>
+          <a:ln>
+            <a:noFill/>
+          </a:ln>
+          <a:effectLst/>
+        </p:spPr>
+        <p:style>
+          <a:lnRef idx="1">
+            <a:schemeClr val="accent1"/>
+          </a:lnRef>
+          <a:fillRef idx="3">
+            <a:schemeClr val="accent1"/>
+          </a:fillRef>
+          <a:effectRef idx="2">
+            <a:schemeClr val="accent1"/>
+          </a:effectRef>
+          <a:fontRef idx="minor">
+            <a:schemeClr val="lt1"/>
+          </a:fontRef>
+        </p:style>
+        <p:txBody>
+          <a:bodyPr rtlCol="0" anchor="ctr"/>
+          <a:lstStyle/>
+          <a:p>
+            <a:pPr algn="ctr"/>
+          </a:p>
+        </p:txBody>
+      </p:sp>
+    </p:spTree>
+  </p:cSld>
+  <p:clrMapOvr>
+    <a:masterClrMapping/>
+  </p:clrMapOvr>
+  <mc:AlternateContent xmlns:mc="http://schemas.openxmlformats.org/markup-compatibility/2006">
+    <mc:Choice xmlns:p159="http://schemas.microsoft.com/office/powerpoint/2015/09/main" Requires="p159">
+      <p:transition xmlns:p14="http://schemas.microsoft.com/office/powerpoint/2010/main" spd="slow" p14:dur="900">
+        <p159:morph option="byObject"/>
+      </p:transition>
+    </mc:Choice>
+    <mc:Fallback>
+      <p:transition spd="slow">
+        <p:fade/>
+      </p:transition>
+    </mc:Fallback>
+  </mc:AlternateContent>
+</p:sld>
+</file>
+
+<file path=ppt/slides/slide13.xml><?xml version="1.0" encoding="utf-8"?>
+<p:sld xmlns:a="http://schemas.openxmlformats.org/drawingml/2006/main" xmlns:p="http://schemas.openxmlformats.org/presentationml/2006/main" xmlns:r="http://schemas.openxmlformats.org/officeDocument/2006/relationships">
+  <p:cSld>
+    <p:spTree>
+      <p:nvGrpSpPr>
+        <p:cNvPr id="1" name=""/>
+        <p:cNvGrpSpPr/>
+        <p:nvPr/>
+      </p:nvGrpSpPr>
+      <p:grpSpPr/>
+      <p:sp>
+        <p:nvSpPr>
+          <p:cNvPr id="2" name="title"/>
+          <p:cNvSpPr txBox="1"/>
+          <p:nvPr/>
+        </p:nvSpPr>
+        <p:spPr>
+          <a:xfrm>
+            <a:off x="457200" y="320040"/>
+            <a:ext cx="8229600" cy="685800"/>
           </a:xfrm>
           <a:prstGeom prst="rect">
             <a:avLst/>
@@ -4348,306 +6003,351 @@
           <a:ln/>
         </p:spPr>
         <p:txBody>
-          <a:bodyPr wrap="square" lIns="0" tIns="0" rIns="0" bIns="0" rtlCol="0" anchor="ctr"/>
-          <a:lstStyle/>
-          <a:p>
-            <a:pPr indent="0" marL="0">
+          <a:bodyPr wrap="square" lIns="0" tIns="0" rIns="0" bIns="0" rtlCol="0" anchor="t"/>
+          <a:lstStyle/>
+          <a:p>
+            <a:pPr algn="l" indent="0" marL="0">
               <a:buNone/>
             </a:pPr>
             <a:r>
-              <a:rPr lang="en-US" sz="1800" b="1" dirty="0">
+              <a:rPr lang="en-US" sz="3000" b="1" dirty="0">
                 <a:solidFill>
                   <a:schemeClr val="tx1"/>
                 </a:solidFill>
               </a:rPr>
-              <a:t>Familie Berger</a:t>
-            </a:r>
-            <a:endParaRPr lang="en-US" sz="1800" dirty="0"/>
-          </a:p>
-          <a:p>
-            <a:pPr indent="0" marL="0">
-              <a:buNone/>
-            </a:pPr>
-            <a:r>
-              <a:rPr lang="en-US" sz="1200" dirty="0">
+              <a:t>So sieht es aus</a:t>
+            </a:r>
+            <a:endParaRPr lang="en-US" sz="3000" dirty="0"/>
+          </a:p>
+        </p:txBody>
+      </p:sp>
+      <p:sp>
+        <p:nvSpPr>
+          <p:cNvPr id="3" name="!!phone-0"/>
+          <p:cNvSpPr/>
+          <p:nvPr/>
+        </p:nvSpPr>
+        <p:spPr>
+          <a:xfrm>
+            <a:off x="742950" y="1085850"/>
+            <a:ext cx="2171700" cy="3162300"/>
+          </a:xfrm>
+          <a:prstGeom prst="rect">
+            <a:avLst/>
+          </a:prstGeom>
+          <a:solidFill>
+            <a:srgbClr val="111111"/>
+          </a:solidFill>
+          <a:ln>
+            <a:noFill/>
+          </a:ln>
+          <a:effectLst/>
+        </p:spPr>
+        <p:style>
+          <a:lnRef idx="1">
+            <a:schemeClr val="accent1"/>
+          </a:lnRef>
+          <a:fillRef idx="3">
+            <a:schemeClr val="accent1"/>
+          </a:fillRef>
+          <a:effectRef idx="2">
+            <a:schemeClr val="accent1"/>
+          </a:effectRef>
+          <a:fontRef idx="minor">
+            <a:schemeClr val="lt1"/>
+          </a:fontRef>
+        </p:style>
+        <p:txBody>
+          <a:bodyPr rtlCol="0" anchor="ctr"/>
+          <a:lstStyle/>
+          <a:p>
+            <a:pPr algn="ctr"/>
+          </a:p>
+        </p:txBody>
+      </p:sp>
+      <p:sp>
+        <p:nvSpPr>
+          <p:cNvPr id="4" name="cap-0"/>
+          <p:cNvSpPr txBox="1"/>
+          <p:nvPr/>
+        </p:nvSpPr>
+        <p:spPr>
+          <a:xfrm>
+            <a:off x="762000" y="4318000"/>
+            <a:ext cx="2133600" cy="381000"/>
+          </a:xfrm>
+          <a:prstGeom prst="rect">
+            <a:avLst/>
+          </a:prstGeom>
+          <a:noFill/>
+        </p:spPr>
+        <p:txBody>
+          <a:bodyPr wrap="square" anchor="t" lIns="0" rIns="0" tIns="0" bIns="0">
+            <a:spAutoFit/>
+          </a:bodyPr>
+          <a:lstStyle/>
+          <a:p>
+            <a:r>
+              <a:rPr sz="1100" b="1">
+                <a:solidFill>
+                  <a:schemeClr val="tx1"/>
+                </a:solidFill>
+              </a:rPr>
+              <a:t>Initiativen  </a:t>
+            </a:r>
+            <a:r>
+              <a:rPr sz="1000" b="0">
                 <a:solidFill>
                   <a:schemeClr val="tx2"/>
                 </a:solidFill>
               </a:rPr>
-              <a:t>Wohnprojekt, 24 Parteien</a:t>
-            </a:r>
-            <a:endParaRPr lang="en-US" sz="1800" dirty="0"/>
-          </a:p>
-        </p:txBody>
-      </p:sp>
-      <p:sp>
-        <p:nvSpPr>
-          <p:cNvPr id="7" name="pp-sit-4-0"/>
+              <a:t>mit Antwortfrist</a:t>
+            </a:r>
+          </a:p>
+        </p:txBody>
+      </p:sp>
+      <p:sp>
+        <p:nvSpPr>
+          <p:cNvPr id="5" name="!!phone-1"/>
+          <p:cNvSpPr/>
+          <p:nvPr/>
+        </p:nvSpPr>
+        <p:spPr>
+          <a:xfrm>
+            <a:off x="3486150" y="1085850"/>
+            <a:ext cx="2171700" cy="3162300"/>
+          </a:xfrm>
+          <a:prstGeom prst="rect">
+            <a:avLst/>
+          </a:prstGeom>
+          <a:solidFill>
+            <a:srgbClr val="111111"/>
+          </a:solidFill>
+          <a:ln>
+            <a:noFill/>
+          </a:ln>
+          <a:effectLst/>
+        </p:spPr>
+        <p:style>
+          <a:lnRef idx="1">
+            <a:schemeClr val="accent1"/>
+          </a:lnRef>
+          <a:fillRef idx="3">
+            <a:schemeClr val="accent1"/>
+          </a:fillRef>
+          <a:effectRef idx="2">
+            <a:schemeClr val="accent1"/>
+          </a:effectRef>
+          <a:fontRef idx="minor">
+            <a:schemeClr val="lt1"/>
+          </a:fontRef>
+        </p:style>
+        <p:txBody>
+          <a:bodyPr rtlCol="0" anchor="ctr"/>
+          <a:lstStyle/>
+          <a:p>
+            <a:pPr algn="ctr"/>
+          </a:p>
+        </p:txBody>
+      </p:sp>
+      <p:sp>
+        <p:nvSpPr>
+          <p:cNvPr id="6" name="cap-1"/>
           <p:cNvSpPr txBox="1"/>
           <p:nvPr/>
         </p:nvSpPr>
         <p:spPr>
           <a:xfrm>
-            <a:off x="731520" y="2331720"/>
-            <a:ext cx="3474720" cy="640080"/>
+            <a:off x="3505200" y="4318000"/>
+            <a:ext cx="2133600" cy="381000"/>
           </a:xfrm>
           <a:prstGeom prst="rect">
             <a:avLst/>
           </a:prstGeom>
           <a:noFill/>
-          <a:ln/>
-        </p:spPr>
-        <p:txBody>
-          <a:bodyPr wrap="square" lIns="0" tIns="0" rIns="0" bIns="0" rtlCol="0" anchor="t"/>
-          <a:lstStyle/>
-          <a:p>
-            <a:pPr indent="0" marL="0">
-              <a:buNone/>
-            </a:pPr>
-            <a:r>
-              <a:rPr lang="en-US" sz="1500" b="1" dirty="0">
+        </p:spPr>
+        <p:txBody>
+          <a:bodyPr wrap="square" anchor="t" lIns="0" rIns="0" tIns="0" bIns="0">
+            <a:spAutoFit/>
+          </a:bodyPr>
+          <a:lstStyle/>
+          <a:p>
+            <a:r>
+              <a:rPr sz="1100" b="1">
                 <a:solidFill>
                   <a:schemeClr val="tx1"/>
                 </a:solidFill>
               </a:rPr>
-              <a:t>Putzplan, Gemeinschaftsraum, Beschlüsse.</a:t>
-            </a:r>
-            <a:endParaRPr lang="en-US" sz="1500" dirty="0"/>
-          </a:p>
-        </p:txBody>
-      </p:sp>
-      <p:sp>
-        <p:nvSpPr>
-          <p:cNvPr id="8" name="pp-sol-4-0"/>
+              <a:t>Marktplatz  </a:t>
+            </a:r>
+            <a:r>
+              <a:rPr sz="1000" b="0">
+                <a:solidFill>
+                  <a:schemeClr val="tx2"/>
+                </a:solidFill>
+              </a:rPr>
+              <a:t>mit Filtern und Karte</a:t>
+            </a:r>
+          </a:p>
+        </p:txBody>
+      </p:sp>
+      <p:sp>
+        <p:nvSpPr>
+          <p:cNvPr id="7" name="!!phone-2"/>
+          <p:cNvSpPr/>
+          <p:nvPr/>
+        </p:nvSpPr>
+        <p:spPr>
+          <a:xfrm>
+            <a:off x="6229350" y="1085850"/>
+            <a:ext cx="2171700" cy="3162300"/>
+          </a:xfrm>
+          <a:prstGeom prst="rect">
+            <a:avLst/>
+          </a:prstGeom>
+          <a:solidFill>
+            <a:srgbClr val="111111"/>
+          </a:solidFill>
+          <a:ln>
+            <a:noFill/>
+          </a:ln>
+          <a:effectLst/>
+        </p:spPr>
+        <p:style>
+          <a:lnRef idx="1">
+            <a:schemeClr val="accent1"/>
+          </a:lnRef>
+          <a:fillRef idx="3">
+            <a:schemeClr val="accent1"/>
+          </a:fillRef>
+          <a:effectRef idx="2">
+            <a:schemeClr val="accent1"/>
+          </a:effectRef>
+          <a:fontRef idx="minor">
+            <a:schemeClr val="lt1"/>
+          </a:fontRef>
+        </p:style>
+        <p:txBody>
+          <a:bodyPr rtlCol="0" anchor="ctr"/>
+          <a:lstStyle/>
+          <a:p>
+            <a:pPr algn="ctr"/>
+          </a:p>
+        </p:txBody>
+      </p:sp>
+      <p:sp>
+        <p:nvSpPr>
+          <p:cNvPr id="8" name="cap-2"/>
           <p:cNvSpPr txBox="1"/>
           <p:nvPr/>
         </p:nvSpPr>
         <p:spPr>
           <a:xfrm>
-            <a:off x="731520" y="3017520"/>
-            <a:ext cx="3474720" cy="1371600"/>
+            <a:off x="6248400" y="4318000"/>
+            <a:ext cx="2133600" cy="381000"/>
           </a:xfrm>
           <a:prstGeom prst="rect">
             <a:avLst/>
           </a:prstGeom>
           <a:noFill/>
-          <a:ln/>
-        </p:spPr>
-        <p:txBody>
-          <a:bodyPr wrap="square" lIns="0" tIns="0" rIns="0" bIns="0" rtlCol="0" anchor="t"/>
-          <a:lstStyle/>
-          <a:p>
-            <a:pPr indent="0" marL="0">
-              <a:buNone/>
-            </a:pPr>
-            <a:r>
-              <a:rPr lang="en-US" sz="1400" dirty="0">
+        </p:spPr>
+        <p:txBody>
+          <a:bodyPr wrap="square" anchor="t" lIns="0" rIns="0" tIns="0" bIns="0">
+            <a:spAutoFit/>
+          </a:bodyPr>
+          <a:lstStyle/>
+          <a:p>
+            <a:r>
+              <a:rPr sz="1100" b="1">
                 <a:solidFill>
                   <a:schemeClr val="tx1"/>
                 </a:solidFill>
               </a:rPr>
-              <a:t>Beschlüsse als Ziele mit Abstimmung, Dienste als Aufgaben, Protokoll mit Versionen, Raum nur für die Gruppe sichtbar.</a:t>
-            </a:r>
-            <a:endParaRPr lang="en-US" sz="1400" dirty="0"/>
-          </a:p>
-        </p:txBody>
-      </p:sp>
-      <p:sp>
-        <p:nvSpPr>
-          <p:cNvPr id="9" name="persona-4-1"/>
-          <p:cNvSpPr/>
-          <p:nvPr/>
-        </p:nvSpPr>
-        <p:spPr>
-          <a:xfrm>
-            <a:off x="4663440" y="1188720"/>
-            <a:ext cx="4023360" cy="3291840"/>
-          </a:xfrm>
-          <a:prstGeom prst="rect">
-            <a:avLst/>
-          </a:prstGeom>
-          <a:solidFill>
-            <a:schemeClr val="bg1"/>
-          </a:solidFill>
-          <a:ln w="9525">
-            <a:solidFill>
-              <a:schemeClr val="accent6"/>
-            </a:solidFill>
-            <a:prstDash val="solid"/>
-          </a:ln>
-        </p:spPr>
-      </p:sp>
-      <p:sp>
-        <p:nvSpPr>
-          <p:cNvPr id="10" name="pp-dot-4-1"/>
-          <p:cNvSpPr/>
-          <p:nvPr/>
-        </p:nvSpPr>
-        <p:spPr>
-          <a:xfrm>
-            <a:off x="4937760" y="1417320"/>
-            <a:ext cx="685800" cy="685800"/>
-          </a:xfrm>
-          <a:prstGeom prst="ellipse">
-            <a:avLst/>
-          </a:prstGeom>
-          <a:solidFill>
-            <a:schemeClr val="tx1"/>
-          </a:solidFill>
-          <a:ln w="12700">
-            <a:solidFill>
-              <a:schemeClr val="tx1"/>
-            </a:solidFill>
-            <a:prstDash val="solid"/>
-          </a:ln>
-        </p:spPr>
+              <a:t>Gruppen  </a:t>
+            </a:r>
+            <a:r>
+              <a:rPr sz="1000" b="0">
+                <a:solidFill>
+                  <a:schemeClr val="tx2"/>
+                </a:solidFill>
+              </a:rPr>
+              <a:t>im Viertel</a:t>
+            </a:r>
+          </a:p>
+        </p:txBody>
       </p:sp>
       <p:pic>
         <p:nvPicPr>
-          <p:cNvPr id="11" name="pp-icon-4-1" descr="preencoded.png">    </p:cNvPr>
+          <p:cNvPr id="9" name="!!img-initiative" descr="initiative.jpg"/>
           <p:cNvPicPr>
             <a:picLocks noChangeAspect="1"/>
           </p:cNvPicPr>
           <p:nvPr/>
         </p:nvPicPr>
         <p:blipFill>
-          <a:blip r:embed="rId2"/>
+          <a:blip r:embed="rId3"/>
           <a:stretch>
             <a:fillRect/>
           </a:stretch>
         </p:blipFill>
         <p:spPr>
           <a:xfrm>
-            <a:off x="5097780" y="1577340"/>
-            <a:ext cx="365760" cy="365760"/>
+            <a:off x="762000" y="1104900"/>
+            <a:ext cx="2133600" cy="3124200"/>
           </a:xfrm>
           <a:prstGeom prst="rect">
             <a:avLst/>
           </a:prstGeom>
         </p:spPr>
       </p:pic>
-      <p:sp>
-        <p:nvSpPr>
-          <p:cNvPr id="12" name="pp-name-4-1"/>
-          <p:cNvSpPr txBox="1"/>
-          <p:nvPr/>
-        </p:nvSpPr>
-        <p:spPr>
-          <a:xfrm>
-            <a:off x="5806440" y="1417320"/>
-            <a:ext cx="2697480" cy="685800"/>
-          </a:xfrm>
-          <a:prstGeom prst="rect">
-            <a:avLst/>
-          </a:prstGeom>
-          <a:noFill/>
-          <a:ln/>
-        </p:spPr>
-        <p:txBody>
-          <a:bodyPr wrap="square" lIns="0" tIns="0" rIns="0" bIns="0" rtlCol="0" anchor="ctr"/>
-          <a:lstStyle/>
-          <a:p>
-            <a:pPr indent="0" marL="0">
-              <a:buNone/>
-            </a:pPr>
-            <a:r>
-              <a:rPr lang="en-US" sz="1800" b="1" dirty="0">
-                <a:solidFill>
-                  <a:schemeClr val="tx1"/>
-                </a:solidFill>
-              </a:rPr>
-              <a:t>Clara, 31</a:t>
-            </a:r>
-            <a:endParaRPr lang="en-US" sz="1800" dirty="0"/>
-          </a:p>
-          <a:p>
-            <a:pPr indent="0" marL="0">
-              <a:buNone/>
-            </a:pPr>
-            <a:r>
-              <a:rPr lang="en-US" sz="1200" dirty="0">
-                <a:solidFill>
-                  <a:schemeClr val="tx2"/>
-                </a:solidFill>
-              </a:rPr>
-              <a:t>Foodsharing</a:t>
-            </a:r>
-            <a:endParaRPr lang="en-US" sz="1800" dirty="0"/>
-          </a:p>
-        </p:txBody>
-      </p:sp>
-      <p:sp>
-        <p:nvSpPr>
-          <p:cNvPr id="13" name="pp-sit-4-1"/>
-          <p:cNvSpPr txBox="1"/>
-          <p:nvPr/>
-        </p:nvSpPr>
-        <p:spPr>
-          <a:xfrm>
-            <a:off x="4937760" y="2331720"/>
-            <a:ext cx="3474720" cy="640080"/>
-          </a:xfrm>
-          <a:prstGeom prst="rect">
-            <a:avLst/>
-          </a:prstGeom>
-          <a:noFill/>
-          <a:ln/>
-        </p:spPr>
-        <p:txBody>
-          <a:bodyPr wrap="square" lIns="0" tIns="0" rIns="0" bIns="0" rtlCol="0" anchor="t"/>
-          <a:lstStyle/>
-          <a:p>
-            <a:pPr indent="0" marL="0">
-              <a:buNone/>
-            </a:pPr>
-            <a:r>
-              <a:rPr lang="en-US" sz="1500" b="1" dirty="0">
-                <a:solidFill>
-                  <a:schemeClr val="tx1"/>
-                </a:solidFill>
-              </a:rPr>
-              <a:t>Abholer:innen fallen kurzfristig aus.</a:t>
-            </a:r>
-            <a:endParaRPr lang="en-US" sz="1500" dirty="0"/>
-          </a:p>
-        </p:txBody>
-      </p:sp>
-      <p:sp>
-        <p:nvSpPr>
-          <p:cNvPr id="14" name="pp-sol-4-1"/>
-          <p:cNvSpPr txBox="1"/>
-          <p:nvPr/>
-        </p:nvSpPr>
-        <p:spPr>
-          <a:xfrm>
-            <a:off x="4937760" y="3017520"/>
-            <a:ext cx="3474720" cy="838200"/>
-          </a:xfrm>
-          <a:prstGeom prst="rect">
-            <a:avLst/>
-          </a:prstGeom>
-          <a:noFill/>
-          <a:ln/>
-        </p:spPr>
-        <p:txBody>
-          <a:bodyPr wrap="square" lIns="0" tIns="0" rIns="0" bIns="0" rtlCol="0" anchor="t"/>
-          <a:lstStyle/>
-          <a:p>
-            <a:pPr indent="0" marL="0">
-              <a:buNone/>
-            </a:pPr>
-            <a:r>
-              <a:rPr lang="en-US" sz="1400" dirty="0">
-                <a:solidFill>
-                  <a:schemeClr val="tx1"/>
-                </a:solidFill>
-              </a:rPr>
-              <a:t>Abholungen als Aufgaben, Brot gratis auf der Karte, per „Weitergeben“ sofort im Nachbarschafts-Chat.</a:t>
-            </a:r>
-            <a:endParaRPr lang="en-US" sz="1400" dirty="0"/>
-          </a:p>
-        </p:txBody>
-      </p:sp>
+      <p:pic>
+        <p:nvPicPr>
+          <p:cNvPr id="10" name="!!img-market" descr="market.jpg"/>
+          <p:cNvPicPr>
+            <a:picLocks noChangeAspect="1"/>
+          </p:cNvPicPr>
+          <p:nvPr/>
+        </p:nvPicPr>
+        <p:blipFill>
+          <a:blip r:embed="rId4"/>
+          <a:stretch>
+            <a:fillRect/>
+          </a:stretch>
+        </p:blipFill>
+        <p:spPr>
+          <a:xfrm>
+            <a:off x="3505200" y="1104900"/>
+            <a:ext cx="2133600" cy="3124200"/>
+          </a:xfrm>
+          <a:prstGeom prst="rect">
+            <a:avLst/>
+          </a:prstGeom>
+        </p:spPr>
+      </p:pic>
+      <p:pic>
+        <p:nvPicPr>
+          <p:cNvPr id="11" name="!!img-groups" descr="groups.jpg"/>
+          <p:cNvPicPr>
+            <a:picLocks noChangeAspect="1"/>
+          </p:cNvPicPr>
+          <p:nvPr/>
+        </p:nvPicPr>
+        <p:blipFill>
+          <a:blip r:embed="rId5"/>
+          <a:stretch>
+            <a:fillRect/>
+          </a:stretch>
+        </p:blipFill>
+        <p:spPr>
+          <a:xfrm>
+            <a:off x="6248400" y="1104900"/>
+            <a:ext cx="2133600" cy="3124200"/>
+          </a:xfrm>
+          <a:prstGeom prst="rect">
+            <a:avLst/>
+          </a:prstGeom>
+        </p:spPr>
+      </p:pic>
       <p:sp>
         <p:nvSpPr>
           <p:cNvPr id="25" name="Slide Number Placeholder 0"/>
@@ -4687,94 +6387,9 @@
             <a:pPr algn="l"/>
             <a:fld id="{F7021451-1387-4CA6-816F-3879F97B5CBC}" type="slidenum">
               <a:rPr b="0" lang="en-US"/>
-              <a:t>11</a:t>
+              <a:t>2</a:t>
             </a:fld>
             <a:endParaRPr lang="en-US"/>
-          </a:p>
-        </p:txBody>
-      </p:sp>
-      <p:sp>
-        <p:nvSpPr>
-          <p:cNvPr id="26" name="fact-bar-4-1"/>
-          <p:cNvSpPr/>
-          <p:nvPr/>
-        </p:nvSpPr>
-        <p:spPr>
-          <a:xfrm>
-            <a:off x="4937760" y="3911600"/>
-            <a:ext cx="38100" cy="482600"/>
-          </a:xfrm>
-          <a:prstGeom prst="rect">
-            <a:avLst/>
-          </a:prstGeom>
-          <a:solidFill>
-            <a:srgbClr val="E2001A"/>
-          </a:solidFill>
-          <a:ln>
-            <a:noFill/>
-          </a:ln>
-          <a:effectLst/>
-        </p:spPr>
-        <p:style>
-          <a:lnRef idx="1">
-            <a:schemeClr val="accent1"/>
-          </a:lnRef>
-          <a:fillRef idx="3">
-            <a:schemeClr val="accent1"/>
-          </a:fillRef>
-          <a:effectRef idx="2">
-            <a:schemeClr val="accent1"/>
-          </a:effectRef>
-          <a:fontRef idx="minor">
-            <a:schemeClr val="lt1"/>
-          </a:fontRef>
-        </p:style>
-        <p:txBody>
-          <a:bodyPr rtlCol="0" anchor="ctr"/>
-          <a:lstStyle/>
-          <a:p>
-            <a:pPr algn="ctr"/>
-          </a:p>
-        </p:txBody>
-      </p:sp>
-      <p:sp>
-        <p:nvSpPr>
-          <p:cNvPr id="27" name="fact-4-1"/>
-          <p:cNvSpPr txBox="1"/>
-          <p:nvPr/>
-        </p:nvSpPr>
-        <p:spPr>
-          <a:xfrm>
-            <a:off x="5064760" y="3911600"/>
-            <a:ext cx="3347720" cy="482600"/>
-          </a:xfrm>
-          <a:prstGeom prst="rect">
-            <a:avLst/>
-          </a:prstGeom>
-          <a:noFill/>
-        </p:spPr>
-        <p:txBody>
-          <a:bodyPr wrap="square" lIns="0" rIns="0" tIns="0" bIns="0">
-            <a:spAutoFit/>
-          </a:bodyPr>
-          <a:lstStyle/>
-          <a:p>
-            <a:r>
-              <a:rPr sz="900" b="1">
-                <a:solidFill>
-                  <a:srgbClr val="E2001A"/>
-                </a:solidFill>
-              </a:rPr>
-              <a:t>EUROPA  </a:t>
-            </a:r>
-            <a:r>
-              <a:rPr sz="1000">
-                <a:solidFill>
-                  <a:srgbClr val="555555"/>
-                </a:solidFill>
-              </a:rPr>
-              <a:t>58 Mio. Tonnen Lebensmittelabfall im Jahr, 130 kg pro Kopf (Eurostat, 2023)</a:t>
-            </a:r>
           </a:p>
         </p:txBody>
       </p:sp>
@@ -4783,10 +6398,22 @@
   <p:clrMapOvr>
     <a:masterClrMapping/>
   </p:clrMapOvr>
+  <mc:AlternateContent xmlns:mc="http://schemas.openxmlformats.org/markup-compatibility/2006">
+    <mc:Choice xmlns:p159="http://schemas.microsoft.com/office/powerpoint/2015/09/main" Requires="p159">
+      <p:transition xmlns:p14="http://schemas.microsoft.com/office/powerpoint/2010/main" spd="slow" p14:dur="900">
+        <p159:morph option="byObject"/>
+      </p:transition>
+    </mc:Choice>
+    <mc:Fallback>
+      <p:transition spd="slow">
+        <p:fade/>
+      </p:transition>
+    </mc:Fallback>
+  </mc:AlternateContent>
 </p:sld>
 </file>
 
-<file path=ppt/slides/slide12.xml><?xml version="1.0" encoding="utf-8"?>
+<file path=ppt/slides/slide14.xml><?xml version="1.0" encoding="utf-8"?>
 <p:sld xmlns:a="http://schemas.openxmlformats.org/drawingml/2006/main" xmlns:r="http://schemas.openxmlformats.org/officeDocument/2006/relationships" xmlns:p="http://schemas.openxmlformats.org/presentationml/2006/main">
   <p:cSld name="Slide 12">
     <p:spTree>
@@ -5246,7 +6873,7 @@
                             <a:schemeClr val="tx1"/>
                           </a:solidFill>
                         </a:rPr>
-                        <a:t>Werbung, Tracking</a:t>
+                        <a:t>Tracking</a:t>
                       </a:r>
                       <a:endParaRPr lang="en-US" sz="1100" dirty="0"/>
                     </a:p>
@@ -5307,7 +6934,7 @@
                             <a:schemeClr val="tx1"/>
                           </a:solidFill>
                         </a:rPr>
-                        <a:t>keine</a:t>
+                        <a:t>keins</a:t>
                       </a:r>
                       <a:endParaRPr lang="en-US" sz="1100" dirty="0"/>
                     </a:p>
@@ -7493,10 +9120,22 @@
   <p:clrMapOvr>
     <a:masterClrMapping/>
   </p:clrMapOvr>
+  <mc:AlternateContent xmlns:mc="http://schemas.openxmlformats.org/markup-compatibility/2006">
+    <mc:Choice xmlns:p159="http://schemas.microsoft.com/office/powerpoint/2015/09/main" Requires="p159">
+      <p:transition xmlns:p14="http://schemas.microsoft.com/office/powerpoint/2010/main" spd="slow" p14:dur="900">
+        <p159:morph option="byObject"/>
+      </p:transition>
+    </mc:Choice>
+    <mc:Fallback>
+      <p:transition spd="slow">
+        <p:fade/>
+      </p:transition>
+    </mc:Fallback>
+  </mc:AlternateContent>
 </p:sld>
 </file>
 
-<file path=ppt/slides/slide13.xml><?xml version="1.0" encoding="utf-8"?>
+<file path=ppt/slides/slide15.xml><?xml version="1.0" encoding="utf-8"?>
 <p:sld xmlns:a="http://schemas.openxmlformats.org/drawingml/2006/main" xmlns:r="http://schemas.openxmlformats.org/officeDocument/2006/relationships" xmlns:p="http://schemas.openxmlformats.org/presentationml/2006/main">
   <p:cSld name="Slide 13">
     <p:spTree>
@@ -7615,7 +9254,7 @@
                   <a:schemeClr val="accent3"/>
                 </a:solidFill>
               </a:rPr>
-              <a:t>Werbung und Tracking</a:t>
+              <a:t>Tracking und Datenverkauf</a:t>
             </a:r>
             <a:endParaRPr lang="en-US" sz="1600" dirty="0"/>
           </a:p>
@@ -7834,66 +9473,6 @@
               <a:t>offener Code (AGPL)</a:t>
             </a:r>
             <a:endParaRPr lang="en-US" sz="1600" dirty="0"/>
-          </a:p>
-        </p:txBody>
-      </p:sp>
-      <p:sp>
-        <p:nvSpPr>
-          <p:cNvPr id="11" name="Text 0"/>
-          <p:cNvSpPr/>
-          <p:nvPr>
-            <p:ph idx="100" type="title" hasCustomPrompt="1"/>
-          </p:nvPr>
-        </p:nvSpPr>
-        <p:spPr>
-          <a:xfrm>
-            <a:off x="548640" y="1737360"/>
-            <a:ext cx="8046720" cy="914400"/>
-          </a:xfrm>
-          <a:prstGeom prst="rect">
-            <a:avLst/>
-          </a:prstGeom>
-          <a:noFill/>
-          <a:ln/>
-        </p:spPr>
-        <p:txBody>
-          <a:bodyPr wrap="square" lIns="0" tIns="0" rIns="0" bIns="0" rtlCol="0"/>
-          <a:lstStyle/>
-          <a:p>
-            <a:pPr algn="l" indent="0" marL="0">
-              <a:buNone/>
-            </a:pPr>
-            <a:endParaRPr lang="en-US" sz="4000" dirty="0"/>
-          </a:p>
-        </p:txBody>
-      </p:sp>
-      <p:sp>
-        <p:nvSpPr>
-          <p:cNvPr id="12" name="Text 0"/>
-          <p:cNvSpPr/>
-          <p:nvPr>
-            <p:ph idx="101" type="body" hasCustomPrompt="1"/>
-          </p:nvPr>
-        </p:nvSpPr>
-        <p:spPr>
-          <a:xfrm>
-            <a:off x="548640" y="2743200"/>
-            <a:ext cx="7315200" cy="822960"/>
-          </a:xfrm>
-          <a:prstGeom prst="rect">
-            <a:avLst/>
-          </a:prstGeom>
-          <a:noFill/>
-          <a:ln/>
-        </p:spPr>
-        <p:txBody>
-          <a:bodyPr wrap="square" lIns="0" tIns="0" rIns="0" bIns="0" rtlCol="0" anchor="t"/>
-          <a:lstStyle/>
-          <a:p>
-            <a:pPr algn="l" indent="0" marL="0">
-              <a:buNone/>
-            </a:pPr>
-            <a:endParaRPr lang="en-US" sz="1800" dirty="0"/>
           </a:p>
         </p:txBody>
       </p:sp>
@@ -7947,10 +9526,653 @@
   <p:clrMapOvr>
     <a:masterClrMapping/>
   </p:clrMapOvr>
+  <mc:AlternateContent xmlns:mc="http://schemas.openxmlformats.org/markup-compatibility/2006">
+    <mc:Choice xmlns:p159="http://schemas.microsoft.com/office/powerpoint/2015/09/main" Requires="p159">
+      <p:transition xmlns:p14="http://schemas.microsoft.com/office/powerpoint/2010/main" spd="slow" p14:dur="900">
+        <p159:morph option="byObject"/>
+      </p:transition>
+    </mc:Choice>
+    <mc:Fallback>
+      <p:transition spd="slow">
+        <p:fade/>
+      </p:transition>
+    </mc:Fallback>
+  </mc:AlternateContent>
 </p:sld>
 </file>
 
-<file path=ppt/slides/slide14.xml><?xml version="1.0" encoding="utf-8"?>
+<file path=ppt/slides/slide16.xml><?xml version="1.0" encoding="utf-8"?>
+<p:sld xmlns:a="http://schemas.openxmlformats.org/drawingml/2006/main" xmlns:p="http://schemas.openxmlformats.org/presentationml/2006/main" xmlns:r="http://schemas.openxmlformats.org/officeDocument/2006/relationships">
+  <p:cSld>
+    <p:spTree>
+      <p:nvGrpSpPr>
+        <p:cNvPr id="1" name=""/>
+        <p:cNvGrpSpPr/>
+        <p:nvPr/>
+      </p:nvGrpSpPr>
+      <p:grpSpPr/>
+      <p:sp>
+        <p:nvSpPr>
+          <p:cNvPr id="2" name="title"/>
+          <p:cNvSpPr txBox="1"/>
+          <p:nvPr/>
+        </p:nvSpPr>
+        <p:spPr>
+          <a:xfrm>
+            <a:off x="457200" y="320040"/>
+            <a:ext cx="8229600" cy="685800"/>
+          </a:xfrm>
+          <a:prstGeom prst="rect">
+            <a:avLst/>
+          </a:prstGeom>
+          <a:noFill/>
+          <a:ln/>
+        </p:spPr>
+        <p:txBody>
+          <a:bodyPr wrap="square" lIns="0" tIns="0" rIns="0" bIns="0" rtlCol="0" anchor="t"/>
+          <a:lstStyle/>
+          <a:p>
+            <a:pPr algn="l" indent="0" marL="0">
+              <a:buNone/>
+            </a:pPr>
+            <a:r>
+              <a:rPr lang="en-US" sz="3000" b="1" dirty="0">
+                <a:solidFill>
+                  <a:schemeClr val="tx1"/>
+                </a:solidFill>
+              </a:rPr>
+              <a:t>Gemeinwohl statt Gewinn</a:t>
+            </a:r>
+            <a:endParaRPr lang="en-US" sz="3000" dirty="0"/>
+          </a:p>
+        </p:txBody>
+      </p:sp>
+      <p:sp>
+        <p:nvSpPr>
+          <p:cNvPr id="3" name="!!fin-card-0"/>
+          <p:cNvSpPr/>
+          <p:nvPr/>
+        </p:nvSpPr>
+        <p:spPr>
+          <a:xfrm>
+            <a:off x="457200" y="1193800"/>
+            <a:ext cx="2641600" cy="2159000"/>
+          </a:xfrm>
+          <a:prstGeom prst="rect">
+            <a:avLst/>
+          </a:prstGeom>
+          <a:solidFill>
+            <a:schemeClr val="bg1"/>
+          </a:solidFill>
+          <a:ln w="9525">
+            <a:solidFill>
+              <a:schemeClr val="accent6"/>
+            </a:solidFill>
+          </a:ln>
+          <a:effectLst/>
+        </p:spPr>
+        <p:style>
+          <a:lnRef idx="1">
+            <a:schemeClr val="accent1"/>
+          </a:lnRef>
+          <a:fillRef idx="3">
+            <a:schemeClr val="accent1"/>
+          </a:fillRef>
+          <a:effectRef idx="2">
+            <a:schemeClr val="accent1"/>
+          </a:effectRef>
+          <a:fontRef idx="minor">
+            <a:schemeClr val="lt1"/>
+          </a:fontRef>
+        </p:style>
+        <p:txBody>
+          <a:bodyPr rtlCol="0" anchor="ctr"/>
+          <a:lstStyle/>
+          <a:p>
+            <a:pPr algn="ctr"/>
+          </a:p>
+        </p:txBody>
+      </p:sp>
+      <p:sp>
+        <p:nvSpPr>
+          <p:cNvPr id="4" name="fin-n-0"/>
+          <p:cNvSpPr txBox="1"/>
+          <p:nvPr/>
+        </p:nvSpPr>
+        <p:spPr>
+          <a:xfrm>
+            <a:off x="685800" y="1422400"/>
+            <a:ext cx="2184400" cy="254000"/>
+          </a:xfrm>
+          <a:prstGeom prst="rect">
+            <a:avLst/>
+          </a:prstGeom>
+          <a:noFill/>
+        </p:spPr>
+        <p:txBody>
+          <a:bodyPr wrap="square" anchor="t" lIns="0" rIns="0" tIns="0" bIns="0">
+            <a:spAutoFit/>
+          </a:bodyPr>
+          <a:lstStyle/>
+          <a:p>
+            <a:r>
+              <a:rPr sz="1200" b="1">
+                <a:solidFill>
+                  <a:srgbClr val="E2001A"/>
+                </a:solidFill>
+              </a:rPr>
+              <a:t>01</a:t>
+            </a:r>
+          </a:p>
+        </p:txBody>
+      </p:sp>
+      <p:sp>
+        <p:nvSpPr>
+          <p:cNvPr id="5" name="fin-h-0"/>
+          <p:cNvSpPr txBox="1"/>
+          <p:nvPr/>
+        </p:nvSpPr>
+        <p:spPr>
+          <a:xfrm>
+            <a:off x="685800" y="1727200"/>
+            <a:ext cx="2184400" cy="381000"/>
+          </a:xfrm>
+          <a:prstGeom prst="rect">
+            <a:avLst/>
+          </a:prstGeom>
+          <a:noFill/>
+        </p:spPr>
+        <p:txBody>
+          <a:bodyPr wrap="square" anchor="t" lIns="0" rIns="0" tIns="0" bIns="0">
+            <a:spAutoFit/>
+          </a:bodyPr>
+          <a:lstStyle/>
+          <a:p>
+            <a:r>
+              <a:rPr sz="1800" b="1">
+                <a:solidFill>
+                  <a:schemeClr val="tx1"/>
+                </a:solidFill>
+              </a:rPr>
+              <a:t>Frei für alle</a:t>
+            </a:r>
+          </a:p>
+        </p:txBody>
+      </p:sp>
+      <p:sp>
+        <p:nvSpPr>
+          <p:cNvPr id="6" name="fin-t-0"/>
+          <p:cNvSpPr txBox="1"/>
+          <p:nvPr/>
+        </p:nvSpPr>
+        <p:spPr>
+          <a:xfrm>
+            <a:off x="685800" y="2184400"/>
+            <a:ext cx="2184400" cy="1016000"/>
+          </a:xfrm>
+          <a:prstGeom prst="rect">
+            <a:avLst/>
+          </a:prstGeom>
+          <a:noFill/>
+        </p:spPr>
+        <p:txBody>
+          <a:bodyPr wrap="square" anchor="t" lIns="0" rIns="0" tIns="0" bIns="0">
+            <a:spAutoFit/>
+          </a:bodyPr>
+          <a:lstStyle/>
+          <a:p>
+            <a:r>
+              <a:rPr sz="1300" b="0">
+                <a:solidFill>
+                  <a:schemeClr val="tx2"/>
+                </a:solidFill>
+              </a:rPr>
+              <a:t>Alle Funktionen kostenlos. Offener Code, Vereine und Kommunen können selbst betreiben.</a:t>
+            </a:r>
+          </a:p>
+        </p:txBody>
+      </p:sp>
+      <p:sp>
+        <p:nvSpPr>
+          <p:cNvPr id="7" name="!!fin-card-1"/>
+          <p:cNvSpPr/>
+          <p:nvPr/>
+        </p:nvSpPr>
+        <p:spPr>
+          <a:xfrm>
+            <a:off x="3251200" y="1193800"/>
+            <a:ext cx="2641600" cy="2159000"/>
+          </a:xfrm>
+          <a:prstGeom prst="rect">
+            <a:avLst/>
+          </a:prstGeom>
+          <a:solidFill>
+            <a:schemeClr val="bg1"/>
+          </a:solidFill>
+          <a:ln w="9525">
+            <a:solidFill>
+              <a:schemeClr val="accent6"/>
+            </a:solidFill>
+          </a:ln>
+          <a:effectLst/>
+        </p:spPr>
+        <p:style>
+          <a:lnRef idx="1">
+            <a:schemeClr val="accent1"/>
+          </a:lnRef>
+          <a:fillRef idx="3">
+            <a:schemeClr val="accent1"/>
+          </a:fillRef>
+          <a:effectRef idx="2">
+            <a:schemeClr val="accent1"/>
+          </a:effectRef>
+          <a:fontRef idx="minor">
+            <a:schemeClr val="lt1"/>
+          </a:fontRef>
+        </p:style>
+        <p:txBody>
+          <a:bodyPr rtlCol="0" anchor="ctr"/>
+          <a:lstStyle/>
+          <a:p>
+            <a:pPr algn="ctr"/>
+          </a:p>
+        </p:txBody>
+      </p:sp>
+      <p:sp>
+        <p:nvSpPr>
+          <p:cNvPr id="8" name="fin-n-1"/>
+          <p:cNvSpPr txBox="1"/>
+          <p:nvPr/>
+        </p:nvSpPr>
+        <p:spPr>
+          <a:xfrm>
+            <a:off x="3479800" y="1422400"/>
+            <a:ext cx="2184400" cy="254000"/>
+          </a:xfrm>
+          <a:prstGeom prst="rect">
+            <a:avLst/>
+          </a:prstGeom>
+          <a:noFill/>
+        </p:spPr>
+        <p:txBody>
+          <a:bodyPr wrap="square" anchor="t" lIns="0" rIns="0" tIns="0" bIns="0">
+            <a:spAutoFit/>
+          </a:bodyPr>
+          <a:lstStyle/>
+          <a:p>
+            <a:r>
+              <a:rPr sz="1200" b="1">
+                <a:solidFill>
+                  <a:srgbClr val="E2001A"/>
+                </a:solidFill>
+              </a:rPr>
+              <a:t>02</a:t>
+            </a:r>
+          </a:p>
+        </p:txBody>
+      </p:sp>
+      <p:sp>
+        <p:nvSpPr>
+          <p:cNvPr id="9" name="fin-h-1"/>
+          <p:cNvSpPr txBox="1"/>
+          <p:nvPr/>
+        </p:nvSpPr>
+        <p:spPr>
+          <a:xfrm>
+            <a:off x="3479800" y="1727200"/>
+            <a:ext cx="2184400" cy="381000"/>
+          </a:xfrm>
+          <a:prstGeom prst="rect">
+            <a:avLst/>
+          </a:prstGeom>
+          <a:noFill/>
+        </p:spPr>
+        <p:txBody>
+          <a:bodyPr wrap="square" anchor="t" lIns="0" rIns="0" tIns="0" bIns="0">
+            <a:spAutoFit/>
+          </a:bodyPr>
+          <a:lstStyle/>
+          <a:p>
+            <a:r>
+              <a:rPr sz="1800" b="1">
+                <a:solidFill>
+                  <a:schemeClr val="tx1"/>
+                </a:solidFill>
+              </a:rPr>
+              <a:t>Speicher</a:t>
+            </a:r>
+          </a:p>
+        </p:txBody>
+      </p:sp>
+      <p:sp>
+        <p:nvSpPr>
+          <p:cNvPr id="10" name="fin-t-1"/>
+          <p:cNvSpPr txBox="1"/>
+          <p:nvPr/>
+        </p:nvSpPr>
+        <p:spPr>
+          <a:xfrm>
+            <a:off x="3479800" y="2184400"/>
+            <a:ext cx="2184400" cy="1016000"/>
+          </a:xfrm>
+          <a:prstGeom prst="rect">
+            <a:avLst/>
+          </a:prstGeom>
+          <a:noFill/>
+        </p:spPr>
+        <p:txBody>
+          <a:bodyPr wrap="square" anchor="t" lIns="0" rIns="0" tIns="0" bIns="0">
+            <a:spAutoFit/>
+          </a:bodyPr>
+          <a:lstStyle/>
+          <a:p>
+            <a:r>
+              <a:rPr sz="1300" b="0">
+                <a:solidFill>
+                  <a:schemeClr val="tx2"/>
+                </a:solidFill>
+              </a:rPr>
+              <a:t>Eigenen Cloud-Speicher anbinden, etwa Google Drive, oder Speicher dazubuchen.</a:t>
+            </a:r>
+          </a:p>
+        </p:txBody>
+      </p:sp>
+      <p:sp>
+        <p:nvSpPr>
+          <p:cNvPr id="11" name="!!fin-card-2"/>
+          <p:cNvSpPr/>
+          <p:nvPr/>
+        </p:nvSpPr>
+        <p:spPr>
+          <a:xfrm>
+            <a:off x="6045200" y="1193800"/>
+            <a:ext cx="2641600" cy="2159000"/>
+          </a:xfrm>
+          <a:prstGeom prst="rect">
+            <a:avLst/>
+          </a:prstGeom>
+          <a:solidFill>
+            <a:schemeClr val="bg1"/>
+          </a:solidFill>
+          <a:ln w="9525">
+            <a:solidFill>
+              <a:schemeClr val="accent6"/>
+            </a:solidFill>
+          </a:ln>
+          <a:effectLst/>
+        </p:spPr>
+        <p:style>
+          <a:lnRef idx="1">
+            <a:schemeClr val="accent1"/>
+          </a:lnRef>
+          <a:fillRef idx="3">
+            <a:schemeClr val="accent1"/>
+          </a:fillRef>
+          <a:effectRef idx="2">
+            <a:schemeClr val="accent1"/>
+          </a:effectRef>
+          <a:fontRef idx="minor">
+            <a:schemeClr val="lt1"/>
+          </a:fontRef>
+        </p:style>
+        <p:txBody>
+          <a:bodyPr rtlCol="0" anchor="ctr"/>
+          <a:lstStyle/>
+          <a:p>
+            <a:pPr algn="ctr"/>
+          </a:p>
+        </p:txBody>
+      </p:sp>
+      <p:sp>
+        <p:nvSpPr>
+          <p:cNvPr id="12" name="fin-n-2"/>
+          <p:cNvSpPr txBox="1"/>
+          <p:nvPr/>
+        </p:nvSpPr>
+        <p:spPr>
+          <a:xfrm>
+            <a:off x="6273800" y="1422400"/>
+            <a:ext cx="2184400" cy="254000"/>
+          </a:xfrm>
+          <a:prstGeom prst="rect">
+            <a:avLst/>
+          </a:prstGeom>
+          <a:noFill/>
+        </p:spPr>
+        <p:txBody>
+          <a:bodyPr wrap="square" anchor="t" lIns="0" rIns="0" tIns="0" bIns="0">
+            <a:spAutoFit/>
+          </a:bodyPr>
+          <a:lstStyle/>
+          <a:p>
+            <a:r>
+              <a:rPr sz="1200" b="1">
+                <a:solidFill>
+                  <a:srgbClr val="E2001A"/>
+                </a:solidFill>
+              </a:rPr>
+              <a:t>03</a:t>
+            </a:r>
+          </a:p>
+        </p:txBody>
+      </p:sp>
+      <p:sp>
+        <p:nvSpPr>
+          <p:cNvPr id="13" name="fin-h-2"/>
+          <p:cNvSpPr txBox="1"/>
+          <p:nvPr/>
+        </p:nvSpPr>
+        <p:spPr>
+          <a:xfrm>
+            <a:off x="6273800" y="1727200"/>
+            <a:ext cx="2184400" cy="381000"/>
+          </a:xfrm>
+          <a:prstGeom prst="rect">
+            <a:avLst/>
+          </a:prstGeom>
+          <a:noFill/>
+        </p:spPr>
+        <p:txBody>
+          <a:bodyPr wrap="square" anchor="t" lIns="0" rIns="0" tIns="0" bIns="0">
+            <a:spAutoFit/>
+          </a:bodyPr>
+          <a:lstStyle/>
+          <a:p>
+            <a:r>
+              <a:rPr sz="1800" b="1">
+                <a:solidFill>
+                  <a:schemeClr val="tx1"/>
+                </a:solidFill>
+              </a:rPr>
+              <a:t>Sichtbarkeit</a:t>
+            </a:r>
+          </a:p>
+        </p:txBody>
+      </p:sp>
+      <p:sp>
+        <p:nvSpPr>
+          <p:cNvPr id="14" name="fin-t-2"/>
+          <p:cNvSpPr txBox="1"/>
+          <p:nvPr/>
+        </p:nvSpPr>
+        <p:spPr>
+          <a:xfrm>
+            <a:off x="6273800" y="2184400"/>
+            <a:ext cx="2184400" cy="1016000"/>
+          </a:xfrm>
+          <a:prstGeom prst="rect">
+            <a:avLst/>
+          </a:prstGeom>
+          <a:noFill/>
+        </p:spPr>
+        <p:txBody>
+          <a:bodyPr wrap="square" anchor="t" lIns="0" rIns="0" tIns="0" bIns="0">
+            <a:spAutoFit/>
+          </a:bodyPr>
+          <a:lstStyle/>
+          <a:p>
+            <a:r>
+              <a:rPr sz="1300" b="0">
+                <a:solidFill>
+                  <a:schemeClr val="tx2"/>
+                </a:solidFill>
+              </a:rPr>
+              <a:t>Dienstleister heben ihre Angebote hervor. Gekennzeichnet, ohne Tracking, ohne Profile.</a:t>
+            </a:r>
+          </a:p>
+        </p:txBody>
+      </p:sp>
+      <p:sp>
+        <p:nvSpPr>
+          <p:cNvPr id="15" name="!!fin-bar"/>
+          <p:cNvSpPr/>
+          <p:nvPr/>
+        </p:nvSpPr>
+        <p:spPr>
+          <a:xfrm>
+            <a:off x="457200" y="3556000"/>
+            <a:ext cx="8229600" cy="711200"/>
+          </a:xfrm>
+          <a:prstGeom prst="rect">
+            <a:avLst/>
+          </a:prstGeom>
+          <a:solidFill>
+            <a:srgbClr val="111111"/>
+          </a:solidFill>
+          <a:ln>
+            <a:noFill/>
+          </a:ln>
+          <a:effectLst/>
+        </p:spPr>
+        <p:style>
+          <a:lnRef idx="1">
+            <a:schemeClr val="accent1"/>
+          </a:lnRef>
+          <a:fillRef idx="3">
+            <a:schemeClr val="accent1"/>
+          </a:fillRef>
+          <a:effectRef idx="2">
+            <a:schemeClr val="accent1"/>
+          </a:effectRef>
+          <a:fontRef idx="minor">
+            <a:schemeClr val="lt1"/>
+          </a:fontRef>
+        </p:style>
+        <p:txBody>
+          <a:bodyPr rtlCol="0" anchor="ctr"/>
+          <a:lstStyle/>
+          <a:p>
+            <a:pPr algn="ctr"/>
+          </a:p>
+        </p:txBody>
+      </p:sp>
+      <p:sp>
+        <p:nvSpPr>
+          <p:cNvPr id="16" name="fin-bar-t"/>
+          <p:cNvSpPr txBox="1"/>
+          <p:nvPr/>
+        </p:nvSpPr>
+        <p:spPr>
+          <a:xfrm>
+            <a:off x="685800" y="3556000"/>
+            <a:ext cx="7772400" cy="711200"/>
+          </a:xfrm>
+          <a:prstGeom prst="rect">
+            <a:avLst/>
+          </a:prstGeom>
+          <a:noFill/>
+        </p:spPr>
+        <p:txBody>
+          <a:bodyPr wrap="square" anchor="ctr" lIns="0" rIns="0" tIns="0" bIns="0">
+            <a:spAutoFit/>
+          </a:bodyPr>
+          <a:lstStyle/>
+          <a:p>
+            <a:r>
+              <a:rPr sz="1400" b="1">
+                <a:solidFill>
+                  <a:srgbClr val="FFFFFF"/>
+                </a:solidFill>
+              </a:rPr>
+              <a:t>Ziel: die Betriebskosten tragen, nicht Gewinn machen. </a:t>
+            </a:r>
+            <a:r>
+              <a:rPr sz="1400" b="0">
+                <a:solidFill>
+                  <a:srgbClr val="FFFFFF"/>
+                </a:solidFill>
+              </a:rPr>
+              <a:t>Förderung finanziert den Aufbau.</a:t>
+            </a:r>
+          </a:p>
+        </p:txBody>
+      </p:sp>
+      <p:sp>
+        <p:nvSpPr>
+          <p:cNvPr id="25" name="Slide Number Placeholder 0"/>
+          <p:cNvSpPr>
+            <a:spLocks noGrp="1"/>
+          </p:cNvSpPr>
+          <p:nvPr>
+            <p:ph type="sldNum" sz="quarter" idx="4294967295"/>
+          </p:nvPr>
+        </p:nvSpPr>
+        <p:spPr>
+          <a:xfrm>
+            <a:off x="8412480" y="4754880"/>
+            <a:ext cx="457200" cy="274320"/>
+          </a:xfrm>
+          <a:prstGeom prst="rect">
+            <a:avLst/>
+          </a:prstGeom>
+          <a:extLst>
+            <a:ext uri="{C572A759-6A51-4108-AA02-DFA0A04FC94B}">
+              <ma14:wrappingTextBoxFlag xmlns:ma14="http://schemas.microsoft.com/office/mac/drawingml/2011/main" val="0"/>
+            </a:ext>
+          </a:extLst>
+        </p:spPr>
+        <p:txBody>
+          <a:bodyPr/>
+          <a:lstStyle>
+            <a:lvl1pPr>
+              <a:defRPr sz="1000">
+                <a:solidFill>
+                  <a:schemeClr val="tx2"/>
+                </a:solidFill>
+              </a:defRPr>
+            </a:lvl1pPr>
+          </a:lstStyle>
+          <a:p>
+            <a:pPr algn="l"/>
+            <a:fld id="{F7021451-1387-4CA6-816F-3879F97B5CBC}" type="slidenum">
+              <a:rPr b="0" lang="en-US"/>
+              <a:t>2</a:t>
+            </a:fld>
+            <a:endParaRPr lang="en-US"/>
+          </a:p>
+        </p:txBody>
+      </p:sp>
+    </p:spTree>
+  </p:cSld>
+  <p:clrMapOvr>
+    <a:masterClrMapping/>
+  </p:clrMapOvr>
+  <mc:AlternateContent xmlns:mc="http://schemas.openxmlformats.org/markup-compatibility/2006">
+    <mc:Choice xmlns:p159="http://schemas.microsoft.com/office/powerpoint/2015/09/main" Requires="p159">
+      <p:transition xmlns:p14="http://schemas.microsoft.com/office/powerpoint/2010/main" spd="slow" p14:dur="900">
+        <p159:morph option="byObject"/>
+      </p:transition>
+    </mc:Choice>
+    <mc:Fallback>
+      <p:transition spd="slow">
+        <p:fade/>
+      </p:transition>
+    </mc:Fallback>
+  </mc:AlternateContent>
+</p:sld>
+</file>
+
+<file path=ppt/slides/slide17.xml><?xml version="1.0" encoding="utf-8"?>
 <p:sld xmlns:a="http://schemas.openxmlformats.org/drawingml/2006/main" xmlns:r="http://schemas.openxmlformats.org/officeDocument/2006/relationships" xmlns:p="http://schemas.openxmlformats.org/presentationml/2006/main">
   <p:cSld name="Slide 14">
     <p:spTree>
@@ -7999,7 +10221,7 @@
                   <a:schemeClr val="tx1"/>
                 </a:solidFill>
               </a:rPr>
-              <a:t>Auf dem Weg zur unabhängigen, dezentralen Plattform</a:t>
+              <a:t>Auf dem Weg zur dezentralen Plattform</a:t>
             </a:r>
             <a:endParaRPr lang="en-US" sz="3000" dirty="0"/>
           </a:p>
@@ -8013,8 +10235,8 @@
         </p:nvSpPr>
         <p:spPr>
           <a:xfrm>
-            <a:off x="731520" y="1783080"/>
-            <a:ext cx="7680960" cy="0"/>
+            <a:off x="822960" y="1783080"/>
+            <a:ext cx="6766560" cy="0"/>
           </a:xfrm>
           <a:prstGeom prst="line">
             <a:avLst/>
@@ -8815,10 +11037,22 @@
   <p:clrMapOvr>
     <a:masterClrMapping/>
   </p:clrMapOvr>
+  <mc:AlternateContent xmlns:mc="http://schemas.openxmlformats.org/markup-compatibility/2006">
+    <mc:Choice xmlns:p159="http://schemas.microsoft.com/office/powerpoint/2015/09/main" Requires="p159">
+      <p:transition xmlns:p14="http://schemas.microsoft.com/office/powerpoint/2010/main" spd="slow" p14:dur="900">
+        <p159:morph option="byObject"/>
+      </p:transition>
+    </mc:Choice>
+    <mc:Fallback>
+      <p:transition spd="slow">
+        <p:fade/>
+      </p:transition>
+    </mc:Fallback>
+  </mc:AlternateContent>
 </p:sld>
 </file>
 
-<file path=ppt/slides/slide15.xml><?xml version="1.0" encoding="utf-8"?>
+<file path=ppt/slides/slide18.xml><?xml version="1.0" encoding="utf-8"?>
 <p:sld xmlns:a="http://schemas.openxmlformats.org/drawingml/2006/main" xmlns:r="http://schemas.openxmlformats.org/officeDocument/2006/relationships" xmlns:p="http://schemas.openxmlformats.org/presentationml/2006/main">
   <p:cSld name="Slide 15">
     <p:spTree>
@@ -8845,8 +11079,8 @@
         </p:nvSpPr>
         <p:spPr>
           <a:xfrm>
-            <a:off x="548640" y="1371600"/>
-            <a:ext cx="5120640" cy="1280160"/>
+            <a:off x="546100" y="889000"/>
+            <a:ext cx="4064000" cy="889000"/>
           </a:xfrm>
           <a:prstGeom prst="rect">
             <a:avLst/>
@@ -8883,8 +11117,8 @@
         </p:nvSpPr>
         <p:spPr>
           <a:xfrm>
-            <a:off x="548640" y="2788920"/>
-            <a:ext cx="4937760" cy="1097280"/>
+            <a:off x="546100" y="1905000"/>
+            <a:ext cx="4064000" cy="2032000"/>
           </a:xfrm>
           <a:prstGeom prst="rect">
             <a:avLst/>
@@ -8897,550 +11131,184 @@
           <a:lstStyle/>
           <a:p>
             <a:pPr algn="l" indent="0" marL="0">
+              <a:spcAft>
+                <a:spcPts val="600"/>
+              </a:spcAft>
               <a:buNone/>
             </a:pPr>
             <a:r>
-              <a:rPr lang="en-US" sz="2000" dirty="0">
-                <a:solidFill>
-                  <a:schemeClr val="bg1"/>
-                </a:solidFill>
-              </a:rPr>
-              <a:t>Ausprobieren: hive-voice.vercel.app</a:t>
+              <a:rPr sz="1600" b="1">
+                <a:solidFill>
+                  <a:srgbClr val="FFFFFF"/>
+                </a:solidFill>
+              </a:rPr>
+              <a:t>Förderung</a:t>
+            </a:r>
+            <a:r>
+              <a:rPr sz="1600" b="0">
+                <a:solidFill>
+                  <a:srgbClr val="B3B3B3"/>
+                </a:solidFill>
+              </a:rPr>
+              <a:t> für Aufbau und Barrierefreiheit</a:t>
             </a:r>
             <a:endParaRPr lang="en-US" sz="2000" dirty="0"/>
           </a:p>
           <a:p>
-            <a:pPr algn="l" indent="0" marL="0">
-              <a:buNone/>
+            <a:pPr>
+              <a:spcAft>
+                <a:spcPts val="600"/>
+              </a:spcAft>
             </a:pPr>
             <a:r>
-              <a:rPr lang="en-US" sz="2000" dirty="0">
-                <a:solidFill>
-                  <a:schemeClr val="bg1"/>
-                </a:solidFill>
-              </a:rPr>
-              <a:t>Deinen Verein oder dein Viertel gründen</a:t>
-            </a:r>
-            <a:endParaRPr lang="en-US" sz="2000" dirty="0"/>
-          </a:p>
-          <a:p>
-            <a:pPr algn="l" indent="0" marL="0">
-              <a:buNone/>
+              <a:rPr sz="1600" b="1">
+                <a:solidFill>
+                  <a:srgbClr val="FFFFFF"/>
+                </a:solidFill>
+              </a:rPr>
+              <a:t>Eine Pilot-Kommune</a:t>
+            </a:r>
+            <a:r>
+              <a:rPr sz="1600" b="0">
+                <a:solidFill>
+                  <a:srgbClr val="B3B3B3"/>
+                </a:solidFill>
+              </a:rPr>
+              <a:t> oder einen Bezirk</a:t>
+            </a:r>
+          </a:p>
+          <a:p>
+            <a:pPr>
+              <a:spcAft>
+                <a:spcPts val="600"/>
+              </a:spcAft>
             </a:pPr>
             <a:r>
-              <a:rPr lang="en-US" sz="2000" dirty="0">
-                <a:solidFill>
-                  <a:schemeClr val="bg1"/>
-                </a:solidFill>
-              </a:rPr>
-              <a:t>Eine eigene Instanz betreiben</a:t>
-            </a:r>
-            <a:endParaRPr lang="en-US" sz="2000" dirty="0"/>
-          </a:p>
-        </p:txBody>
-      </p:sp>
-      <p:sp>
-        <p:nvSpPr>
-          <p:cNvPr id="4" name="logo-0"/>
-          <p:cNvSpPr/>
-          <p:nvPr/>
-        </p:nvSpPr>
-        <p:spPr>
-          <a:xfrm>
-            <a:off x="7540269" y="1859280"/>
-            <a:ext cx="629361" cy="726440"/>
-          </a:xfrm>
-          <a:custGeom>
-            <a:avLst/>
-            <a:gdLst/>
-            <a:ahLst/>
-            <a:cxnLst/>
-            <a:rect l="l" t="t" r="r" b="b"/>
-            <a:pathLst>
-              <a:path w="629361" h="726440">
-                <a:moveTo>
-                  <a:pt x="314681" y="0"/>
-                </a:moveTo>
-                <a:lnTo>
-                  <a:pt x="629361" y="181609"/>
-                </a:lnTo>
-                <a:lnTo>
-                  <a:pt x="629361" y="544830"/>
-                </a:lnTo>
-                <a:lnTo>
-                  <a:pt x="314681" y="726440"/>
-                </a:lnTo>
-                <a:lnTo>
-                  <a:pt x="0" y="544830"/>
-                </a:lnTo>
-                <a:lnTo>
-                  <a:pt x="0" y="181609"/>
-                </a:lnTo>
-                <a:close/>
-              </a:path>
-            </a:pathLst>
-          </a:custGeom>
-          <a:solidFill>
-            <a:srgbClr val="F4F4F4"/>
-          </a:solidFill>
-          <a:ln>
-            <a:noFill/>
-          </a:ln>
-          <a:effectLst/>
-        </p:spPr>
-        <p:style>
-          <a:lnRef idx="1">
-            <a:schemeClr val="accent1"/>
-          </a:lnRef>
-          <a:fillRef idx="3">
-            <a:schemeClr val="accent1"/>
-          </a:fillRef>
-          <a:effectRef idx="2">
-            <a:schemeClr val="accent1"/>
-          </a:effectRef>
-          <a:fontRef idx="minor">
-            <a:schemeClr val="lt1"/>
-          </a:fontRef>
-        </p:style>
-        <p:txBody>
-          <a:bodyPr rtlCol="0" anchor="ctr"/>
-          <a:lstStyle/>
-          <a:p>
-            <a:pPr algn="ctr"/>
-          </a:p>
-        </p:txBody>
-      </p:sp>
-      <p:sp>
-        <p:nvSpPr>
-          <p:cNvPr id="5" name="logo-1"/>
-          <p:cNvSpPr/>
-          <p:nvPr/>
-        </p:nvSpPr>
-        <p:spPr>
-          <a:xfrm>
-            <a:off x="6054369" y="1859280"/>
-            <a:ext cx="629361" cy="726440"/>
-          </a:xfrm>
-          <a:custGeom>
-            <a:avLst/>
-            <a:gdLst/>
-            <a:ahLst/>
-            <a:cxnLst/>
-            <a:rect l="l" t="t" r="r" b="b"/>
-            <a:pathLst>
-              <a:path w="629361" h="726440">
-                <a:moveTo>
-                  <a:pt x="314681" y="0"/>
-                </a:moveTo>
-                <a:lnTo>
-                  <a:pt x="629361" y="181609"/>
-                </a:lnTo>
-                <a:lnTo>
-                  <a:pt x="629361" y="544830"/>
-                </a:lnTo>
-                <a:lnTo>
-                  <a:pt x="314681" y="726440"/>
-                </a:lnTo>
-                <a:lnTo>
-                  <a:pt x="0" y="544830"/>
-                </a:lnTo>
-                <a:lnTo>
-                  <a:pt x="0" y="181609"/>
-                </a:lnTo>
-                <a:close/>
-              </a:path>
-            </a:pathLst>
-          </a:custGeom>
-          <a:solidFill>
-            <a:srgbClr val="F4F4F4"/>
-          </a:solidFill>
-          <a:ln>
-            <a:noFill/>
-          </a:ln>
-          <a:effectLst/>
-        </p:spPr>
-        <p:style>
-          <a:lnRef idx="1">
-            <a:schemeClr val="accent1"/>
-          </a:lnRef>
-          <a:fillRef idx="3">
-            <a:schemeClr val="accent1"/>
-          </a:fillRef>
-          <a:effectRef idx="2">
-            <a:schemeClr val="accent1"/>
-          </a:effectRef>
-          <a:fontRef idx="minor">
-            <a:schemeClr val="lt1"/>
-          </a:fontRef>
-        </p:style>
-        <p:txBody>
-          <a:bodyPr rtlCol="0" anchor="ctr"/>
-          <a:lstStyle/>
-          <a:p>
-            <a:pPr algn="ctr"/>
-          </a:p>
-        </p:txBody>
-      </p:sp>
-      <p:sp>
-        <p:nvSpPr>
-          <p:cNvPr id="6" name="logo-2"/>
-          <p:cNvSpPr/>
-          <p:nvPr/>
-        </p:nvSpPr>
-        <p:spPr>
-          <a:xfrm>
-            <a:off x="7168794" y="1215390"/>
-            <a:ext cx="629361" cy="726440"/>
-          </a:xfrm>
-          <a:custGeom>
-            <a:avLst/>
-            <a:gdLst/>
-            <a:ahLst/>
-            <a:cxnLst/>
-            <a:rect l="l" t="t" r="r" b="b"/>
-            <a:pathLst>
-              <a:path w="629361" h="726440">
-                <a:moveTo>
-                  <a:pt x="314681" y="0"/>
-                </a:moveTo>
-                <a:lnTo>
-                  <a:pt x="629361" y="181610"/>
-                </a:lnTo>
-                <a:lnTo>
-                  <a:pt x="629361" y="544830"/>
-                </a:lnTo>
-                <a:lnTo>
-                  <a:pt x="314681" y="726440"/>
-                </a:lnTo>
-                <a:lnTo>
-                  <a:pt x="0" y="544830"/>
-                </a:lnTo>
-                <a:lnTo>
-                  <a:pt x="0" y="181610"/>
-                </a:lnTo>
-                <a:close/>
-              </a:path>
-            </a:pathLst>
-          </a:custGeom>
-          <a:solidFill>
-            <a:srgbClr val="F4F4F4"/>
-          </a:solidFill>
-          <a:ln>
-            <a:noFill/>
-          </a:ln>
-          <a:effectLst/>
-        </p:spPr>
-        <p:style>
-          <a:lnRef idx="1">
-            <a:schemeClr val="accent1"/>
-          </a:lnRef>
-          <a:fillRef idx="3">
-            <a:schemeClr val="accent1"/>
-          </a:fillRef>
-          <a:effectRef idx="2">
-            <a:schemeClr val="accent1"/>
-          </a:effectRef>
-          <a:fontRef idx="minor">
-            <a:schemeClr val="lt1"/>
-          </a:fontRef>
-        </p:style>
-        <p:txBody>
-          <a:bodyPr rtlCol="0" anchor="ctr"/>
-          <a:lstStyle/>
-          <a:p>
-            <a:pPr algn="ctr"/>
-          </a:p>
-        </p:txBody>
-      </p:sp>
-      <p:sp>
-        <p:nvSpPr>
-          <p:cNvPr id="7" name="logo-3"/>
-          <p:cNvSpPr/>
-          <p:nvPr/>
-        </p:nvSpPr>
-        <p:spPr>
-          <a:xfrm>
-            <a:off x="6425844" y="1215390"/>
-            <a:ext cx="629361" cy="726440"/>
-          </a:xfrm>
-          <a:custGeom>
-            <a:avLst/>
-            <a:gdLst/>
-            <a:ahLst/>
-            <a:cxnLst/>
-            <a:rect l="l" t="t" r="r" b="b"/>
-            <a:pathLst>
-              <a:path w="629361" h="726440">
-                <a:moveTo>
-                  <a:pt x="314681" y="0"/>
-                </a:moveTo>
-                <a:lnTo>
-                  <a:pt x="629361" y="181610"/>
-                </a:lnTo>
-                <a:lnTo>
-                  <a:pt x="629361" y="544830"/>
-                </a:lnTo>
-                <a:lnTo>
-                  <a:pt x="314681" y="726440"/>
-                </a:lnTo>
-                <a:lnTo>
-                  <a:pt x="0" y="544830"/>
-                </a:lnTo>
-                <a:lnTo>
-                  <a:pt x="0" y="181610"/>
-                </a:lnTo>
-                <a:close/>
-              </a:path>
-            </a:pathLst>
-          </a:custGeom>
-          <a:solidFill>
-            <a:srgbClr val="F4F4F4"/>
-          </a:solidFill>
-          <a:ln>
-            <a:noFill/>
-          </a:ln>
-          <a:effectLst/>
-        </p:spPr>
-        <p:style>
-          <a:lnRef idx="1">
-            <a:schemeClr val="accent1"/>
-          </a:lnRef>
-          <a:fillRef idx="3">
-            <a:schemeClr val="accent1"/>
-          </a:fillRef>
-          <a:effectRef idx="2">
-            <a:schemeClr val="accent1"/>
-          </a:effectRef>
-          <a:fontRef idx="minor">
-            <a:schemeClr val="lt1"/>
-          </a:fontRef>
-        </p:style>
-        <p:txBody>
-          <a:bodyPr rtlCol="0" anchor="ctr"/>
-          <a:lstStyle/>
-          <a:p>
-            <a:pPr algn="ctr"/>
-          </a:p>
-        </p:txBody>
-      </p:sp>
-      <p:sp>
-        <p:nvSpPr>
-          <p:cNvPr id="8" name="logo-4"/>
-          <p:cNvSpPr/>
-          <p:nvPr/>
-        </p:nvSpPr>
-        <p:spPr>
-          <a:xfrm>
-            <a:off x="7168794" y="2503170"/>
-            <a:ext cx="629361" cy="726440"/>
-          </a:xfrm>
-          <a:custGeom>
-            <a:avLst/>
-            <a:gdLst/>
-            <a:ahLst/>
-            <a:cxnLst/>
-            <a:rect l="l" t="t" r="r" b="b"/>
-            <a:pathLst>
-              <a:path w="629361" h="726440">
-                <a:moveTo>
-                  <a:pt x="314681" y="0"/>
-                </a:moveTo>
-                <a:lnTo>
-                  <a:pt x="629361" y="181610"/>
-                </a:lnTo>
-                <a:lnTo>
-                  <a:pt x="629361" y="544830"/>
-                </a:lnTo>
-                <a:lnTo>
-                  <a:pt x="314681" y="726440"/>
-                </a:lnTo>
-                <a:lnTo>
-                  <a:pt x="0" y="544830"/>
-                </a:lnTo>
-                <a:lnTo>
-                  <a:pt x="0" y="181610"/>
-                </a:lnTo>
-                <a:close/>
-              </a:path>
-            </a:pathLst>
-          </a:custGeom>
-          <a:solidFill>
-            <a:srgbClr val="F4F4F4"/>
-          </a:solidFill>
-          <a:ln>
-            <a:noFill/>
-          </a:ln>
-          <a:effectLst/>
-        </p:spPr>
-        <p:style>
-          <a:lnRef idx="1">
-            <a:schemeClr val="accent1"/>
-          </a:lnRef>
-          <a:fillRef idx="3">
-            <a:schemeClr val="accent1"/>
-          </a:fillRef>
-          <a:effectRef idx="2">
-            <a:schemeClr val="accent1"/>
-          </a:effectRef>
-          <a:fontRef idx="minor">
-            <a:schemeClr val="lt1"/>
-          </a:fontRef>
-        </p:style>
-        <p:txBody>
-          <a:bodyPr rtlCol="0" anchor="ctr"/>
-          <a:lstStyle/>
-          <a:p>
-            <a:pPr algn="ctr"/>
-          </a:p>
-        </p:txBody>
-      </p:sp>
-      <p:sp>
-        <p:nvSpPr>
-          <p:cNvPr id="9" name="logo-5"/>
-          <p:cNvSpPr/>
-          <p:nvPr/>
-        </p:nvSpPr>
-        <p:spPr>
-          <a:xfrm>
-            <a:off x="6425844" y="2503170"/>
-            <a:ext cx="629361" cy="726440"/>
-          </a:xfrm>
-          <a:custGeom>
-            <a:avLst/>
-            <a:gdLst/>
-            <a:ahLst/>
-            <a:cxnLst/>
-            <a:rect l="l" t="t" r="r" b="b"/>
-            <a:pathLst>
-              <a:path w="629361" h="726440">
-                <a:moveTo>
-                  <a:pt x="314681" y="0"/>
-                </a:moveTo>
-                <a:lnTo>
-                  <a:pt x="629361" y="181610"/>
-                </a:lnTo>
-                <a:lnTo>
-                  <a:pt x="629361" y="544830"/>
-                </a:lnTo>
-                <a:lnTo>
-                  <a:pt x="314681" y="726440"/>
-                </a:lnTo>
-                <a:lnTo>
-                  <a:pt x="0" y="544830"/>
-                </a:lnTo>
-                <a:lnTo>
-                  <a:pt x="0" y="181610"/>
-                </a:lnTo>
-                <a:close/>
-              </a:path>
-            </a:pathLst>
-          </a:custGeom>
-          <a:solidFill>
-            <a:srgbClr val="F4F4F4"/>
-          </a:solidFill>
-          <a:ln>
-            <a:noFill/>
-          </a:ln>
-          <a:effectLst/>
-        </p:spPr>
-        <p:style>
-          <a:lnRef idx="1">
-            <a:schemeClr val="accent1"/>
-          </a:lnRef>
-          <a:fillRef idx="3">
-            <a:schemeClr val="accent1"/>
-          </a:fillRef>
-          <a:effectRef idx="2">
-            <a:schemeClr val="accent1"/>
-          </a:effectRef>
-          <a:fontRef idx="minor">
-            <a:schemeClr val="lt1"/>
-          </a:fontRef>
-        </p:style>
-        <p:txBody>
-          <a:bodyPr rtlCol="0" anchor="ctr"/>
-          <a:lstStyle/>
-          <a:p>
-            <a:pPr algn="ctr"/>
-          </a:p>
-        </p:txBody>
-      </p:sp>
-      <p:sp>
-        <p:nvSpPr>
-          <p:cNvPr id="10" name="logo-center"/>
-          <p:cNvSpPr/>
-          <p:nvPr/>
-        </p:nvSpPr>
-        <p:spPr>
-          <a:xfrm>
-            <a:off x="6797319" y="1859280"/>
-            <a:ext cx="629361" cy="726440"/>
-          </a:xfrm>
-          <a:custGeom>
-            <a:avLst/>
-            <a:gdLst/>
-            <a:ahLst/>
-            <a:cxnLst/>
-            <a:rect l="l" t="t" r="r" b="b"/>
-            <a:pathLst>
-              <a:path w="629361" h="726440">
-                <a:moveTo>
-                  <a:pt x="314681" y="0"/>
-                </a:moveTo>
-                <a:lnTo>
-                  <a:pt x="629361" y="181609"/>
-                </a:lnTo>
-                <a:lnTo>
-                  <a:pt x="629361" y="544830"/>
-                </a:lnTo>
-                <a:lnTo>
-                  <a:pt x="314681" y="726440"/>
-                </a:lnTo>
-                <a:lnTo>
-                  <a:pt x="0" y="544830"/>
-                </a:lnTo>
-                <a:lnTo>
-                  <a:pt x="0" y="181609"/>
-                </a:lnTo>
-                <a:close/>
-              </a:path>
-            </a:pathLst>
-          </a:custGeom>
-          <a:solidFill>
-            <a:srgbClr val="E2001A"/>
-          </a:solidFill>
-          <a:ln>
-            <a:noFill/>
-          </a:ln>
-          <a:effectLst/>
-        </p:spPr>
-        <p:style>
-          <a:lnRef idx="1">
-            <a:schemeClr val="accent1"/>
-          </a:lnRef>
-          <a:fillRef idx="3">
-            <a:schemeClr val="accent1"/>
-          </a:fillRef>
-          <a:effectRef idx="2">
-            <a:schemeClr val="accent1"/>
-          </a:effectRef>
-          <a:fontRef idx="minor">
-            <a:schemeClr val="lt1"/>
-          </a:fontRef>
-        </p:style>
-        <p:txBody>
-          <a:bodyPr rtlCol="0" anchor="ctr"/>
-          <a:lstStyle/>
-          <a:p>
-            <a:pPr algn="ctr"/>
-          </a:p>
-        </p:txBody>
-      </p:sp>
+              <a:rPr sz="1600" b="1">
+                <a:solidFill>
+                  <a:srgbClr val="FFFFFF"/>
+                </a:solidFill>
+              </a:rPr>
+              <a:t>Vereine und Initiativen</a:t>
+            </a:r>
+            <a:r>
+              <a:rPr sz="1600" b="0">
+                <a:solidFill>
+                  <a:srgbClr val="B3B3B3"/>
+                </a:solidFill>
+              </a:rPr>
+              <a:t> als erste Gruppen</a:t>
+            </a:r>
+          </a:p>
+        </p:txBody>
+      </p:sp>
+      <p:sp>
+        <p:nvSpPr>
+          <p:cNvPr id="4" name="ask-url"/>
+          <p:cNvSpPr txBox="1"/>
+          <p:nvPr/>
+        </p:nvSpPr>
+        <p:spPr>
+          <a:xfrm>
+            <a:off x="546100" y="4038600"/>
+            <a:ext cx="4064000" cy="381000"/>
+          </a:xfrm>
+          <a:prstGeom prst="rect">
+            <a:avLst/>
+          </a:prstGeom>
+          <a:noFill/>
+        </p:spPr>
+        <p:txBody>
+          <a:bodyPr wrap="square" anchor="t" lIns="0" rIns="0" tIns="0" bIns="0">
+            <a:spAutoFit/>
+          </a:bodyPr>
+          <a:lstStyle/>
+          <a:p>
+            <a:r>
+              <a:rPr sz="1800" b="1">
+                <a:solidFill>
+                  <a:srgbClr val="E2001A"/>
+                </a:solidFill>
+              </a:rPr>
+              <a:t>hive-voice.vercel.app</a:t>
+            </a:r>
+          </a:p>
+        </p:txBody>
+      </p:sp>
+      <p:sp>
+        <p:nvSpPr>
+          <p:cNvPr id="5" name="ask-kicker"/>
+          <p:cNvSpPr txBox="1"/>
+          <p:nvPr/>
+        </p:nvSpPr>
+        <p:spPr>
+          <a:xfrm>
+            <a:off x="546100" y="508000"/>
+            <a:ext cx="2540000" cy="254000"/>
+          </a:xfrm>
+          <a:prstGeom prst="rect">
+            <a:avLst/>
+          </a:prstGeom>
+          <a:noFill/>
+        </p:spPr>
+        <p:txBody>
+          <a:bodyPr wrap="square" anchor="t" lIns="0" rIns="0" tIns="0" bIns="0">
+            <a:spAutoFit/>
+          </a:bodyPr>
+          <a:lstStyle/>
+          <a:p>
+            <a:r>
+              <a:rPr sz="1000" b="1">
+                <a:solidFill>
+                  <a:srgbClr val="B3B3B3"/>
+                </a:solidFill>
+              </a:rPr>
+              <a:t>WAS WIR SUCHEN</a:t>
+            </a:r>
+          </a:p>
+        </p:txBody>
+      </p:sp>
+      <p:pic>
+        <p:nvPicPr>
+          <p:cNvPr id="6" name="!!img-machmit" descr="machmit.jpg"/>
+          <p:cNvPicPr>
+            <a:picLocks noChangeAspect="1"/>
+          </p:cNvPicPr>
+          <p:nvPr/>
+        </p:nvPicPr>
+        <p:blipFill>
+          <a:blip r:embed="rId3"/>
+          <a:stretch>
+            <a:fillRect/>
+          </a:stretch>
+        </p:blipFill>
+        <p:spPr>
+          <a:xfrm>
+            <a:off x="5029200" y="0"/>
+            <a:ext cx="4114800" cy="5143500"/>
+          </a:xfrm>
+          <a:prstGeom prst="rect">
+            <a:avLst/>
+          </a:prstGeom>
+        </p:spPr>
+      </p:pic>
     </p:spTree>
   </p:cSld>
   <p:clrMapOvr>
     <a:masterClrMapping/>
   </p:clrMapOvr>
+  <mc:AlternateContent xmlns:mc="http://schemas.openxmlformats.org/markup-compatibility/2006">
+    <mc:Choice xmlns:p159="http://schemas.microsoft.com/office/powerpoint/2015/09/main" Requires="p159">
+      <p:transition xmlns:p14="http://schemas.microsoft.com/office/powerpoint/2010/main" spd="slow" p14:dur="900">
+        <p159:morph option="byObject"/>
+      </p:transition>
+    </mc:Choice>
+    <mc:Fallback>
+      <p:transition spd="slow">
+        <p:fade/>
+      </p:transition>
+    </mc:Fallback>
+  </mc:AlternateContent>
 </p:sld>
 </file>
 
@@ -9493,7 +11361,7 @@
                   <a:schemeClr val="tx1"/>
                 </a:solidFill>
               </a:rPr>
-              <a:t>Engagement zerfällt heute in zehn Apps</a:t>
+              <a:t>Engagement zerfällt heute in viele Apps</a:t>
             </a:r>
             <a:endParaRPr lang="en-US" sz="3000" dirty="0"/>
           </a:p>
@@ -10076,409 +11944,1035 @@
   <p:clrMapOvr>
     <a:masterClrMapping/>
   </p:clrMapOvr>
+  <mc:AlternateContent xmlns:mc="http://schemas.openxmlformats.org/markup-compatibility/2006">
+    <mc:Choice xmlns:p159="http://schemas.microsoft.com/office/powerpoint/2015/09/main" Requires="p159">
+      <p:transition xmlns:p14="http://schemas.microsoft.com/office/powerpoint/2010/main" spd="slow" p14:dur="900">
+        <p159:morph option="byObject"/>
+      </p:transition>
+    </mc:Choice>
+    <mc:Fallback>
+      <p:transition spd="slow">
+        <p:fade/>
+      </p:transition>
+    </mc:Fallback>
+  </mc:AlternateContent>
 </p:sld>
 </file>
 
 <file path=ppt/slides/slide3.xml><?xml version="1.0" encoding="utf-8"?>
-<p:sld xmlns:a="http://schemas.openxmlformats.org/drawingml/2006/main" xmlns:r="http://schemas.openxmlformats.org/officeDocument/2006/relationships" xmlns:p="http://schemas.openxmlformats.org/presentationml/2006/main">
-  <p:cSld name="Slide 3">
+<p:sld xmlns:a="http://schemas.openxmlformats.org/drawingml/2006/main" xmlns:p="http://schemas.openxmlformats.org/presentationml/2006/main" xmlns:r="http://schemas.openxmlformats.org/officeDocument/2006/relationships">
+  <p:cSld>
     <p:spTree>
       <p:nvGrpSpPr>
         <p:cNvPr id="1" name=""/>
         <p:cNvGrpSpPr/>
         <p:nvPr/>
       </p:nvGrpSpPr>
-      <p:grpSpPr>
-        <a:xfrm>
-          <a:off x="0" y="0"/>
-          <a:ext cx="0" cy="0"/>
-          <a:chOff x="0" y="0"/>
-          <a:chExt cx="0" cy="0"/>
-        </a:xfrm>
-      </p:grpSpPr>
-      <p:sp>
-        <p:nvSpPr>
-          <p:cNvPr id="2" name="Text 0"/>
+      <p:grpSpPr/>
+      <p:sp>
+        <p:nvSpPr>
+          <p:cNvPr id="2" name="need-title"/>
+          <p:cNvSpPr txBox="1"/>
+          <p:nvPr/>
+        </p:nvSpPr>
+        <p:spPr>
+          <a:xfrm>
+            <a:off x="546100" y="457200"/>
+            <a:ext cx="8051800" cy="635000"/>
+          </a:xfrm>
+          <a:prstGeom prst="rect">
+            <a:avLst/>
+          </a:prstGeom>
+          <a:noFill/>
+        </p:spPr>
+        <p:txBody>
+          <a:bodyPr wrap="square" anchor="t" lIns="0" rIns="0" tIns="0" bIns="0">
+            <a:spAutoFit/>
+          </a:bodyPr>
+          <a:lstStyle/>
+          <a:p>
+            <a:r>
+              <a:rPr sz="3000" b="1">
+                <a:solidFill>
+                  <a:srgbClr val="FFFFFF"/>
+                </a:solidFill>
+              </a:rPr>
+              <a:t>Was vor Ort fehlt</a:t>
+            </a:r>
+          </a:p>
+        </p:txBody>
+      </p:sp>
+      <p:sp>
+        <p:nvSpPr>
+          <p:cNvPr id="3" name="!!need-label-0"/>
+          <p:cNvSpPr txBox="1"/>
+          <p:nvPr/>
+        </p:nvSpPr>
+        <p:spPr>
+          <a:xfrm>
+            <a:off x="546100" y="1524000"/>
+            <a:ext cx="2489200" cy="254000"/>
+          </a:xfrm>
+          <a:prstGeom prst="rect">
+            <a:avLst/>
+          </a:prstGeom>
+          <a:noFill/>
+        </p:spPr>
+        <p:txBody>
+          <a:bodyPr wrap="square" anchor="t" lIns="0" rIns="0" tIns="0" bIns="0">
+            <a:spAutoFit/>
+          </a:bodyPr>
+          <a:lstStyle/>
+          <a:p>
+            <a:r>
+              <a:rPr sz="1000" b="1">
+                <a:solidFill>
+                  <a:srgbClr val="E2001A"/>
+                </a:solidFill>
+              </a:rPr>
+              <a:t>MÜNCHEN</a:t>
+            </a:r>
+          </a:p>
+        </p:txBody>
+      </p:sp>
+      <p:sp>
+        <p:nvSpPr>
+          <p:cNvPr id="4" name="!!need-num-0"/>
+          <p:cNvSpPr txBox="1"/>
+          <p:nvPr/>
+        </p:nvSpPr>
+        <p:spPr>
+          <a:xfrm>
+            <a:off x="546100" y="1803400"/>
+            <a:ext cx="2489200" cy="762000"/>
+          </a:xfrm>
+          <a:prstGeom prst="rect">
+            <a:avLst/>
+          </a:prstGeom>
+          <a:noFill/>
+        </p:spPr>
+        <p:txBody>
+          <a:bodyPr wrap="square" anchor="t" lIns="0" rIns="0" tIns="0" bIns="0">
+            <a:spAutoFit/>
+          </a:bodyPr>
+          <a:lstStyle/>
+          <a:p>
+            <a:r>
+              <a:rPr sz="4600" b="1">
+                <a:solidFill>
+                  <a:srgbClr val="FFFFFF"/>
+                </a:solidFill>
+              </a:rPr>
+              <a:t>23,35 €</a:t>
+            </a:r>
+          </a:p>
+        </p:txBody>
+      </p:sp>
+      <p:sp>
+        <p:nvSpPr>
+          <p:cNvPr id="5" name="need-text-0"/>
+          <p:cNvSpPr txBox="1"/>
+          <p:nvPr/>
+        </p:nvSpPr>
+        <p:spPr>
+          <a:xfrm>
+            <a:off x="546100" y="2667000"/>
+            <a:ext cx="2413000" cy="889000"/>
+          </a:xfrm>
+          <a:prstGeom prst="rect">
+            <a:avLst/>
+          </a:prstGeom>
+          <a:noFill/>
+        </p:spPr>
+        <p:txBody>
+          <a:bodyPr wrap="square" anchor="t" lIns="0" rIns="0" tIns="0" bIns="0">
+            <a:spAutoFit/>
+          </a:bodyPr>
+          <a:lstStyle/>
+          <a:p>
+            <a:r>
+              <a:rPr sz="1400" b="0">
+                <a:solidFill>
+                  <a:srgbClr val="B3B3B3"/>
+                </a:solidFill>
+              </a:rPr>
+              <a:t>pro m² für neu angebotene Wohnungen, fast 9 € über dem Bundesschnitt</a:t>
+            </a:r>
+          </a:p>
+        </p:txBody>
+      </p:sp>
+      <p:sp>
+        <p:nvSpPr>
+          <p:cNvPr id="6" name="!!need-label-1"/>
+          <p:cNvSpPr txBox="1"/>
+          <p:nvPr/>
+        </p:nvSpPr>
+        <p:spPr>
+          <a:xfrm>
+            <a:off x="3289300" y="1524000"/>
+            <a:ext cx="2489200" cy="254000"/>
+          </a:xfrm>
+          <a:prstGeom prst="rect">
+            <a:avLst/>
+          </a:prstGeom>
+          <a:noFill/>
+        </p:spPr>
+        <p:txBody>
+          <a:bodyPr wrap="square" anchor="t" lIns="0" rIns="0" tIns="0" bIns="0">
+            <a:spAutoFit/>
+          </a:bodyPr>
+          <a:lstStyle/>
+          <a:p>
+            <a:r>
+              <a:rPr sz="1000" b="1">
+                <a:solidFill>
+                  <a:srgbClr val="E2001A"/>
+                </a:solidFill>
+              </a:rPr>
+              <a:t>DEUTSCHLAND</a:t>
+            </a:r>
+          </a:p>
+        </p:txBody>
+      </p:sp>
+      <p:sp>
+        <p:nvSpPr>
+          <p:cNvPr id="7" name="!!need-num-1"/>
+          <p:cNvSpPr txBox="1"/>
+          <p:nvPr/>
+        </p:nvSpPr>
+        <p:spPr>
+          <a:xfrm>
+            <a:off x="3289300" y="1803400"/>
+            <a:ext cx="2489200" cy="762000"/>
+          </a:xfrm>
+          <a:prstGeom prst="rect">
+            <a:avLst/>
+          </a:prstGeom>
+          <a:noFill/>
+        </p:spPr>
+        <p:txBody>
+          <a:bodyPr wrap="square" anchor="t" lIns="0" rIns="0" tIns="0" bIns="0">
+            <a:spAutoFit/>
+          </a:bodyPr>
+          <a:lstStyle/>
+          <a:p>
+            <a:r>
+              <a:rPr sz="4600" b="1">
+                <a:solidFill>
+                  <a:srgbClr val="FFFFFF"/>
+                </a:solidFill>
+              </a:rPr>
+              <a:t>1 von 9</a:t>
+            </a:r>
+          </a:p>
+        </p:txBody>
+      </p:sp>
+      <p:sp>
+        <p:nvSpPr>
+          <p:cNvPr id="8" name="need-text-1"/>
+          <p:cNvSpPr txBox="1"/>
+          <p:nvPr/>
+        </p:nvSpPr>
+        <p:spPr>
+          <a:xfrm>
+            <a:off x="3289300" y="2667000"/>
+            <a:ext cx="2413000" cy="889000"/>
+          </a:xfrm>
+          <a:prstGeom prst="rect">
+            <a:avLst/>
+          </a:prstGeom>
+          <a:noFill/>
+        </p:spPr>
+        <p:txBody>
+          <a:bodyPr wrap="square" anchor="t" lIns="0" rIns="0" tIns="0" bIns="0">
+            <a:spAutoFit/>
+          </a:bodyPr>
+          <a:lstStyle/>
+          <a:p>
+            <a:r>
+              <a:rPr sz="1400" b="0">
+                <a:solidFill>
+                  <a:srgbClr val="B3B3B3"/>
+                </a:solidFill>
+              </a:rPr>
+              <a:t>Menschen fühlt sich häufig einsam, über 75-Jährige am stärksten</a:t>
+            </a:r>
+          </a:p>
+        </p:txBody>
+      </p:sp>
+      <p:sp>
+        <p:nvSpPr>
+          <p:cNvPr id="9" name="!!need-label-2"/>
+          <p:cNvSpPr txBox="1"/>
+          <p:nvPr/>
+        </p:nvSpPr>
+        <p:spPr>
+          <a:xfrm>
+            <a:off x="6032500" y="1524000"/>
+            <a:ext cx="2489200" cy="254000"/>
+          </a:xfrm>
+          <a:prstGeom prst="rect">
+            <a:avLst/>
+          </a:prstGeom>
+          <a:noFill/>
+        </p:spPr>
+        <p:txBody>
+          <a:bodyPr wrap="square" anchor="t" lIns="0" rIns="0" tIns="0" bIns="0">
+            <a:spAutoFit/>
+          </a:bodyPr>
+          <a:lstStyle/>
+          <a:p>
+            <a:r>
+              <a:rPr sz="1000" b="1">
+                <a:solidFill>
+                  <a:srgbClr val="E2001A"/>
+                </a:solidFill>
+              </a:rPr>
+              <a:t>EUROPA</a:t>
+            </a:r>
+          </a:p>
+        </p:txBody>
+      </p:sp>
+      <p:sp>
+        <p:nvSpPr>
+          <p:cNvPr id="10" name="!!need-num-2"/>
+          <p:cNvSpPr txBox="1"/>
+          <p:nvPr/>
+        </p:nvSpPr>
+        <p:spPr>
+          <a:xfrm>
+            <a:off x="6032500" y="1803400"/>
+            <a:ext cx="2489200" cy="762000"/>
+          </a:xfrm>
+          <a:prstGeom prst="rect">
+            <a:avLst/>
+          </a:prstGeom>
+          <a:noFill/>
+        </p:spPr>
+        <p:txBody>
+          <a:bodyPr wrap="square" anchor="t" lIns="0" rIns="0" tIns="0" bIns="0">
+            <a:spAutoFit/>
+          </a:bodyPr>
+          <a:lstStyle/>
+          <a:p>
+            <a:r>
+              <a:rPr sz="4600" b="1">
+                <a:solidFill>
+                  <a:srgbClr val="FFFFFF"/>
+                </a:solidFill>
+              </a:rPr>
+              <a:t>130 kg</a:t>
+            </a:r>
+          </a:p>
+        </p:txBody>
+      </p:sp>
+      <p:sp>
+        <p:nvSpPr>
+          <p:cNvPr id="11" name="need-text-2"/>
+          <p:cNvSpPr txBox="1"/>
+          <p:nvPr/>
+        </p:nvSpPr>
+        <p:spPr>
+          <a:xfrm>
+            <a:off x="6032500" y="2667000"/>
+            <a:ext cx="2413000" cy="889000"/>
+          </a:xfrm>
+          <a:prstGeom prst="rect">
+            <a:avLst/>
+          </a:prstGeom>
+          <a:noFill/>
+        </p:spPr>
+        <p:txBody>
+          <a:bodyPr wrap="square" anchor="t" lIns="0" rIns="0" tIns="0" bIns="0">
+            <a:spAutoFit/>
+          </a:bodyPr>
+          <a:lstStyle/>
+          <a:p>
+            <a:r>
+              <a:rPr sz="1400" b="0">
+                <a:solidFill>
+                  <a:srgbClr val="B3B3B3"/>
+                </a:solidFill>
+              </a:rPr>
+              <a:t>Lebensmittel pro Kopf und Jahr landen in der EU im Abfall</a:t>
+            </a:r>
+          </a:p>
+        </p:txBody>
+      </p:sp>
+      <p:sp>
+        <p:nvSpPr>
+          <p:cNvPr id="12" name="need-src"/>
+          <p:cNvSpPr txBox="1"/>
+          <p:nvPr/>
+        </p:nvSpPr>
+        <p:spPr>
+          <a:xfrm>
+            <a:off x="546100" y="4191000"/>
+            <a:ext cx="8051800" cy="381000"/>
+          </a:xfrm>
+          <a:prstGeom prst="rect">
+            <a:avLst/>
+          </a:prstGeom>
+          <a:noFill/>
+        </p:spPr>
+        <p:txBody>
+          <a:bodyPr wrap="square" anchor="t" lIns="0" rIns="0" tIns="0" bIns="0">
+            <a:spAutoFit/>
+          </a:bodyPr>
+          <a:lstStyle/>
+          <a:p>
+            <a:r>
+              <a:rPr sz="900" b="0">
+                <a:solidFill>
+                  <a:srgbClr val="888888"/>
+                </a:solidFill>
+              </a:rPr>
+              <a:t>Quellen: IfW Kiel, GREIX Q4/2025 · BMFSFJ, Einsamkeitsbarometer 2024 · Eurostat, Daten für 2023</a:t>
+            </a:r>
+          </a:p>
+        </p:txBody>
+      </p:sp>
+      <p:sp>
+        <p:nvSpPr>
+          <p:cNvPr id="25" name="Slide Number Placeholder 0"/>
+          <p:cNvSpPr>
+            <a:spLocks noGrp="1"/>
+          </p:cNvSpPr>
+          <p:nvPr>
+            <p:ph type="sldNum" sz="quarter" idx="4294967295"/>
+          </p:nvPr>
+        </p:nvSpPr>
+        <p:spPr>
+          <a:xfrm>
+            <a:off x="8412480" y="4754880"/>
+            <a:ext cx="457200" cy="274320"/>
+          </a:xfrm>
+          <a:prstGeom prst="rect">
+            <a:avLst/>
+          </a:prstGeom>
+          <a:extLst>
+            <a:ext uri="{C572A759-6A51-4108-AA02-DFA0A04FC94B}">
+              <ma14:wrappingTextBoxFlag xmlns:ma14="http://schemas.microsoft.com/office/mac/drawingml/2011/main" val="0"/>
+            </a:ext>
+          </a:extLst>
+        </p:spPr>
+        <p:txBody>
+          <a:bodyPr/>
+          <a:lstStyle>
+            <a:lvl1pPr>
+              <a:defRPr sz="1000">
+                <a:solidFill>
+                  <a:schemeClr val="accent3"/>
+                </a:solidFill>
+              </a:defRPr>
+            </a:lvl1pPr>
+          </a:lstStyle>
+          <a:p>
+            <a:pPr algn="l"/>
+            <a:fld id="{F7021451-1387-4CA6-816F-3879F97B5CBC}" type="slidenum">
+              <a:rPr b="0" lang="en-US"/>
+              <a:t>13</a:t>
+            </a:fld>
+            <a:endParaRPr lang="en-US"/>
+          </a:p>
+        </p:txBody>
+      </p:sp>
+    </p:spTree>
+  </p:cSld>
+  <p:clrMapOvr>
+    <a:masterClrMapping/>
+  </p:clrMapOvr>
+  <mc:AlternateContent xmlns:mc="http://schemas.openxmlformats.org/markup-compatibility/2006">
+    <mc:Choice xmlns:p159="http://schemas.microsoft.com/office/powerpoint/2015/09/main" Requires="p159">
+      <p:transition xmlns:p14="http://schemas.microsoft.com/office/powerpoint/2010/main" spd="slow" p14:dur="900">
+        <p159:morph option="byObject"/>
+      </p:transition>
+    </mc:Choice>
+    <mc:Fallback>
+      <p:transition spd="slow">
+        <p:fade/>
+      </p:transition>
+    </mc:Fallback>
+  </mc:AlternateContent>
+</p:sld>
+</file>
+
+<file path=ppt/slides/slide4.xml><?xml version="1.0" encoding="utf-8"?>
+<p:sld xmlns:a="http://schemas.openxmlformats.org/drawingml/2006/main" xmlns:p="http://schemas.openxmlformats.org/presentationml/2006/main" xmlns:r="http://schemas.openxmlformats.org/officeDocument/2006/relationships">
+  <p:cSld>
+    <p:spTree>
+      <p:nvGrpSpPr>
+        <p:cNvPr id="1" name=""/>
+        <p:cNvGrpSpPr/>
+        <p:nvPr/>
+      </p:nvGrpSpPr>
+      <p:grpSpPr/>
+      <p:sp>
+        <p:nvSpPr>
+          <p:cNvPr id="2" name="!!idea-head"/>
+          <p:cNvSpPr txBox="1"/>
+          <p:nvPr/>
+        </p:nvSpPr>
+        <p:spPr>
+          <a:xfrm>
+            <a:off x="546100" y="3683000"/>
+            <a:ext cx="8051800" cy="508000"/>
+          </a:xfrm>
+          <a:prstGeom prst="rect">
+            <a:avLst/>
+          </a:prstGeom>
+          <a:noFill/>
+        </p:spPr>
+        <p:txBody>
+          <a:bodyPr wrap="square" anchor="t" lIns="0" rIns="0" tIns="0" bIns="0">
+            <a:spAutoFit/>
+          </a:bodyPr>
+          <a:lstStyle/>
+          <a:p>
+            <a:r>
+              <a:rPr sz="2400" b="1">
+                <a:solidFill>
+                  <a:schemeClr val="tx1"/>
+                </a:solidFill>
+              </a:rPr>
+              <a:t>Frag an, was dir fehlt. Biete, was du entbehren kannst.</a:t>
+            </a:r>
+          </a:p>
+        </p:txBody>
+      </p:sp>
+      <p:sp>
+        <p:nvSpPr>
+          <p:cNvPr id="3" name="idea-sub"/>
+          <p:cNvSpPr txBox="1"/>
+          <p:nvPr/>
+        </p:nvSpPr>
+        <p:spPr>
+          <a:xfrm>
+            <a:off x="546100" y="4216400"/>
+            <a:ext cx="8051800" cy="635000"/>
+          </a:xfrm>
+          <a:prstGeom prst="rect">
+            <a:avLst/>
+          </a:prstGeom>
+          <a:noFill/>
+        </p:spPr>
+        <p:txBody>
+          <a:bodyPr wrap="square" anchor="t" lIns="0" rIns="0" tIns="0" bIns="0">
+            <a:spAutoFit/>
+          </a:bodyPr>
+          <a:lstStyle/>
+          <a:p>
+            <a:r>
+              <a:rPr sz="1400" b="0">
+                <a:solidFill>
+                  <a:schemeClr val="tx2"/>
+                </a:solidFill>
+              </a:rPr>
+              <a:t>Wer dasselbe will, verbindet sich zu Gruppen mit Zielen. Und wer etwas verändern will, bekommt eine Antwort.</a:t>
+            </a:r>
+          </a:p>
+        </p:txBody>
+      </p:sp>
+      <p:sp>
+        <p:nvSpPr>
+          <p:cNvPr id="4" name="!!idea-logo-0"/>
           <p:cNvSpPr/>
-          <p:nvPr>
-            <p:ph idx="100" type="title" hasCustomPrompt="1"/>
-          </p:nvPr>
-        </p:nvSpPr>
-        <p:spPr>
-          <a:xfrm>
-            <a:off x="457200" y="320040"/>
-            <a:ext cx="8229600" cy="685800"/>
-          </a:xfrm>
-          <a:prstGeom prst="rect">
-            <a:avLst/>
-          </a:prstGeom>
-          <a:noFill/>
-          <a:ln/>
-        </p:spPr>
-        <p:txBody>
-          <a:bodyPr wrap="square" lIns="0" tIns="0" rIns="0" bIns="0" rtlCol="0" anchor="t"/>
-          <a:lstStyle/>
-          <a:p>
-            <a:pPr algn="l" indent="0" marL="0">
-              <a:buNone/>
-            </a:pPr>
-            <a:r>
-              <a:rPr lang="en-US" sz="3000" b="1" dirty="0">
-                <a:solidFill>
-                  <a:schemeClr val="tx1"/>
-                </a:solidFill>
-              </a:rPr>
-              <a:t>Vier Grundsätze</a:t>
-            </a:r>
-            <a:endParaRPr lang="en-US" sz="3000" dirty="0"/>
-          </a:p>
-        </p:txBody>
-      </p:sp>
-      <p:sp>
-        <p:nvSpPr>
-          <p:cNvPr id="3" name="principle-0"/>
+          <p:nvPr/>
+        </p:nvSpPr>
+        <p:spPr>
+          <a:xfrm>
+            <a:off x="8590404" y="4816602"/>
+            <a:ext cx="82301" cy="94996"/>
+          </a:xfrm>
+          <a:custGeom>
+            <a:avLst/>
+            <a:gdLst/>
+            <a:ahLst/>
+            <a:cxnLst/>
+            <a:rect l="l" t="t" r="r" b="b"/>
+            <a:pathLst>
+              <a:path w="82301" h="94996">
+                <a:moveTo>
+                  <a:pt x="41151" y="0"/>
+                </a:moveTo>
+                <a:lnTo>
+                  <a:pt x="82301" y="23749"/>
+                </a:lnTo>
+                <a:lnTo>
+                  <a:pt x="82301" y="71247"/>
+                </a:lnTo>
+                <a:lnTo>
+                  <a:pt x="41151" y="94996"/>
+                </a:lnTo>
+                <a:lnTo>
+                  <a:pt x="0" y="71247"/>
+                </a:lnTo>
+                <a:lnTo>
+                  <a:pt x="0" y="23749"/>
+                </a:lnTo>
+                <a:close/>
+              </a:path>
+            </a:pathLst>
+          </a:custGeom>
+          <a:solidFill>
+            <a:srgbClr val="111111"/>
+          </a:solidFill>
+          <a:ln>
+            <a:noFill/>
+          </a:ln>
+          <a:effectLst/>
+        </p:spPr>
+        <p:style>
+          <a:lnRef idx="1">
+            <a:schemeClr val="accent1"/>
+          </a:lnRef>
+          <a:fillRef idx="3">
+            <a:schemeClr val="accent1"/>
+          </a:fillRef>
+          <a:effectRef idx="2">
+            <a:schemeClr val="accent1"/>
+          </a:effectRef>
+          <a:fontRef idx="minor">
+            <a:schemeClr val="lt1"/>
+          </a:fontRef>
+        </p:style>
+        <p:txBody>
+          <a:bodyPr rtlCol="0" anchor="ctr"/>
+          <a:lstStyle/>
+          <a:p>
+            <a:pPr algn="ctr"/>
+          </a:p>
+        </p:txBody>
+      </p:sp>
+      <p:sp>
+        <p:nvSpPr>
+          <p:cNvPr id="5" name="!!idea-logo-1"/>
           <p:cNvSpPr/>
           <p:nvPr/>
         </p:nvSpPr>
         <p:spPr>
           <a:xfrm>
-            <a:off x="457200" y="1188720"/>
-            <a:ext cx="4023360" cy="1508760"/>
-          </a:xfrm>
-          <a:prstGeom prst="rect">
-            <a:avLst/>
-          </a:prstGeom>
+            <a:off x="8396094" y="4816602"/>
+            <a:ext cx="82301" cy="94996"/>
+          </a:xfrm>
+          <a:custGeom>
+            <a:avLst/>
+            <a:gdLst/>
+            <a:ahLst/>
+            <a:cxnLst/>
+            <a:rect l="l" t="t" r="r" b="b"/>
+            <a:pathLst>
+              <a:path w="82301" h="94996">
+                <a:moveTo>
+                  <a:pt x="41151" y="0"/>
+                </a:moveTo>
+                <a:lnTo>
+                  <a:pt x="82301" y="23749"/>
+                </a:lnTo>
+                <a:lnTo>
+                  <a:pt x="82301" y="71247"/>
+                </a:lnTo>
+                <a:lnTo>
+                  <a:pt x="41151" y="94996"/>
+                </a:lnTo>
+                <a:lnTo>
+                  <a:pt x="0" y="71247"/>
+                </a:lnTo>
+                <a:lnTo>
+                  <a:pt x="0" y="23749"/>
+                </a:lnTo>
+                <a:close/>
+              </a:path>
+            </a:pathLst>
+          </a:custGeom>
           <a:solidFill>
-            <a:schemeClr val="bg1"/>
+            <a:srgbClr val="111111"/>
           </a:solidFill>
-          <a:ln w="9525">
-            <a:solidFill>
-              <a:schemeClr val="accent6"/>
-            </a:solidFill>
-            <a:prstDash val="solid"/>
+          <a:ln>
+            <a:noFill/>
           </a:ln>
-        </p:spPr>
-      </p:sp>
-      <p:sp>
-        <p:nvSpPr>
-          <p:cNvPr id="4" name="p-dot-0"/>
+          <a:effectLst/>
+        </p:spPr>
+        <p:style>
+          <a:lnRef idx="1">
+            <a:schemeClr val="accent1"/>
+          </a:lnRef>
+          <a:fillRef idx="3">
+            <a:schemeClr val="accent1"/>
+          </a:fillRef>
+          <a:effectRef idx="2">
+            <a:schemeClr val="accent1"/>
+          </a:effectRef>
+          <a:fontRef idx="minor">
+            <a:schemeClr val="lt1"/>
+          </a:fontRef>
+        </p:style>
+        <p:txBody>
+          <a:bodyPr rtlCol="0" anchor="ctr"/>
+          <a:lstStyle/>
+          <a:p>
+            <a:pPr algn="ctr"/>
+          </a:p>
+        </p:txBody>
+      </p:sp>
+      <p:sp>
+        <p:nvSpPr>
+          <p:cNvPr id="6" name="!!idea-logo-2"/>
           <p:cNvSpPr/>
           <p:nvPr/>
         </p:nvSpPr>
         <p:spPr>
           <a:xfrm>
-            <a:off x="685800" y="1463040"/>
-            <a:ext cx="548640" cy="548640"/>
-          </a:xfrm>
-          <a:prstGeom prst="ellipse">
-            <a:avLst/>
-          </a:prstGeom>
+            <a:off x="8541826" y="4732401"/>
+            <a:ext cx="82302" cy="94996"/>
+          </a:xfrm>
+          <a:custGeom>
+            <a:avLst/>
+            <a:gdLst/>
+            <a:ahLst/>
+            <a:cxnLst/>
+            <a:rect l="l" t="t" r="r" b="b"/>
+            <a:pathLst>
+              <a:path w="82302" h="94996">
+                <a:moveTo>
+                  <a:pt x="41151" y="0"/>
+                </a:moveTo>
+                <a:lnTo>
+                  <a:pt x="82302" y="23749"/>
+                </a:lnTo>
+                <a:lnTo>
+                  <a:pt x="82302" y="71247"/>
+                </a:lnTo>
+                <a:lnTo>
+                  <a:pt x="41151" y="94996"/>
+                </a:lnTo>
+                <a:lnTo>
+                  <a:pt x="0" y="71247"/>
+                </a:lnTo>
+                <a:lnTo>
+                  <a:pt x="0" y="23749"/>
+                </a:lnTo>
+                <a:close/>
+              </a:path>
+            </a:pathLst>
+          </a:custGeom>
           <a:solidFill>
-            <a:schemeClr val="accent1"/>
+            <a:srgbClr val="111111"/>
           </a:solidFill>
-          <a:ln w="12700">
-            <a:solidFill>
-              <a:schemeClr val="accent1"/>
-            </a:solidFill>
-            <a:prstDash val="solid"/>
+          <a:ln>
+            <a:noFill/>
           </a:ln>
-        </p:spPr>
+          <a:effectLst/>
+        </p:spPr>
+        <p:style>
+          <a:lnRef idx="1">
+            <a:schemeClr val="accent1"/>
+          </a:lnRef>
+          <a:fillRef idx="3">
+            <a:schemeClr val="accent1"/>
+          </a:fillRef>
+          <a:effectRef idx="2">
+            <a:schemeClr val="accent1"/>
+          </a:effectRef>
+          <a:fontRef idx="minor">
+            <a:schemeClr val="lt1"/>
+          </a:fontRef>
+        </p:style>
+        <p:txBody>
+          <a:bodyPr rtlCol="0" anchor="ctr"/>
+          <a:lstStyle/>
+          <a:p>
+            <a:pPr algn="ctr"/>
+          </a:p>
+        </p:txBody>
+      </p:sp>
+      <p:sp>
+        <p:nvSpPr>
+          <p:cNvPr id="7" name="!!idea-logo-3"/>
+          <p:cNvSpPr/>
+          <p:nvPr/>
+        </p:nvSpPr>
+        <p:spPr>
+          <a:xfrm>
+            <a:off x="8444671" y="4732401"/>
+            <a:ext cx="82302" cy="94996"/>
+          </a:xfrm>
+          <a:custGeom>
+            <a:avLst/>
+            <a:gdLst/>
+            <a:ahLst/>
+            <a:cxnLst/>
+            <a:rect l="l" t="t" r="r" b="b"/>
+            <a:pathLst>
+              <a:path w="82302" h="94996">
+                <a:moveTo>
+                  <a:pt x="41151" y="0"/>
+                </a:moveTo>
+                <a:lnTo>
+                  <a:pt x="82302" y="23749"/>
+                </a:lnTo>
+                <a:lnTo>
+                  <a:pt x="82302" y="71247"/>
+                </a:lnTo>
+                <a:lnTo>
+                  <a:pt x="41151" y="94996"/>
+                </a:lnTo>
+                <a:lnTo>
+                  <a:pt x="0" y="71247"/>
+                </a:lnTo>
+                <a:lnTo>
+                  <a:pt x="0" y="23749"/>
+                </a:lnTo>
+                <a:close/>
+              </a:path>
+            </a:pathLst>
+          </a:custGeom>
+          <a:solidFill>
+            <a:srgbClr val="111111"/>
+          </a:solidFill>
+          <a:ln>
+            <a:noFill/>
+          </a:ln>
+          <a:effectLst/>
+        </p:spPr>
+        <p:style>
+          <a:lnRef idx="1">
+            <a:schemeClr val="accent1"/>
+          </a:lnRef>
+          <a:fillRef idx="3">
+            <a:schemeClr val="accent1"/>
+          </a:fillRef>
+          <a:effectRef idx="2">
+            <a:schemeClr val="accent1"/>
+          </a:effectRef>
+          <a:fontRef idx="minor">
+            <a:schemeClr val="lt1"/>
+          </a:fontRef>
+        </p:style>
+        <p:txBody>
+          <a:bodyPr rtlCol="0" anchor="ctr"/>
+          <a:lstStyle/>
+          <a:p>
+            <a:pPr algn="ctr"/>
+          </a:p>
+        </p:txBody>
+      </p:sp>
+      <p:sp>
+        <p:nvSpPr>
+          <p:cNvPr id="8" name="!!idea-logo-4"/>
+          <p:cNvSpPr/>
+          <p:nvPr/>
+        </p:nvSpPr>
+        <p:spPr>
+          <a:xfrm>
+            <a:off x="8541826" y="4900803"/>
+            <a:ext cx="82302" cy="94996"/>
+          </a:xfrm>
+          <a:custGeom>
+            <a:avLst/>
+            <a:gdLst/>
+            <a:ahLst/>
+            <a:cxnLst/>
+            <a:rect l="l" t="t" r="r" b="b"/>
+            <a:pathLst>
+              <a:path w="82302" h="94996">
+                <a:moveTo>
+                  <a:pt x="41151" y="0"/>
+                </a:moveTo>
+                <a:lnTo>
+                  <a:pt x="82302" y="23749"/>
+                </a:lnTo>
+                <a:lnTo>
+                  <a:pt x="82302" y="71247"/>
+                </a:lnTo>
+                <a:lnTo>
+                  <a:pt x="41151" y="94996"/>
+                </a:lnTo>
+                <a:lnTo>
+                  <a:pt x="0" y="71247"/>
+                </a:lnTo>
+                <a:lnTo>
+                  <a:pt x="0" y="23749"/>
+                </a:lnTo>
+                <a:close/>
+              </a:path>
+            </a:pathLst>
+          </a:custGeom>
+          <a:solidFill>
+            <a:srgbClr val="111111"/>
+          </a:solidFill>
+          <a:ln>
+            <a:noFill/>
+          </a:ln>
+          <a:effectLst/>
+        </p:spPr>
+        <p:style>
+          <a:lnRef idx="1">
+            <a:schemeClr val="accent1"/>
+          </a:lnRef>
+          <a:fillRef idx="3">
+            <a:schemeClr val="accent1"/>
+          </a:fillRef>
+          <a:effectRef idx="2">
+            <a:schemeClr val="accent1"/>
+          </a:effectRef>
+          <a:fontRef idx="minor">
+            <a:schemeClr val="lt1"/>
+          </a:fontRef>
+        </p:style>
+        <p:txBody>
+          <a:bodyPr rtlCol="0" anchor="ctr"/>
+          <a:lstStyle/>
+          <a:p>
+            <a:pPr algn="ctr"/>
+          </a:p>
+        </p:txBody>
+      </p:sp>
+      <p:sp>
+        <p:nvSpPr>
+          <p:cNvPr id="9" name="!!idea-logo-5"/>
+          <p:cNvSpPr/>
+          <p:nvPr/>
+        </p:nvSpPr>
+        <p:spPr>
+          <a:xfrm>
+            <a:off x="8444671" y="4900803"/>
+            <a:ext cx="82302" cy="94996"/>
+          </a:xfrm>
+          <a:custGeom>
+            <a:avLst/>
+            <a:gdLst/>
+            <a:ahLst/>
+            <a:cxnLst/>
+            <a:rect l="l" t="t" r="r" b="b"/>
+            <a:pathLst>
+              <a:path w="82302" h="94996">
+                <a:moveTo>
+                  <a:pt x="41151" y="0"/>
+                </a:moveTo>
+                <a:lnTo>
+                  <a:pt x="82302" y="23749"/>
+                </a:lnTo>
+                <a:lnTo>
+                  <a:pt x="82302" y="71247"/>
+                </a:lnTo>
+                <a:lnTo>
+                  <a:pt x="41151" y="94996"/>
+                </a:lnTo>
+                <a:lnTo>
+                  <a:pt x="0" y="71247"/>
+                </a:lnTo>
+                <a:lnTo>
+                  <a:pt x="0" y="23749"/>
+                </a:lnTo>
+                <a:close/>
+              </a:path>
+            </a:pathLst>
+          </a:custGeom>
+          <a:solidFill>
+            <a:srgbClr val="111111"/>
+          </a:solidFill>
+          <a:ln>
+            <a:noFill/>
+          </a:ln>
+          <a:effectLst/>
+        </p:spPr>
+        <p:style>
+          <a:lnRef idx="1">
+            <a:schemeClr val="accent1"/>
+          </a:lnRef>
+          <a:fillRef idx="3">
+            <a:schemeClr val="accent1"/>
+          </a:fillRef>
+          <a:effectRef idx="2">
+            <a:schemeClr val="accent1"/>
+          </a:effectRef>
+          <a:fontRef idx="minor">
+            <a:schemeClr val="lt1"/>
+          </a:fontRef>
+        </p:style>
+        <p:txBody>
+          <a:bodyPr rtlCol="0" anchor="ctr"/>
+          <a:lstStyle/>
+          <a:p>
+            <a:pPr algn="ctr"/>
+          </a:p>
+        </p:txBody>
+      </p:sp>
+      <p:sp>
+        <p:nvSpPr>
+          <p:cNvPr id="10" name="!!idea-logo-6"/>
+          <p:cNvSpPr/>
+          <p:nvPr/>
+        </p:nvSpPr>
+        <p:spPr>
+          <a:xfrm>
+            <a:off x="8493249" y="4816602"/>
+            <a:ext cx="82301" cy="94996"/>
+          </a:xfrm>
+          <a:custGeom>
+            <a:avLst/>
+            <a:gdLst/>
+            <a:ahLst/>
+            <a:cxnLst/>
+            <a:rect l="l" t="t" r="r" b="b"/>
+            <a:pathLst>
+              <a:path w="82301" h="94996">
+                <a:moveTo>
+                  <a:pt x="41151" y="0"/>
+                </a:moveTo>
+                <a:lnTo>
+                  <a:pt x="82301" y="23749"/>
+                </a:lnTo>
+                <a:lnTo>
+                  <a:pt x="82301" y="71247"/>
+                </a:lnTo>
+                <a:lnTo>
+                  <a:pt x="41151" y="94996"/>
+                </a:lnTo>
+                <a:lnTo>
+                  <a:pt x="0" y="71247"/>
+                </a:lnTo>
+                <a:lnTo>
+                  <a:pt x="0" y="23749"/>
+                </a:lnTo>
+                <a:close/>
+              </a:path>
+            </a:pathLst>
+          </a:custGeom>
+          <a:solidFill>
+            <a:srgbClr val="E2001A"/>
+          </a:solidFill>
+          <a:ln>
+            <a:noFill/>
+          </a:ln>
+          <a:effectLst/>
+        </p:spPr>
+        <p:style>
+          <a:lnRef idx="1">
+            <a:schemeClr val="accent1"/>
+          </a:lnRef>
+          <a:fillRef idx="3">
+            <a:schemeClr val="accent1"/>
+          </a:fillRef>
+          <a:effectRef idx="2">
+            <a:schemeClr val="accent1"/>
+          </a:effectRef>
+          <a:fontRef idx="minor">
+            <a:schemeClr val="lt1"/>
+          </a:fontRef>
+        </p:style>
+        <p:txBody>
+          <a:bodyPr rtlCol="0" anchor="ctr"/>
+          <a:lstStyle/>
+          <a:p>
+            <a:pPr algn="ctr"/>
+          </a:p>
+        </p:txBody>
       </p:sp>
       <p:pic>
         <p:nvPicPr>
-          <p:cNvPr id="5" name="p-icon-0" descr="preencoded.png">    </p:cNvPr>
-          <p:cNvPicPr>
-            <a:picLocks noChangeAspect="1"/>
-          </p:cNvPicPr>
-          <p:nvPr/>
-        </p:nvPicPr>
-        <p:blipFill>
-          <a:blip r:embed="rId1"/>
-          <a:stretch>
-            <a:fillRect/>
-          </a:stretch>
-        </p:blipFill>
-        <p:spPr>
-          <a:xfrm>
-            <a:off x="822960" y="1600200"/>
-            <a:ext cx="274320" cy="274320"/>
-          </a:xfrm>
-          <a:prstGeom prst="rect">
-            <a:avLst/>
-          </a:prstGeom>
-        </p:spPr>
-      </p:pic>
-      <p:sp>
-        <p:nvSpPr>
-          <p:cNvPr id="6" name="p-h-0"/>
-          <p:cNvSpPr txBox="1"/>
-          <p:nvPr/>
-        </p:nvSpPr>
-        <p:spPr>
-          <a:xfrm>
-            <a:off x="1417320" y="1389888"/>
-            <a:ext cx="2880360" cy="365760"/>
-          </a:xfrm>
-          <a:prstGeom prst="rect">
-            <a:avLst/>
-          </a:prstGeom>
-          <a:noFill/>
-          <a:ln/>
-        </p:spPr>
-        <p:txBody>
-          <a:bodyPr wrap="square" lIns="0" tIns="0" rIns="0" bIns="0" rtlCol="0" anchor="ctr"/>
-          <a:lstStyle/>
-          <a:p>
-            <a:pPr indent="0" marL="0">
-              <a:buNone/>
-            </a:pPr>
-            <a:r>
-              <a:rPr lang="en-US" sz="1600" b="1" dirty="0">
-                <a:solidFill>
-                  <a:schemeClr val="tx1"/>
-                </a:solidFill>
-              </a:rPr>
-              <a:t>Gehör statt Reichweite</a:t>
-            </a:r>
-            <a:endParaRPr lang="en-US" sz="1600" dirty="0"/>
-          </a:p>
-        </p:txBody>
-      </p:sp>
-      <p:sp>
-        <p:nvSpPr>
-          <p:cNvPr id="7" name="p-t-0"/>
-          <p:cNvSpPr txBox="1"/>
-          <p:nvPr/>
-        </p:nvSpPr>
-        <p:spPr>
-          <a:xfrm>
-            <a:off x="1417320" y="1755648"/>
-            <a:ext cx="2880360" cy="822960"/>
-          </a:xfrm>
-          <a:prstGeom prst="rect">
-            <a:avLst/>
-          </a:prstGeom>
-          <a:noFill/>
-          <a:ln/>
-        </p:spPr>
-        <p:txBody>
-          <a:bodyPr wrap="square" lIns="0" tIns="0" rIns="0" bIns="0" rtlCol="0" anchor="t"/>
-          <a:lstStyle/>
-          <a:p>
-            <a:pPr indent="0" marL="0">
-              <a:buNone/>
-            </a:pPr>
-            <a:r>
-              <a:rPr lang="en-US" sz="1200" dirty="0">
-                <a:solidFill>
-                  <a:schemeClr val="tx2"/>
-                </a:solidFill>
-              </a:rPr>
-              <a:t>Oben stehen Argumente, die beide Seiten überzeugen. Keine Follower-Zahlen, keine Likes als Währung.</a:t>
-            </a:r>
-            <a:endParaRPr lang="en-US" sz="1200" dirty="0"/>
-          </a:p>
-        </p:txBody>
-      </p:sp>
-      <p:sp>
-        <p:nvSpPr>
-          <p:cNvPr id="8" name="principle-1"/>
-          <p:cNvSpPr/>
-          <p:nvPr/>
-        </p:nvSpPr>
-        <p:spPr>
-          <a:xfrm>
-            <a:off x="4663440" y="1188720"/>
-            <a:ext cx="4023360" cy="1508760"/>
-          </a:xfrm>
-          <a:prstGeom prst="rect">
-            <a:avLst/>
-          </a:prstGeom>
-          <a:solidFill>
-            <a:schemeClr val="bg1"/>
-          </a:solidFill>
-          <a:ln w="9525">
-            <a:solidFill>
-              <a:schemeClr val="accent6"/>
-            </a:solidFill>
-            <a:prstDash val="solid"/>
-          </a:ln>
-        </p:spPr>
-      </p:sp>
-      <p:sp>
-        <p:nvSpPr>
-          <p:cNvPr id="9" name="p-dot-1"/>
-          <p:cNvSpPr/>
-          <p:nvPr/>
-        </p:nvSpPr>
-        <p:spPr>
-          <a:xfrm>
-            <a:off x="4892040" y="1463040"/>
-            <a:ext cx="548640" cy="548640"/>
-          </a:xfrm>
-          <a:prstGeom prst="ellipse">
-            <a:avLst/>
-          </a:prstGeom>
-          <a:solidFill>
-            <a:schemeClr val="tx1"/>
-          </a:solidFill>
-          <a:ln w="12700">
-            <a:solidFill>
-              <a:schemeClr val="tx1"/>
-            </a:solidFill>
-            <a:prstDash val="solid"/>
-          </a:ln>
-        </p:spPr>
-      </p:sp>
-      <p:pic>
-        <p:nvPicPr>
-          <p:cNvPr id="10" name="p-icon-1" descr="preencoded.png">    </p:cNvPr>
-          <p:cNvPicPr>
-            <a:picLocks noChangeAspect="1"/>
-          </p:cNvPicPr>
-          <p:nvPr/>
-        </p:nvPicPr>
-        <p:blipFill>
-          <a:blip r:embed="rId2"/>
-          <a:stretch>
-            <a:fillRect/>
-          </a:stretch>
-        </p:blipFill>
-        <p:spPr>
-          <a:xfrm>
-            <a:off x="5029200" y="1600200"/>
-            <a:ext cx="274320" cy="274320"/>
-          </a:xfrm>
-          <a:prstGeom prst="rect">
-            <a:avLst/>
-          </a:prstGeom>
-        </p:spPr>
-      </p:pic>
-      <p:sp>
-        <p:nvSpPr>
-          <p:cNvPr id="11" name="p-h-1"/>
-          <p:cNvSpPr txBox="1"/>
-          <p:nvPr/>
-        </p:nvSpPr>
-        <p:spPr>
-          <a:xfrm>
-            <a:off x="5623560" y="1389888"/>
-            <a:ext cx="2880360" cy="365760"/>
-          </a:xfrm>
-          <a:prstGeom prst="rect">
-            <a:avLst/>
-          </a:prstGeom>
-          <a:noFill/>
-          <a:ln/>
-        </p:spPr>
-        <p:txBody>
-          <a:bodyPr wrap="square" lIns="0" tIns="0" rIns="0" bIns="0" rtlCol="0" anchor="ctr"/>
-          <a:lstStyle/>
-          <a:p>
-            <a:pPr indent="0" marL="0">
-              <a:buNone/>
-            </a:pPr>
-            <a:r>
-              <a:rPr lang="en-US" sz="1600" b="1" dirty="0">
-                <a:solidFill>
-                  <a:schemeClr val="tx1"/>
-                </a:solidFill>
-              </a:rPr>
-              <a:t>Echte Menschen</a:t>
-            </a:r>
-            <a:endParaRPr lang="en-US" sz="1600" dirty="0"/>
-          </a:p>
-        </p:txBody>
-      </p:sp>
-      <p:sp>
-        <p:nvSpPr>
-          <p:cNvPr id="12" name="p-t-1"/>
-          <p:cNvSpPr txBox="1"/>
-          <p:nvPr/>
-        </p:nvSpPr>
-        <p:spPr>
-          <a:xfrm>
-            <a:off x="5623560" y="1755648"/>
-            <a:ext cx="2880360" cy="822960"/>
-          </a:xfrm>
-          <a:prstGeom prst="rect">
-            <a:avLst/>
-          </a:prstGeom>
-          <a:noFill/>
-          <a:ln/>
-        </p:spPr>
-        <p:txBody>
-          <a:bodyPr wrap="square" lIns="0" tIns="0" rIns="0" bIns="0" rtlCol="0" anchor="t"/>
-          <a:lstStyle/>
-          <a:p>
-            <a:pPr indent="0" marL="0">
-              <a:buNone/>
-            </a:pPr>
-            <a:r>
-              <a:rPr lang="en-US" sz="1200" dirty="0">
-                <a:solidFill>
-                  <a:schemeClr val="tx2"/>
-                </a:solidFill>
-              </a:rPr>
-              <a:t>Eine Person, ein Konto. Später mit Online-Ausweis bestätigt. Pseudonyme bleiben möglich.</a:t>
-            </a:r>
-            <a:endParaRPr lang="en-US" sz="1200" dirty="0"/>
-          </a:p>
-        </p:txBody>
-      </p:sp>
-      <p:sp>
-        <p:nvSpPr>
-          <p:cNvPr id="13" name="principle-2"/>
-          <p:cNvSpPr/>
-          <p:nvPr/>
-        </p:nvSpPr>
-        <p:spPr>
-          <a:xfrm>
-            <a:off x="457200" y="2880360"/>
-            <a:ext cx="4023360" cy="1508760"/>
-          </a:xfrm>
-          <a:prstGeom prst="rect">
-            <a:avLst/>
-          </a:prstGeom>
-          <a:solidFill>
-            <a:schemeClr val="bg1"/>
-          </a:solidFill>
-          <a:ln w="9525">
-            <a:solidFill>
-              <a:schemeClr val="accent6"/>
-            </a:solidFill>
-            <a:prstDash val="solid"/>
-          </a:ln>
-        </p:spPr>
-      </p:sp>
-      <p:sp>
-        <p:nvSpPr>
-          <p:cNvPr id="14" name="p-dot-2"/>
-          <p:cNvSpPr/>
-          <p:nvPr/>
-        </p:nvSpPr>
-        <p:spPr>
-          <a:xfrm>
-            <a:off x="685800" y="3154680"/>
-            <a:ext cx="548640" cy="548640"/>
-          </a:xfrm>
-          <a:prstGeom prst="ellipse">
-            <a:avLst/>
-          </a:prstGeom>
-          <a:solidFill>
-            <a:schemeClr val="tx1"/>
-          </a:solidFill>
-          <a:ln w="12700">
-            <a:solidFill>
-              <a:schemeClr val="tx1"/>
-            </a:solidFill>
-            <a:prstDash val="solid"/>
-          </a:ln>
-        </p:spPr>
-      </p:sp>
-      <p:pic>
-        <p:nvPicPr>
-          <p:cNvPr id="15" name="p-icon-2" descr="preencoded.png">    </p:cNvPr>
+          <p:cNvPr id="11" name="!!img-idee" descr="idee.jpg"/>
           <p:cNvPicPr>
             <a:picLocks noChangeAspect="1"/>
           </p:cNvPicPr>
@@ -10492,286 +12986,35 @@
         </p:blipFill>
         <p:spPr>
           <a:xfrm>
-            <a:off x="822960" y="3291840"/>
-            <a:ext cx="274320" cy="274320"/>
+            <a:off x="0" y="0"/>
+            <a:ext cx="9144000" cy="3429000"/>
           </a:xfrm>
           <a:prstGeom prst="rect">
             <a:avLst/>
           </a:prstGeom>
         </p:spPr>
       </p:pic>
-      <p:sp>
-        <p:nvSpPr>
-          <p:cNvPr id="16" name="p-h-2"/>
-          <p:cNvSpPr txBox="1"/>
-          <p:nvPr/>
-        </p:nvSpPr>
-        <p:spPr>
-          <a:xfrm>
-            <a:off x="1417320" y="3081528"/>
-            <a:ext cx="2880360" cy="365760"/>
-          </a:xfrm>
-          <a:prstGeom prst="rect">
-            <a:avLst/>
-          </a:prstGeom>
-          <a:noFill/>
-          <a:ln/>
-        </p:spPr>
-        <p:txBody>
-          <a:bodyPr wrap="square" lIns="0" tIns="0" rIns="0" bIns="0" rtlCol="0" anchor="ctr"/>
-          <a:lstStyle/>
-          <a:p>
-            <a:pPr indent="0" marL="0">
-              <a:buNone/>
-            </a:pPr>
-            <a:r>
-              <a:rPr lang="en-US" sz="1600" b="1" dirty="0">
-                <a:solidFill>
-                  <a:schemeClr val="tx1"/>
-                </a:solidFill>
-              </a:rPr>
-              <a:t>Verbindlich entscheiden</a:t>
-            </a:r>
-            <a:endParaRPr lang="en-US" sz="1600" dirty="0"/>
-          </a:p>
-        </p:txBody>
-      </p:sp>
-      <p:sp>
-        <p:nvSpPr>
-          <p:cNvPr id="17" name="p-t-2"/>
-          <p:cNvSpPr txBox="1"/>
-          <p:nvPr/>
-        </p:nvSpPr>
-        <p:spPr>
-          <a:xfrm>
-            <a:off x="1417320" y="3447288"/>
-            <a:ext cx="2880360" cy="822960"/>
-          </a:xfrm>
-          <a:prstGeom prst="rect">
-            <a:avLst/>
-          </a:prstGeom>
-          <a:noFill/>
-          <a:ln/>
-        </p:spPr>
-        <p:txBody>
-          <a:bodyPr wrap="square" lIns="0" tIns="0" rIns="0" bIns="0" rtlCol="0" anchor="t"/>
-          <a:lstStyle/>
-          <a:p>
-            <a:pPr indent="0" marL="0">
-              <a:buNone/>
-            </a:pPr>
-            <a:r>
-              <a:rPr lang="en-US" sz="1200" dirty="0">
-                <a:solidFill>
-                  <a:schemeClr val="tx2"/>
-                </a:solidFill>
-              </a:rPr>
-              <a:t>Geheime Abstimmungen, Betroffene zählen verbindlich, Zuständige antworten mit Frist und öffentlich.</a:t>
-            </a:r>
-            <a:endParaRPr lang="en-US" sz="1200" dirty="0"/>
-          </a:p>
-        </p:txBody>
-      </p:sp>
-      <p:sp>
-        <p:nvSpPr>
-          <p:cNvPr id="18" name="principle-3"/>
-          <p:cNvSpPr/>
-          <p:nvPr/>
-        </p:nvSpPr>
-        <p:spPr>
-          <a:xfrm>
-            <a:off x="4663440" y="2880360"/>
-            <a:ext cx="4023360" cy="1508760"/>
-          </a:xfrm>
-          <a:prstGeom prst="rect">
-            <a:avLst/>
-          </a:prstGeom>
-          <a:solidFill>
-            <a:schemeClr val="bg1"/>
-          </a:solidFill>
-          <a:ln w="9525">
-            <a:solidFill>
-              <a:schemeClr val="accent6"/>
-            </a:solidFill>
-            <a:prstDash val="solid"/>
-          </a:ln>
-        </p:spPr>
-      </p:sp>
-      <p:sp>
-        <p:nvSpPr>
-          <p:cNvPr id="19" name="p-dot-3"/>
-          <p:cNvSpPr/>
-          <p:nvPr/>
-        </p:nvSpPr>
-        <p:spPr>
-          <a:xfrm>
-            <a:off x="4892040" y="3154680"/>
-            <a:ext cx="548640" cy="548640"/>
-          </a:xfrm>
-          <a:prstGeom prst="ellipse">
-            <a:avLst/>
-          </a:prstGeom>
-          <a:solidFill>
-            <a:schemeClr val="tx1"/>
-          </a:solidFill>
-          <a:ln w="12700">
-            <a:solidFill>
-              <a:schemeClr val="tx1"/>
-            </a:solidFill>
-            <a:prstDash val="solid"/>
-          </a:ln>
-        </p:spPr>
-      </p:sp>
-      <p:pic>
-        <p:nvPicPr>
-          <p:cNvPr id="20" name="p-icon-3" descr="preencoded.png">    </p:cNvPr>
-          <p:cNvPicPr>
-            <a:picLocks noChangeAspect="1"/>
-          </p:cNvPicPr>
-          <p:nvPr/>
-        </p:nvPicPr>
-        <p:blipFill>
-          <a:blip r:embed="rId4"/>
-          <a:stretch>
-            <a:fillRect/>
-          </a:stretch>
-        </p:blipFill>
-        <p:spPr>
-          <a:xfrm>
-            <a:off x="5029200" y="3291840"/>
-            <a:ext cx="274320" cy="274320"/>
-          </a:xfrm>
-          <a:prstGeom prst="rect">
-            <a:avLst/>
-          </a:prstGeom>
-        </p:spPr>
-      </p:pic>
-      <p:sp>
-        <p:nvSpPr>
-          <p:cNvPr id="21" name="p-h-3"/>
-          <p:cNvSpPr txBox="1"/>
-          <p:nvPr/>
-        </p:nvSpPr>
-        <p:spPr>
-          <a:xfrm>
-            <a:off x="5623560" y="3081528"/>
-            <a:ext cx="2880360" cy="365760"/>
-          </a:xfrm>
-          <a:prstGeom prst="rect">
-            <a:avLst/>
-          </a:prstGeom>
-          <a:noFill/>
-          <a:ln/>
-        </p:spPr>
-        <p:txBody>
-          <a:bodyPr wrap="square" lIns="0" tIns="0" rIns="0" bIns="0" rtlCol="0" anchor="ctr"/>
-          <a:lstStyle/>
-          <a:p>
-            <a:pPr indent="0" marL="0">
-              <a:buNone/>
-            </a:pPr>
-            <a:r>
-              <a:rPr lang="en-US" sz="1600" b="1" dirty="0">
-                <a:solidFill>
-                  <a:schemeClr val="tx1"/>
-                </a:solidFill>
-              </a:rPr>
-              <a:t>Gemeingut statt Geschäft</a:t>
-            </a:r>
-            <a:endParaRPr lang="en-US" sz="1600" dirty="0"/>
-          </a:p>
-        </p:txBody>
-      </p:sp>
-      <p:sp>
-        <p:nvSpPr>
-          <p:cNvPr id="22" name="p-t-3"/>
-          <p:cNvSpPr txBox="1"/>
-          <p:nvPr/>
-        </p:nvSpPr>
-        <p:spPr>
-          <a:xfrm>
-            <a:off x="5623560" y="3447288"/>
-            <a:ext cx="2880360" cy="822960"/>
-          </a:xfrm>
-          <a:prstGeom prst="rect">
-            <a:avLst/>
-          </a:prstGeom>
-          <a:noFill/>
-          <a:ln/>
-        </p:spPr>
-        <p:txBody>
-          <a:bodyPr wrap="square" lIns="0" tIns="0" rIns="0" bIns="0" rtlCol="0" anchor="t"/>
-          <a:lstStyle/>
-          <a:p>
-            <a:pPr indent="0" marL="0">
-              <a:buNone/>
-            </a:pPr>
-            <a:r>
-              <a:rPr lang="en-US" sz="1200" dirty="0">
-                <a:solidFill>
-                  <a:schemeClr val="tx2"/>
-                </a:solidFill>
-              </a:rPr>
-              <a:t>Keine Werbung, kein Tracking. Offener Code (AGPL), selbst betreibbar von Vereinen und Kommunen.</a:t>
-            </a:r>
-            <a:endParaRPr lang="en-US" sz="1200" dirty="0"/>
-          </a:p>
-        </p:txBody>
-      </p:sp>
-      <p:sp>
-        <p:nvSpPr>
-          <p:cNvPr id="25" name="Slide Number Placeholder 0"/>
-          <p:cNvSpPr>
-            <a:spLocks noGrp="1"/>
-          </p:cNvSpPr>
-          <p:nvPr>
-            <p:ph type="sldNum" sz="quarter" idx="4294967295"/>
-          </p:nvPr>
-        </p:nvSpPr>
-        <p:spPr>
-          <a:xfrm>
-            <a:off x="8412480" y="4754880"/>
-            <a:ext cx="457200" cy="274320"/>
-          </a:xfrm>
-          <a:prstGeom prst="rect">
-            <a:avLst/>
-          </a:prstGeom>
-          <a:extLst>
-            <a:ext uri="{C572A759-6A51-4108-AA02-DFA0A04FC94B}">
-              <ma14:wrappingTextBoxFlag xmlns:ma14="http://schemas.microsoft.com/office/mac/drawingml/2011/main" val="0"/>
-            </a:ext>
-          </a:extLst>
-        </p:spPr>
-        <p:txBody>
-          <a:bodyPr/>
-          <a:lstStyle>
-            <a:lvl1pPr>
-              <a:defRPr sz="1000">
-                <a:solidFill>
-                  <a:schemeClr val="tx2"/>
-                </a:solidFill>
-              </a:defRPr>
-            </a:lvl1pPr>
-          </a:lstStyle>
-          <a:p>
-            <a:pPr algn="l"/>
-            <a:fld id="{F7021451-1387-4CA6-816F-3879F97B5CBC}" type="slidenum">
-              <a:rPr b="0" lang="en-US"/>
-              <a:t>3</a:t>
-            </a:fld>
-            <a:endParaRPr lang="en-US"/>
-          </a:p>
-        </p:txBody>
-      </p:sp>
     </p:spTree>
   </p:cSld>
   <p:clrMapOvr>
     <a:masterClrMapping/>
   </p:clrMapOvr>
+  <mc:AlternateContent xmlns:mc="http://schemas.openxmlformats.org/markup-compatibility/2006">
+    <mc:Choice xmlns:p159="http://schemas.microsoft.com/office/powerpoint/2015/09/main" Requires="p159">
+      <p:transition xmlns:p14="http://schemas.microsoft.com/office/powerpoint/2010/main" spd="slow" p14:dur="900">
+        <p159:morph option="byObject"/>
+      </p:transition>
+    </mc:Choice>
+    <mc:Fallback>
+      <p:transition spd="slow">
+        <p:fade/>
+      </p:transition>
+    </mc:Fallback>
+  </mc:AlternateContent>
 </p:sld>
 </file>
 
-<file path=ppt/slides/slide4.xml><?xml version="1.0" encoding="utf-8"?>
+<file path=ppt/slides/slide5.xml><?xml version="1.0" encoding="utf-8"?>
 <p:sld xmlns:a="http://schemas.openxmlformats.org/drawingml/2006/main" xmlns:r="http://schemas.openxmlformats.org/officeDocument/2006/relationships" xmlns:p="http://schemas.openxmlformats.org/presentationml/2006/main">
   <p:cSld name="Slide 4">
     <p:spTree>
@@ -11360,10 +13603,22 @@
   <p:clrMapOvr>
     <a:masterClrMapping/>
   </p:clrMapOvr>
+  <mc:AlternateContent xmlns:mc="http://schemas.openxmlformats.org/markup-compatibility/2006">
+    <mc:Choice xmlns:p159="http://schemas.microsoft.com/office/powerpoint/2015/09/main" Requires="p159">
+      <p:transition xmlns:p14="http://schemas.microsoft.com/office/powerpoint/2010/main" spd="slow" p14:dur="900">
+        <p159:morph option="byObject"/>
+      </p:transition>
+    </mc:Choice>
+    <mc:Fallback>
+      <p:transition spd="slow">
+        <p:fade/>
+      </p:transition>
+    </mc:Fallback>
+  </mc:AlternateContent>
 </p:sld>
 </file>
 
-<file path=ppt/slides/slide5.xml><?xml version="1.0" encoding="utf-8"?>
+<file path=ppt/slides/slide6.xml><?xml version="1.0" encoding="utf-8"?>
 <p:sld xmlns:a="http://schemas.openxmlformats.org/drawingml/2006/main" xmlns:r="http://schemas.openxmlformats.org/officeDocument/2006/relationships" xmlns:p="http://schemas.openxmlformats.org/presentationml/2006/main">
   <p:cSld name="Slide 5">
     <p:spTree>
@@ -12073,10 +14328,22 @@
   <p:clrMapOvr>
     <a:masterClrMapping/>
   </p:clrMapOvr>
+  <mc:AlternateContent xmlns:mc="http://schemas.openxmlformats.org/markup-compatibility/2006">
+    <mc:Choice xmlns:p159="http://schemas.microsoft.com/office/powerpoint/2015/09/main" Requires="p159">
+      <p:transition xmlns:p14="http://schemas.microsoft.com/office/powerpoint/2010/main" spd="slow" p14:dur="900">
+        <p159:morph option="byObject"/>
+      </p:transition>
+    </mc:Choice>
+    <mc:Fallback>
+      <p:transition spd="slow">
+        <p:fade/>
+      </p:transition>
+    </mc:Fallback>
+  </mc:AlternateContent>
 </p:sld>
 </file>
 
-<file path=ppt/slides/slide6.xml><?xml version="1.0" encoding="utf-8"?>
+<file path=ppt/slides/slide7.xml><?xml version="1.0" encoding="utf-8"?>
 <p:sld xmlns:a="http://schemas.openxmlformats.org/drawingml/2006/main" xmlns:r="http://schemas.openxmlformats.org/officeDocument/2006/relationships" xmlns:p="http://schemas.openxmlformats.org/presentationml/2006/main">
   <p:cSld name="Slide 6">
     <p:spTree>
@@ -12103,8 +14370,8 @@
         </p:nvSpPr>
         <p:spPr>
           <a:xfrm>
-            <a:off x="548640" y="1737360"/>
-            <a:ext cx="8046720" cy="914400"/>
+            <a:off x="546100" y="1016000"/>
+            <a:ext cx="4064000" cy="1778000"/>
           </a:xfrm>
           <a:prstGeom prst="rect">
             <a:avLst/>
@@ -12113,7 +14380,7 @@
           <a:ln/>
         </p:spPr>
         <p:txBody>
-          <a:bodyPr wrap="square" lIns="0" tIns="0" rIns="0" bIns="0" rtlCol="0"/>
+          <a:bodyPr wrap="square" lIns="0" tIns="0" rIns="0" bIns="0" rtlCol="0" anchor="b"/>
           <a:lstStyle/>
           <a:p>
             <a:pPr algn="l" indent="0" marL="0">
@@ -12125,7 +14392,7 @@
                   <a:schemeClr val="bg1"/>
                 </a:solidFill>
               </a:rPr>
-              <a:t>Zehn Menschen, zehn Situationen</a:t>
+              <a:t>Fünf Paare, die sich ergänzen</a:t>
             </a:r>
             <a:endParaRPr lang="en-US" sz="4000" dirty="0"/>
           </a:p>
@@ -12141,8 +14408,8 @@
         </p:nvSpPr>
         <p:spPr>
           <a:xfrm>
-            <a:off x="548640" y="2743200"/>
-            <a:ext cx="7315200" cy="822960"/>
+            <a:off x="546100" y="2946400"/>
+            <a:ext cx="4064000" cy="889000"/>
           </a:xfrm>
           <a:prstGeom prst="rect">
             <a:avLst/>
@@ -12163,7 +14430,7 @@
                   <a:schemeClr val="accent3"/>
                 </a:solidFill>
               </a:rPr>
-              <a:t>Wofür HiveVoice gemacht ist, und warum gerade hier.</a:t>
+              <a:t>Was die eine Person sucht, bietet die andere.</a:t>
             </a:r>
             <a:endParaRPr lang="en-US" sz="1800" dirty="0"/>
           </a:p>
@@ -12214,15 +14481,51 @@
           </a:p>
         </p:txBody>
       </p:sp>
+      <p:pic>
+        <p:nvPicPr>
+          <p:cNvPr id="26" name="!!img-paare" descr="paare.jpg"/>
+          <p:cNvPicPr>
+            <a:picLocks noChangeAspect="1"/>
+          </p:cNvPicPr>
+          <p:nvPr/>
+        </p:nvPicPr>
+        <p:blipFill>
+          <a:blip r:embed="rId3"/>
+          <a:stretch>
+            <a:fillRect/>
+          </a:stretch>
+        </p:blipFill>
+        <p:spPr>
+          <a:xfrm>
+            <a:off x="5029200" y="0"/>
+            <a:ext cx="4114800" cy="5143500"/>
+          </a:xfrm>
+          <a:prstGeom prst="rect">
+            <a:avLst/>
+          </a:prstGeom>
+        </p:spPr>
+      </p:pic>
     </p:spTree>
   </p:cSld>
   <p:clrMapOvr>
     <a:masterClrMapping/>
   </p:clrMapOvr>
+  <mc:AlternateContent xmlns:mc="http://schemas.openxmlformats.org/markup-compatibility/2006">
+    <mc:Choice xmlns:p159="http://schemas.microsoft.com/office/powerpoint/2015/09/main" Requires="p159">
+      <p:transition xmlns:p14="http://schemas.microsoft.com/office/powerpoint/2010/main" spd="slow" p14:dur="900">
+        <p159:morph option="byObject"/>
+      </p:transition>
+    </mc:Choice>
+    <mc:Fallback>
+      <p:transition spd="slow">
+        <p:fade/>
+      </p:transition>
+    </mc:Fallback>
+  </mc:AlternateContent>
 </p:sld>
 </file>
 
-<file path=ppt/slides/slide7.xml><?xml version="1.0" encoding="utf-8"?>
+<file path=ppt/slides/slide8.xml><?xml version="1.0" encoding="utf-8"?>
 <p:sld xmlns:a="http://schemas.openxmlformats.org/drawingml/2006/main" xmlns:r="http://schemas.openxmlformats.org/officeDocument/2006/relationships" xmlns:p="http://schemas.openxmlformats.org/presentationml/2006/main">
   <p:cSld name="Slide 7">
     <p:spTree>
@@ -12271,7 +14574,7 @@
                   <a:schemeClr val="tx1"/>
                 </a:solidFill>
               </a:rPr>
-              <a:t>Fatma und Jonas</a:t>
+              <a:t>Fatma und Erika</a:t>
             </a:r>
             <a:endParaRPr lang="en-US" sz="3000" dirty="0"/>
           </a:p>
@@ -12279,14 +14582,59 @@
       </p:sp>
       <p:sp>
         <p:nvSpPr>
-          <p:cNvPr id="3" name="persona-0-0"/>
+          <p:cNvPr id="25" name="Slide Number Placeholder 0"/>
+          <p:cNvSpPr>
+            <a:spLocks noGrp="1"/>
+          </p:cNvSpPr>
+          <p:nvPr>
+            <p:ph type="sldNum" sz="quarter" idx="4294967295"/>
+          </p:nvPr>
+        </p:nvSpPr>
+        <p:spPr>
+          <a:xfrm>
+            <a:off x="8412480" y="4754880"/>
+            <a:ext cx="457200" cy="274320"/>
+          </a:xfrm>
+          <a:prstGeom prst="rect">
+            <a:avLst/>
+          </a:prstGeom>
+          <a:extLst>
+            <a:ext uri="{C572A759-6A51-4108-AA02-DFA0A04FC94B}">
+              <ma14:wrappingTextBoxFlag xmlns:ma14="http://schemas.microsoft.com/office/mac/drawingml/2011/main" val="0"/>
+            </a:ext>
+          </a:extLst>
+        </p:spPr>
+        <p:txBody>
+          <a:bodyPr/>
+          <a:lstStyle>
+            <a:lvl1pPr>
+              <a:defRPr sz="1000">
+                <a:solidFill>
+                  <a:schemeClr val="tx2"/>
+                </a:solidFill>
+              </a:defRPr>
+            </a:lvl1pPr>
+          </a:lstStyle>
+          <a:p>
+            <a:pPr algn="l"/>
+            <a:fld id="{F7021451-1387-4CA6-816F-3879F97B5CBC}" type="slidenum">
+              <a:rPr b="0" lang="en-US"/>
+              <a:t>7</a:t>
+            </a:fld>
+            <a:endParaRPr lang="en-US"/>
+          </a:p>
+        </p:txBody>
+      </p:sp>
+      <p:sp>
+        <p:nvSpPr>
+          <p:cNvPr id="26" name="!!card-a"/>
           <p:cNvSpPr/>
           <p:nvPr/>
         </p:nvSpPr>
         <p:spPr>
           <a:xfrm>
-            <a:off x="457200" y="1188720"/>
-            <a:ext cx="4023360" cy="3291840"/>
+            <a:off x="457200" y="1193800"/>
+            <a:ext cx="3683000" cy="3327400"/>
           </a:xfrm>
           <a:prstGeom prst="rect">
             <a:avLst/>
@@ -12298,20 +14646,41 @@
             <a:solidFill>
               <a:schemeClr val="accent6"/>
             </a:solidFill>
-            <a:prstDash val="solid"/>
           </a:ln>
-        </p:spPr>
-      </p:sp>
-      <p:sp>
-        <p:nvSpPr>
-          <p:cNvPr id="4" name="pp-dot-0-0"/>
+          <a:effectLst/>
+        </p:spPr>
+        <p:style>
+          <a:lnRef idx="1">
+            <a:schemeClr val="accent1"/>
+          </a:lnRef>
+          <a:fillRef idx="3">
+            <a:schemeClr val="accent1"/>
+          </a:fillRef>
+          <a:effectRef idx="2">
+            <a:schemeClr val="accent1"/>
+          </a:effectRef>
+          <a:fontRef idx="minor">
+            <a:schemeClr val="lt1"/>
+          </a:fontRef>
+        </p:style>
+        <p:txBody>
+          <a:bodyPr rtlCol="0" anchor="ctr"/>
+          <a:lstStyle/>
+          <a:p>
+            <a:pPr algn="ctr"/>
+          </a:p>
+        </p:txBody>
+      </p:sp>
+      <p:sp>
+        <p:nvSpPr>
+          <p:cNvPr id="27" name="!!dot-a"/>
           <p:cNvSpPr/>
           <p:nvPr/>
         </p:nvSpPr>
         <p:spPr>
           <a:xfrm>
-            <a:off x="731520" y="1417320"/>
-            <a:ext cx="685800" cy="685800"/>
+            <a:off x="711200" y="1422400"/>
+            <a:ext cx="635000" cy="635000"/>
           </a:xfrm>
           <a:prstGeom prst="ellipse">
             <a:avLst/>
@@ -12319,17 +14688,36 @@
           <a:solidFill>
             <a:schemeClr val="tx1"/>
           </a:solidFill>
-          <a:ln w="12700">
-            <a:solidFill>
-              <a:schemeClr val="tx1"/>
-            </a:solidFill>
-            <a:prstDash val="solid"/>
+          <a:ln>
+            <a:noFill/>
           </a:ln>
-        </p:spPr>
+          <a:effectLst/>
+        </p:spPr>
+        <p:style>
+          <a:lnRef idx="1">
+            <a:schemeClr val="accent1"/>
+          </a:lnRef>
+          <a:fillRef idx="3">
+            <a:schemeClr val="accent1"/>
+          </a:fillRef>
+          <a:effectRef idx="2">
+            <a:schemeClr val="accent1"/>
+          </a:effectRef>
+          <a:fontRef idx="minor">
+            <a:schemeClr val="lt1"/>
+          </a:fontRef>
+        </p:style>
+        <p:txBody>
+          <a:bodyPr rtlCol="0" anchor="ctr"/>
+          <a:lstStyle/>
+          <a:p>
+            <a:pPr algn="ctr"/>
+          </a:p>
+        </p:txBody>
       </p:sp>
       <p:pic>
         <p:nvPicPr>
-          <p:cNvPr id="5" name="pp-icon-0-0" descr="preencoded.png">    </p:cNvPr>
+          <p:cNvPr id="28" name="icon-a" descr="image.png"/>
           <p:cNvPicPr>
             <a:picLocks noChangeAspect="1"/>
           </p:cNvPicPr>
@@ -12343,8 +14731,8 @@
         </p:blipFill>
         <p:spPr>
           <a:xfrm>
-            <a:off x="891540" y="1577340"/>
-            <a:ext cx="365760" cy="365760"/>
+            <a:off x="850900" y="1562100"/>
+            <a:ext cx="355600" cy="355600"/>
           </a:xfrm>
           <a:prstGeom prst="rect">
             <a:avLst/>
@@ -12353,136 +14741,153 @@
       </p:pic>
       <p:sp>
         <p:nvSpPr>
-          <p:cNvPr id="6" name="pp-name-0-0"/>
+          <p:cNvPr id="29" name="name-a"/>
           <p:cNvSpPr txBox="1"/>
           <p:nvPr/>
         </p:nvSpPr>
         <p:spPr>
           <a:xfrm>
-            <a:off x="1600200" y="1417320"/>
-            <a:ext cx="2697480" cy="685800"/>
+            <a:off x="1524000" y="1422400"/>
+            <a:ext cx="2362200" cy="635000"/>
           </a:xfrm>
           <a:prstGeom prst="rect">
             <a:avLst/>
           </a:prstGeom>
           <a:noFill/>
-          <a:ln/>
-        </p:spPr>
-        <p:txBody>
-          <a:bodyPr wrap="square" lIns="0" tIns="0" rIns="0" bIns="0" rtlCol="0" anchor="ctr"/>
-          <a:lstStyle/>
-          <a:p>
-            <a:pPr indent="0" marL="0">
-              <a:buNone/>
+        </p:spPr>
+        <p:txBody>
+          <a:bodyPr wrap="square" anchor="ctr" lIns="0" rIns="0" tIns="0" bIns="0">
+            <a:spAutoFit/>
+          </a:bodyPr>
+          <a:lstStyle/>
+          <a:p>
+            <a:r>
+              <a:rPr sz="1700" b="1">
+                <a:solidFill>
+                  <a:schemeClr val="tx1"/>
+                </a:solidFill>
+              </a:rPr>
+              <a:t>Fatma, 34</a:t>
+            </a:r>
+          </a:p>
+          <a:p>
+            <a:r>
+              <a:rPr sz="1100" b="0">
+                <a:solidFill>
+                  <a:schemeClr val="tx2"/>
+                </a:solidFill>
+              </a:rPr>
+              <a:t>alleinerziehend, Schichtdienst</a:t>
+            </a:r>
+          </a:p>
+        </p:txBody>
+      </p:sp>
+      <p:sp>
+        <p:nvSpPr>
+          <p:cNvPr id="30" name="sucht-a"/>
+          <p:cNvSpPr txBox="1"/>
+          <p:nvPr/>
+        </p:nvSpPr>
+        <p:spPr>
+          <a:xfrm>
+            <a:off x="711200" y="2260600"/>
+            <a:ext cx="3175000" cy="736600"/>
+          </a:xfrm>
+          <a:prstGeom prst="rect">
+            <a:avLst/>
+          </a:prstGeom>
+          <a:noFill/>
+        </p:spPr>
+        <p:txBody>
+          <a:bodyPr wrap="square" anchor="t" lIns="0" rIns="0" tIns="0" bIns="0">
+            <a:spAutoFit/>
+          </a:bodyPr>
+          <a:lstStyle/>
+          <a:p>
+            <a:r>
+              <a:rPr sz="900" b="1">
+                <a:solidFill>
+                  <a:srgbClr val="E2001A"/>
+                </a:solidFill>
+              </a:rPr>
+              <a:t>SUCHT</a:t>
+            </a:r>
+          </a:p>
+          <a:p>
+            <a:pPr>
+              <a:spcBef>
+                <a:spcPts val="200"/>
+              </a:spcBef>
             </a:pPr>
             <a:r>
-              <a:rPr lang="en-US" sz="1800" b="1" dirty="0">
+              <a:rPr sz="1300" b="1">
                 <a:solidFill>
                   <a:schemeClr val="tx1"/>
                 </a:solidFill>
               </a:rPr>
-              <a:t>Fatma, 34</a:t>
-            </a:r>
-            <a:endParaRPr lang="en-US" sz="1800" dirty="0"/>
-          </a:p>
-          <a:p>
-            <a:pPr indent="0" marL="0">
-              <a:buNone/>
+              <a:t>Betreuung für ihren Sohn an zwei Abenden pro Woche</a:t>
+            </a:r>
+          </a:p>
+        </p:txBody>
+      </p:sp>
+      <p:sp>
+        <p:nvSpPr>
+          <p:cNvPr id="31" name="bietet-a"/>
+          <p:cNvSpPr txBox="1"/>
+          <p:nvPr/>
+        </p:nvSpPr>
+        <p:spPr>
+          <a:xfrm>
+            <a:off x="711200" y="3073400"/>
+            <a:ext cx="3175000" cy="736600"/>
+          </a:xfrm>
+          <a:prstGeom prst="rect">
+            <a:avLst/>
+          </a:prstGeom>
+          <a:noFill/>
+        </p:spPr>
+        <p:txBody>
+          <a:bodyPr wrap="square" anchor="t" lIns="0" rIns="0" tIns="0" bIns="0">
+            <a:spAutoFit/>
+          </a:bodyPr>
+          <a:lstStyle/>
+          <a:p>
+            <a:r>
+              <a:rPr sz="900" b="1">
+                <a:solidFill>
+                  <a:srgbClr val="E2001A"/>
+                </a:solidFill>
+              </a:rPr>
+              <a:t>BIETET</a:t>
+            </a:r>
+          </a:p>
+          <a:p>
+            <a:pPr>
+              <a:spcBef>
+                <a:spcPts val="200"/>
+              </a:spcBef>
             </a:pPr>
             <a:r>
-              <a:rPr lang="en-US" sz="1200" dirty="0">
-                <a:solidFill>
-                  <a:schemeClr val="tx2"/>
-                </a:solidFill>
-              </a:rPr>
-              <a:t>alleinerziehend</a:t>
-            </a:r>
-            <a:endParaRPr lang="en-US" sz="1800" dirty="0"/>
-          </a:p>
-        </p:txBody>
-      </p:sp>
-      <p:sp>
-        <p:nvSpPr>
-          <p:cNvPr id="7" name="pp-sit-0-0"/>
-          <p:cNvSpPr txBox="1"/>
-          <p:nvPr/>
-        </p:nvSpPr>
-        <p:spPr>
-          <a:xfrm>
-            <a:off x="731520" y="2331720"/>
-            <a:ext cx="3474720" cy="640080"/>
-          </a:xfrm>
-          <a:prstGeom prst="rect">
-            <a:avLst/>
-          </a:prstGeom>
-          <a:noFill/>
-          <a:ln/>
-        </p:spPr>
-        <p:txBody>
-          <a:bodyPr wrap="square" lIns="0" tIns="0" rIns="0" bIns="0" rtlCol="0" anchor="t"/>
-          <a:lstStyle/>
-          <a:p>
-            <a:pPr indent="0" marL="0">
-              <a:buNone/>
-            </a:pPr>
-            <a:r>
-              <a:rPr lang="en-US" sz="1500" b="1" dirty="0">
+              <a:rPr sz="1300" b="0">
                 <a:solidFill>
                   <a:schemeClr val="tx1"/>
                 </a:solidFill>
               </a:rPr>
-              <a:t>Braucht abends Kinderbetreuung, kann Türkisch übersetzen.</a:t>
-            </a:r>
-            <a:endParaRPr lang="en-US" sz="1500" dirty="0"/>
-          </a:p>
-        </p:txBody>
-      </p:sp>
-      <p:sp>
-        <p:nvSpPr>
-          <p:cNvPr id="8" name="pp-sol-0-0"/>
-          <p:cNvSpPr txBox="1"/>
-          <p:nvPr/>
-        </p:nvSpPr>
-        <p:spPr>
-          <a:xfrm>
-            <a:off x="731520" y="3017520"/>
-            <a:ext cx="3474720" cy="1371600"/>
-          </a:xfrm>
-          <a:prstGeom prst="rect">
-            <a:avLst/>
-          </a:prstGeom>
-          <a:noFill/>
-          <a:ln/>
-        </p:spPr>
-        <p:txBody>
-          <a:bodyPr wrap="square" lIns="0" tIns="0" rIns="0" bIns="0" rtlCol="0" anchor="t"/>
-          <a:lstStyle/>
-          <a:p>
-            <a:pPr indent="0" marL="0">
-              <a:buNone/>
-            </a:pPr>
-            <a:r>
-              <a:rPr lang="en-US" sz="1400" dirty="0">
-                <a:solidFill>
-                  <a:schemeClr val="tx1"/>
-                </a:solidFill>
-              </a:rPr>
-              <a:t>Trägt beides als Tausch ein. Eine Nachbarin, die Hilfe beim Amtsbrief braucht, bekommt den Treffer „Tausch in beide Richtungen“.</a:t>
-            </a:r>
-            <a:endParaRPr lang="en-US" sz="1400" dirty="0"/>
-          </a:p>
-        </p:txBody>
-      </p:sp>
-      <p:sp>
-        <p:nvSpPr>
-          <p:cNvPr id="9" name="persona-0-1"/>
+              <a:t>Sonntags Mittagessen zu dritt und Hilfe mit Handy und Online-Banking</a:t>
+            </a:r>
+          </a:p>
+        </p:txBody>
+      </p:sp>
+      <p:sp>
+        <p:nvSpPr>
+          <p:cNvPr id="32" name="!!card-b"/>
           <p:cNvSpPr/>
           <p:nvPr/>
         </p:nvSpPr>
         <p:spPr>
           <a:xfrm>
-            <a:off x="4663440" y="1188720"/>
-            <a:ext cx="4023360" cy="3291840"/>
+            <a:off x="5003800" y="1193800"/>
+            <a:ext cx="3683000" cy="3327400"/>
           </a:xfrm>
           <a:prstGeom prst="rect">
             <a:avLst/>
@@ -12494,20 +14899,41 @@
             <a:solidFill>
               <a:schemeClr val="accent6"/>
             </a:solidFill>
-            <a:prstDash val="solid"/>
           </a:ln>
-        </p:spPr>
-      </p:sp>
-      <p:sp>
-        <p:nvSpPr>
-          <p:cNvPr id="10" name="pp-dot-0-1"/>
+          <a:effectLst/>
+        </p:spPr>
+        <p:style>
+          <a:lnRef idx="1">
+            <a:schemeClr val="accent1"/>
+          </a:lnRef>
+          <a:fillRef idx="3">
+            <a:schemeClr val="accent1"/>
+          </a:fillRef>
+          <a:effectRef idx="2">
+            <a:schemeClr val="accent1"/>
+          </a:effectRef>
+          <a:fontRef idx="minor">
+            <a:schemeClr val="lt1"/>
+          </a:fontRef>
+        </p:style>
+        <p:txBody>
+          <a:bodyPr rtlCol="0" anchor="ctr"/>
+          <a:lstStyle/>
+          <a:p>
+            <a:pPr algn="ctr"/>
+          </a:p>
+        </p:txBody>
+      </p:sp>
+      <p:sp>
+        <p:nvSpPr>
+          <p:cNvPr id="33" name="!!dot-b"/>
           <p:cNvSpPr/>
           <p:nvPr/>
         </p:nvSpPr>
         <p:spPr>
           <a:xfrm>
-            <a:off x="4937760" y="1417320"/>
-            <a:ext cx="685800" cy="685800"/>
+            <a:off x="5257800" y="1422400"/>
+            <a:ext cx="635000" cy="635000"/>
           </a:xfrm>
           <a:prstGeom prst="ellipse">
             <a:avLst/>
@@ -12515,32 +14941,51 @@
           <a:solidFill>
             <a:schemeClr val="tx1"/>
           </a:solidFill>
-          <a:ln w="12700">
-            <a:solidFill>
-              <a:schemeClr val="tx1"/>
-            </a:solidFill>
-            <a:prstDash val="solid"/>
+          <a:ln>
+            <a:noFill/>
           </a:ln>
-        </p:spPr>
+          <a:effectLst/>
+        </p:spPr>
+        <p:style>
+          <a:lnRef idx="1">
+            <a:schemeClr val="accent1"/>
+          </a:lnRef>
+          <a:fillRef idx="3">
+            <a:schemeClr val="accent1"/>
+          </a:fillRef>
+          <a:effectRef idx="2">
+            <a:schemeClr val="accent1"/>
+          </a:effectRef>
+          <a:fontRef idx="minor">
+            <a:schemeClr val="lt1"/>
+          </a:fontRef>
+        </p:style>
+        <p:txBody>
+          <a:bodyPr rtlCol="0" anchor="ctr"/>
+          <a:lstStyle/>
+          <a:p>
+            <a:pPr algn="ctr"/>
+          </a:p>
+        </p:txBody>
       </p:sp>
       <p:pic>
         <p:nvPicPr>
-          <p:cNvPr id="11" name="pp-icon-0-1" descr="preencoded.png">    </p:cNvPr>
+          <p:cNvPr id="34" name="icon-b" descr="image.png"/>
           <p:cNvPicPr>
             <a:picLocks noChangeAspect="1"/>
           </p:cNvPicPr>
           <p:nvPr/>
         </p:nvPicPr>
         <p:blipFill>
-          <a:blip r:embed="rId2"/>
+          <a:blip r:embed="rId5"/>
           <a:stretch>
             <a:fillRect/>
           </a:stretch>
         </p:blipFill>
         <p:spPr>
           <a:xfrm>
-            <a:off x="5097780" y="1577340"/>
-            <a:ext cx="365760" cy="365760"/>
+            <a:off x="5397500" y="1562100"/>
+            <a:ext cx="355600" cy="355600"/>
           </a:xfrm>
           <a:prstGeom prst="rect">
             <a:avLst/>
@@ -12549,181 +14994,153 @@
       </p:pic>
       <p:sp>
         <p:nvSpPr>
-          <p:cNvPr id="12" name="pp-name-0-1"/>
+          <p:cNvPr id="35" name="name-b"/>
           <p:cNvSpPr txBox="1"/>
           <p:nvPr/>
         </p:nvSpPr>
         <p:spPr>
           <a:xfrm>
-            <a:off x="5806440" y="1417320"/>
-            <a:ext cx="2697480" cy="685800"/>
+            <a:off x="6070600" y="1422400"/>
+            <a:ext cx="2362200" cy="635000"/>
           </a:xfrm>
           <a:prstGeom prst="rect">
             <a:avLst/>
           </a:prstGeom>
           <a:noFill/>
-          <a:ln/>
-        </p:spPr>
-        <p:txBody>
-          <a:bodyPr wrap="square" lIns="0" tIns="0" rIns="0" bIns="0" rtlCol="0" anchor="ctr"/>
-          <a:lstStyle/>
-          <a:p>
-            <a:pPr indent="0" marL="0">
-              <a:buNone/>
+        </p:spPr>
+        <p:txBody>
+          <a:bodyPr wrap="square" anchor="ctr" lIns="0" rIns="0" tIns="0" bIns="0">
+            <a:spAutoFit/>
+          </a:bodyPr>
+          <a:lstStyle/>
+          <a:p>
+            <a:r>
+              <a:rPr sz="1700" b="1">
+                <a:solidFill>
+                  <a:schemeClr val="tx1"/>
+                </a:solidFill>
+              </a:rPr>
+              <a:t>Erika, 72</a:t>
+            </a:r>
+          </a:p>
+          <a:p>
+            <a:r>
+              <a:rPr sz="1100" b="0">
+                <a:solidFill>
+                  <a:schemeClr val="tx2"/>
+                </a:solidFill>
+              </a:rPr>
+              <a:t>Rentnerin, lebt allein</a:t>
+            </a:r>
+          </a:p>
+        </p:txBody>
+      </p:sp>
+      <p:sp>
+        <p:nvSpPr>
+          <p:cNvPr id="36" name="sucht-b"/>
+          <p:cNvSpPr txBox="1"/>
+          <p:nvPr/>
+        </p:nvSpPr>
+        <p:spPr>
+          <a:xfrm>
+            <a:off x="5257800" y="2260600"/>
+            <a:ext cx="3175000" cy="736600"/>
+          </a:xfrm>
+          <a:prstGeom prst="rect">
+            <a:avLst/>
+          </a:prstGeom>
+          <a:noFill/>
+        </p:spPr>
+        <p:txBody>
+          <a:bodyPr wrap="square" anchor="t" lIns="0" rIns="0" tIns="0" bIns="0">
+            <a:spAutoFit/>
+          </a:bodyPr>
+          <a:lstStyle/>
+          <a:p>
+            <a:r>
+              <a:rPr sz="900" b="1">
+                <a:solidFill>
+                  <a:srgbClr val="E2001A"/>
+                </a:solidFill>
+              </a:rPr>
+              <a:t>SUCHT</a:t>
+            </a:r>
+          </a:p>
+          <a:p>
+            <a:pPr>
+              <a:spcBef>
+                <a:spcPts val="200"/>
+              </a:spcBef>
             </a:pPr>
             <a:r>
-              <a:rPr lang="en-US" sz="1800" b="1" dirty="0">
+              <a:rPr sz="1300" b="1">
                 <a:solidFill>
                   <a:schemeClr val="tx1"/>
                 </a:solidFill>
               </a:rPr>
-              <a:t>Jonas, 19</a:t>
-            </a:r>
-            <a:endParaRPr lang="en-US" sz="1800" dirty="0"/>
-          </a:p>
-          <a:p>
-            <a:pPr indent="0" marL="0">
-              <a:buNone/>
+              <a:t>Gesellschaft und jemanden, der ihr das Smartphone erklärt</a:t>
+            </a:r>
+          </a:p>
+        </p:txBody>
+      </p:sp>
+      <p:sp>
+        <p:nvSpPr>
+          <p:cNvPr id="37" name="bietet-b"/>
+          <p:cNvSpPr txBox="1"/>
+          <p:nvPr/>
+        </p:nvSpPr>
+        <p:spPr>
+          <a:xfrm>
+            <a:off x="5257800" y="3073400"/>
+            <a:ext cx="3175000" cy="736600"/>
+          </a:xfrm>
+          <a:prstGeom prst="rect">
+            <a:avLst/>
+          </a:prstGeom>
+          <a:noFill/>
+        </p:spPr>
+        <p:txBody>
+          <a:bodyPr wrap="square" anchor="t" lIns="0" rIns="0" tIns="0" bIns="0">
+            <a:spAutoFit/>
+          </a:bodyPr>
+          <a:lstStyle/>
+          <a:p>
+            <a:r>
+              <a:rPr sz="900" b="1">
+                <a:solidFill>
+                  <a:srgbClr val="E2001A"/>
+                </a:solidFill>
+              </a:rPr>
+              <a:t>BIETET</a:t>
+            </a:r>
+          </a:p>
+          <a:p>
+            <a:pPr>
+              <a:spcBef>
+                <a:spcPts val="200"/>
+              </a:spcBef>
             </a:pPr>
             <a:r>
-              <a:rPr lang="en-US" sz="1200" dirty="0">
-                <a:solidFill>
-                  <a:schemeClr val="tx2"/>
-                </a:solidFill>
-              </a:rPr>
-              <a:t>Azubi, neu in der Stadt</a:t>
-            </a:r>
-            <a:endParaRPr lang="en-US" sz="1800" dirty="0"/>
-          </a:p>
-        </p:txBody>
-      </p:sp>
-      <p:sp>
-        <p:nvSpPr>
-          <p:cNvPr id="13" name="pp-sit-0-1"/>
-          <p:cNvSpPr txBox="1"/>
-          <p:nvPr/>
-        </p:nvSpPr>
-        <p:spPr>
-          <a:xfrm>
-            <a:off x="4937760" y="2331720"/>
-            <a:ext cx="3474720" cy="640080"/>
-          </a:xfrm>
-          <a:prstGeom prst="rect">
-            <a:avLst/>
-          </a:prstGeom>
-          <a:noFill/>
-          <a:ln/>
-        </p:spPr>
-        <p:txBody>
-          <a:bodyPr wrap="square" lIns="0" tIns="0" rIns="0" bIns="0" rtlCol="0" anchor="t"/>
-          <a:lstStyle/>
-          <a:p>
-            <a:pPr indent="0" marL="0">
-              <a:buNone/>
-            </a:pPr>
-            <a:r>
-              <a:rPr lang="en-US" sz="1500" b="1" dirty="0">
+              <a:rPr sz="1300" b="0">
                 <a:solidFill>
                   <a:schemeClr val="tx1"/>
                 </a:solidFill>
               </a:rPr>
-              <a:t>Sucht WG-Zimmer und Minijob.</a:t>
-            </a:r>
-            <a:endParaRPr lang="en-US" sz="1500" dirty="0"/>
-          </a:p>
-        </p:txBody>
-      </p:sp>
-      <p:sp>
-        <p:nvSpPr>
-          <p:cNvPr id="14" name="pp-sol-0-1"/>
-          <p:cNvSpPr txBox="1"/>
-          <p:nvPr/>
-        </p:nvSpPr>
-        <p:spPr>
-          <a:xfrm>
-            <a:off x="4937760" y="3017520"/>
-            <a:ext cx="3474720" cy="838200"/>
-          </a:xfrm>
-          <a:prstGeom prst="rect">
-            <a:avLst/>
-          </a:prstGeom>
-          <a:noFill/>
-          <a:ln/>
-        </p:spPr>
-        <p:txBody>
-          <a:bodyPr wrap="square" lIns="0" tIns="0" rIns="0" bIns="0" rtlCol="0" anchor="t"/>
-          <a:lstStyle/>
-          <a:p>
-            <a:pPr indent="0" marL="0">
-              <a:buNone/>
-            </a:pPr>
-            <a:r>
-              <a:rPr lang="en-US" sz="1400" dirty="0">
-                <a:solidFill>
-                  <a:schemeClr val="tx1"/>
-                </a:solidFill>
-              </a:rPr>
-              <a:t>Filtert Wohnen nach Art, Zimmern, Preis und Jobs nach Anstellung, sieht alles auf der Karte, bekommt neue Treffer gemeldet.</a:t>
-            </a:r>
-            <a:endParaRPr lang="en-US" sz="1400" dirty="0"/>
-          </a:p>
-        </p:txBody>
-      </p:sp>
-      <p:sp>
-        <p:nvSpPr>
-          <p:cNvPr id="25" name="Slide Number Placeholder 0"/>
-          <p:cNvSpPr>
-            <a:spLocks noGrp="1"/>
-          </p:cNvSpPr>
-          <p:nvPr>
-            <p:ph type="sldNum" sz="quarter" idx="4294967295"/>
-          </p:nvPr>
-        </p:nvSpPr>
-        <p:spPr>
-          <a:xfrm>
-            <a:off x="8412480" y="4754880"/>
-            <a:ext cx="457200" cy="274320"/>
-          </a:xfrm>
-          <a:prstGeom prst="rect">
-            <a:avLst/>
-          </a:prstGeom>
-          <a:extLst>
-            <a:ext uri="{C572A759-6A51-4108-AA02-DFA0A04FC94B}">
-              <ma14:wrappingTextBoxFlag xmlns:ma14="http://schemas.microsoft.com/office/mac/drawingml/2011/main" val="0"/>
-            </a:ext>
-          </a:extLst>
-        </p:spPr>
-        <p:txBody>
-          <a:bodyPr/>
-          <a:lstStyle>
-            <a:lvl1pPr>
-              <a:defRPr sz="1000">
-                <a:solidFill>
-                  <a:schemeClr val="tx2"/>
-                </a:solidFill>
-              </a:defRPr>
-            </a:lvl1pPr>
-          </a:lstStyle>
-          <a:p>
-            <a:pPr algn="l"/>
-            <a:fld id="{F7021451-1387-4CA6-816F-3879F97B5CBC}" type="slidenum">
-              <a:rPr b="0" lang="en-US"/>
-              <a:t>7</a:t>
-            </a:fld>
-            <a:endParaRPr lang="en-US"/>
-          </a:p>
-        </p:txBody>
-      </p:sp>
-      <p:sp>
-        <p:nvSpPr>
-          <p:cNvPr id="26" name="fact-bar-0-1"/>
+              <a:t>Zeit an den Abenden, Kuchen und viel Erfahrung mit Enkeln</a:t>
+            </a:r>
+          </a:p>
+        </p:txBody>
+      </p:sp>
+      <p:sp>
+        <p:nvSpPr>
+          <p:cNvPr id="38" name="fact-bar-b"/>
           <p:cNvSpPr/>
           <p:nvPr/>
         </p:nvSpPr>
         <p:spPr>
           <a:xfrm>
-            <a:off x="4937760" y="3911600"/>
-            <a:ext cx="38100" cy="482600"/>
+            <a:off x="5257800" y="3937000"/>
+            <a:ext cx="38100" cy="355600"/>
           </a:xfrm>
           <a:prstGeom prst="rect">
             <a:avLst/>
@@ -12760,14 +15177,14 @@
       </p:sp>
       <p:sp>
         <p:nvSpPr>
-          <p:cNvPr id="27" name="fact-0-1"/>
+          <p:cNvPr id="39" name="fact-b"/>
           <p:cNvSpPr txBox="1"/>
           <p:nvPr/>
         </p:nvSpPr>
         <p:spPr>
           <a:xfrm>
-            <a:off x="5064760" y="3911600"/>
-            <a:ext cx="3347720" cy="482600"/>
+            <a:off x="5384800" y="3937000"/>
+            <a:ext cx="3048000" cy="355600"/>
           </a:xfrm>
           <a:prstGeom prst="rect">
             <a:avLst/>
@@ -12775,7 +15192,7 @@
           <a:noFill/>
         </p:spPr>
         <p:txBody>
-          <a:bodyPr wrap="square" lIns="0" rIns="0" tIns="0" bIns="0">
+          <a:bodyPr wrap="square" anchor="ctr" lIns="0" rIns="0" tIns="0" bIns="0">
             <a:spAutoFit/>
           </a:bodyPr>
           <a:lstStyle/>
@@ -12786,16 +15203,60 @@
                   <a:srgbClr val="E2001A"/>
                 </a:solidFill>
               </a:rPr>
-              <a:t>MÜNCHEN  </a:t>
-            </a:r>
-            <a:r>
-              <a:rPr sz="1000">
-                <a:solidFill>
-                  <a:srgbClr val="555555"/>
-                </a:solidFill>
-              </a:rPr>
-              <a:t>23,35 € pro m² Angebotsmiete, fast 9 € über dem Bundesschnitt (IfW Kiel, GREIX Q4/2025)</a:t>
-            </a:r>
+              <a:t>DEUTSCHLAND  </a:t>
+            </a:r>
+            <a:r>
+              <a:rPr sz="1000" b="0">
+                <a:solidFill>
+                  <a:schemeClr val="tx2"/>
+                </a:solidFill>
+              </a:rPr>
+              <a:t>1 von 9 fühlt sich häufig einsam (Einsamkeitsbarometer 2024)</a:t>
+            </a:r>
+          </a:p>
+        </p:txBody>
+      </p:sp>
+      <p:sp>
+        <p:nvSpPr>
+          <p:cNvPr id="40" name="!!match"/>
+          <p:cNvSpPr/>
+          <p:nvPr/>
+        </p:nvSpPr>
+        <p:spPr>
+          <a:xfrm>
+            <a:off x="4292600" y="2692400"/>
+            <a:ext cx="558800" cy="330200"/>
+          </a:xfrm>
+          <a:prstGeom prst="leftRightArrow">
+            <a:avLst/>
+          </a:prstGeom>
+          <a:solidFill>
+            <a:srgbClr val="E2001A"/>
+          </a:solidFill>
+          <a:ln>
+            <a:noFill/>
+          </a:ln>
+          <a:effectLst/>
+        </p:spPr>
+        <p:style>
+          <a:lnRef idx="1">
+            <a:schemeClr val="accent1"/>
+          </a:lnRef>
+          <a:fillRef idx="3">
+            <a:schemeClr val="accent1"/>
+          </a:fillRef>
+          <a:effectRef idx="2">
+            <a:schemeClr val="accent1"/>
+          </a:effectRef>
+          <a:fontRef idx="minor">
+            <a:schemeClr val="lt1"/>
+          </a:fontRef>
+        </p:style>
+        <p:txBody>
+          <a:bodyPr rtlCol="0" anchor="ctr"/>
+          <a:lstStyle/>
+          <a:p>
+            <a:pPr algn="ctr"/>
           </a:p>
         </p:txBody>
       </p:sp>
@@ -12804,10 +15265,22 @@
   <p:clrMapOvr>
     <a:masterClrMapping/>
   </p:clrMapOvr>
+  <mc:AlternateContent xmlns:mc="http://schemas.openxmlformats.org/markup-compatibility/2006">
+    <mc:Choice xmlns:p159="http://schemas.microsoft.com/office/powerpoint/2015/09/main" Requires="p159">
+      <p:transition xmlns:p14="http://schemas.microsoft.com/office/powerpoint/2010/main" spd="slow" p14:dur="900">
+        <p159:morph option="byObject"/>
+      </p:transition>
+    </mc:Choice>
+    <mc:Fallback>
+      <p:transition spd="slow">
+        <p:fade/>
+      </p:transition>
+    </mc:Fallback>
+  </mc:AlternateContent>
 </p:sld>
 </file>
 
-<file path=ppt/slides/slide8.xml><?xml version="1.0" encoding="utf-8"?>
+<file path=ppt/slides/slide9.xml><?xml version="1.0" encoding="utf-8"?>
 <p:sld xmlns:a="http://schemas.openxmlformats.org/drawingml/2006/main" xmlns:r="http://schemas.openxmlformats.org/officeDocument/2006/relationships" xmlns:p="http://schemas.openxmlformats.org/presentationml/2006/main">
   <p:cSld name="Slide 8">
     <p:spTree>
@@ -12856,7 +15329,7 @@
                   <a:schemeClr val="tx1"/>
                 </a:solidFill>
               </a:rPr>
-              <a:t>Erika und Thomas</a:t>
+              <a:t>Jonas und Josef</a:t>
             </a:r>
             <a:endParaRPr lang="en-US" sz="3000" dirty="0"/>
           </a:p>
@@ -12864,14 +15337,59 @@
       </p:sp>
       <p:sp>
         <p:nvSpPr>
-          <p:cNvPr id="3" name="persona-1-0"/>
+          <p:cNvPr id="25" name="Slide Number Placeholder 0"/>
+          <p:cNvSpPr>
+            <a:spLocks noGrp="1"/>
+          </p:cNvSpPr>
+          <p:nvPr>
+            <p:ph type="sldNum" sz="quarter" idx="4294967295"/>
+          </p:nvPr>
+        </p:nvSpPr>
+        <p:spPr>
+          <a:xfrm>
+            <a:off x="8412480" y="4754880"/>
+            <a:ext cx="457200" cy="274320"/>
+          </a:xfrm>
+          <a:prstGeom prst="rect">
+            <a:avLst/>
+          </a:prstGeom>
+          <a:extLst>
+            <a:ext uri="{C572A759-6A51-4108-AA02-DFA0A04FC94B}">
+              <ma14:wrappingTextBoxFlag xmlns:ma14="http://schemas.microsoft.com/office/mac/drawingml/2011/main" val="0"/>
+            </a:ext>
+          </a:extLst>
+        </p:spPr>
+        <p:txBody>
+          <a:bodyPr/>
+          <a:lstStyle>
+            <a:lvl1pPr>
+              <a:defRPr sz="1000">
+                <a:solidFill>
+                  <a:schemeClr val="tx2"/>
+                </a:solidFill>
+              </a:defRPr>
+            </a:lvl1pPr>
+          </a:lstStyle>
+          <a:p>
+            <a:pPr algn="l"/>
+            <a:fld id="{F7021451-1387-4CA6-816F-3879F97B5CBC}" type="slidenum">
+              <a:rPr b="0" lang="en-US"/>
+              <a:t>8</a:t>
+            </a:fld>
+            <a:endParaRPr lang="en-US"/>
+          </a:p>
+        </p:txBody>
+      </p:sp>
+      <p:sp>
+        <p:nvSpPr>
+          <p:cNvPr id="26" name="!!card-a"/>
           <p:cNvSpPr/>
           <p:nvPr/>
         </p:nvSpPr>
         <p:spPr>
           <a:xfrm>
-            <a:off x="457200" y="1188720"/>
-            <a:ext cx="4023360" cy="3291840"/>
+            <a:off x="457200" y="1193800"/>
+            <a:ext cx="3683000" cy="3327400"/>
           </a:xfrm>
           <a:prstGeom prst="rect">
             <a:avLst/>
@@ -12883,20 +15401,41 @@
             <a:solidFill>
               <a:schemeClr val="accent6"/>
             </a:solidFill>
-            <a:prstDash val="solid"/>
           </a:ln>
-        </p:spPr>
-      </p:sp>
-      <p:sp>
-        <p:nvSpPr>
-          <p:cNvPr id="4" name="pp-dot-1-0"/>
+          <a:effectLst/>
+        </p:spPr>
+        <p:style>
+          <a:lnRef idx="1">
+            <a:schemeClr val="accent1"/>
+          </a:lnRef>
+          <a:fillRef idx="3">
+            <a:schemeClr val="accent1"/>
+          </a:fillRef>
+          <a:effectRef idx="2">
+            <a:schemeClr val="accent1"/>
+          </a:effectRef>
+          <a:fontRef idx="minor">
+            <a:schemeClr val="lt1"/>
+          </a:fontRef>
+        </p:style>
+        <p:txBody>
+          <a:bodyPr rtlCol="0" anchor="ctr"/>
+          <a:lstStyle/>
+          <a:p>
+            <a:pPr algn="ctr"/>
+          </a:p>
+        </p:txBody>
+      </p:sp>
+      <p:sp>
+        <p:nvSpPr>
+          <p:cNvPr id="27" name="!!dot-a"/>
           <p:cNvSpPr/>
           <p:nvPr/>
         </p:nvSpPr>
         <p:spPr>
           <a:xfrm>
-            <a:off x="731520" y="1417320"/>
-            <a:ext cx="685800" cy="685800"/>
+            <a:off x="711200" y="1422400"/>
+            <a:ext cx="635000" cy="635000"/>
           </a:xfrm>
           <a:prstGeom prst="ellipse">
             <a:avLst/>
@@ -12904,32 +15443,51 @@
           <a:solidFill>
             <a:schemeClr val="tx1"/>
           </a:solidFill>
-          <a:ln w="12700">
-            <a:solidFill>
-              <a:schemeClr val="tx1"/>
-            </a:solidFill>
-            <a:prstDash val="solid"/>
+          <a:ln>
+            <a:noFill/>
           </a:ln>
-        </p:spPr>
+          <a:effectLst/>
+        </p:spPr>
+        <p:style>
+          <a:lnRef idx="1">
+            <a:schemeClr val="accent1"/>
+          </a:lnRef>
+          <a:fillRef idx="3">
+            <a:schemeClr val="accent1"/>
+          </a:fillRef>
+          <a:effectRef idx="2">
+            <a:schemeClr val="accent1"/>
+          </a:effectRef>
+          <a:fontRef idx="minor">
+            <a:schemeClr val="lt1"/>
+          </a:fontRef>
+        </p:style>
+        <p:txBody>
+          <a:bodyPr rtlCol="0" anchor="ctr"/>
+          <a:lstStyle/>
+          <a:p>
+            <a:pPr algn="ctr"/>
+          </a:p>
+        </p:txBody>
       </p:sp>
       <p:pic>
         <p:nvPicPr>
-          <p:cNvPr id="5" name="pp-icon-1-0" descr="preencoded.png">    </p:cNvPr>
+          <p:cNvPr id="28" name="icon-a" descr="image.png"/>
           <p:cNvPicPr>
             <a:picLocks noChangeAspect="1"/>
           </p:cNvPicPr>
           <p:nvPr/>
         </p:nvPicPr>
         <p:blipFill>
-          <a:blip r:embed="rId1"/>
+          <a:blip r:embed="rId5"/>
           <a:stretch>
             <a:fillRect/>
           </a:stretch>
         </p:blipFill>
         <p:spPr>
           <a:xfrm>
-            <a:off x="891540" y="1577340"/>
-            <a:ext cx="365760" cy="365760"/>
+            <a:off x="850900" y="1562100"/>
+            <a:ext cx="355600" cy="355600"/>
           </a:xfrm>
           <a:prstGeom prst="rect">
             <a:avLst/>
@@ -12938,136 +15496,238 @@
       </p:pic>
       <p:sp>
         <p:nvSpPr>
-          <p:cNvPr id="6" name="pp-name-1-0"/>
+          <p:cNvPr id="29" name="name-a"/>
           <p:cNvSpPr txBox="1"/>
           <p:nvPr/>
         </p:nvSpPr>
         <p:spPr>
           <a:xfrm>
-            <a:off x="1600200" y="1417320"/>
-            <a:ext cx="2697480" cy="685800"/>
+            <a:off x="1524000" y="1422400"/>
+            <a:ext cx="2362200" cy="635000"/>
           </a:xfrm>
           <a:prstGeom prst="rect">
             <a:avLst/>
           </a:prstGeom>
           <a:noFill/>
-          <a:ln/>
-        </p:spPr>
-        <p:txBody>
-          <a:bodyPr wrap="square" lIns="0" tIns="0" rIns="0" bIns="0" rtlCol="0" anchor="ctr"/>
-          <a:lstStyle/>
-          <a:p>
-            <a:pPr indent="0" marL="0">
-              <a:buNone/>
+        </p:spPr>
+        <p:txBody>
+          <a:bodyPr wrap="square" anchor="ctr" lIns="0" rIns="0" tIns="0" bIns="0">
+            <a:spAutoFit/>
+          </a:bodyPr>
+          <a:lstStyle/>
+          <a:p>
+            <a:r>
+              <a:rPr sz="1700" b="1">
+                <a:solidFill>
+                  <a:schemeClr val="tx1"/>
+                </a:solidFill>
+              </a:rPr>
+              <a:t>Jonas, 19</a:t>
+            </a:r>
+          </a:p>
+          <a:p>
+            <a:r>
+              <a:rPr sz="1100" b="0">
+                <a:solidFill>
+                  <a:schemeClr val="tx2"/>
+                </a:solidFill>
+              </a:rPr>
+              <a:t>Azubi, neu in München</a:t>
+            </a:r>
+          </a:p>
+        </p:txBody>
+      </p:sp>
+      <p:sp>
+        <p:nvSpPr>
+          <p:cNvPr id="30" name="sucht-a"/>
+          <p:cNvSpPr txBox="1"/>
+          <p:nvPr/>
+        </p:nvSpPr>
+        <p:spPr>
+          <a:xfrm>
+            <a:off x="711200" y="2260600"/>
+            <a:ext cx="3175000" cy="736600"/>
+          </a:xfrm>
+          <a:prstGeom prst="rect">
+            <a:avLst/>
+          </a:prstGeom>
+          <a:noFill/>
+        </p:spPr>
+        <p:txBody>
+          <a:bodyPr wrap="square" anchor="t" lIns="0" rIns="0" tIns="0" bIns="0">
+            <a:spAutoFit/>
+          </a:bodyPr>
+          <a:lstStyle/>
+          <a:p>
+            <a:r>
+              <a:rPr sz="900" b="1">
+                <a:solidFill>
+                  <a:srgbClr val="E2001A"/>
+                </a:solidFill>
+              </a:rPr>
+              <a:t>SUCHT</a:t>
+            </a:r>
+          </a:p>
+          <a:p>
+            <a:pPr>
+              <a:spcBef>
+                <a:spcPts val="200"/>
+              </a:spcBef>
             </a:pPr>
             <a:r>
-              <a:rPr lang="en-US" sz="1800" b="1" dirty="0">
+              <a:rPr sz="1300" b="1">
                 <a:solidFill>
                   <a:schemeClr val="tx1"/>
                 </a:solidFill>
               </a:rPr>
-              <a:t>Erika, 72</a:t>
-            </a:r>
-            <a:endParaRPr lang="en-US" sz="1800" dirty="0"/>
-          </a:p>
-          <a:p>
-            <a:pPr indent="0" marL="0">
-              <a:buNone/>
+              <a:t>Ein bezahlbares Zimmer nahe der Berufsschule</a:t>
+            </a:r>
+          </a:p>
+        </p:txBody>
+      </p:sp>
+      <p:sp>
+        <p:nvSpPr>
+          <p:cNvPr id="31" name="bietet-a"/>
+          <p:cNvSpPr txBox="1"/>
+          <p:nvPr/>
+        </p:nvSpPr>
+        <p:spPr>
+          <a:xfrm>
+            <a:off x="711200" y="3073400"/>
+            <a:ext cx="3175000" cy="736600"/>
+          </a:xfrm>
+          <a:prstGeom prst="rect">
+            <a:avLst/>
+          </a:prstGeom>
+          <a:noFill/>
+        </p:spPr>
+        <p:txBody>
+          <a:bodyPr wrap="square" anchor="t" lIns="0" rIns="0" tIns="0" bIns="0">
+            <a:spAutoFit/>
+          </a:bodyPr>
+          <a:lstStyle/>
+          <a:p>
+            <a:r>
+              <a:rPr sz="900" b="1">
+                <a:solidFill>
+                  <a:srgbClr val="E2001A"/>
+                </a:solidFill>
+              </a:rPr>
+              <a:t>BIETET</a:t>
+            </a:r>
+          </a:p>
+          <a:p>
+            <a:pPr>
+              <a:spcBef>
+                <a:spcPts val="200"/>
+              </a:spcBef>
             </a:pPr>
             <a:r>
-              <a:rPr lang="en-US" sz="1200" dirty="0">
+              <a:rPr sz="1300" b="0">
+                <a:solidFill>
+                  <a:schemeClr val="tx1"/>
+                </a:solidFill>
+              </a:rPr>
+              <a:t>Einkaufen, Garten und Schneeschippen, ein paar Stunden pro Woche</a:t>
+            </a:r>
+          </a:p>
+        </p:txBody>
+      </p:sp>
+      <p:sp>
+        <p:nvSpPr>
+          <p:cNvPr id="32" name="fact-bar-a"/>
+          <p:cNvSpPr/>
+          <p:nvPr/>
+        </p:nvSpPr>
+        <p:spPr>
+          <a:xfrm>
+            <a:off x="711200" y="3937000"/>
+            <a:ext cx="38100" cy="355600"/>
+          </a:xfrm>
+          <a:prstGeom prst="rect">
+            <a:avLst/>
+          </a:prstGeom>
+          <a:solidFill>
+            <a:srgbClr val="E2001A"/>
+          </a:solidFill>
+          <a:ln>
+            <a:noFill/>
+          </a:ln>
+          <a:effectLst/>
+        </p:spPr>
+        <p:style>
+          <a:lnRef idx="1">
+            <a:schemeClr val="accent1"/>
+          </a:lnRef>
+          <a:fillRef idx="3">
+            <a:schemeClr val="accent1"/>
+          </a:fillRef>
+          <a:effectRef idx="2">
+            <a:schemeClr val="accent1"/>
+          </a:effectRef>
+          <a:fontRef idx="minor">
+            <a:schemeClr val="lt1"/>
+          </a:fontRef>
+        </p:style>
+        <p:txBody>
+          <a:bodyPr rtlCol="0" anchor="ctr"/>
+          <a:lstStyle/>
+          <a:p>
+            <a:pPr algn="ctr"/>
+          </a:p>
+        </p:txBody>
+      </p:sp>
+      <p:sp>
+        <p:nvSpPr>
+          <p:cNvPr id="33" name="fact-a"/>
+          <p:cNvSpPr txBox="1"/>
+          <p:nvPr/>
+        </p:nvSpPr>
+        <p:spPr>
+          <a:xfrm>
+            <a:off x="838200" y="3937000"/>
+            <a:ext cx="3048000" cy="355600"/>
+          </a:xfrm>
+          <a:prstGeom prst="rect">
+            <a:avLst/>
+          </a:prstGeom>
+          <a:noFill/>
+        </p:spPr>
+        <p:txBody>
+          <a:bodyPr wrap="square" anchor="ctr" lIns="0" rIns="0" tIns="0" bIns="0">
+            <a:spAutoFit/>
+          </a:bodyPr>
+          <a:lstStyle/>
+          <a:p>
+            <a:r>
+              <a:rPr sz="900" b="1">
+                <a:solidFill>
+                  <a:srgbClr val="E2001A"/>
+                </a:solidFill>
+              </a:rPr>
+              <a:t>MÜNCHEN  </a:t>
+            </a:r>
+            <a:r>
+              <a:rPr sz="1000" b="0">
                 <a:solidFill>
                   <a:schemeClr val="tx2"/>
                 </a:solidFill>
               </a:rPr>
-              <a:t>lebt allein</a:t>
-            </a:r>
-            <a:endParaRPr lang="en-US" sz="1800" dirty="0"/>
-          </a:p>
-        </p:txBody>
-      </p:sp>
-      <p:sp>
-        <p:nvSpPr>
-          <p:cNvPr id="7" name="pp-sit-1-0"/>
-          <p:cNvSpPr txBox="1"/>
-          <p:nvPr/>
-        </p:nvSpPr>
-        <p:spPr>
-          <a:xfrm>
-            <a:off x="731520" y="2331720"/>
-            <a:ext cx="3474720" cy="640080"/>
-          </a:xfrm>
-          <a:prstGeom prst="rect">
-            <a:avLst/>
-          </a:prstGeom>
-          <a:noFill/>
-          <a:ln/>
-        </p:spPr>
-        <p:txBody>
-          <a:bodyPr wrap="square" lIns="0" tIns="0" rIns="0" bIns="0" rtlCol="0" anchor="t"/>
-          <a:lstStyle/>
-          <a:p>
-            <a:pPr indent="0" marL="0">
-              <a:buNone/>
-            </a:pPr>
-            <a:r>
-              <a:rPr lang="en-US" sz="1500" b="1" dirty="0">
-                <a:solidFill>
-                  <a:schemeClr val="tx1"/>
-                </a:solidFill>
-              </a:rPr>
-              <a:t>Backt gern, hat Zeit, ist einsam.</a:t>
-            </a:r>
-            <a:endParaRPr lang="en-US" sz="1500" dirty="0"/>
-          </a:p>
-        </p:txBody>
-      </p:sp>
-      <p:sp>
-        <p:nvSpPr>
-          <p:cNvPr id="8" name="pp-sol-1-0"/>
-          <p:cNvSpPr txBox="1"/>
-          <p:nvPr/>
-        </p:nvSpPr>
-        <p:spPr>
-          <a:xfrm>
-            <a:off x="731520" y="3017520"/>
-            <a:ext cx="3474720" cy="838200"/>
-          </a:xfrm>
-          <a:prstGeom prst="rect">
-            <a:avLst/>
-          </a:prstGeom>
-          <a:noFill/>
-          <a:ln/>
-        </p:spPr>
-        <p:txBody>
-          <a:bodyPr wrap="square" lIns="0" tIns="0" rIns="0" bIns="0" rtlCol="0" anchor="t"/>
-          <a:lstStyle/>
-          <a:p>
-            <a:pPr indent="0" marL="0">
-              <a:buNone/>
-            </a:pPr>
-            <a:r>
-              <a:rPr lang="en-US" sz="1400" dirty="0">
-                <a:solidFill>
-                  <a:schemeClr val="tx1"/>
-                </a:solidFill>
-              </a:rPr>
-              <a:t>Bietet „Kuchen und Kennenlernen, sonntags“ an. Zwei Familien und ein Student kommen. Auch in Leichter Sprache.</a:t>
-            </a:r>
-            <a:endParaRPr lang="en-US" sz="1400" dirty="0"/>
-          </a:p>
-        </p:txBody>
-      </p:sp>
-      <p:sp>
-        <p:nvSpPr>
-          <p:cNvPr id="9" name="persona-1-1"/>
+              <a:t>23,35 € pro m² Angebotsmiete (IfW Kiel, Q4/2025)</a:t>
+            </a:r>
+          </a:p>
+        </p:txBody>
+      </p:sp>
+      <p:sp>
+        <p:nvSpPr>
+          <p:cNvPr id="34" name="!!card-b"/>
           <p:cNvSpPr/>
           <p:nvPr/>
         </p:nvSpPr>
         <p:spPr>
           <a:xfrm>
-            <a:off x="4663440" y="1188720"/>
-            <a:ext cx="4023360" cy="3291840"/>
+            <a:off x="5003800" y="1193800"/>
+            <a:ext cx="3683000" cy="3327400"/>
           </a:xfrm>
           <a:prstGeom prst="rect">
             <a:avLst/>
@@ -13079,20 +15739,41 @@
             <a:solidFill>
               <a:schemeClr val="accent6"/>
             </a:solidFill>
-            <a:prstDash val="solid"/>
           </a:ln>
-        </p:spPr>
-      </p:sp>
-      <p:sp>
-        <p:nvSpPr>
-          <p:cNvPr id="10" name="pp-dot-1-1"/>
+          <a:effectLst/>
+        </p:spPr>
+        <p:style>
+          <a:lnRef idx="1">
+            <a:schemeClr val="accent1"/>
+          </a:lnRef>
+          <a:fillRef idx="3">
+            <a:schemeClr val="accent1"/>
+          </a:fillRef>
+          <a:effectRef idx="2">
+            <a:schemeClr val="accent1"/>
+          </a:effectRef>
+          <a:fontRef idx="minor">
+            <a:schemeClr val="lt1"/>
+          </a:fontRef>
+        </p:style>
+        <p:txBody>
+          <a:bodyPr rtlCol="0" anchor="ctr"/>
+          <a:lstStyle/>
+          <a:p>
+            <a:pPr algn="ctr"/>
+          </a:p>
+        </p:txBody>
+      </p:sp>
+      <p:sp>
+        <p:nvSpPr>
+          <p:cNvPr id="35" name="!!dot-b"/>
           <p:cNvSpPr/>
           <p:nvPr/>
         </p:nvSpPr>
         <p:spPr>
           <a:xfrm>
-            <a:off x="4937760" y="1417320"/>
-            <a:ext cx="685800" cy="685800"/>
+            <a:off x="5257800" y="1422400"/>
+            <a:ext cx="635000" cy="635000"/>
           </a:xfrm>
           <a:prstGeom prst="ellipse">
             <a:avLst/>
@@ -13100,32 +15781,51 @@
           <a:solidFill>
             <a:schemeClr val="tx1"/>
           </a:solidFill>
-          <a:ln w="12700">
-            <a:solidFill>
-              <a:schemeClr val="tx1"/>
-            </a:solidFill>
-            <a:prstDash val="solid"/>
+          <a:ln>
+            <a:noFill/>
           </a:ln>
-        </p:spPr>
+          <a:effectLst/>
+        </p:spPr>
+        <p:style>
+          <a:lnRef idx="1">
+            <a:schemeClr val="accent1"/>
+          </a:lnRef>
+          <a:fillRef idx="3">
+            <a:schemeClr val="accent1"/>
+          </a:fillRef>
+          <a:effectRef idx="2">
+            <a:schemeClr val="accent1"/>
+          </a:effectRef>
+          <a:fontRef idx="minor">
+            <a:schemeClr val="lt1"/>
+          </a:fontRef>
+        </p:style>
+        <p:txBody>
+          <a:bodyPr rtlCol="0" anchor="ctr"/>
+          <a:lstStyle/>
+          <a:p>
+            <a:pPr algn="ctr"/>
+          </a:p>
+        </p:txBody>
       </p:sp>
       <p:pic>
         <p:nvPicPr>
-          <p:cNvPr id="11" name="pp-icon-1-1" descr="preencoded.png">    </p:cNvPr>
+          <p:cNvPr id="36" name="icon-b" descr="key.png"/>
           <p:cNvPicPr>
             <a:picLocks noChangeAspect="1"/>
           </p:cNvPicPr>
           <p:nvPr/>
         </p:nvPicPr>
         <p:blipFill>
-          <a:blip r:embed="rId2"/>
+          <a:blip r:embed="rId6"/>
           <a:stretch>
             <a:fillRect/>
           </a:stretch>
         </p:blipFill>
         <p:spPr>
           <a:xfrm>
-            <a:off x="5097780" y="1577340"/>
-            <a:ext cx="365760" cy="365760"/>
+            <a:off x="5397500" y="1562100"/>
+            <a:ext cx="355600" cy="355600"/>
           </a:xfrm>
           <a:prstGeom prst="rect">
             <a:avLst/>
@@ -13134,183 +15834,155 @@
       </p:pic>
       <p:sp>
         <p:nvSpPr>
-          <p:cNvPr id="12" name="pp-name-1-1"/>
+          <p:cNvPr id="37" name="name-b"/>
           <p:cNvSpPr txBox="1"/>
           <p:nvPr/>
         </p:nvSpPr>
         <p:spPr>
           <a:xfrm>
-            <a:off x="5806440" y="1417320"/>
-            <a:ext cx="2697480" cy="685800"/>
+            <a:off x="6070600" y="1422400"/>
+            <a:ext cx="2362200" cy="635000"/>
           </a:xfrm>
           <a:prstGeom prst="rect">
             <a:avLst/>
           </a:prstGeom>
           <a:noFill/>
-          <a:ln/>
-        </p:spPr>
-        <p:txBody>
-          <a:bodyPr wrap="square" lIns="0" tIns="0" rIns="0" bIns="0" rtlCol="0" anchor="ctr"/>
-          <a:lstStyle/>
-          <a:p>
-            <a:pPr indent="0" marL="0">
-              <a:buNone/>
+        </p:spPr>
+        <p:txBody>
+          <a:bodyPr wrap="square" anchor="ctr" lIns="0" rIns="0" tIns="0" bIns="0">
+            <a:spAutoFit/>
+          </a:bodyPr>
+          <a:lstStyle/>
+          <a:p>
+            <a:r>
+              <a:rPr sz="1700" b="1">
+                <a:solidFill>
+                  <a:schemeClr val="tx1"/>
+                </a:solidFill>
+              </a:rPr>
+              <a:t>Josef, 81</a:t>
+            </a:r>
+          </a:p>
+          <a:p>
+            <a:r>
+              <a:rPr sz="1100" b="0">
+                <a:solidFill>
+                  <a:schemeClr val="tx2"/>
+                </a:solidFill>
+              </a:rPr>
+              <a:t>Witwer, Haus in Pasing</a:t>
+            </a:r>
+          </a:p>
+        </p:txBody>
+      </p:sp>
+      <p:sp>
+        <p:nvSpPr>
+          <p:cNvPr id="38" name="sucht-b"/>
+          <p:cNvSpPr txBox="1"/>
+          <p:nvPr/>
+        </p:nvSpPr>
+        <p:spPr>
+          <a:xfrm>
+            <a:off x="5257800" y="2260600"/>
+            <a:ext cx="3175000" cy="736600"/>
+          </a:xfrm>
+          <a:prstGeom prst="rect">
+            <a:avLst/>
+          </a:prstGeom>
+          <a:noFill/>
+        </p:spPr>
+        <p:txBody>
+          <a:bodyPr wrap="square" anchor="t" lIns="0" rIns="0" tIns="0" bIns="0">
+            <a:spAutoFit/>
+          </a:bodyPr>
+          <a:lstStyle/>
+          <a:p>
+            <a:r>
+              <a:rPr sz="900" b="1">
+                <a:solidFill>
+                  <a:srgbClr val="E2001A"/>
+                </a:solidFill>
+              </a:rPr>
+              <a:t>SUCHT</a:t>
+            </a:r>
+          </a:p>
+          <a:p>
+            <a:pPr>
+              <a:spcBef>
+                <a:spcPts val="200"/>
+              </a:spcBef>
             </a:pPr>
             <a:r>
-              <a:rPr lang="en-US" sz="1800" b="1" dirty="0">
+              <a:rPr sz="1300" b="1">
                 <a:solidFill>
                   <a:schemeClr val="tx1"/>
                 </a:solidFill>
               </a:rPr>
-              <a:t>Thomas, 45</a:t>
-            </a:r>
-            <a:endParaRPr lang="en-US" sz="1800" dirty="0"/>
-          </a:p>
-          <a:p>
-            <a:pPr indent="0" marL="0">
-              <a:buNone/>
+              <a:t>Hilfe im Alltag und jemanden, der mit im Haus wohnt</a:t>
+            </a:r>
+          </a:p>
+        </p:txBody>
+      </p:sp>
+      <p:sp>
+        <p:nvSpPr>
+          <p:cNvPr id="39" name="bietet-b"/>
+          <p:cNvSpPr txBox="1"/>
+          <p:nvPr/>
+        </p:nvSpPr>
+        <p:spPr>
+          <a:xfrm>
+            <a:off x="5257800" y="3073400"/>
+            <a:ext cx="3175000" cy="736600"/>
+          </a:xfrm>
+          <a:prstGeom prst="rect">
+            <a:avLst/>
+          </a:prstGeom>
+          <a:noFill/>
+        </p:spPr>
+        <p:txBody>
+          <a:bodyPr wrap="square" anchor="t" lIns="0" rIns="0" tIns="0" bIns="0">
+            <a:spAutoFit/>
+          </a:bodyPr>
+          <a:lstStyle/>
+          <a:p>
+            <a:r>
+              <a:rPr sz="900" b="1">
+                <a:solidFill>
+                  <a:srgbClr val="E2001A"/>
+                </a:solidFill>
+              </a:rPr>
+              <a:t>BIETET</a:t>
+            </a:r>
+          </a:p>
+          <a:p>
+            <a:pPr>
+              <a:spcBef>
+                <a:spcPts val="200"/>
+              </a:spcBef>
             </a:pPr>
             <a:r>
-              <a:rPr lang="en-US" sz="1200" dirty="0">
-                <a:solidFill>
-                  <a:schemeClr val="tx2"/>
-                </a:solidFill>
-              </a:rPr>
-              <a:t>Vereinsvorsitzender</a:t>
-            </a:r>
-            <a:endParaRPr lang="en-US" sz="1800" dirty="0"/>
-          </a:p>
-        </p:txBody>
-      </p:sp>
-      <p:sp>
-        <p:nvSpPr>
-          <p:cNvPr id="13" name="pp-sit-1-1"/>
-          <p:cNvSpPr txBox="1"/>
-          <p:nvPr/>
-        </p:nvSpPr>
-        <p:spPr>
-          <a:xfrm>
-            <a:off x="4937760" y="2331720"/>
-            <a:ext cx="3474720" cy="640080"/>
-          </a:xfrm>
-          <a:prstGeom prst="rect">
-            <a:avLst/>
-          </a:prstGeom>
-          <a:noFill/>
-          <a:ln/>
-        </p:spPr>
-        <p:txBody>
-          <a:bodyPr wrap="square" lIns="0" tIns="0" rIns="0" bIns="0" rtlCol="0" anchor="t"/>
-          <a:lstStyle/>
-          <a:p>
-            <a:pPr indent="0" marL="0">
-              <a:buNone/>
-            </a:pPr>
-            <a:r>
-              <a:rPr lang="en-US" sz="1500" b="1" dirty="0">
+              <a:rPr sz="1300" b="0">
                 <a:solidFill>
                   <a:schemeClr val="tx1"/>
                 </a:solidFill>
               </a:rPr>
-              <a:t>400 Mitglieder, fünf Abteilungen, zwölf Chat-Gruppen.</a:t>
-            </a:r>
-            <a:endParaRPr lang="en-US" sz="1500" dirty="0"/>
-          </a:p>
-        </p:txBody>
-      </p:sp>
-      <p:sp>
-        <p:nvSpPr>
-          <p:cNvPr id="14" name="pp-sol-1-1"/>
-          <p:cNvSpPr txBox="1"/>
-          <p:nvPr/>
-        </p:nvSpPr>
-        <p:spPr>
-          <a:xfrm>
-            <a:off x="4937760" y="3017520"/>
-            <a:ext cx="3474720" cy="1371600"/>
-          </a:xfrm>
-          <a:prstGeom prst="rect">
-            <a:avLst/>
-          </a:prstGeom>
-          <a:noFill/>
-          <a:ln/>
-        </p:spPr>
-        <p:txBody>
-          <a:bodyPr wrap="square" lIns="0" tIns="0" rIns="0" bIns="0" rtlCol="0" anchor="t"/>
-          <a:lstStyle/>
-          <a:p>
-            <a:pPr indent="0" marL="0">
-              <a:buNone/>
-            </a:pPr>
-            <a:r>
-              <a:rPr lang="en-US" sz="1400" dirty="0">
-                <a:solidFill>
-                  <a:schemeClr val="tx1"/>
-                </a:solidFill>
-              </a:rPr>
-              <a:t>Vorlage „Sportverein“, Abteilungen als Untergruppen, Turnierdienste als Aufgaben, geheime Abstimmung übers Vereinsheim.</a:t>
-            </a:r>
-            <a:endParaRPr lang="en-US" sz="1400" dirty="0"/>
-          </a:p>
-        </p:txBody>
-      </p:sp>
-      <p:sp>
-        <p:nvSpPr>
-          <p:cNvPr id="25" name="Slide Number Placeholder 0"/>
-          <p:cNvSpPr>
-            <a:spLocks noGrp="1"/>
-          </p:cNvSpPr>
-          <p:nvPr>
-            <p:ph type="sldNum" sz="quarter" idx="4294967295"/>
-          </p:nvPr>
-        </p:nvSpPr>
-        <p:spPr>
-          <a:xfrm>
-            <a:off x="8412480" y="4754880"/>
-            <a:ext cx="457200" cy="274320"/>
-          </a:xfrm>
-          <a:prstGeom prst="rect">
-            <a:avLst/>
-          </a:prstGeom>
-          <a:extLst>
-            <a:ext uri="{C572A759-6A51-4108-AA02-DFA0A04FC94B}">
-              <ma14:wrappingTextBoxFlag xmlns:ma14="http://schemas.microsoft.com/office/mac/drawingml/2011/main" val="0"/>
-            </a:ext>
-          </a:extLst>
-        </p:spPr>
-        <p:txBody>
-          <a:bodyPr/>
-          <a:lstStyle>
-            <a:lvl1pPr>
-              <a:defRPr sz="1000">
-                <a:solidFill>
-                  <a:schemeClr val="tx2"/>
-                </a:solidFill>
-              </a:defRPr>
-            </a:lvl1pPr>
-          </a:lstStyle>
-          <a:p>
-            <a:pPr algn="l"/>
-            <a:fld id="{F7021451-1387-4CA6-816F-3879F97B5CBC}" type="slidenum">
-              <a:rPr b="0" lang="en-US"/>
-              <a:t>8</a:t>
-            </a:fld>
-            <a:endParaRPr lang="en-US"/>
-          </a:p>
-        </p:txBody>
-      </p:sp>
-      <p:sp>
-        <p:nvSpPr>
-          <p:cNvPr id="26" name="fact-bar-1-0"/>
+              <a:t>Ein freies Zimmer, fast mietfrei</a:t>
+            </a:r>
+          </a:p>
+        </p:txBody>
+      </p:sp>
+      <p:sp>
+        <p:nvSpPr>
+          <p:cNvPr id="40" name="!!match"/>
           <p:cNvSpPr/>
           <p:nvPr/>
         </p:nvSpPr>
         <p:spPr>
           <a:xfrm>
-            <a:off x="731520" y="3911600"/>
-            <a:ext cx="38100" cy="482600"/>
-          </a:xfrm>
-          <a:prstGeom prst="rect">
+            <a:off x="4292600" y="2692400"/>
+            <a:ext cx="558800" cy="330200"/>
+          </a:xfrm>
+          <a:prstGeom prst="leftRightArrow">
             <a:avLst/>
           </a:prstGeom>
           <a:solidFill>
@@ -13343,552 +16015,23 @@
           </a:p>
         </p:txBody>
       </p:sp>
-      <p:sp>
-        <p:nvSpPr>
-          <p:cNvPr id="27" name="fact-1-0"/>
-          <p:cNvSpPr txBox="1"/>
-          <p:nvPr/>
-        </p:nvSpPr>
-        <p:spPr>
-          <a:xfrm>
-            <a:off x="858520" y="3911600"/>
-            <a:ext cx="3347720" cy="482600"/>
-          </a:xfrm>
-          <a:prstGeom prst="rect">
-            <a:avLst/>
-          </a:prstGeom>
-          <a:noFill/>
-        </p:spPr>
-        <p:txBody>
-          <a:bodyPr wrap="square" lIns="0" rIns="0" tIns="0" bIns="0">
-            <a:spAutoFit/>
-          </a:bodyPr>
-          <a:lstStyle/>
-          <a:p>
-            <a:r>
-              <a:rPr sz="900" b="1">
-                <a:solidFill>
-                  <a:srgbClr val="E2001A"/>
-                </a:solidFill>
-              </a:rPr>
-              <a:t>DEUTSCHLAND  </a:t>
-            </a:r>
-            <a:r>
-              <a:rPr sz="1000">
-                <a:solidFill>
-                  <a:srgbClr val="555555"/>
-                </a:solidFill>
-              </a:rPr>
-              <a:t>Gut jede:r Neunte fühlt sich häufig einsam, über 75-Jährige am stärksten (Einsamkeitsbarometer 2024)</a:t>
-            </a:r>
-          </a:p>
-        </p:txBody>
-      </p:sp>
     </p:spTree>
   </p:cSld>
   <p:clrMapOvr>
     <a:masterClrMapping/>
   </p:clrMapOvr>
-</p:sld>
-</file>
-
-<file path=ppt/slides/slide9.xml><?xml version="1.0" encoding="utf-8"?>
-<p:sld xmlns:a="http://schemas.openxmlformats.org/drawingml/2006/main" xmlns:r="http://schemas.openxmlformats.org/officeDocument/2006/relationships" xmlns:p="http://schemas.openxmlformats.org/presentationml/2006/main">
-  <p:cSld name="Slide 9">
-    <p:spTree>
-      <p:nvGrpSpPr>
-        <p:cNvPr id="1" name=""/>
-        <p:cNvGrpSpPr/>
-        <p:nvPr/>
-      </p:nvGrpSpPr>
-      <p:grpSpPr>
-        <a:xfrm>
-          <a:off x="0" y="0"/>
-          <a:ext cx="0" cy="0"/>
-          <a:chOff x="0" y="0"/>
-          <a:chExt cx="0" cy="0"/>
-        </a:xfrm>
-      </p:grpSpPr>
-      <p:sp>
-        <p:nvSpPr>
-          <p:cNvPr id="2" name="Text 0"/>
-          <p:cNvSpPr/>
-          <p:nvPr>
-            <p:ph idx="100" type="title" hasCustomPrompt="1"/>
-          </p:nvPr>
-        </p:nvSpPr>
-        <p:spPr>
-          <a:xfrm>
-            <a:off x="457200" y="320040"/>
-            <a:ext cx="8229600" cy="685800"/>
-          </a:xfrm>
-          <a:prstGeom prst="rect">
-            <a:avLst/>
-          </a:prstGeom>
-          <a:noFill/>
-          <a:ln/>
-        </p:spPr>
-        <p:txBody>
-          <a:bodyPr wrap="square" lIns="0" tIns="0" rIns="0" bIns="0" rtlCol="0" anchor="t"/>
-          <a:lstStyle/>
-          <a:p>
-            <a:pPr algn="l" indent="0" marL="0">
-              <a:buNone/>
-            </a:pPr>
-            <a:r>
-              <a:rPr lang="en-US" sz="3000" b="1" dirty="0">
-                <a:solidFill>
-                  <a:schemeClr val="tx1"/>
-                </a:solidFill>
-              </a:rPr>
-              <a:t>Lena und Ahmed</a:t>
-            </a:r>
-            <a:endParaRPr lang="en-US" sz="3000" dirty="0"/>
-          </a:p>
-        </p:txBody>
-      </p:sp>
-      <p:sp>
-        <p:nvSpPr>
-          <p:cNvPr id="3" name="persona-2-0"/>
-          <p:cNvSpPr/>
-          <p:nvPr/>
-        </p:nvSpPr>
-        <p:spPr>
-          <a:xfrm>
-            <a:off x="457200" y="1188720"/>
-            <a:ext cx="4023360" cy="3291840"/>
-          </a:xfrm>
-          <a:prstGeom prst="rect">
-            <a:avLst/>
-          </a:prstGeom>
-          <a:solidFill>
-            <a:schemeClr val="bg1"/>
-          </a:solidFill>
-          <a:ln w="9525">
-            <a:solidFill>
-              <a:schemeClr val="accent6"/>
-            </a:solidFill>
-            <a:prstDash val="solid"/>
-          </a:ln>
-        </p:spPr>
-      </p:sp>
-      <p:sp>
-        <p:nvSpPr>
-          <p:cNvPr id="4" name="pp-dot-2-0"/>
-          <p:cNvSpPr/>
-          <p:nvPr/>
-        </p:nvSpPr>
-        <p:spPr>
-          <a:xfrm>
-            <a:off x="731520" y="1417320"/>
-            <a:ext cx="685800" cy="685800"/>
-          </a:xfrm>
-          <a:prstGeom prst="ellipse">
-            <a:avLst/>
-          </a:prstGeom>
-          <a:solidFill>
-            <a:schemeClr val="tx1"/>
-          </a:solidFill>
-          <a:ln w="12700">
-            <a:solidFill>
-              <a:schemeClr val="tx1"/>
-            </a:solidFill>
-            <a:prstDash val="solid"/>
-          </a:ln>
-        </p:spPr>
-      </p:sp>
-      <p:pic>
-        <p:nvPicPr>
-          <p:cNvPr id="5" name="pp-icon-2-0" descr="preencoded.png">    </p:cNvPr>
-          <p:cNvPicPr>
-            <a:picLocks noChangeAspect="1"/>
-          </p:cNvPicPr>
-          <p:nvPr/>
-        </p:nvPicPr>
-        <p:blipFill>
-          <a:blip r:embed="rId1"/>
-          <a:stretch>
-            <a:fillRect/>
-          </a:stretch>
-        </p:blipFill>
-        <p:spPr>
-          <a:xfrm>
-            <a:off x="891540" y="1577340"/>
-            <a:ext cx="365760" cy="365760"/>
-          </a:xfrm>
-          <a:prstGeom prst="rect">
-            <a:avLst/>
-          </a:prstGeom>
-        </p:spPr>
-      </p:pic>
-      <p:sp>
-        <p:nvSpPr>
-          <p:cNvPr id="6" name="pp-name-2-0"/>
-          <p:cNvSpPr txBox="1"/>
-          <p:nvPr/>
-        </p:nvSpPr>
-        <p:spPr>
-          <a:xfrm>
-            <a:off x="1600200" y="1417320"/>
-            <a:ext cx="2697480" cy="685800"/>
-          </a:xfrm>
-          <a:prstGeom prst="rect">
-            <a:avLst/>
-          </a:prstGeom>
-          <a:noFill/>
-          <a:ln/>
-        </p:spPr>
-        <p:txBody>
-          <a:bodyPr wrap="square" lIns="0" tIns="0" rIns="0" bIns="0" rtlCol="0" anchor="ctr"/>
-          <a:lstStyle/>
-          <a:p>
-            <a:pPr indent="0" marL="0">
-              <a:buNone/>
-            </a:pPr>
-            <a:r>
-              <a:rPr lang="en-US" sz="1800" b="1" dirty="0">
-                <a:solidFill>
-                  <a:schemeClr val="tx1"/>
-                </a:solidFill>
-              </a:rPr>
-              <a:t>Lena, 28</a:t>
-            </a:r>
-            <a:endParaRPr lang="en-US" sz="1800" dirty="0"/>
-          </a:p>
-          <a:p>
-            <a:pPr indent="0" marL="0">
-              <a:buNone/>
-            </a:pPr>
-            <a:r>
-              <a:rPr lang="en-US" sz="1200" dirty="0">
-                <a:solidFill>
-                  <a:schemeClr val="tx2"/>
-                </a:solidFill>
-              </a:rPr>
-              <a:t>will einen sicheren Radweg</a:t>
-            </a:r>
-            <a:endParaRPr lang="en-US" sz="1800" dirty="0"/>
-          </a:p>
-        </p:txBody>
-      </p:sp>
-      <p:sp>
-        <p:nvSpPr>
-          <p:cNvPr id="7" name="pp-sit-2-0"/>
-          <p:cNvSpPr txBox="1"/>
-          <p:nvPr/>
-        </p:nvSpPr>
-        <p:spPr>
-          <a:xfrm>
-            <a:off x="731520" y="2331720"/>
-            <a:ext cx="3474720" cy="640080"/>
-          </a:xfrm>
-          <a:prstGeom prst="rect">
-            <a:avLst/>
-          </a:prstGeom>
-          <a:noFill/>
-          <a:ln/>
-        </p:spPr>
-        <p:txBody>
-          <a:bodyPr wrap="square" lIns="0" tIns="0" rIns="0" bIns="0" rtlCol="0" anchor="t"/>
-          <a:lstStyle/>
-          <a:p>
-            <a:pPr indent="0" marL="0">
-              <a:buNone/>
-            </a:pPr>
-            <a:r>
-              <a:rPr lang="en-US" sz="1500" b="1" dirty="0">
-                <a:solidFill>
-                  <a:schemeClr val="tx1"/>
-                </a:solidFill>
-              </a:rPr>
-              <a:t>Petitionen versanden ohne Antwort.</a:t>
-            </a:r>
-            <a:endParaRPr lang="en-US" sz="1500" dirty="0"/>
-          </a:p>
-        </p:txBody>
-      </p:sp>
-      <p:sp>
-        <p:nvSpPr>
-          <p:cNvPr id="8" name="pp-sol-2-0"/>
-          <p:cNvSpPr txBox="1"/>
-          <p:nvPr/>
-        </p:nvSpPr>
-        <p:spPr>
-          <a:xfrm>
-            <a:off x="731520" y="3017520"/>
-            <a:ext cx="3474720" cy="1371600"/>
-          </a:xfrm>
-          <a:prstGeom prst="rect">
-            <a:avLst/>
-          </a:prstGeom>
-          <a:noFill/>
-          <a:ln/>
-        </p:spPr>
-        <p:txBody>
-          <a:bodyPr wrap="square" lIns="0" tIns="0" rIns="0" bIns="0" rtlCol="0" anchor="t"/>
-          <a:lstStyle/>
-          <a:p>
-            <a:pPr indent="0" marL="0">
-              <a:buNone/>
-            </a:pPr>
-            <a:r>
-              <a:rPr lang="en-US" sz="1400" dirty="0">
-                <a:solidFill>
-                  <a:schemeClr val="tx1"/>
-                </a:solidFill>
-              </a:rPr>
-              <a:t>Initiative ans Baureferat: Argumente beider Seiten, geheime Abstimmung der Anwohner:innen, Antwort binnen sechs Wochen.</a:t>
-            </a:r>
-            <a:endParaRPr lang="en-US" sz="1400" dirty="0"/>
-          </a:p>
-        </p:txBody>
-      </p:sp>
-      <p:sp>
-        <p:nvSpPr>
-          <p:cNvPr id="9" name="persona-2-1"/>
-          <p:cNvSpPr/>
-          <p:nvPr/>
-        </p:nvSpPr>
-        <p:spPr>
-          <a:xfrm>
-            <a:off x="4663440" y="1188720"/>
-            <a:ext cx="4023360" cy="3291840"/>
-          </a:xfrm>
-          <a:prstGeom prst="rect">
-            <a:avLst/>
-          </a:prstGeom>
-          <a:solidFill>
-            <a:schemeClr val="bg1"/>
-          </a:solidFill>
-          <a:ln w="9525">
-            <a:solidFill>
-              <a:schemeClr val="accent6"/>
-            </a:solidFill>
-            <a:prstDash val="solid"/>
-          </a:ln>
-        </p:spPr>
-      </p:sp>
-      <p:sp>
-        <p:nvSpPr>
-          <p:cNvPr id="10" name="pp-dot-2-1"/>
-          <p:cNvSpPr/>
-          <p:nvPr/>
-        </p:nvSpPr>
-        <p:spPr>
-          <a:xfrm>
-            <a:off x="4937760" y="1417320"/>
-            <a:ext cx="685800" cy="685800"/>
-          </a:xfrm>
-          <a:prstGeom prst="ellipse">
-            <a:avLst/>
-          </a:prstGeom>
-          <a:solidFill>
-            <a:schemeClr val="tx1"/>
-          </a:solidFill>
-          <a:ln w="12700">
-            <a:solidFill>
-              <a:schemeClr val="tx1"/>
-            </a:solidFill>
-            <a:prstDash val="solid"/>
-          </a:ln>
-        </p:spPr>
-      </p:sp>
-      <p:pic>
-        <p:nvPicPr>
-          <p:cNvPr id="11" name="pp-icon-2-1" descr="preencoded.png">    </p:cNvPr>
-          <p:cNvPicPr>
-            <a:picLocks noChangeAspect="1"/>
-          </p:cNvPicPr>
-          <p:nvPr/>
-        </p:nvPicPr>
-        <p:blipFill>
-          <a:blip r:embed="rId2"/>
-          <a:stretch>
-            <a:fillRect/>
-          </a:stretch>
-        </p:blipFill>
-        <p:spPr>
-          <a:xfrm>
-            <a:off x="5097780" y="1577340"/>
-            <a:ext cx="365760" cy="365760"/>
-          </a:xfrm>
-          <a:prstGeom prst="rect">
-            <a:avLst/>
-          </a:prstGeom>
-        </p:spPr>
-      </p:pic>
-      <p:sp>
-        <p:nvSpPr>
-          <p:cNvPr id="12" name="pp-name-2-1"/>
-          <p:cNvSpPr txBox="1"/>
-          <p:nvPr/>
-        </p:nvSpPr>
-        <p:spPr>
-          <a:xfrm>
-            <a:off x="5806440" y="1417320"/>
-            <a:ext cx="2697480" cy="685800"/>
-          </a:xfrm>
-          <a:prstGeom prst="rect">
-            <a:avLst/>
-          </a:prstGeom>
-          <a:noFill/>
-          <a:ln/>
-        </p:spPr>
-        <p:txBody>
-          <a:bodyPr wrap="square" lIns="0" tIns="0" rIns="0" bIns="0" rtlCol="0" anchor="ctr"/>
-          <a:lstStyle/>
-          <a:p>
-            <a:pPr indent="0" marL="0">
-              <a:buNone/>
-            </a:pPr>
-            <a:r>
-              <a:rPr lang="en-US" sz="1800" b="1" dirty="0">
-                <a:solidFill>
-                  <a:schemeClr val="tx1"/>
-                </a:solidFill>
-              </a:rPr>
-              <a:t>Ahmed, 38</a:t>
-            </a:r>
-            <a:endParaRPr lang="en-US" sz="1800" dirty="0"/>
-          </a:p>
-          <a:p>
-            <a:pPr indent="0" marL="0">
-              <a:buNone/>
-            </a:pPr>
-            <a:r>
-              <a:rPr lang="en-US" sz="1200" dirty="0">
-                <a:solidFill>
-                  <a:schemeClr val="tx2"/>
-                </a:solidFill>
-              </a:rPr>
-              <a:t>Bauingenieur aus Syrien</a:t>
-            </a:r>
-            <a:endParaRPr lang="en-US" sz="1800" dirty="0"/>
-          </a:p>
-        </p:txBody>
-      </p:sp>
-      <p:sp>
-        <p:nvSpPr>
-          <p:cNvPr id="13" name="pp-sit-2-1"/>
-          <p:cNvSpPr txBox="1"/>
-          <p:nvPr/>
-        </p:nvSpPr>
-        <p:spPr>
-          <a:xfrm>
-            <a:off x="4937760" y="2331720"/>
-            <a:ext cx="3474720" cy="640080"/>
-          </a:xfrm>
-          <a:prstGeom prst="rect">
-            <a:avLst/>
-          </a:prstGeom>
-          <a:noFill/>
-          <a:ln/>
-        </p:spPr>
-        <p:txBody>
-          <a:bodyPr wrap="square" lIns="0" tIns="0" rIns="0" bIns="0" rtlCol="0" anchor="t"/>
-          <a:lstStyle/>
-          <a:p>
-            <a:pPr indent="0" marL="0">
-              <a:buNone/>
-            </a:pPr>
-            <a:r>
-              <a:rPr lang="en-US" sz="1500" b="1" dirty="0">
-                <a:solidFill>
-                  <a:schemeClr val="tx1"/>
-                </a:solidFill>
-              </a:rPr>
-              <a:t>Abschluss in Anerkennung, will arbeiten und helfen.</a:t>
-            </a:r>
-            <a:endParaRPr lang="en-US" sz="1500" dirty="0"/>
-          </a:p>
-        </p:txBody>
-      </p:sp>
-      <p:sp>
-        <p:nvSpPr>
-          <p:cNvPr id="14" name="pp-sol-2-1"/>
-          <p:cNvSpPr txBox="1"/>
-          <p:nvPr/>
-        </p:nvSpPr>
-        <p:spPr>
-          <a:xfrm>
-            <a:off x="4937760" y="3017520"/>
-            <a:ext cx="3474720" cy="1371600"/>
-          </a:xfrm>
-          <a:prstGeom prst="rect">
-            <a:avLst/>
-          </a:prstGeom>
-          <a:noFill/>
-          <a:ln/>
-        </p:spPr>
-        <p:txBody>
-          <a:bodyPr wrap="square" lIns="0" tIns="0" rIns="0" bIns="0" rtlCol="0" anchor="t"/>
-          <a:lstStyle/>
-          <a:p>
-            <a:pPr indent="0" marL="0">
-              <a:buNone/>
-            </a:pPr>
-            <a:r>
-              <a:rPr lang="en-US" sz="1400" dirty="0">
-                <a:solidFill>
-                  <a:schemeClr val="tx1"/>
-                </a:solidFill>
-              </a:rPr>
-              <a:t>Bietet Statik-Nachhilfe und Übersetzen, findet eine Mentorin für die Anerkennung – mit den Gründen, warum es passt.</a:t>
-            </a:r>
-            <a:endParaRPr lang="en-US" sz="1400" dirty="0"/>
-          </a:p>
-        </p:txBody>
-      </p:sp>
-      <p:sp>
-        <p:nvSpPr>
-          <p:cNvPr id="25" name="Slide Number Placeholder 0"/>
-          <p:cNvSpPr>
-            <a:spLocks noGrp="1"/>
-          </p:cNvSpPr>
-          <p:nvPr>
-            <p:ph type="sldNum" sz="quarter" idx="4294967295"/>
-          </p:nvPr>
-        </p:nvSpPr>
-        <p:spPr>
-          <a:xfrm>
-            <a:off x="8412480" y="4754880"/>
-            <a:ext cx="457200" cy="274320"/>
-          </a:xfrm>
-          <a:prstGeom prst="rect">
-            <a:avLst/>
-          </a:prstGeom>
-          <a:extLst>
-            <a:ext uri="{C572A759-6A51-4108-AA02-DFA0A04FC94B}">
-              <ma14:wrappingTextBoxFlag xmlns:ma14="http://schemas.microsoft.com/office/mac/drawingml/2011/main" val="0"/>
-            </a:ext>
-          </a:extLst>
-        </p:spPr>
-        <p:txBody>
-          <a:bodyPr/>
-          <a:lstStyle>
-            <a:lvl1pPr>
-              <a:defRPr sz="1000">
-                <a:solidFill>
-                  <a:schemeClr val="tx2"/>
-                </a:solidFill>
-              </a:defRPr>
-            </a:lvl1pPr>
-          </a:lstStyle>
-          <a:p>
-            <a:pPr algn="l"/>
-            <a:fld id="{F7021451-1387-4CA6-816F-3879F97B5CBC}" type="slidenum">
-              <a:rPr b="0" lang="en-US"/>
-              <a:t>9</a:t>
-            </a:fld>
-            <a:endParaRPr lang="en-US"/>
-          </a:p>
-        </p:txBody>
-      </p:sp>
-    </p:spTree>
-  </p:cSld>
-  <p:clrMapOvr>
-    <a:masterClrMapping/>
-  </p:clrMapOvr>
+  <mc:AlternateContent xmlns:mc="http://schemas.openxmlformats.org/markup-compatibility/2006">
+    <mc:Choice xmlns:p159="http://schemas.microsoft.com/office/powerpoint/2015/09/main" Requires="p159">
+      <p:transition xmlns:p14="http://schemas.microsoft.com/office/powerpoint/2010/main" spd="slow" p14:dur="900">
+        <p159:morph option="byObject"/>
+      </p:transition>
+    </mc:Choice>
+    <mc:Fallback>
+      <p:transition spd="slow">
+        <p:fade/>
+      </p:transition>
+    </mc:Fallback>
+  </mc:AlternateContent>
 </p:sld>
 </file>
 
